--- a/산출물/실전반/이론/08회차/실전반_08일차.pptx
+++ b/산출물/실전반/이론/08회차/실전반_08일차.pptx
@@ -635,7 +635,7 @@
           <a:lstStyle/>
           <a:p>
             <a:r>
-              <a:t>먼저 짚을 게 있어요. 경보 메시지와 지식 그래프는 서로 다른 곳에서 만들어졌습니다. 경보는 감지 서비스가 냈고, 그래프는 사람이 정의하고 적재했죠. 이 둘이 만나는 지점은 딱 값 하나예요. 경보의 패턴 칸에 쿨러 성능 저하를 뜻하는 코드가 적혀 있었죠. 그래프의 이상 패턴 노드에도 같은 코드가 속성으로 들어 있습니다. 진단 도구는 이 코드로 그래프의 출발 노드를 찾아요. 화면 맨 왼쪽, 진하게 칠한 동그라미가 그 노드입니다. 거기서부터는 관계를 따라가요. 이상 패턴이 증상을 감지하고, 증상이 고장 유형을 가리킵니다. 유온 상승이라는 증상을 거쳐서 쿨러 냉각 성능 상실이라는 고장 유형에 닿는 거죠. 그런데 마지막 화살표를 보세요. 방향이 반대예요. 원인이 고장 유형을 일으킨다는 관계라서, 원인 쪽에서 고장 유형 쪽으로 향합니다. 진단 도구는 이 화살표를 거슬러 올라가서 원인 후보를 얻어요. 후보는 셋입니다. 쿨러 핀 오염, 팬 구동 불량, 주변 온도 상승이죠. 앞에서 경보 메시지에는 원인이 없다고 했는데, 그 빈칸에 들어갈 수 있는 답들이 여기서 처음 나온 거예요. 만약 경보의 코드와 그래프의 코드가 달랐다면 어떻게 됐을까요? 진단 도구는 출발 노드부터 찾지 못했을 겁니다. 여러 저장소가 같은 대상을 같은 값으로 가리키도록 식별자를 맞춰 둔 까닭이, 바로 여기서 드러나는 거예요.</a:t>
+              <a:t>먼저 짚을 게 있어요. 경보 메시지와 지식 그래프는 서로 다른 곳에서 만들어졌습니다. 경보는 감지 서비스가 냈고, 그래프는 사람이 정의하고 적재했죠. 이 둘이 만나는 지점은 딱 값 하나예요. 경보의 패턴 칸에 쿨러 성능 저하를 뜻하는 코드가 적혀 있었죠. 그래프의 이상 패턴 노드에도 같은 코드가 속성으로 들어 있습니다. 진단 도구는 이 코드로 그래프의 출발 노드를 찾아요. 화면 맨 왼쪽 아래 동그라미가 그 노드입니다. 노드에는 클래스 이름을 적었고, 가운데 진한 노드는 여러 관계가 모이는 고장 유형이에요. 거기서부터는 관계를 따라가요. 이상 패턴이 증상을 감지하고, 증상이 고장 유형을 가리킵니다. 유온 상승이라는 증상을 거쳐서 쿨러 냉각 성능 상실이라는 고장 유형에 닿는 거죠. 그런데 마지막 화살표를 보세요. 방향이 반대예요. 원인이 고장 유형을 일으킨다는 관계라서, 원인 쪽에서 고장 유형 쪽으로 향합니다. 진단 도구는 이 화살표를 거슬러 올라가서 원인 후보를 얻어요. 후보는 셋입니다. 쿨러 핀 오염, 팬 구동 불량, 주변 온도 상승이죠. 앞에서 경보 메시지에는 원인이 없다고 했는데, 그 빈칸에 들어갈 수 있는 답들이 여기서 처음 나온 거예요. 만약 경보의 코드와 그래프의 코드가 달랐다면 어떻게 됐을까요? 진단 도구는 출발 노드부터 찾지 못했을 겁니다. 여러 저장소가 같은 대상을 같은 값으로 가리키도록 식별자를 맞춰 둔 까닭이, 바로 여기서 드러나는 거예요.</a:t>
             </a:r>
           </a:p>
         </p:txBody>
@@ -1125,7 +1125,7 @@
           <a:lstStyle/>
           <a:p>
             <a:r>
-              <a:t>그 판단 번호가 붙은 추천안을 열어 볼게요. 화면 왼쪽이 제출 도구로 낸 추천안을 항목별로 나눠 적은 거예요. 맨 위가 방금 본 판단 번호고요. 그 아래 항목들이 앞의 도구들이 읽고 계산한 결과를 어떻게 담고 있는지 볼게요. 원인은 쿨러 핀 오염입니다. 그 아래 근거에는 팬 진동은 정상인데 냉각 효율이 절반에 못 미치는 46퍼센트쯤으로 떨어져 있다는 값이 적혔어요. 진단 도구가 시계열 DB에서 읽은 값이죠. 배제 칸에는 맞지 않은 후보 둘, 팬 구동 불량과 주변 온도 상승이 적혔습니다. 왜 그 원인이 아닌지까지 남긴 거예요. 추천은 팬 최대 운전이고, 평가에서 받은 점수가 같이 실렸습니다. 그 아래 예측은, 이 조치를 하면 주어진 가정에서 유온이 50도 조금 아래로 내려갈 것으로 본 계산 결과고요. 예측값은 실제로 측정한 회복 온도와 구별해야 합니다. 예측이 좋아 보여도 실행 뒤에는 다시 관측해야 해요. 마지막 줄이 출처예요. 매뉴얼의 즉시 완화 조치 절을 가리킵니다. 승인하는 사람 입장에서 생각해 볼까요? 원인과 추천만 있다면 믿을지 말지 정할 근거가 없습니다. 근거가 된 값, 배제한 후보, 예측, 출처가 함께 있으니까, 무엇을 보고 이렇게 판단했는지 확인할 수 있는 거예요.</a:t>
+              <a:t>그 판단 번호가 붙은 추천안을 열어 볼게요. 화면 왼쪽이 제출 도구로 낸 추천안을 항목별로 나눠 적은 거예요. 맨 위가 방금 본 판단 번호고요. 그 아래 항목들이 앞의 도구들이 읽고 계산한 결과를 어떻게 담고 있는지 볼게요. 원인은 쿨러 핀 오염입니다. 그 아래 근거에는 팬 진동은 정상인데 냉각 효율이 절반에 못 미치는 46퍼센트쯤으로 떨어져 있다는 값이 적혔어요. 진단 도구가 시계열 DB에서 읽은 값이죠. 배제 칸에는 맞지 않은 후보 둘, 팬 구동 불량과 주변 온도 상승이 적혔습니다. 다른 두 후보가 등록된 기준을 충족하지 못한 이유까지 남긴 거예요. 추천은 팬 최대 운전이고, 평가에서 받은 점수가 같이 실렸습니다. 그 아래 예측은, 이 조치를 하면 주어진 가정에서 유온이 50도 조금 아래로 내려갈 것으로 본 계산 결과고요. 예측값은 실제로 측정한 회복 온도와 구별해야 합니다. 예측이 좋아 보여도 실행 뒤에는 다시 관측해야 해요. 마지막 줄이 출처예요. 매뉴얼의 즉시 완화 조치 절을 가리킵니다. 승인하는 사람 입장에서 생각해 볼까요? 원인과 추천만 있다면 믿을지 말지 정할 근거가 없습니다. 근거가 된 값, 배제한 후보, 예측, 출처가 함께 있으니까, 무엇을 보고 이렇게 판단했는지 확인할 수 있는 거예요.</a:t>
             </a:r>
           </a:p>
         </p:txBody>
@@ -1685,7 +1685,7 @@
           <a:lstStyle/>
           <a:p>
             <a:r>
-              <a:t>이 자리는 누가 맡고, 무엇을 기준으로 채울까요? 추천안이 제출된 뒤에 남은 다섯 자리를 표로 놓았습니다. 가운데 칸이 그 자리를 맡는 쪽, 오른쪽 칸이 그 일의 기준이에요. 첫 줄, 승인은 운전원이 맡습니다. 기준은 조치에 정해진 승인 역할이에요. 팬 최대 운전의 승인 역할이 운전원이라서 운전원에게 간 거죠. 둘째 줄부터는 맡는 쪽이 모두 프로세스 엔진이에요. 냉각 명령은 엔진이 SCADA를 거쳐 PLC에 보냅니다. 기준은 승인된 조치, 곧 팬 속도 100퍼센트고요. 재관측은 엔진이 시계열 DB에서 값을 다시 읽는 일이에요. 유온이 55도 미만으로 내려오고 경보가 해제돼야 회복으로 봅니다. 조건을 둘로 둔 데는 까닭이 있어요. 값이 기준 아래로 한 번 내려간 것만 보고 회복이라고 하지 않으려는 거죠. 경보를 냈던 감지 쪽에서도 이상이 풀렸다고 해제를 내 줘야 하는 거예요. 작업지시 등록은, 회복을 확인한 뒤에 엔진이 정비 관리 시스템, CMMS에 등록해요. 마지막 결과 보고는 처리 건이 어느 끝에 닿았는지, 그리고 그때까지의 결과를 알리는 일입니다. 가운데 칸의 화살표 방향도 보세요. 명령과 작업지시는 엔진에서 바깥으로 나가는 쓰기고요, 재관측만 바깥에서 엔진으로 들어오는 읽기예요. 이 다섯 자리를 정해진 순서로 잇는 게 바로 프로세스입니다.</a:t>
+              <a:t>이 자리는 누가 맡고, 무엇을 기준으로 채울까요? 추천안이 제출된 뒤에 남은 다섯 자리를 표로 놓았습니다. 가운데 칸이 그 자리를 맡는 쪽, 오른쪽 칸이 그 일의 기준이에요. 첫 줄, 승인은 운전원이 맡습니다. 기준은 조치에 정해진 승인 역할이에요. 팬 최대 운전의 승인 역할이 운전원이라서 운전원에게 간 거죠. 둘째 줄부터는 맡는 쪽이 모두 프로세스 엔진이에요. 냉각 명령은 엔진이 SCADA를 거쳐 PLC에 보냅니다. 기준은 승인된 조치, 곧 팬 속도 100퍼센트고요. 재관측은 엔진이 시계열 DB에서 값을 다시 읽는 일이에요. 유온이 55도 미만으로 내려오고 경보가 해제돼야 회복으로 봅니다. 조건을 둘로 둔 데는 까닭이 있어요. 값이 기준 아래로 한 번 내려간 것만 보고 회복이라고 하지 않으려는 거죠. 경보를 냈던 감지 쪽에서도 이상이 풀렸다고 해제를 내 줘야 하는 거예요. 작업지시 등록은, 회복을 확인한 뒤에 엔진이 정비 관리 시스템, CMMS에 등록해요. 결과 보고는 진행한 경로와 그때까지의 업무 결과를 알리는 일입니다. 보고 뒤에 끝 이벤트로 이어지는지도 확인합니다. 가운데 칸의 화살표 방향도 보세요. 명령과 작업지시는 엔진에서 바깥으로 나가는 쓰기고요, 재관측만 바깥에서 엔진으로 들어오는 읽기예요. 이 다섯 자리를 정해진 순서로 잇는 게 바로 프로세스입니다.</a:t>
             </a:r>
           </a:p>
         </p:txBody>
@@ -1895,7 +1895,7 @@
           <a:lstStyle/>
           <a:p>
             <a:r>
-              <a:t>그 약속대로 놓인 추천안을 운전원이 승인하면, 처리 건에 새 값이 남습니다. 표의 위 두 줄은 프로세스 변수고, 아래 두 줄은 처리 기록이에요. 첫 줄은 승인이라는 결정과 고른 조치입니다. 쿨러 사건에서는 추천안 그대로 팬 최대 운전을 골랐어요. 이 표는 그 선택을 같은 흐름의 변수와 기록 항목에 대응시킨 예입니다. 운전원 승인 단계가 채우는 값이죠. 강조한 둘째 줄이 승인한 역할이에요. 이 값은 승인하는 순간 서버가 채웁니다. 에이전트는 자기 결과에 이 값을 써넣을 수 없어요. 에이전트의 제안과 승인 처리 경로를 분리한 거죠. 수업 환경에서는 화면에서 고른 역할로 흐름을 경험합니다. 실제 업무에서는 로그인한 신원과 그 역할의 권한을 연결해서 확인해야 누가 승인했는지 책임을 물을 수 있어요. 아래 두 줄은 처리 기록입니다. 셋째 줄은 승인이 접수됐다는 기록이에요. 승인한 역할과 판단 번호가 같이 남습니다. 이 기록이 있어야 나중에 누가, 어떤 근거로, 무엇을 승인했는지 되짚을 수 있어요. 판단 번호로 추천안과 이어져 있으니까, 승인에서 추천안으로, 추천안에서 근거와 출처로 거슬러 갈 수 있는 거죠. 넷째 줄은 승인이 다음 단계로 전달됐다는 기록입니다. 이 전달이 성공한 뒤에야 냉각 명령이 시작돼요. 승인 시점의 조건도 다시 확인해야 합니다. 추천을 만든 뒤에 설비 상태나 정책이 바뀔 수 있으니까요. HYD도 현재 조건을 확인하지 못하거나 허용하지 않는 경우에는 그대로 실행에 넘기지 않도록 검사합니다. 과거의 추천이 있었다는 사실만으로 지금의 실행을 허용하지 않는 겁니다.</a:t>
+              <a:t>그 약속대로 놓인 추천안을 운전원이 승인하면, 처리 건에 새 값이 남습니다. 위쪽 두 칸은 프로세스 변수고, 아래쪽 화살표는 처리 기록이 남는 순서예요. 첫 줄은 승인이라는 결정과 고른 조치입니다. 쿨러 사건에서는 추천안 그대로 팬 최대 운전을 골랐어요. 이 그림은 그 선택을 같은 흐름의 변수와 기록 항목에 대응시킨 예입니다. 운전원 승인 단계가 채우는 값이죠. 위쪽 오른편의 강조한 칸이 승인한 역할이에요. 이 값은 승인하는 순간 서버가 채웁니다. 에이전트는 자기 결과에 이 값을 써넣을 수 없어요. 에이전트의 제안과 승인 처리 경로를 분리한 거죠. 수업 환경에서는 화면에서 고른 역할로 흐름을 경험합니다. 실제 업무에서는 로그인한 신원과 그 역할의 권한을 연결해서 확인해야 누가 승인했는지 책임을 물을 수 있어요. 아래쪽은 처리 기록이 남는 순서입니다. 왼쪽은 승인이 접수됐다는 기록이에요. 승인한 역할과 판단 번호가 같이 남습니다. 이 기록이 있어야 나중에 누가, 어떤 근거로, 무엇을 승인했는지 되짚을 수 있어요. 판단 번호로 추천안과 이어져 있으니까, 승인에서 추천안으로, 추천안에서 근거와 출처로 거슬러 갈 수 있는 거죠. 오른쪽은 승인이 다음 단계로 전달됐다는 기록입니다. 이 전달이 성공한 뒤에야 냉각 명령이 시작돼요. 승인 시점의 조건도 다시 확인해야 합니다. 추천을 만든 뒤에 설비 상태나 정책이 바뀔 수 있으니까요. HYD도 현재 조건을 확인하지 못하거나 허용하지 않는 경우에는 그대로 실행에 넘기지 않도록 검사합니다. 과거의 추천이 있었다는 사실만으로 지금의 실행을 허용하지 않는 겁니다.</a:t>
             </a:r>
           </a:p>
         </p:txBody>
@@ -2035,7 +2035,7 @@
           <a:lstStyle/>
           <a:p>
             <a:r>
-              <a:t>여기까지는 운전원이 승인한 경우였어요. 승인하지 않으면 어떻게 될까요? 같은 추천안이라도 사람의 결정에 따라 결말이 셋으로 갈립니다. 표의 가운데 칸, 시스템 실행의 수를 견줘 보세요. 첫 줄, 이 사례의 정상 경로에서는 승인 뒤 명령이 실행되고, 회복을 확인한 다음 작업지시가 등록돼 정상 종료로 닫혔고 결과 보고도 정상이었습니다. 승인만으로 정상 종료가 보장되는 건 아니에요. 회복 기준을 충족하지 못하면 미달 결과를 남기는 다른 경로로 갑니다. 둘째 줄, 거절하면 시스템 실행이 한 건도 없어요. 설비 명령도 작업지시도 나가지 않고, 거절의 끝으로 닫힙니다. 결과 보고에는 반려, 그리고 설비 명령은 내지 않았다는 사실이 남아요. 기록을 열어 보면 가지 않은 단계들, 냉각 명령과 재관측과 작업지시는 취소 상태로 남아 있고, 거절의 사유도 함께 남습니다. 어느 갈래로 갔는지가 기록에 그대로 보이는 거죠. 그런데 여기서 조심할 게 있습니다. 이때도 처리 건의 상태는 완료로 표시돼요. 그러니까 일이 실제로 이뤄졌는지는 어느 끝에 닿았는지와 결과 보고로 읽어야 합니다. 셋째 줄, 응답이 없으면 정해 둔 기한이 지난 뒤 승인 지연 알림만 나갑니다. 처리 건은 자동으로 승인되지도, 취소되거나 거절되지도 않아요. 승인을 계속 기다립니다. 늦게 승인하더라도 그때의 조건을 다시 확인해 허용되는 경우에 실행을 이어갑니다. 왜 기한이 지나면 알아서 승인하거나 취소하게 두지 않았을까요? 자동으로 승인하면, 아무도 결정하지 않은 조치가 설비를 움직이게 됩니다. 사람의 승인을 둔 의미가 사라지죠. 반대로 자동으로 취소하면, 유온이 오르고 있는데 필요한 조치가 조용히 사라져요. 그래서 결정은 끝까지 사람에게 남겨 두고, 늦어졌다는 사실만 알려서 사람을 다시 부르는 겁니다. 세 경우 모두 에이전트의 추천안은 같았습니다. 결말을 가른 건 사람의 결정이에요. 그리고 그 결정에 따라 어디로 갈지는 프로세스 정의가 정해 둔 길입니다.</a:t>
+              <a:t>여기까지는 운전원이 승인한 경우였어요. 승인하지 않으면 어떻게 될까요? 같은 추천안이라도 사람의 결정에 따라 결말이 셋으로 갈립니다. 표의 가운데 칸, 시스템 실행의 수를 견줘 보세요. 첫 줄, 이 사례의 정상 경로에서는 승인 뒤 명령이 실행되고, 회복을 확인한 다음 작업지시가 등록돼 정상 종료로 닫혔고 결과 보고도 정상이었습니다. 승인만으로 정상 종료가 보장되는 건 아니에요. 회복 기준을 충족하지 못하면 미달 결과를 남기는 다른 경로로 갑니다. 둘째 줄, 거절하면 시스템 실행이 한 건도 없어요. 설비 명령도 작업지시도 나가지 않고, 거절의 끝으로 닫힙니다. 결과 보고에는 반려, 그리고 설비 명령은 내지 않았다는 사실이 남아요. 기록을 열어 보면 가지 않은 단계들, 냉각 명령과 재관측과 작업지시는 취소 상태로 남아 있고, 거절의 사유도 함께 남습니다. 어느 갈래로 갔는지가 기록에 그대로 보이는 거죠. 그런데 여기서 조심할 게 있습니다. 이때도 처리 건의 상태는 완료로 표시돼요. 그러니까 일이 실제로 이뤄졌는지는 어느 끝에 닿았는지와 결과 보고로 읽어야 합니다. 셋째 줄, 응답이 없으면 정해 둔 기한이 지난 뒤 승인 지연 알림만 나갑니다. 처리 건은 자동으로 승인되지도, 취소되거나 거절되지도 않아요. 승인을 계속 기다립니다. 늦게 승인하더라도 그때의 조건을 다시 확인해 허용되는 경우에 실행을 이어갑니다. 왜 기한이 지나면 알아서 승인하거나 취소하게 두지 않았을까요? 자동으로 승인하면, 아무도 결정하지 않은 조치가 설비를 움직이게 됩니다. 사람의 승인을 둔 의미가 사라지죠. 반대로 자동으로 취소하면, 유온이 오르고 있는데 필요한 조치가 조용히 사라져요. 그래서 결정은 끝까지 사람에게 남겨 두고, 늦어졌다는 사실만 알려서 사람을 다시 부르는 겁니다. 이 표는 서로 다른 실행 기록에서 승인 여부에 따른 경로를 비교한 것입니다. 추천안의 모든 내용과 입력이 같았다는 뜻은 아니에요. 사람의 결정에 따라 실행을 허용하거나 보류하는 구조를 보세요. 그리고 그 결정에 따라 어디로 갈지는 프로세스 정의가 정해 둔 길입니다.</a:t>
             </a:r>
           </a:p>
         </p:txBody>
@@ -2315,7 +2315,7 @@
           <a:lstStyle/>
           <a:p>
             <a:r>
-              <a:t>배운 장치를 두 쪽으로 나눴습니다. 화면 왼쪽이 에이전트 쪽, 오른쪽이 프로세스 쪽이에요. 아래 꼬리표는 각 쪽이 지키는 걸 한마디로 적은 겁니다. 왼쪽, 에이전트 쪽에는 에이전트 실행, 스킬, MCP가 있고, 명세를 기준으로 개발하는 SDD와, 구체적인 행동 예로 기대 결과를 합의하고 검증하는 BDD가 있어요. 이 장치들은 한 단계 안에서 추천안 하나를 제대로 만들게 합니다. 그래서 지키는 건 판단의 품질이에요. 오른쪽, 프로세스 쪽에는 BPMN으로 그린 프로세스 정의와 그 정의로 열린 인스턴스, 사람의 승인인 HITL, 그리고 시스템 실행이 있습니다. 이 장치들은 단계와 단계를 이어서 업무를 끝내요. 지키는 건 순서와 책임입니다. 두 꼬리표를 쿨러 사건에 대어 보면 이렇습니다. 판단의 품질은 등록된 근거가 지지하는 원인을 가리고, 근거와 배제한 후보, 출처까지 추천안에 남긴 것이에요. 순서와 책임은 운전원이 승인하기 전에는 팬이 움직이지 않았고, 누가 승인했는지가 기록으로 남은 것이고요. 그리고 두 쪽은 서로를 대신하지 못합니다. 스킬을 아무리 잘 써도, 승인 없이 명령이 나가는 걸 막을 수는 없습니다. 프로세스를 아무리 잘 그려도, 에이전트가 근거 없는 원인을 내는 걸 막을 수는 없고요. 결과가 기대와 다를 때 어느 쪽 몫인지부터 가려야 하는 이유예요.</a:t>
+              <a:t>배운 장치를 두 쪽으로 나눴습니다. 화면 왼쪽이 에이전트 쪽, 오른쪽이 프로세스 쪽이에요. 아래 꼬리표는 각 쪽이 지키는 걸 한마디로 적은 겁니다. 왼쪽, 에이전트 쪽에는 에이전트 실행, 스킬, MCP가 있고, 명세를 기준으로 개발하는 SDD와, 구체적인 행동 예로 기대 결과를 합의하고 검증하는 BDD가 있어요. 이 장치들은 한 단계 안에서 추천안 하나를 제대로 만들게 합니다. 그래서 지키는 건 판단의 품질이에요. 오른쪽, 프로세스 쪽에는 BPMN으로 그린 프로세스 정의와 그 정의로 열린 인스턴스, 사람의 승인인 HITL, 그리고 시스템 실행이 있습니다. 이 장치들은 단계와 단계를 이어서 업무를 끝내요. 지키는 건 순서와 책임입니다. 두 꼬리표를 쿨러 사건에 대어 보면 이렇습니다. 판단의 품질은 등록된 근거가 지지하는 원인을 가리고, 근거와 배제한 후보, 출처까지 추천안에 남긴 것이에요. 순서와 책임은 운전원이 승인하기 전에는 팬 속도를 바꾸는 명령이 나가지 않았고, 누가 승인했는지가 기록으로 남은 것이고요. 그리고 두 쪽은 서로를 대신하지 못합니다. 스킬을 아무리 잘 써도, 승인 없이 명령이 나가는 걸 막을 수는 없습니다. 프로세스를 아무리 잘 그려도, 에이전트가 근거 없는 원인을 내는 걸 막을 수는 없고요. 결과가 기대와 다를 때 어느 쪽 몫인지부터 가려야 하는 이유예요.</a:t>
             </a:r>
           </a:p>
         </p:txBody>
@@ -2385,7 +2385,7 @@
           <a:lstStyle/>
           <a:p>
             <a:r>
-              <a:t>실제 처리 건에서 이 장치들은 어디서 일했을까요? 같은 사건의 줄 위에 두 쪽 장치가 일한 자리를 표시했습니다. 위쪽이 프로세스 쪽, 아래쪽이 에이전트 쪽이에요. 아래쪽부터 볼게요. 파란 상자로 두른 둘째 자리가 에이전트 쪽입니다. 냉각 대응 에이전트가 이 한 자리에서 냉각 긴급 대응 스킬을 따라 일했고요, 판단 엔진과 업무 DB의 MCP 도구를 사용할 수 있도록 연결했습니다. 지식 그래프는 판단 엔진의 진단 도구가 안에서 읽습니다. 이 처리 건의 요약에는 도구 호출 열 번이 남아 있어요. 다만 이 정본 사건의 호출별 상세 기록은 없어서, 연결된 도구를 모두 실제로 호출했다고 단정하지는 않습니다. 왼쪽 아래 문서 그림은 명세와 시나리오예요. 이건 실행 중에 일한 게 아닙니다. 결과에 무엇이 있어야 하는지, 어떤 상황에서 어떻게 행동해야 하는지를 실행에 앞서 정해 둔 거죠. 이번엔 위쪽이에요. 남색 긴 괄호가 프로세스 정의와 인스턴스입니다. 냉각 긴급 대응 정의에는 작업 아홉, 분기 둘, 타이머 하나가 그려져 있고요, 그 정의로 열린 인스턴스 하나가 경보에서 정상 종료까지를 덮었습니다. 정의는 하나지만, 경보가 날 때마다 인스턴스가 새로 하나씩 열려요. 쿨러 성능 저하 경보가 하루에 세 번 나면 처리 건도 셋이 되고, 저마다 따로 진행되고 따로 기록이 남습니다. HYD는 같은 테넌트와 프로세스 정의, 사건 식별자의 중복 시작을 검사합니다. 이것만으로 외부 명령이 반드시 한 번만 실행된다고 보장하는 것은 아니에요. 명령 재시도와 중복 효과는 별도 확인이 필요합니다. 괄호 아래를 보면, 승인 위의 선이 운전원 역할로 남은 승인 기록이고, 냉각 명령에서 작업지시까지 걸친 파란 괄호가 설비 명령과 작업지시를 남긴 시스템 실행이에요. 한눈에 보이시죠? 에이전트 쪽 장치는 줄의 한 자리에만 있고, 프로세스 쪽 장치는 줄 전체를 덮습니다.</a:t>
+              <a:t>실제 처리 건에서 이 장치들은 어디서 일했을까요? 같은 사건의 줄 위에 두 쪽 장치가 일한 자리를 표시했습니다. 위쪽이 프로세스 쪽, 아래쪽이 에이전트 쪽이에요. 아래쪽부터 볼게요. 파란 상자로 두른 둘째 자리가 에이전트 쪽입니다. 냉각 대응 에이전트가 이 한 자리에서 냉각 긴급 대응 스킬을 따라 일했고요, 판단 엔진과 업무 DB의 MCP 도구를 사용할 수 있도록 연결했습니다. 지식 그래프는 판단 엔진의 진단 도구가 안에서 읽습니다. 이 처리 건의 요약에는 도구 호출 열 번이 남아 있어요. 다만 이 정본 사건의 호출별 상세 기록은 없어서, 연결된 도구를 모두 실제로 호출했다고 단정하지는 않습니다. 왼쪽 아래 문서 그림은 명세와 시나리오예요. 이건 실행 중에 일한 게 아닙니다. 결과에 무엇이 있어야 하는지, 어떤 상황에서 어떻게 행동해야 하는지를 실행에 앞서 정해 둔 거죠. 이번엔 위쪽이에요. 남색 긴 괄호가 프로세스 정의와 인스턴스입니다. 냉각 긴급 대응 정의에는 작업 아홉, 분기 둘, 타이머 하나가 그려져 있고요, 그 정의로 열린 인스턴스 하나가 경보에서 정상 종료까지를 덮었습니다. 정의는 하나지만, 경보가 날 때마다 인스턴스가 새로 하나씩 열려요. 서로 다른 사건 식별자를 가진 쿨러 성능 저하 경보 세 건이 시작 조건을 충족하면 처리 건도 셋이 되고, 저마다 따로 진행되고 따로 기록이 남습니다. HYD는 같은 테넌트와 프로세스 정의, 사건 식별자의 중복 시작을 검사합니다. 이것만으로 외부 명령이 반드시 한 번만 실행된다고 보장하는 것은 아니에요. 명령 재시도와 중복 효과는 별도 확인이 필요합니다. 괄호 아래를 보면, 승인 위의 선이 운전원 역할로 남은 승인 기록이고, 냉각 명령에서 작업지시까지 걸친 파란 괄호가 설비 명령과 작업지시를 남긴 시스템 실행이에요. 한눈에 보이시죠? 에이전트 쪽 장치는 줄의 한 자리에만 있고, 프로세스 쪽 장치는 줄 전체를 덮습니다.</a:t>
             </a:r>
           </a:p>
         </p:txBody>
@@ -2735,7 +2735,7 @@
           <a:lstStyle/>
           <a:p>
             <a:r>
-              <a:t>이렇게 위험을 막는 장치는 에이전트 쪽에도 있습니다. 두 쪽의 장치를 위험별로 짝지어 봤어요. 윗줄이 에이전트 쪽 장치, 아랫줄이 프로세스 쪽 장치입니다. 그리고 둘을 잇는 세로선에 붙은 이름이, 두 장치가 함께 막는 위험이에요. 왼쪽 짝이 막는 건 근거가 모자란 추천안입니다. 도구는 증거와 값의 상태를 검사하고, 에이전트에는 근거가 부족하면 이유를 적어 보류하도록 지침을 둡니다. 사람도 추천안의 근거를 검토하도록 해서 놓친 부분을 다시 살펴요. 가운데 짝은 승인 없는 쓰기예요. 에이전트의 업무 도구 접근을 읽기와 제안 제출로 제한하고, 프로세스에서는 승인 조건의 갈림을 지나야만 실행에 닿게 합니다. 오른쪽 짝은 드러나지 않은 채 길어지는 대기예요. 에이전트 쪽에서는 실행 시간과 재시도에 한도가 있어서, 멈춘 작업이 드러나고 사람이 닫을 수 있습니다. 프로세스 쪽에서는 승인 지연 타이머가 사람의 응답이 늦어졌다는 걸 알려요. 타이머가 알림을 보냈다고 대기가 자동 해결되지는 않습니다. 누가 확인하고 어떻게 다시 처리할지도 정해야 하죠. 이 짝이 말하는 건 한 장치만 믿지 않는다는 거예요. 에이전트 쪽 장치는 모델의 판단에 기대는 부분이 있어서 놓칠 수 있습니다. 프로세스 쪽 장치는 그 판단의 결과가 효과를 내기 전에 한 번 더 거르고요.</a:t>
+              <a:t>이렇게 위험을 막는 장치는 에이전트 쪽에도 있습니다. 두 쪽의 장치를 위험별로 짝지어 봤어요. 윗줄이 에이전트 쪽 장치, 아랫줄이 프로세스 쪽 장치입니다. 그리고 둘을 잇는 세로선에 붙은 이름이, 두 장치가 함께 막는 위험이에요. 왼쪽 짝이 막는 건 근거가 모자란 추천안입니다. 도구는 증거와 값의 상태를 검사하고, 에이전트에는 근거가 부족하면 이유를 적어 보류하도록 지침을 둡니다. 사람도 추천안의 근거를 검토하도록 해서 놓친 부분을 다시 살펴요. 가운데 짝은 승인 없는 쓰기예요. 에이전트의 업무 도구 접근을 읽기와 제안 제출로 제한하고, 프로세스에서는 승인 조건의 갈림을 지나야만 실행에 닿게 합니다. 오른쪽 짝은 드러나지 않은 채 길어지는 대기예요. 에이전트 쪽에서는 실행 시간과 재시도에 한도가 있어서, 멈춘 작업이 드러나고 사람이 닫을 수 있습니다. 프로세스 쪽에서는 승인 지연 타이머가 사람의 응답이 늦어졌다는 걸 알려요. 타이머가 알림을 보냈다고 대기가 자동 해결되지는 않습니다. 누가 확인하고 어떻게 다시 처리할지도 정해야 하죠. 이 짝이 말하는 건 한 장치만 믿지 않는다는 거예요. 보류 지침처럼 모델 판단에 기대는 부분과 도구 권한처럼 기계적으로 제한하는 부분을 구별해야 합니다. 프로세스의 승인 검사는 실행 전에 권한과 조건을 확인하고, 지연 타이머는 응답이 늦어진 상태를 알립니다. 각 장치가 작동하는 시점과 막는 위험이 다른 거죠.</a:t>
             </a:r>
           </a:p>
         </p:txBody>
@@ -3225,7 +3225,7 @@
           <a:lstStyle/>
           <a:p>
             <a:r>
-              <a:t>네 번째 실습은 직접 그린 흐름으로 에이전트를 실행하는 일입니다. 앞 실습에서 만들 에이전트는 제안이나 보류 한 건을 내는 데서 멈춥니다. 쿨러 사건에서도 에이전트의 일은 추천안을 제출하면서 끝났고, 그 뒤를 이은 건 프로세스였죠. 내 업무도 마찬가지예요. 에이전트가 낸 제안이나 보류를 누가 확인하고 어떻게 끝낼지는 흐름이 정합니다. 작은 업무의 흐름은 bpmn.io로 그리고요, 화면의 다섯 칸, 시작, 에이전트 작업, 필요한 자리의 사람 확인, 결과 보고, 종료입니다. 그린 흐름을 준비된 연결 방식의 범위에서 등록하고 실행하면, 앞에서 만든 에이전트가 그 단계에서 일하고 처리 건 하나가 기록으로 남아요. 등록된 흐름과 그 처리 건의 기록이 이 실습에서 남는 것입니다. 이때 지킬 게 하나 있습니다. 일정 등록이나 메일 발송처럼 준비된 범위 밖의 외부 시스템 쓰기는 성공한 것처럼 적지 않아요. 하지 못한 일로 결과 보고에 남깁니다. 처리 건이 끝 이벤트에 닿아 닫히고, 사람 확인이 필요한 자리에 실제로 있었고, 결과 보고에 한 일과 하지 못한 일이 함께 남았으면 성공이에요. 단, 등록할 수 있는 연결이 먼저 준비돼 있어야 합니다. 수업 예제에는 제가 실제 도구와 결과 형식에 맞게 채울 자리도 있어요. 연결이 없는 기능을 성공으로 꾸미지 말고, 확인 가능한 범위와 막힌 이유를 결과로 남겨야 합니다.</a:t>
+              <a:t>네 번째 실습은 직접 그린 흐름으로 에이전트를 실행하는 일입니다. 앞 실습에서 만들 에이전트는 제안이나 보류 한 건을 내는 데서 멈춥니다. 쿨러 사건에서도 에이전트의 일은 추천안을 제출하면서 끝났고, 그 뒤를 이은 건 프로세스였죠. 내 업무도 마찬가지예요. 에이전트가 낸 제안이나 보류를 누가 확인하고 어떻게 끝낼지는 흐름이 정합니다. 작은 업무의 흐름은 bpmn.io로 그리고요, 화면의 다섯 칸, 시작, 에이전트 작업, 필요한 자리의 사람 확인, 결과 보고, 종료입니다. 그린 흐름을 준비된 연결 방식의 범위에서 등록하고 실행하면, 앞에서 만든 에이전트가 그 단계에서 일하고 처리 건 하나가 기록으로 남아요. 등록된 흐름과 그 처리 건의 기록이 이 실습에서 남는 것입니다. 이때 지킬 게 하나 있습니다. 일정 등록이나 메일 발송처럼 준비된 범위 밖의 외부 시스템 쓰기는 성공한 것처럼 적지 않아요. 하지 못한 일로 결과 보고에 남깁니다. 필요한 흐름이 모두 끝나 다른 열린 작업 없이 처리 건이 닫히고, 사람 확인이 필요한 자리에 실제로 있었고, 결과 보고에 한 일과 하지 못한 일이 함께 남았으면 성공이에요. 단, 등록할 수 있는 연결이 먼저 준비돼 있어야 합니다. 수업 예제에는 제가 실제 도구와 결과 형식에 맞게 채울 자리도 있어요. 연결이 없는 기능을 성공으로 꾸미지 말고, 확인 가능한 범위와 막힌 이유를 결과로 남겨야 합니다.</a:t>
             </a:r>
           </a:p>
         </p:txBody>
@@ -3925,7 +3925,7 @@
           <a:lstStyle/>
           <a:p>
             <a:r>
-              <a:t>실습과 시연에서 남긴 기록으로 돌아왔습니다. 이제 복습과 용어 정리, 퀴즈로 이번 회차를 마무리하겠습니다. 학습 노트에는 완성한 결과와 아직 확인하지 못한 것을 구분해 두겠습니다. 먼저 이번 회차에 배운 흐름을 쿨러 사건으로 복습해 보겠습니다. 표에 쿨러 사건의 다섯 순간을 놓았어요. 답과 근거 칸은 잠깐 가려 둘게요. 순간마다 지식, 에이전트, 프로세스 가운데 어느 영역의 일인지 먼저 골라 보세요. 왜 그 영역인지 근거도 같이 생각해 보시고요. 답을 맞춰 볼까요? 첫째, 핀 오염의 기준을 읽은 순간은 지식의 일입니다. 여기서 지식으로 분류한 것은 읽는 행동이 아니라 기준의 출처와 역할입니다. 기준은 매뉴얼과 정책을 검토해 관리하고 개정하는 지식이죠. 둘째, 지금의 냉각 효율을 읽어서 기준에 댄 건 에이전트의 일이에요. 값은 도구로 읽은 현재 값이고, 그걸 기준에 대어 판단하는 게 에이전트의 몫이니까요. 셋째, 쿨러 핀 세척을 설비보전팀장이 승인한다는 건 다시 지식입니다. 승인 역할은 조치에 적힌 지식이었죠. 넷째, 운전원 승인 뒤에 냉각 명령이 열린 건 프로세스의 일이에요. 단계 사이의 순서는 엔진이 지킵니다. 다섯째가 헷갈리기 쉬워요. 내려간 유온을 다시 읽고 작업지시를 등록한 건 프로세스의 일입니다. 둘째 순간처럼 시계열 DB를 읽긴 하는데, 판단의 재료를 읽은 게 아니라 승인 뒤 실행의 결과를 확인한 서비스 작업이거든요. 결국 같은 값을 읽어도, 누가 무엇을 위해 읽었는지에 따라 영역이 갈립니다. 이 HYD 사례에서는 진단 도구를 통한 대조와 승인 뒤 재관측 서비스의 역할이 다릅니다. 다른 시스템에서는 배치가 달라질 수 있어도, 판단 근거를 읽는 일과 실행 결과를 확인하는 일을 구별하는 질문은 유효합니다.</a:t>
+              <a:t>실습과 시연에서 남긴 기록으로 돌아왔습니다. 이제 복습과 용어 정리, 퀴즈로 이번 회차를 마무리하겠습니다. 학습 노트에는 완성한 결과와 아직 확인하지 못한 것을 구분해 두겠습니다. 먼저 이번 회차에 배운 흐름을 쿨러 사건으로 복습해 보겠습니다. 표에 쿨러 사건의 다섯 순간을 놓았어요. 답과 근거 칸은 잠깐 가려 둘게요. 순간마다 지식, 에이전트, 프로세스 가운데 어느 영역의 일인지 먼저 골라 보세요. 왜 그 영역인지 근거도 같이 생각해 보시고요. 답을 맞춰 볼까요? 첫째, 핀 오염을 판단할 기준을 등록해 관리하는 일은 지식의 영역입니다. 기준은 매뉴얼과 정책을 검토해 관리하고 개정하는 지식이죠. 둘째, 지금의 냉각 효율을 읽어서 기준에 댄 건 에이전트의 일이에요. 값은 도구로 읽은 현재 값이고, 그걸 기준에 대어 판단하는 게 에이전트의 몫이니까요. 셋째, 쿨러 핀 세척을 설비보전팀장이 승인한다는 건 다시 지식입니다. 승인 역할은 조치에 적힌 지식이었죠. 넷째, 운전원 승인 뒤에 냉각 명령이 열린 건 프로세스의 일이에요. 단계 사이의 순서는 엔진이 지킵니다. 다섯째가 헷갈리기 쉬워요. 내려간 유온을 다시 읽고 작업지시를 등록한 건 프로세스의 일입니다. 둘째 순간처럼 시계열 DB를 읽긴 하는데, 판단의 재료를 읽은 게 아니라 승인 뒤 실행의 결과를 확인한 서비스 작업이거든요. 결국 같은 값을 읽어도, 누가 무엇을 위해 읽었는지에 따라 영역이 갈립니다. 이 HYD 사례에서는 진단 도구를 통한 대조와 승인 뒤 재관측 서비스의 역할이 다릅니다. 다른 시스템에서는 배치가 달라질 수 있어도, 판단 근거를 읽는 일과 실행 결과를 확인하는 일을 구별하는 질문은 유효합니다.</a:t>
             </a:r>
           </a:p>
         </p:txBody>
@@ -3995,7 +3995,7 @@
           <a:lstStyle/>
           <a:p>
             <a:r>
-              <a:t>흐름을 되짚었으니, 이번엔 용어의 이름과 뜻을 정리하겠습니다. 표에 이번 회차에서 다시 쓰고 새로 세운 용어 일곱 개가 있어요. 스킬은 에이전트가 업무를 수행하는 순서와 요령을 적은 재사용 지침입니다. MCP는 에이전트가 외부 시스템의 도구를 같은 방식으로 부르게 하는 연결 규약이에요. 출력 계약은 에이전트의 결과에 반드시 있어야 할 항목과 형식의 약속입니다. HITL은 사람의 판단이나 피드백을 과정 안에 넣는 방식입니다. 이 수업에서는 실행 전에 승인하거나 거절하는 자리로 구체화했고요. 프로세스 인스턴스는 프로세스 정의에 따라 실제로 도는 한 건이에요. 우리가 처리 건이라고 불러 온 거죠. 워크아이템은 인스턴스 안에서 수행자에게 맡겨지는 작업 하나, 우리가 단계라고 부른 겁니다. 마지막으로 멀티 에이전트 오케스트레이션은 한 프로세스 안에서 여러 에이전트의 순서와 호출을 조율하는 일입니다.</a:t>
+              <a:t>흐름을 되짚었으니, 이번엔 용어의 이름과 뜻을 정리하겠습니다. 표에 이번 회차에서 다시 쓰고 새로 세운 용어 일곱 개가 있어요. 스킬은 에이전트가 업무를 수행하는 순서와 요령을 적은 재사용 지침입니다. MCP는 에이전트가 외부 시스템의 도구를 같은 방식으로 부르게 하는 연결 규약이에요. 출력 계약은 결과의 필수 항목과 형식, 의미와 처리 조건에 대한 약속입니다. HITL은 사람의 판단이나 피드백을 과정 안에 넣는 방식입니다. 이 수업에서는 실행 전에 승인하거나 거절하는 자리로 구체화했고요. 프로세스 인스턴스는 프로세스 정의에 따라 실제로 도는 한 건이에요. 우리가 처리 건이라고 불러 온 거죠. 워크아이템은 인스턴스 안에서 수행자에게 맡겨지는 작업 하나, 우리가 단계라고 부른 겁니다. 마지막으로 멀티 에이전트 오케스트레이션은 한 프로세스 안에서 여러 에이전트의 순서와 호출을 조율하는 일입니다.</a:t>
             </a:r>
           </a:p>
         </p:txBody>
@@ -4275,7 +4275,7 @@
           <a:lstStyle/>
           <a:p>
             <a:r>
-              <a:t>마지막 문제입니다. 재고 보충을 빨리 끝내려고, 구매 에이전트에게 발주를 직접 등록하는 쓰기 도구를 연결하자는 의견이 나왔어요. 통제의 관점에서 가장 알맞은 판단은 무엇일까요? 1번, 발주 등록은 승인 뒤의 프로세스 작업에 두고 에이전트는 읽기만 한다. 2번, 스킬에 승인 뒤에만 발주한다고 적어 두면 쓰기 도구를 연결해도 된다. 3번, 발주한 뒤에 감사 기록이 남으니 쓰기 도구를 연결해도 문제없다. 4번, 발주 수량을 규칙으로 계산하게 하면 사람의 승인은 필요 없다.</a:t>
+              <a:t>마지막 문제입니다. 재고 보충을 빨리 끝내려고, 구매 에이전트에게 발주를 직접 등록하는 쓰기 도구를 연결하자는 의견이 나왔어요. 이 수업의 승인 정책에서 가장 알맞은 판단은 무엇일까요? 1번, 발주는 승인 뒤 프로세스가 등록하고 에이전트는 업무 원천을 조회해 제안을 제출한다. 2번, 스킬에 승인 뒤에만 발주한다고 적어 두면 쓰기 도구를 연결해도 된다. 3번, 발주한 뒤에 감사 기록이 남으니 쓰기 도구를 연결해도 문제없다. 4번, 발주 수량을 규칙으로 계산하게 하면 사람의 승인은 필요 없다.</a:t>
             </a:r>
           </a:p>
         </p:txBody>
@@ -8613,7 +8613,147 @@
         </p:nvSpPr>
         <p:spPr>
           <a:xfrm>
-            <a:off x="548639" y="3122676"/>
+            <a:off x="548639" y="4318711"/>
+            <a:ext cx="1737360" cy="1737360"/>
+          </a:xfrm>
+          <a:prstGeom prst="ellipse">
+            <a:avLst/>
+          </a:prstGeom>
+          <a:solidFill>
+            <a:srgbClr val="E7F3FD"/>
+          </a:solidFill>
+          <a:ln w="25400">
+            <a:solidFill>
+              <a:srgbClr val="5CB8F2"/>
+            </a:solidFill>
+          </a:ln>
+        </p:spPr>
+        <p:txBody>
+          <a:bodyPr rtlCol="0" anchor="ctr"/>
+          <a:lstStyle/>
+          <a:p>
+            <a:pPr algn="ctr"/>
+          </a:p>
+        </p:txBody>
+      </p:sp>
+      <p:sp>
+        <p:nvSpPr>
+          <p:cNvPr id="7" name="TextBox 6"/>
+          <p:cNvSpPr txBox="1"/>
+          <p:nvPr/>
+        </p:nvSpPr>
+        <p:spPr>
+          <a:xfrm>
+            <a:off x="523951" y="4648809"/>
+            <a:ext cx="1786737" cy="1077163"/>
+          </a:xfrm>
+          <a:prstGeom prst="rect">
+            <a:avLst/>
+          </a:prstGeom>
+          <a:noFill/>
+        </p:spPr>
+        <p:txBody>
+          <a:bodyPr wrap="square" anchor="ctr"/>
+          <a:lstStyle/>
+          <a:p>
+            <a:pPr algn="ctr" eaLnBrk="0">
+              <a:lnSpc>
+                <a:spcPct val="110000"/>
+              </a:lnSpc>
+            </a:pPr>
+            <a:r>
+              <a:rPr sz="1400" b="1">
+                <a:solidFill>
+                  <a:srgbClr val="13294B"/>
+                </a:solidFill>
+                <a:latin typeface="맑은 고딕"/>
+                <a:ea typeface="맑은 고딕"/>
+                <a:cs typeface="맑은 고딕"/>
+              </a:rPr>
+              <a:t>AnomalyPattern</a:t>
+            </a:r>
+          </a:p>
+        </p:txBody>
+      </p:sp>
+      <p:sp>
+        <p:nvSpPr>
+          <p:cNvPr id="8" name="Oval 7"/>
+          <p:cNvSpPr/>
+          <p:nvPr/>
+        </p:nvSpPr>
+        <p:spPr>
+          <a:xfrm>
+            <a:off x="3730038" y="1777136"/>
+            <a:ext cx="1737360" cy="1737360"/>
+          </a:xfrm>
+          <a:prstGeom prst="ellipse">
+            <a:avLst/>
+          </a:prstGeom>
+          <a:solidFill>
+            <a:srgbClr val="E7F3FD"/>
+          </a:solidFill>
+          <a:ln w="25400">
+            <a:solidFill>
+              <a:srgbClr val="5CB8F2"/>
+            </a:solidFill>
+          </a:ln>
+        </p:spPr>
+        <p:txBody>
+          <a:bodyPr rtlCol="0" anchor="ctr"/>
+          <a:lstStyle/>
+          <a:p>
+            <a:pPr algn="ctr"/>
+          </a:p>
+        </p:txBody>
+      </p:sp>
+      <p:sp>
+        <p:nvSpPr>
+          <p:cNvPr id="9" name="TextBox 8"/>
+          <p:cNvSpPr txBox="1"/>
+          <p:nvPr/>
+        </p:nvSpPr>
+        <p:spPr>
+          <a:xfrm>
+            <a:off x="3851653" y="2107234"/>
+            <a:ext cx="1494129" cy="1077163"/>
+          </a:xfrm>
+          <a:prstGeom prst="rect">
+            <a:avLst/>
+          </a:prstGeom>
+          <a:noFill/>
+        </p:spPr>
+        <p:txBody>
+          <a:bodyPr wrap="square" anchor="ctr"/>
+          <a:lstStyle/>
+          <a:p>
+            <a:pPr algn="ctr" eaLnBrk="0">
+              <a:lnSpc>
+                <a:spcPct val="110000"/>
+              </a:lnSpc>
+            </a:pPr>
+            <a:r>
+              <a:rPr sz="1400" b="1">
+                <a:solidFill>
+                  <a:srgbClr val="13294B"/>
+                </a:solidFill>
+                <a:latin typeface="맑은 고딕"/>
+                <a:ea typeface="맑은 고딕"/>
+                <a:cs typeface="맑은 고딕"/>
+              </a:rPr>
+              <a:t>Symptom</a:t>
+            </a:r>
+          </a:p>
+        </p:txBody>
+      </p:sp>
+      <p:sp>
+        <p:nvSpPr>
+          <p:cNvPr id="10" name="Oval 9"/>
+          <p:cNvSpPr/>
+          <p:nvPr/>
+        </p:nvSpPr>
+        <p:spPr>
+          <a:xfrm>
+            <a:off x="6817866" y="4318711"/>
             <a:ext cx="1737360" cy="1737360"/>
           </a:xfrm>
           <a:prstGeom prst="ellipse">
@@ -8638,13 +8778,13 @@
       </p:sp>
       <p:sp>
         <p:nvSpPr>
-          <p:cNvPr id="7" name="TextBox 6"/>
-          <p:cNvSpPr txBox="1"/>
-          <p:nvPr/>
-        </p:nvSpPr>
-        <p:spPr>
-          <a:xfrm>
-            <a:off x="670255" y="3452774"/>
+          <p:cNvPr id="11" name="TextBox 10"/>
+          <p:cNvSpPr txBox="1"/>
+          <p:nvPr/>
+        </p:nvSpPr>
+        <p:spPr>
+          <a:xfrm>
+            <a:off x="6939482" y="4648809"/>
             <a:ext cx="1494129" cy="1077163"/>
           </a:xfrm>
           <a:prstGeom prst="rect">
@@ -8670,38 +8810,20 @@
                 <a:ea typeface="맑은 고딕"/>
                 <a:cs typeface="맑은 고딕"/>
               </a:rPr>
-              <a:t>이상 패턴</a:t>
-            </a:r>
-          </a:p>
-          <a:p>
-            <a:pPr algn="ctr" eaLnBrk="0">
-              <a:lnSpc>
-                <a:spcPct val="110000"/>
-              </a:lnSpc>
-            </a:pPr>
-            <a:r>
-              <a:rPr sz="1100" b="0">
-                <a:solidFill>
-                  <a:srgbClr val="556175"/>
-                </a:solidFill>
-                <a:latin typeface="맑은 고딕"/>
-                <a:ea typeface="맑은 고딕"/>
-                <a:cs typeface="맑은 고딕"/>
-              </a:rPr>
-              <a:t>쿨러 성능 저하</a:t>
-            </a:r>
-          </a:p>
-        </p:txBody>
-      </p:sp>
-      <p:sp>
-        <p:nvSpPr>
-          <p:cNvPr id="8" name="Oval 7"/>
+              <a:t>FailureMode</a:t>
+            </a:r>
+          </a:p>
+        </p:txBody>
+      </p:sp>
+      <p:sp>
+        <p:nvSpPr>
+          <p:cNvPr id="12" name="Oval 11"/>
           <p:cNvSpPr/>
           <p:nvPr/>
         </p:nvSpPr>
         <p:spPr>
           <a:xfrm>
-            <a:off x="3730038" y="3122676"/>
+            <a:off x="9905695" y="1777136"/>
             <a:ext cx="1737360" cy="1737360"/>
           </a:xfrm>
           <a:prstGeom prst="ellipse">
@@ -8726,13 +8848,13 @@
       </p:sp>
       <p:sp>
         <p:nvSpPr>
-          <p:cNvPr id="9" name="TextBox 8"/>
-          <p:cNvSpPr txBox="1"/>
-          <p:nvPr/>
-        </p:nvSpPr>
-        <p:spPr>
-          <a:xfrm>
-            <a:off x="3851653" y="3452774"/>
+          <p:cNvPr id="13" name="TextBox 12"/>
+          <p:cNvSpPr txBox="1"/>
+          <p:nvPr/>
+        </p:nvSpPr>
+        <p:spPr>
+          <a:xfrm>
+            <a:off x="10027310" y="2107234"/>
             <a:ext cx="1494129" cy="1077163"/>
           </a:xfrm>
           <a:prstGeom prst="rect">
@@ -8758,219 +8880,7 @@
                 <a:ea typeface="맑은 고딕"/>
                 <a:cs typeface="맑은 고딕"/>
               </a:rPr>
-              <a:t>증상</a:t>
-            </a:r>
-          </a:p>
-          <a:p>
-            <a:pPr algn="ctr" eaLnBrk="0">
-              <a:lnSpc>
-                <a:spcPct val="110000"/>
-              </a:lnSpc>
-            </a:pPr>
-            <a:r>
-              <a:rPr sz="1100" b="0">
-                <a:solidFill>
-                  <a:srgbClr val="556175"/>
-                </a:solidFill>
-                <a:latin typeface="맑은 고딕"/>
-                <a:ea typeface="맑은 고딕"/>
-                <a:cs typeface="맑은 고딕"/>
-              </a:rPr>
-              <a:t>유온 상승</a:t>
-            </a:r>
-          </a:p>
-        </p:txBody>
-      </p:sp>
-      <p:sp>
-        <p:nvSpPr>
-          <p:cNvPr id="10" name="Oval 9"/>
-          <p:cNvSpPr/>
-          <p:nvPr/>
-        </p:nvSpPr>
-        <p:spPr>
-          <a:xfrm>
-            <a:off x="6817866" y="3122676"/>
-            <a:ext cx="1737360" cy="1737360"/>
-          </a:xfrm>
-          <a:prstGeom prst="ellipse">
-            <a:avLst/>
-          </a:prstGeom>
-          <a:solidFill>
-            <a:srgbClr val="E7F3FD"/>
-          </a:solidFill>
-          <a:ln w="25400">
-            <a:solidFill>
-              <a:srgbClr val="5CB8F2"/>
-            </a:solidFill>
-          </a:ln>
-        </p:spPr>
-        <p:txBody>
-          <a:bodyPr rtlCol="0" anchor="ctr"/>
-          <a:lstStyle/>
-          <a:p>
-            <a:pPr algn="ctr"/>
-          </a:p>
-        </p:txBody>
-      </p:sp>
-      <p:sp>
-        <p:nvSpPr>
-          <p:cNvPr id="11" name="TextBox 10"/>
-          <p:cNvSpPr txBox="1"/>
-          <p:nvPr/>
-        </p:nvSpPr>
-        <p:spPr>
-          <a:xfrm>
-            <a:off x="6939482" y="3452774"/>
-            <a:ext cx="1494129" cy="1077163"/>
-          </a:xfrm>
-          <a:prstGeom prst="rect">
-            <a:avLst/>
-          </a:prstGeom>
-          <a:noFill/>
-        </p:spPr>
-        <p:txBody>
-          <a:bodyPr wrap="square" anchor="ctr"/>
-          <a:lstStyle/>
-          <a:p>
-            <a:pPr algn="ctr" eaLnBrk="0">
-              <a:lnSpc>
-                <a:spcPct val="110000"/>
-              </a:lnSpc>
-            </a:pPr>
-            <a:r>
-              <a:rPr sz="1400" b="1">
-                <a:solidFill>
-                  <a:srgbClr val="13294B"/>
-                </a:solidFill>
-                <a:latin typeface="맑은 고딕"/>
-                <a:ea typeface="맑은 고딕"/>
-                <a:cs typeface="맑은 고딕"/>
-              </a:rPr>
-              <a:t>고장 유형</a:t>
-            </a:r>
-          </a:p>
-          <a:p>
-            <a:pPr algn="ctr" eaLnBrk="0">
-              <a:lnSpc>
-                <a:spcPct val="110000"/>
-              </a:lnSpc>
-            </a:pPr>
-            <a:r>
-              <a:rPr sz="1100" b="0">
-                <a:solidFill>
-                  <a:srgbClr val="556175"/>
-                </a:solidFill>
-                <a:latin typeface="맑은 고딕"/>
-                <a:ea typeface="맑은 고딕"/>
-                <a:cs typeface="맑은 고딕"/>
-              </a:rPr>
-              <a:t>쿨러 냉각</a:t>
-            </a:r>
-          </a:p>
-          <a:p>
-            <a:pPr algn="ctr" eaLnBrk="0">
-              <a:lnSpc>
-                <a:spcPct val="110000"/>
-              </a:lnSpc>
-            </a:pPr>
-            <a:r>
-              <a:rPr sz="1100" b="0">
-                <a:solidFill>
-                  <a:srgbClr val="556175"/>
-                </a:solidFill>
-                <a:latin typeface="맑은 고딕"/>
-                <a:ea typeface="맑은 고딕"/>
-                <a:cs typeface="맑은 고딕"/>
-              </a:rPr>
-              <a:t>성능 상실</a:t>
-            </a:r>
-          </a:p>
-        </p:txBody>
-      </p:sp>
-      <p:sp>
-        <p:nvSpPr>
-          <p:cNvPr id="12" name="Oval 11"/>
-          <p:cNvSpPr/>
-          <p:nvPr/>
-        </p:nvSpPr>
-        <p:spPr>
-          <a:xfrm>
-            <a:off x="9905695" y="3122676"/>
-            <a:ext cx="1737360" cy="1737360"/>
-          </a:xfrm>
-          <a:prstGeom prst="ellipse">
-            <a:avLst/>
-          </a:prstGeom>
-          <a:solidFill>
-            <a:srgbClr val="E7F3FD"/>
-          </a:solidFill>
-          <a:ln w="25400">
-            <a:solidFill>
-              <a:srgbClr val="5CB8F2"/>
-            </a:solidFill>
-          </a:ln>
-        </p:spPr>
-        <p:txBody>
-          <a:bodyPr rtlCol="0" anchor="ctr"/>
-          <a:lstStyle/>
-          <a:p>
-            <a:pPr algn="ctr"/>
-          </a:p>
-        </p:txBody>
-      </p:sp>
-      <p:sp>
-        <p:nvSpPr>
-          <p:cNvPr id="13" name="TextBox 12"/>
-          <p:cNvSpPr txBox="1"/>
-          <p:nvPr/>
-        </p:nvSpPr>
-        <p:spPr>
-          <a:xfrm>
-            <a:off x="10027310" y="3452774"/>
-            <a:ext cx="1494129" cy="1077163"/>
-          </a:xfrm>
-          <a:prstGeom prst="rect">
-            <a:avLst/>
-          </a:prstGeom>
-          <a:noFill/>
-        </p:spPr>
-        <p:txBody>
-          <a:bodyPr wrap="square" anchor="ctr"/>
-          <a:lstStyle/>
-          <a:p>
-            <a:pPr algn="ctr" eaLnBrk="0">
-              <a:lnSpc>
-                <a:spcPct val="110000"/>
-              </a:lnSpc>
-            </a:pPr>
-            <a:r>
-              <a:rPr sz="1400" b="1">
-                <a:solidFill>
-                  <a:srgbClr val="13294B"/>
-                </a:solidFill>
-                <a:latin typeface="맑은 고딕"/>
-                <a:ea typeface="맑은 고딕"/>
-                <a:cs typeface="맑은 고딕"/>
-              </a:rPr>
-              <a:t>원인</a:t>
-            </a:r>
-          </a:p>
-          <a:p>
-            <a:pPr algn="ctr" eaLnBrk="0">
-              <a:lnSpc>
-                <a:spcPct val="110000"/>
-              </a:lnSpc>
-            </a:pPr>
-            <a:r>
-              <a:rPr sz="1100" b="0">
-                <a:solidFill>
-                  <a:srgbClr val="556175"/>
-                </a:solidFill>
-                <a:latin typeface="맑은 고딕"/>
-                <a:ea typeface="맑은 고딕"/>
-                <a:cs typeface="맑은 고딕"/>
-              </a:rPr>
-              <a:t>후보 셋</a:t>
+              <a:t>Cause</a:t>
             </a:r>
           </a:p>
         </p:txBody>
@@ -8982,9 +8892,9 @@
           <p:nvPr/>
         </p:nvCxnSpPr>
         <p:spPr>
-          <a:xfrm>
-            <a:off x="2331720" y="3991356"/>
-            <a:ext cx="1325166" cy="0"/>
+          <a:xfrm flipV="1">
+            <a:off x="2131734" y="3233674"/>
+            <a:ext cx="1731137" cy="1382981"/>
           </a:xfrm>
           <a:prstGeom prst="line">
             <a:avLst/>
@@ -9005,7 +8915,7 @@
         </p:nvSpPr>
         <p:spPr>
           <a:xfrm>
-            <a:off x="2483167" y="3625596"/>
+            <a:off x="2486167" y="3559404"/>
             <a:ext cx="1022271" cy="292608"/>
           </a:xfrm>
           <a:prstGeom prst="roundRect">
@@ -9038,7 +8948,7 @@
         </p:nvSpPr>
         <p:spPr>
           <a:xfrm>
-            <a:off x="2483167" y="3625596"/>
+            <a:off x="2486167" y="3559404"/>
             <a:ext cx="1022271" cy="292608"/>
           </a:xfrm>
           <a:prstGeom prst="rect">
@@ -9077,8 +8987,8 @@
         </p:nvCxnSpPr>
         <p:spPr>
           <a:xfrm>
-            <a:off x="5513118" y="3991356"/>
-            <a:ext cx="1231596" cy="0"/>
+            <a:off x="5304722" y="3226924"/>
+            <a:ext cx="1654641" cy="1361926"/>
           </a:xfrm>
           <a:prstGeom prst="line">
             <a:avLst/>
@@ -9099,7 +9009,7 @@
         </p:nvSpPr>
         <p:spPr>
           <a:xfrm>
-            <a:off x="5510931" y="3625596"/>
+            <a:off x="5514057" y="3542127"/>
             <a:ext cx="1235971" cy="292608"/>
           </a:xfrm>
           <a:prstGeom prst="roundRect">
@@ -9132,7 +9042,7 @@
         </p:nvSpPr>
         <p:spPr>
           <a:xfrm>
-            <a:off x="5510931" y="3625596"/>
+            <a:off x="5514057" y="3542127"/>
             <a:ext cx="1235971" cy="292608"/>
           </a:xfrm>
           <a:prstGeom prst="rect">
@@ -9171,8 +9081,8 @@
         </p:nvCxnSpPr>
         <p:spPr>
           <a:xfrm flipH="1">
-            <a:off x="8628378" y="3991356"/>
-            <a:ext cx="1231597" cy="0"/>
+            <a:off x="8413730" y="3226924"/>
+            <a:ext cx="1654641" cy="1361926"/>
           </a:xfrm>
           <a:prstGeom prst="line">
             <a:avLst/>
@@ -9193,7 +9103,7 @@
         </p:nvSpPr>
         <p:spPr>
           <a:xfrm>
-            <a:off x="8786466" y="3625596"/>
+            <a:off x="8783340" y="3542127"/>
             <a:ext cx="915421" cy="292608"/>
           </a:xfrm>
           <a:prstGeom prst="roundRect">
@@ -9226,7 +9136,7 @@
         </p:nvSpPr>
         <p:spPr>
           <a:xfrm>
-            <a:off x="8786466" y="3625596"/>
+            <a:off x="8783340" y="3542127"/>
             <a:ext cx="915421" cy="292608"/>
           </a:xfrm>
           <a:prstGeom prst="rect">
@@ -17568,8 +17478,8 @@
         </p:nvSpPr>
         <p:spPr>
           <a:xfrm>
-            <a:off x="548640" y="2193162"/>
-            <a:ext cx="2567863" cy="3596386"/>
+            <a:off x="548640" y="2200909"/>
+            <a:ext cx="2567863" cy="3580892"/>
           </a:xfrm>
           <a:prstGeom prst="roundRect">
             <a:avLst>
@@ -17601,7 +17511,7 @@
         </p:nvSpPr>
         <p:spPr>
           <a:xfrm>
-            <a:off x="777240" y="2394331"/>
+            <a:off x="777240" y="2402078"/>
             <a:ext cx="731520" cy="731520"/>
           </a:xfrm>
           <a:prstGeom prst="ellipse">
@@ -17631,14 +17541,14 @@
           <p:nvPr/>
         </p:nvPicPr>
         <p:blipFill>
-          <a:blip r:embed="rId3"/>
+          <a:blip r:embed="rIdTheory2_rId3"/>
           <a:stretch>
             <a:fillRect/>
           </a:stretch>
         </p:blipFill>
         <p:spPr>
           <a:xfrm>
-            <a:off x="930859" y="2547950"/>
+            <a:off x="930859" y="2555697"/>
             <a:ext cx="424281" cy="424281"/>
           </a:xfrm>
           <a:prstGeom prst="rect">
@@ -17654,8 +17564,8 @@
         </p:nvSpPr>
         <p:spPr>
           <a:xfrm>
-            <a:off x="713232" y="3217291"/>
-            <a:ext cx="2238679" cy="2069338"/>
+            <a:off x="713232" y="3225038"/>
+            <a:ext cx="2238679" cy="2053844"/>
           </a:xfrm>
           <a:prstGeom prst="rect">
             <a:avLst/>
@@ -17675,7 +17585,7 @@
               </a:spcAft>
             </a:pPr>
             <a:r>
-              <a:rPr sz="2050" b="1">
+              <a:rPr sz="2100" b="1">
                 <a:solidFill>
                   <a:srgbClr val="13294B"/>
                 </a:solidFill>
@@ -17683,11 +17593,11 @@
                 <a:ea typeface="맑은 고딕"/>
                 <a:cs typeface="맑은 고딕"/>
               </a:rPr>
-              <a:t>지식에서 판단까지</a:t>
-            </a:r>
-          </a:p>
-          <a:p>
-            <a:pPr algn="l" eaLnBrk="0" marL="188595" indent="-188595">
+              <a:t>지식과 판단</a:t>
+            </a:r>
+          </a:p>
+          <a:p>
+            <a:pPr algn="l" eaLnBrk="0" marL="194310" indent="-194310">
               <a:lnSpc>
                 <a:spcPct val="110000"/>
               </a:lnSpc>
@@ -17696,7 +17606,7 @@
               </a:spcAft>
             </a:pPr>
             <a:r>
-              <a:rPr sz="1650" b="0">
+              <a:rPr sz="1700" b="0">
                 <a:solidFill>
                   <a:srgbClr val="1F2A3A"/>
                 </a:solidFill>
@@ -17708,7 +17618,7 @@
             </a:r>
           </a:p>
           <a:p>
-            <a:pPr algn="l" eaLnBrk="0" marL="188595" indent="-188595">
+            <a:pPr algn="l" eaLnBrk="0" marL="194310" indent="-194310">
               <a:lnSpc>
                 <a:spcPct val="110000"/>
               </a:lnSpc>
@@ -17717,7 +17627,7 @@
               </a:spcAft>
             </a:pPr>
             <a:r>
-              <a:rPr sz="1650" b="0">
+              <a:rPr sz="1700" b="0">
                 <a:solidFill>
                   <a:srgbClr val="1F2A3A"/>
                 </a:solidFill>
@@ -17738,7 +17648,7 @@
         </p:nvSpPr>
         <p:spPr>
           <a:xfrm>
-            <a:off x="777240" y="5359781"/>
+            <a:off x="777240" y="5352034"/>
             <a:ext cx="1219199" cy="292608"/>
           </a:xfrm>
           <a:prstGeom prst="roundRect">
@@ -17769,7 +17679,7 @@
         </p:nvSpPr>
         <p:spPr>
           <a:xfrm>
-            <a:off x="777240" y="5359781"/>
+            <a:off x="777240" y="5352034"/>
             <a:ext cx="1219199" cy="292608"/>
           </a:xfrm>
           <a:prstGeom prst="rect">
@@ -17808,8 +17718,8 @@
         </p:nvSpPr>
         <p:spPr>
           <a:xfrm>
-            <a:off x="3390823" y="2193162"/>
-            <a:ext cx="2567863" cy="3596386"/>
+            <a:off x="3390823" y="2200909"/>
+            <a:ext cx="2567863" cy="3580892"/>
           </a:xfrm>
           <a:prstGeom prst="roundRect">
             <a:avLst>
@@ -17841,7 +17751,7 @@
         </p:nvSpPr>
         <p:spPr>
           <a:xfrm>
-            <a:off x="3619423" y="2394331"/>
+            <a:off x="3619423" y="2402078"/>
             <a:ext cx="731520" cy="731520"/>
           </a:xfrm>
           <a:prstGeom prst="ellipse">
@@ -17871,14 +17781,14 @@
           <p:nvPr/>
         </p:nvPicPr>
         <p:blipFill>
-          <a:blip r:embed="rId4"/>
+          <a:blip r:embed="rIdTheory2_rId4"/>
           <a:stretch>
             <a:fillRect/>
           </a:stretch>
         </p:blipFill>
         <p:spPr>
           <a:xfrm>
-            <a:off x="3773043" y="2547950"/>
+            <a:off x="3773043" y="2555697"/>
             <a:ext cx="424281" cy="424281"/>
           </a:xfrm>
           <a:prstGeom prst="rect">
@@ -17894,8 +17804,8 @@
         </p:nvSpPr>
         <p:spPr>
           <a:xfrm>
-            <a:off x="3555415" y="3217291"/>
-            <a:ext cx="2238679" cy="2069338"/>
+            <a:off x="3555415" y="3225038"/>
+            <a:ext cx="2238679" cy="2053844"/>
           </a:xfrm>
           <a:prstGeom prst="rect">
             <a:avLst/>
@@ -17915,7 +17825,7 @@
               </a:spcAft>
             </a:pPr>
             <a:r>
-              <a:rPr sz="2050" b="1">
+              <a:rPr sz="2100" b="1">
                 <a:solidFill>
                   <a:srgbClr val="13294B"/>
                 </a:solidFill>
@@ -17923,11 +17833,11 @@
                 <a:ea typeface="맑은 고딕"/>
                 <a:cs typeface="맑은 고딕"/>
               </a:rPr>
-              <a:t>제안에서 완료까지</a:t>
-            </a:r>
-          </a:p>
-          <a:p>
-            <a:pPr algn="l" eaLnBrk="0" marL="188595" indent="-188595">
+              <a:t>제안과 업무 완료</a:t>
+            </a:r>
+          </a:p>
+          <a:p>
+            <a:pPr algn="l" eaLnBrk="0" marL="194310" indent="-194310">
               <a:lnSpc>
                 <a:spcPct val="110000"/>
               </a:lnSpc>
@@ -17936,7 +17846,7 @@
               </a:spcAft>
             </a:pPr>
             <a:r>
-              <a:rPr sz="1650" b="0">
+              <a:rPr sz="1700" b="0">
                 <a:solidFill>
                   <a:srgbClr val="1F2A3A"/>
                 </a:solidFill>
@@ -17948,7 +17858,7 @@
             </a:r>
           </a:p>
           <a:p>
-            <a:pPr algn="l" eaLnBrk="0" marL="188595" indent="-188595">
+            <a:pPr algn="l" eaLnBrk="0" marL="194310" indent="-194310">
               <a:lnSpc>
                 <a:spcPct val="110000"/>
               </a:lnSpc>
@@ -17957,7 +17867,7 @@
               </a:spcAft>
             </a:pPr>
             <a:r>
-              <a:rPr sz="1650" b="0">
+              <a:rPr sz="1700" b="0">
                 <a:solidFill>
                   <a:srgbClr val="1F2A3A"/>
                 </a:solidFill>
@@ -17978,7 +17888,7 @@
         </p:nvSpPr>
         <p:spPr>
           <a:xfrm>
-            <a:off x="3619423" y="5359781"/>
+            <a:off x="3619423" y="5352034"/>
             <a:ext cx="1219199" cy="292608"/>
           </a:xfrm>
           <a:prstGeom prst="roundRect">
@@ -18009,7 +17919,7 @@
         </p:nvSpPr>
         <p:spPr>
           <a:xfrm>
-            <a:off x="3619423" y="5359781"/>
+            <a:off x="3619423" y="5352034"/>
             <a:ext cx="1219199" cy="292608"/>
           </a:xfrm>
           <a:prstGeom prst="rect">
@@ -18048,8 +17958,8 @@
         </p:nvSpPr>
         <p:spPr>
           <a:xfrm>
-            <a:off x="6233007" y="2193162"/>
-            <a:ext cx="2567863" cy="3596386"/>
+            <a:off x="6233007" y="2200909"/>
+            <a:ext cx="2567863" cy="3580892"/>
           </a:xfrm>
           <a:prstGeom prst="roundRect">
             <a:avLst>
@@ -18081,7 +17991,7 @@
         </p:nvSpPr>
         <p:spPr>
           <a:xfrm>
-            <a:off x="6461607" y="2394331"/>
+            <a:off x="6461607" y="2402078"/>
             <a:ext cx="731520" cy="731520"/>
           </a:xfrm>
           <a:prstGeom prst="ellipse">
@@ -18111,14 +18021,14 @@
           <p:nvPr/>
         </p:nvPicPr>
         <p:blipFill>
-          <a:blip r:embed="rId5"/>
+          <a:blip r:embed="rIdTheory2_rId5"/>
           <a:stretch>
             <a:fillRect/>
           </a:stretch>
         </p:blipFill>
         <p:spPr>
           <a:xfrm>
-            <a:off x="6615226" y="2547950"/>
+            <a:off x="6615226" y="2555697"/>
             <a:ext cx="424281" cy="424281"/>
           </a:xfrm>
           <a:prstGeom prst="rect">
@@ -18134,8 +18044,8 @@
         </p:nvSpPr>
         <p:spPr>
           <a:xfrm>
-            <a:off x="6397599" y="3217291"/>
-            <a:ext cx="2238679" cy="2069338"/>
+            <a:off x="6397599" y="3225038"/>
+            <a:ext cx="2238679" cy="2053844"/>
           </a:xfrm>
           <a:prstGeom prst="rect">
             <a:avLst/>
@@ -18155,7 +18065,7 @@
               </a:spcAft>
             </a:pPr>
             <a:r>
-              <a:rPr sz="2050" b="1">
+              <a:rPr sz="2100" b="1">
                 <a:solidFill>
                   <a:srgbClr val="13294B"/>
                 </a:solidFill>
@@ -18167,7 +18077,7 @@
             </a:r>
           </a:p>
           <a:p>
-            <a:pPr algn="l" eaLnBrk="0" marL="188595" indent="-188595">
+            <a:pPr algn="l" eaLnBrk="0" marL="194310" indent="-194310">
               <a:lnSpc>
                 <a:spcPct val="110000"/>
               </a:lnSpc>
@@ -18176,7 +18086,7 @@
               </a:spcAft>
             </a:pPr>
             <a:r>
-              <a:rPr sz="1650" b="0">
+              <a:rPr sz="1700" b="0">
                 <a:solidFill>
                   <a:srgbClr val="1F2A3A"/>
                 </a:solidFill>
@@ -18188,7 +18098,7 @@
             </a:r>
           </a:p>
           <a:p>
-            <a:pPr algn="l" eaLnBrk="0" marL="188595" indent="-188595">
+            <a:pPr algn="l" eaLnBrk="0" marL="194310" indent="-194310">
               <a:lnSpc>
                 <a:spcPct val="110000"/>
               </a:lnSpc>
@@ -18197,7 +18107,7 @@
               </a:spcAft>
             </a:pPr>
             <a:r>
-              <a:rPr sz="1650" b="0">
+              <a:rPr sz="1700" b="0">
                 <a:solidFill>
                   <a:srgbClr val="1F2A3A"/>
                 </a:solidFill>
@@ -18218,7 +18128,7 @@
         </p:nvSpPr>
         <p:spPr>
           <a:xfrm>
-            <a:off x="6461607" y="5359781"/>
+            <a:off x="6461607" y="5352034"/>
             <a:ext cx="1173480" cy="292608"/>
           </a:xfrm>
           <a:prstGeom prst="roundRect">
@@ -18249,7 +18159,7 @@
         </p:nvSpPr>
         <p:spPr>
           <a:xfrm>
-            <a:off x="6461607" y="5359781"/>
+            <a:off x="6461607" y="5352034"/>
             <a:ext cx="1173480" cy="292608"/>
           </a:xfrm>
           <a:prstGeom prst="rect">
@@ -18288,8 +18198,8 @@
         </p:nvSpPr>
         <p:spPr>
           <a:xfrm>
-            <a:off x="9075191" y="2193162"/>
-            <a:ext cx="2567863" cy="3596386"/>
+            <a:off x="9075191" y="2200909"/>
+            <a:ext cx="2567863" cy="3580892"/>
           </a:xfrm>
           <a:prstGeom prst="roundRect">
             <a:avLst>
@@ -18321,7 +18231,7 @@
         </p:nvSpPr>
         <p:spPr>
           <a:xfrm>
-            <a:off x="9303791" y="2394331"/>
+            <a:off x="9303791" y="2402078"/>
             <a:ext cx="731520" cy="731520"/>
           </a:xfrm>
           <a:prstGeom prst="ellipse">
@@ -18351,14 +18261,14 @@
           <p:nvPr/>
         </p:nvPicPr>
         <p:blipFill>
-          <a:blip r:embed="rId6"/>
+          <a:blip r:embed="rIdTheory2_rId6"/>
           <a:stretch>
             <a:fillRect/>
           </a:stretch>
         </p:blipFill>
         <p:spPr>
           <a:xfrm>
-            <a:off x="9457410" y="2547950"/>
+            <a:off x="9457410" y="2555697"/>
             <a:ext cx="424281" cy="424281"/>
           </a:xfrm>
           <a:prstGeom prst="rect">
@@ -18374,8 +18284,8 @@
         </p:nvSpPr>
         <p:spPr>
           <a:xfrm>
-            <a:off x="9239783" y="3217291"/>
-            <a:ext cx="2238679" cy="2069338"/>
+            <a:off x="9239783" y="3225038"/>
+            <a:ext cx="2238679" cy="2053844"/>
           </a:xfrm>
           <a:prstGeom prst="rect">
             <a:avLst/>
@@ -18395,7 +18305,7 @@
               </a:spcAft>
             </a:pPr>
             <a:r>
-              <a:rPr sz="2050" b="1">
+              <a:rPr sz="2100" b="1">
                 <a:solidFill>
                   <a:srgbClr val="13294B"/>
                 </a:solidFill>
@@ -18407,7 +18317,7 @@
             </a:r>
           </a:p>
           <a:p>
-            <a:pPr algn="l" eaLnBrk="0" marL="188595" indent="-188595">
+            <a:pPr algn="l" eaLnBrk="0" marL="194310" indent="-194310">
               <a:lnSpc>
                 <a:spcPct val="110000"/>
               </a:lnSpc>
@@ -18416,7 +18326,7 @@
               </a:spcAft>
             </a:pPr>
             <a:r>
-              <a:rPr sz="1650" b="0">
+              <a:rPr sz="1700" b="0">
                 <a:solidFill>
                   <a:srgbClr val="1F2A3A"/>
                 </a:solidFill>
@@ -18428,7 +18338,7 @@
             </a:r>
           </a:p>
           <a:p>
-            <a:pPr algn="l" eaLnBrk="0" marL="188595" indent="-188595">
+            <a:pPr algn="l" eaLnBrk="0" marL="194310" indent="-194310">
               <a:lnSpc>
                 <a:spcPct val="110000"/>
               </a:lnSpc>
@@ -18437,7 +18347,7 @@
               </a:spcAft>
             </a:pPr>
             <a:r>
-              <a:rPr sz="1650" b="0">
+              <a:rPr sz="1700" b="0">
                 <a:solidFill>
                   <a:srgbClr val="1F2A3A"/>
                 </a:solidFill>
@@ -18458,7 +18368,7 @@
         </p:nvSpPr>
         <p:spPr>
           <a:xfrm>
-            <a:off x="9303791" y="5359781"/>
+            <a:off x="9303791" y="5352034"/>
             <a:ext cx="1219199" cy="292608"/>
           </a:xfrm>
           <a:prstGeom prst="roundRect">
@@ -18489,7 +18399,7 @@
         </p:nvSpPr>
         <p:spPr>
           <a:xfrm>
-            <a:off x="9303791" y="5359781"/>
+            <a:off x="9303791" y="5352034"/>
             <a:ext cx="1219199" cy="292608"/>
           </a:xfrm>
           <a:prstGeom prst="rect">
@@ -21968,7 +21878,7 @@
                 <a:ea typeface="맑은 고딕"/>
                 <a:cs typeface="맑은 고딕"/>
               </a:rPr>
-              <a:t>닿은 끝 이벤트와 그때까지의 결과</a:t>
+              <a:t>진행한 경로와 그때까지의 업무 결과</a:t>
             </a:r>
           </a:p>
         </p:txBody>
@@ -24082,16 +23992,686 @@
         </p:nvSpPr>
         <p:spPr>
           <a:xfrm>
-            <a:off x="548640" y="1961387"/>
-            <a:ext cx="11094415" cy="347472"/>
+            <a:off x="594360" y="1828800"/>
+            <a:ext cx="5212080" cy="1965960"/>
           </a:xfrm>
           <a:prstGeom prst="roundRect">
             <a:avLst>
-              <a:gd name="adj" fmla="val 12000"/>
+              <a:gd name="adj" fmla="val 6000"/>
             </a:avLst>
           </a:prstGeom>
           <a:solidFill>
-            <a:srgbClr val="13294B"/>
+            <a:srgbClr val="FFFFFF"/>
+          </a:solidFill>
+          <a:ln w="15875">
+            <a:solidFill>
+              <a:srgbClr val="D3D9E1"/>
+            </a:solidFill>
+          </a:ln>
+        </p:spPr>
+        <p:txBody>
+          <a:bodyPr rtlCol="0" anchor="ctr"/>
+          <a:lstStyle/>
+          <a:p>
+            <a:pPr algn="ctr"/>
+          </a:p>
+        </p:txBody>
+      </p:sp>
+      <p:sp>
+        <p:nvSpPr>
+          <p:cNvPr id="7" name="TextBox 6"/>
+          <p:cNvSpPr txBox="1"/>
+          <p:nvPr/>
+        </p:nvSpPr>
+        <p:spPr>
+          <a:xfrm>
+            <a:off x="777240" y="1993392"/>
+            <a:ext cx="4846320" cy="365760"/>
+          </a:xfrm>
+          <a:prstGeom prst="rect">
+            <a:avLst/>
+          </a:prstGeom>
+          <a:noFill/>
+        </p:spPr>
+        <p:txBody>
+          <a:bodyPr wrap="square" anchor="t"/>
+          <a:lstStyle/>
+          <a:p>
+            <a:pPr algn="l" eaLnBrk="0">
+              <a:lnSpc>
+                <a:spcPct val="110000"/>
+              </a:lnSpc>
+            </a:pPr>
+            <a:r>
+              <a:rPr sz="1900" b="1">
+                <a:solidFill>
+                  <a:srgbClr val="13294B"/>
+                </a:solidFill>
+                <a:latin typeface="맑은 고딕"/>
+                <a:ea typeface="맑은 고딕"/>
+                <a:cs typeface="맑은 고딕"/>
+              </a:rPr>
+              <a:t>approval · chosen_skill</a:t>
+            </a:r>
+          </a:p>
+        </p:txBody>
+      </p:sp>
+      <p:sp>
+        <p:nvSpPr>
+          <p:cNvPr id="8" name="TextBox 7"/>
+          <p:cNvSpPr txBox="1"/>
+          <p:nvPr/>
+        </p:nvSpPr>
+        <p:spPr>
+          <a:xfrm>
+            <a:off x="777240" y="2514600"/>
+            <a:ext cx="4846320" cy="685800"/>
+          </a:xfrm>
+          <a:prstGeom prst="rect">
+            <a:avLst/>
+          </a:prstGeom>
+          <a:noFill/>
+        </p:spPr>
+        <p:txBody>
+          <a:bodyPr wrap="square" anchor="t"/>
+          <a:lstStyle/>
+          <a:p>
+            <a:pPr algn="l" eaLnBrk="0">
+              <a:lnSpc>
+                <a:spcPct val="110000"/>
+              </a:lnSpc>
+            </a:pPr>
+            <a:r>
+              <a:rPr sz="1700" b="0">
+                <a:solidFill>
+                  <a:srgbClr val="13294B"/>
+                </a:solidFill>
+                <a:latin typeface="맑은 고딕"/>
+                <a:ea typeface="맑은 고딕"/>
+                <a:cs typeface="맑은 고딕"/>
+              </a:rPr>
+              <a:t>승인이라는 결정과 고른 조치</a:t>
+            </a:r>
+          </a:p>
+          <a:p>
+            <a:pPr algn="l" eaLnBrk="0">
+              <a:lnSpc>
+                <a:spcPct val="110000"/>
+              </a:lnSpc>
+            </a:pPr>
+            <a:r>
+              <a:rPr sz="1700" b="0">
+                <a:solidFill>
+                  <a:srgbClr val="13294B"/>
+                </a:solidFill>
+                <a:latin typeface="맑은 고딕"/>
+                <a:ea typeface="맑은 고딕"/>
+                <a:cs typeface="맑은 고딕"/>
+              </a:rPr>
+              <a:t>선택 예: 승인 · 팬 최대 운전</a:t>
+            </a:r>
+          </a:p>
+        </p:txBody>
+      </p:sp>
+      <p:sp>
+        <p:nvSpPr>
+          <p:cNvPr id="9" name="TextBox 8"/>
+          <p:cNvSpPr txBox="1"/>
+          <p:nvPr/>
+        </p:nvSpPr>
+        <p:spPr>
+          <a:xfrm>
+            <a:off x="777240" y="3310128"/>
+            <a:ext cx="4846320" cy="320040"/>
+          </a:xfrm>
+          <a:prstGeom prst="rect">
+            <a:avLst/>
+          </a:prstGeom>
+          <a:noFill/>
+        </p:spPr>
+        <p:txBody>
+          <a:bodyPr wrap="square" anchor="t"/>
+          <a:lstStyle/>
+          <a:p>
+            <a:pPr algn="l" eaLnBrk="0">
+              <a:lnSpc>
+                <a:spcPct val="110000"/>
+              </a:lnSpc>
+            </a:pPr>
+            <a:r>
+              <a:rPr sz="1500" b="1">
+                <a:solidFill>
+                  <a:srgbClr val="1A6FC4"/>
+                </a:solidFill>
+                <a:latin typeface="맑은 고딕"/>
+                <a:ea typeface="맑은 고딕"/>
+                <a:cs typeface="맑은 고딕"/>
+              </a:rPr>
+              <a:t>운전원 승인 단계</a:t>
+            </a:r>
+          </a:p>
+        </p:txBody>
+      </p:sp>
+      <p:sp>
+        <p:nvSpPr>
+          <p:cNvPr id="10" name="Rounded Rectangle 9"/>
+          <p:cNvSpPr/>
+          <p:nvPr/>
+        </p:nvSpPr>
+        <p:spPr>
+          <a:xfrm>
+            <a:off x="6263640" y="1828800"/>
+            <a:ext cx="5212080" cy="1965960"/>
+          </a:xfrm>
+          <a:prstGeom prst="roundRect">
+            <a:avLst>
+              <a:gd name="adj" fmla="val 6000"/>
+            </a:avLst>
+          </a:prstGeom>
+          <a:solidFill>
+            <a:srgbClr val="E7F3FD"/>
+          </a:solidFill>
+          <a:ln w="15875">
+            <a:solidFill>
+              <a:srgbClr val="D3D9E1"/>
+            </a:solidFill>
+          </a:ln>
+        </p:spPr>
+        <p:txBody>
+          <a:bodyPr rtlCol="0" anchor="ctr"/>
+          <a:lstStyle/>
+          <a:p>
+            <a:pPr algn="ctr"/>
+          </a:p>
+        </p:txBody>
+      </p:sp>
+      <p:sp>
+        <p:nvSpPr>
+          <p:cNvPr id="11" name="TextBox 10"/>
+          <p:cNvSpPr txBox="1"/>
+          <p:nvPr/>
+        </p:nvSpPr>
+        <p:spPr>
+          <a:xfrm>
+            <a:off x="6446520" y="1993392"/>
+            <a:ext cx="4846320" cy="365760"/>
+          </a:xfrm>
+          <a:prstGeom prst="rect">
+            <a:avLst/>
+          </a:prstGeom>
+          <a:noFill/>
+        </p:spPr>
+        <p:txBody>
+          <a:bodyPr wrap="square" anchor="t"/>
+          <a:lstStyle/>
+          <a:p>
+            <a:pPr algn="l" eaLnBrk="0">
+              <a:lnSpc>
+                <a:spcPct val="110000"/>
+              </a:lnSpc>
+            </a:pPr>
+            <a:r>
+              <a:rPr sz="1900" b="1">
+                <a:solidFill>
+                  <a:srgbClr val="13294B"/>
+                </a:solidFill>
+                <a:latin typeface="맑은 고딕"/>
+                <a:ea typeface="맑은 고딕"/>
+                <a:cs typeface="맑은 고딕"/>
+              </a:rPr>
+              <a:t>approved_role</a:t>
+            </a:r>
+          </a:p>
+        </p:txBody>
+      </p:sp>
+      <p:sp>
+        <p:nvSpPr>
+          <p:cNvPr id="12" name="TextBox 11"/>
+          <p:cNvSpPr txBox="1"/>
+          <p:nvPr/>
+        </p:nvSpPr>
+        <p:spPr>
+          <a:xfrm>
+            <a:off x="6446520" y="2514600"/>
+            <a:ext cx="4846320" cy="685800"/>
+          </a:xfrm>
+          <a:prstGeom prst="rect">
+            <a:avLst/>
+          </a:prstGeom>
+          <a:noFill/>
+        </p:spPr>
+        <p:txBody>
+          <a:bodyPr wrap="square" anchor="t"/>
+          <a:lstStyle/>
+          <a:p>
+            <a:pPr algn="l" eaLnBrk="0">
+              <a:lnSpc>
+                <a:spcPct val="110000"/>
+              </a:lnSpc>
+            </a:pPr>
+            <a:r>
+              <a:rPr sz="1700" b="0">
+                <a:solidFill>
+                  <a:srgbClr val="13294B"/>
+                </a:solidFill>
+                <a:latin typeface="맑은 고딕"/>
+                <a:ea typeface="맑은 고딕"/>
+                <a:cs typeface="맑은 고딕"/>
+              </a:rPr>
+              <a:t>승인한 역할</a:t>
+            </a:r>
+          </a:p>
+          <a:p>
+            <a:pPr algn="l" eaLnBrk="0">
+              <a:lnSpc>
+                <a:spcPct val="110000"/>
+              </a:lnSpc>
+            </a:pPr>
+            <a:r>
+              <a:rPr sz="1700" b="0">
+                <a:solidFill>
+                  <a:srgbClr val="13294B"/>
+                </a:solidFill>
+                <a:latin typeface="맑은 고딕"/>
+                <a:ea typeface="맑은 고딕"/>
+                <a:cs typeface="맑은 고딕"/>
+              </a:rPr>
+              <a:t>역할 예: 운전원</a:t>
+            </a:r>
+          </a:p>
+        </p:txBody>
+      </p:sp>
+      <p:sp>
+        <p:nvSpPr>
+          <p:cNvPr id="13" name="TextBox 12"/>
+          <p:cNvSpPr txBox="1"/>
+          <p:nvPr/>
+        </p:nvSpPr>
+        <p:spPr>
+          <a:xfrm>
+            <a:off x="6446520" y="3310128"/>
+            <a:ext cx="4846320" cy="320040"/>
+          </a:xfrm>
+          <a:prstGeom prst="rect">
+            <a:avLst/>
+          </a:prstGeom>
+          <a:noFill/>
+        </p:spPr>
+        <p:txBody>
+          <a:bodyPr wrap="square" anchor="t"/>
+          <a:lstStyle/>
+          <a:p>
+            <a:pPr algn="l" eaLnBrk="0">
+              <a:lnSpc>
+                <a:spcPct val="110000"/>
+              </a:lnSpc>
+            </a:pPr>
+            <a:r>
+              <a:rPr sz="1500" b="1">
+                <a:solidFill>
+                  <a:srgbClr val="1A6FC4"/>
+                </a:solidFill>
+                <a:latin typeface="맑은 고딕"/>
+                <a:ea typeface="맑은 고딕"/>
+                <a:cs typeface="맑은 고딕"/>
+              </a:rPr>
+              <a:t>서버 · 에이전트는 못 쓴다</a:t>
+            </a:r>
+          </a:p>
+        </p:txBody>
+      </p:sp>
+      <p:sp>
+        <p:nvSpPr>
+          <p:cNvPr id="14" name="Rounded Rectangle 13"/>
+          <p:cNvSpPr/>
+          <p:nvPr/>
+        </p:nvSpPr>
+        <p:spPr>
+          <a:xfrm>
+            <a:off x="594360" y="4160520"/>
+            <a:ext cx="5212080" cy="1965960"/>
+          </a:xfrm>
+          <a:prstGeom prst="roundRect">
+            <a:avLst>
+              <a:gd name="adj" fmla="val 6000"/>
+            </a:avLst>
+          </a:prstGeom>
+          <a:solidFill>
+            <a:srgbClr val="FFFFFF"/>
+          </a:solidFill>
+          <a:ln w="15875">
+            <a:solidFill>
+              <a:srgbClr val="D3D9E1"/>
+            </a:solidFill>
+          </a:ln>
+        </p:spPr>
+        <p:txBody>
+          <a:bodyPr rtlCol="0" anchor="ctr"/>
+          <a:lstStyle/>
+          <a:p>
+            <a:pPr algn="ctr"/>
+          </a:p>
+        </p:txBody>
+      </p:sp>
+      <p:sp>
+        <p:nvSpPr>
+          <p:cNvPr id="15" name="TextBox 14"/>
+          <p:cNvSpPr txBox="1"/>
+          <p:nvPr/>
+        </p:nvSpPr>
+        <p:spPr>
+          <a:xfrm>
+            <a:off x="777240" y="4325112"/>
+            <a:ext cx="4846320" cy="365760"/>
+          </a:xfrm>
+          <a:prstGeom prst="rect">
+            <a:avLst/>
+          </a:prstGeom>
+          <a:noFill/>
+        </p:spPr>
+        <p:txBody>
+          <a:bodyPr wrap="square" anchor="t"/>
+          <a:lstStyle/>
+          <a:p>
+            <a:pPr algn="l" eaLnBrk="0">
+              <a:lnSpc>
+                <a:spcPct val="110000"/>
+              </a:lnSpc>
+            </a:pPr>
+            <a:r>
+              <a:rPr sz="1900" b="1">
+                <a:solidFill>
+                  <a:srgbClr val="13294B"/>
+                </a:solidFill>
+                <a:latin typeface="맑은 고딕"/>
+                <a:ea typeface="맑은 고딕"/>
+                <a:cs typeface="맑은 고딕"/>
+              </a:rPr>
+              <a:t>APPROVAL_ACCEPTED</a:t>
+            </a:r>
+          </a:p>
+        </p:txBody>
+      </p:sp>
+      <p:sp>
+        <p:nvSpPr>
+          <p:cNvPr id="16" name="TextBox 15"/>
+          <p:cNvSpPr txBox="1"/>
+          <p:nvPr/>
+        </p:nvSpPr>
+        <p:spPr>
+          <a:xfrm>
+            <a:off x="777240" y="4846320"/>
+            <a:ext cx="4846320" cy="685800"/>
+          </a:xfrm>
+          <a:prstGeom prst="rect">
+            <a:avLst/>
+          </a:prstGeom>
+          <a:noFill/>
+        </p:spPr>
+        <p:txBody>
+          <a:bodyPr wrap="square" anchor="t"/>
+          <a:lstStyle/>
+          <a:p>
+            <a:pPr algn="l" eaLnBrk="0">
+              <a:lnSpc>
+                <a:spcPct val="110000"/>
+              </a:lnSpc>
+            </a:pPr>
+            <a:r>
+              <a:rPr sz="1700" b="0">
+                <a:solidFill>
+                  <a:srgbClr val="13294B"/>
+                </a:solidFill>
+                <a:latin typeface="맑은 고딕"/>
+                <a:ea typeface="맑은 고딕"/>
+                <a:cs typeface="맑은 고딕"/>
+              </a:rPr>
+              <a:t>승인 접수 기록</a:t>
+            </a:r>
+          </a:p>
+          <a:p>
+            <a:pPr algn="l" eaLnBrk="0">
+              <a:lnSpc>
+                <a:spcPct val="110000"/>
+              </a:lnSpc>
+            </a:pPr>
+            <a:r>
+              <a:rPr sz="1700" b="0">
+                <a:solidFill>
+                  <a:srgbClr val="13294B"/>
+                </a:solidFill>
+                <a:latin typeface="맑은 고딕"/>
+                <a:ea typeface="맑은 고딕"/>
+                <a:cs typeface="맑은 고딕"/>
+              </a:rPr>
+              <a:t>역할과 판단 id</a:t>
+            </a:r>
+          </a:p>
+        </p:txBody>
+      </p:sp>
+      <p:sp>
+        <p:nvSpPr>
+          <p:cNvPr id="17" name="TextBox 16"/>
+          <p:cNvSpPr txBox="1"/>
+          <p:nvPr/>
+        </p:nvSpPr>
+        <p:spPr>
+          <a:xfrm>
+            <a:off x="777240" y="5641848"/>
+            <a:ext cx="4846320" cy="320040"/>
+          </a:xfrm>
+          <a:prstGeom prst="rect">
+            <a:avLst/>
+          </a:prstGeom>
+          <a:noFill/>
+        </p:spPr>
+        <p:txBody>
+          <a:bodyPr wrap="square" anchor="t"/>
+          <a:lstStyle/>
+          <a:p>
+            <a:pPr algn="l" eaLnBrk="0">
+              <a:lnSpc>
+                <a:spcPct val="110000"/>
+              </a:lnSpc>
+            </a:pPr>
+            <a:r>
+              <a:rPr sz="1500" b="1">
+                <a:solidFill>
+                  <a:srgbClr val="1A6FC4"/>
+                </a:solidFill>
+                <a:latin typeface="맑은 고딕"/>
+                <a:ea typeface="맑은 고딕"/>
+                <a:cs typeface="맑은 고딕"/>
+              </a:rPr>
+              <a:t>처리 기록</a:t>
+            </a:r>
+          </a:p>
+        </p:txBody>
+      </p:sp>
+      <p:sp>
+        <p:nvSpPr>
+          <p:cNvPr id="18" name="Rounded Rectangle 17"/>
+          <p:cNvSpPr/>
+          <p:nvPr/>
+        </p:nvSpPr>
+        <p:spPr>
+          <a:xfrm>
+            <a:off x="6263640" y="4160520"/>
+            <a:ext cx="5212080" cy="1965960"/>
+          </a:xfrm>
+          <a:prstGeom prst="roundRect">
+            <a:avLst>
+              <a:gd name="adj" fmla="val 6000"/>
+            </a:avLst>
+          </a:prstGeom>
+          <a:solidFill>
+            <a:srgbClr val="FFFFFF"/>
+          </a:solidFill>
+          <a:ln w="15875">
+            <a:solidFill>
+              <a:srgbClr val="D3D9E1"/>
+            </a:solidFill>
+          </a:ln>
+        </p:spPr>
+        <p:txBody>
+          <a:bodyPr rtlCol="0" anchor="ctr"/>
+          <a:lstStyle/>
+          <a:p>
+            <a:pPr algn="ctr"/>
+          </a:p>
+        </p:txBody>
+      </p:sp>
+      <p:sp>
+        <p:nvSpPr>
+          <p:cNvPr id="19" name="TextBox 18"/>
+          <p:cNvSpPr txBox="1"/>
+          <p:nvPr/>
+        </p:nvSpPr>
+        <p:spPr>
+          <a:xfrm>
+            <a:off x="6446520" y="4325112"/>
+            <a:ext cx="4846320" cy="365760"/>
+          </a:xfrm>
+          <a:prstGeom prst="rect">
+            <a:avLst/>
+          </a:prstGeom>
+          <a:noFill/>
+        </p:spPr>
+        <p:txBody>
+          <a:bodyPr wrap="square" anchor="t"/>
+          <a:lstStyle/>
+          <a:p>
+            <a:pPr algn="l" eaLnBrk="0">
+              <a:lnSpc>
+                <a:spcPct val="110000"/>
+              </a:lnSpc>
+            </a:pPr>
+            <a:r>
+              <a:rPr sz="1900" b="1">
+                <a:solidFill>
+                  <a:srgbClr val="13294B"/>
+                </a:solidFill>
+                <a:latin typeface="맑은 고딕"/>
+                <a:ea typeface="맑은 고딕"/>
+                <a:cs typeface="맑은 고딕"/>
+              </a:rPr>
+              <a:t>APPROVAL_DELIVERY</a:t>
+            </a:r>
+          </a:p>
+        </p:txBody>
+      </p:sp>
+      <p:sp>
+        <p:nvSpPr>
+          <p:cNvPr id="20" name="TextBox 19"/>
+          <p:cNvSpPr txBox="1"/>
+          <p:nvPr/>
+        </p:nvSpPr>
+        <p:spPr>
+          <a:xfrm>
+            <a:off x="6446520" y="4846320"/>
+            <a:ext cx="4846320" cy="685800"/>
+          </a:xfrm>
+          <a:prstGeom prst="rect">
+            <a:avLst/>
+          </a:prstGeom>
+          <a:noFill/>
+        </p:spPr>
+        <p:txBody>
+          <a:bodyPr wrap="square" anchor="t"/>
+          <a:lstStyle/>
+          <a:p>
+            <a:pPr algn="l" eaLnBrk="0">
+              <a:lnSpc>
+                <a:spcPct val="110000"/>
+              </a:lnSpc>
+            </a:pPr>
+            <a:r>
+              <a:rPr sz="1700" b="0">
+                <a:solidFill>
+                  <a:srgbClr val="13294B"/>
+                </a:solidFill>
+                <a:latin typeface="맑은 고딕"/>
+                <a:ea typeface="맑은 고딕"/>
+                <a:cs typeface="맑은 고딕"/>
+              </a:rPr>
+              <a:t>승인 전달 완료 기록</a:t>
+            </a:r>
+          </a:p>
+          <a:p>
+            <a:pPr algn="l" eaLnBrk="0">
+              <a:lnSpc>
+                <a:spcPct val="110000"/>
+              </a:lnSpc>
+            </a:pPr>
+            <a:r>
+              <a:rPr sz="1700" b="0">
+                <a:solidFill>
+                  <a:srgbClr val="13294B"/>
+                </a:solidFill>
+                <a:latin typeface="맑은 고딕"/>
+                <a:ea typeface="맑은 고딕"/>
+                <a:cs typeface="맑은 고딕"/>
+              </a:rPr>
+              <a:t>이 뒤에야 냉각 명령이 열린다</a:t>
+            </a:r>
+          </a:p>
+        </p:txBody>
+      </p:sp>
+      <p:sp>
+        <p:nvSpPr>
+          <p:cNvPr id="21" name="TextBox 20"/>
+          <p:cNvSpPr txBox="1"/>
+          <p:nvPr/>
+        </p:nvSpPr>
+        <p:spPr>
+          <a:xfrm>
+            <a:off x="6446520" y="5641848"/>
+            <a:ext cx="4846320" cy="320040"/>
+          </a:xfrm>
+          <a:prstGeom prst="rect">
+            <a:avLst/>
+          </a:prstGeom>
+          <a:noFill/>
+        </p:spPr>
+        <p:txBody>
+          <a:bodyPr wrap="square" anchor="t"/>
+          <a:lstStyle/>
+          <a:p>
+            <a:pPr algn="l" eaLnBrk="0">
+              <a:lnSpc>
+                <a:spcPct val="110000"/>
+              </a:lnSpc>
+            </a:pPr>
+            <a:r>
+              <a:rPr sz="1500" b="1">
+                <a:solidFill>
+                  <a:srgbClr val="1A6FC4"/>
+                </a:solidFill>
+                <a:latin typeface="맑은 고딕"/>
+                <a:ea typeface="맑은 고딕"/>
+                <a:cs typeface="맑은 고딕"/>
+              </a:rPr>
+              <a:t>처리 기록</a:t>
+            </a:r>
+          </a:p>
+        </p:txBody>
+      </p:sp>
+      <p:sp>
+        <p:nvSpPr>
+          <p:cNvPr id="22" name="Right Arrow 21"/>
+          <p:cNvSpPr/>
+          <p:nvPr/>
+        </p:nvSpPr>
+        <p:spPr>
+          <a:xfrm>
+            <a:off x="5879592" y="4983480"/>
+            <a:ext cx="320040" cy="201168"/>
+          </a:xfrm>
+          <a:prstGeom prst="rightArrow">
+            <a:avLst/>
+          </a:prstGeom>
+          <a:solidFill>
+            <a:srgbClr val="1A6FC4"/>
           </a:solidFill>
           <a:ln>
             <a:noFill/>
@@ -24102,805 +24682,6 @@
           <a:lstStyle/>
           <a:p>
             <a:pPr algn="ctr"/>
-          </a:p>
-        </p:txBody>
-      </p:sp>
-      <p:sp>
-        <p:nvSpPr>
-          <p:cNvPr id="7" name="TextBox 6"/>
-          <p:cNvSpPr txBox="1"/>
-          <p:nvPr/>
-        </p:nvSpPr>
-        <p:spPr>
-          <a:xfrm>
-            <a:off x="685800" y="1961387"/>
-            <a:ext cx="2514600" cy="347472"/>
-          </a:xfrm>
-          <a:prstGeom prst="rect">
-            <a:avLst/>
-          </a:prstGeom>
-          <a:noFill/>
-        </p:spPr>
-        <p:txBody>
-          <a:bodyPr wrap="square" anchor="ctr"/>
-          <a:lstStyle/>
-          <a:p>
-            <a:pPr algn="l" eaLnBrk="0">
-              <a:lnSpc>
-                <a:spcPct val="110000"/>
-              </a:lnSpc>
-            </a:pPr>
-            <a:r>
-              <a:rPr sz="1300" b="1">
-                <a:solidFill>
-                  <a:srgbClr val="FFFFFF"/>
-                </a:solidFill>
-                <a:latin typeface="맑은 고딕"/>
-                <a:ea typeface="맑은 고딕"/>
-                <a:cs typeface="맑은 고딕"/>
-              </a:rPr>
-              <a:t>남는 값</a:t>
-            </a:r>
-          </a:p>
-        </p:txBody>
-      </p:sp>
-      <p:sp>
-        <p:nvSpPr>
-          <p:cNvPr id="8" name="TextBox 7"/>
-          <p:cNvSpPr txBox="1"/>
-          <p:nvPr/>
-        </p:nvSpPr>
-        <p:spPr>
-          <a:xfrm>
-            <a:off x="3200400" y="1961387"/>
-            <a:ext cx="6248095" cy="347472"/>
-          </a:xfrm>
-          <a:prstGeom prst="rect">
-            <a:avLst/>
-          </a:prstGeom>
-          <a:noFill/>
-        </p:spPr>
-        <p:txBody>
-          <a:bodyPr wrap="square" anchor="ctr"/>
-          <a:lstStyle/>
-          <a:p>
-            <a:pPr algn="l" eaLnBrk="0">
-              <a:lnSpc>
-                <a:spcPct val="110000"/>
-              </a:lnSpc>
-            </a:pPr>
-            <a:r>
-              <a:rPr sz="1300" b="1">
-                <a:solidFill>
-                  <a:srgbClr val="FFFFFF"/>
-                </a:solidFill>
-                <a:latin typeface="맑은 고딕"/>
-                <a:ea typeface="맑은 고딕"/>
-                <a:cs typeface="맑은 고딕"/>
-              </a:rPr>
-              <a:t>뜻</a:t>
-            </a:r>
-          </a:p>
-        </p:txBody>
-      </p:sp>
-      <p:sp>
-        <p:nvSpPr>
-          <p:cNvPr id="9" name="TextBox 8"/>
-          <p:cNvSpPr txBox="1"/>
-          <p:nvPr/>
-        </p:nvSpPr>
-        <p:spPr>
-          <a:xfrm>
-            <a:off x="9448495" y="1961387"/>
-            <a:ext cx="2194560" cy="347472"/>
-          </a:xfrm>
-          <a:prstGeom prst="rect">
-            <a:avLst/>
-          </a:prstGeom>
-          <a:noFill/>
-        </p:spPr>
-        <p:txBody>
-          <a:bodyPr wrap="square" anchor="ctr"/>
-          <a:lstStyle/>
-          <a:p>
-            <a:pPr algn="l" eaLnBrk="0">
-              <a:lnSpc>
-                <a:spcPct val="110000"/>
-              </a:lnSpc>
-            </a:pPr>
-            <a:r>
-              <a:rPr sz="1300" b="1">
-                <a:solidFill>
-                  <a:srgbClr val="FFFFFF"/>
-                </a:solidFill>
-                <a:latin typeface="맑은 고딕"/>
-                <a:ea typeface="맑은 고딕"/>
-                <a:cs typeface="맑은 고딕"/>
-              </a:rPr>
-              <a:t>누가 채우나</a:t>
-            </a:r>
-          </a:p>
-        </p:txBody>
-      </p:sp>
-      <p:sp>
-        <p:nvSpPr>
-          <p:cNvPr id="10" name="Rounded Rectangle 9"/>
-          <p:cNvSpPr/>
-          <p:nvPr/>
-        </p:nvSpPr>
-        <p:spPr>
-          <a:xfrm>
-            <a:off x="548640" y="2395727"/>
-            <a:ext cx="11094415" cy="850392"/>
-          </a:xfrm>
-          <a:prstGeom prst="roundRect">
-            <a:avLst>
-              <a:gd name="adj" fmla="val 8000"/>
-            </a:avLst>
-          </a:prstGeom>
-          <a:solidFill>
-            <a:srgbClr val="F3F6F9"/>
-          </a:solidFill>
-          <a:ln>
-            <a:noFill/>
-          </a:ln>
-        </p:spPr>
-        <p:txBody>
-          <a:bodyPr rtlCol="0" anchor="ctr"/>
-          <a:lstStyle/>
-          <a:p>
-            <a:pPr algn="ctr"/>
-          </a:p>
-        </p:txBody>
-      </p:sp>
-      <p:sp>
-        <p:nvSpPr>
-          <p:cNvPr id="11" name="TextBox 10"/>
-          <p:cNvSpPr txBox="1"/>
-          <p:nvPr/>
-        </p:nvSpPr>
-        <p:spPr>
-          <a:xfrm>
-            <a:off x="685800" y="2363723"/>
-            <a:ext cx="2514600" cy="914400"/>
-          </a:xfrm>
-          <a:prstGeom prst="rect">
-            <a:avLst/>
-          </a:prstGeom>
-          <a:noFill/>
-        </p:spPr>
-        <p:txBody>
-          <a:bodyPr wrap="square" anchor="ctr"/>
-          <a:lstStyle/>
-          <a:p>
-            <a:pPr algn="l" eaLnBrk="0">
-              <a:lnSpc>
-                <a:spcPct val="110000"/>
-              </a:lnSpc>
-            </a:pPr>
-            <a:r>
-              <a:rPr sz="1600" b="1">
-                <a:solidFill>
-                  <a:srgbClr val="13294B"/>
-                </a:solidFill>
-                <a:latin typeface="맑은 고딕"/>
-                <a:ea typeface="맑은 고딕"/>
-                <a:cs typeface="맑은 고딕"/>
-              </a:rPr>
-              <a:t>approval · chosen_skill</a:t>
-            </a:r>
-          </a:p>
-        </p:txBody>
-      </p:sp>
-      <p:sp>
-        <p:nvSpPr>
-          <p:cNvPr id="12" name="TextBox 11"/>
-          <p:cNvSpPr txBox="1"/>
-          <p:nvPr/>
-        </p:nvSpPr>
-        <p:spPr>
-          <a:xfrm>
-            <a:off x="3200400" y="2363723"/>
-            <a:ext cx="6156655" cy="914400"/>
-          </a:xfrm>
-          <a:prstGeom prst="rect">
-            <a:avLst/>
-          </a:prstGeom>
-          <a:noFill/>
-        </p:spPr>
-        <p:txBody>
-          <a:bodyPr wrap="square" anchor="ctr"/>
-          <a:lstStyle/>
-          <a:p>
-            <a:pPr algn="l" eaLnBrk="0">
-              <a:lnSpc>
-                <a:spcPct val="110000"/>
-              </a:lnSpc>
-            </a:pPr>
-            <a:r>
-              <a:rPr sz="1400" b="0">
-                <a:solidFill>
-                  <a:srgbClr val="1F2A3A"/>
-                </a:solidFill>
-                <a:latin typeface="맑은 고딕"/>
-                <a:ea typeface="맑은 고딕"/>
-                <a:cs typeface="맑은 고딕"/>
-              </a:rPr>
-              <a:t>승인이라는 결정과 고른 조치</a:t>
-            </a:r>
-          </a:p>
-          <a:p>
-            <a:pPr algn="l" eaLnBrk="0">
-              <a:lnSpc>
-                <a:spcPct val="110000"/>
-              </a:lnSpc>
-            </a:pPr>
-            <a:r>
-              <a:rPr sz="1400" b="0">
-                <a:solidFill>
-                  <a:srgbClr val="1F2A3A"/>
-                </a:solidFill>
-                <a:latin typeface="맑은 고딕"/>
-                <a:ea typeface="맑은 고딕"/>
-                <a:cs typeface="맑은 고딕"/>
-              </a:rPr>
-              <a:t>선택 예: 승인 · 팬 최대 운전</a:t>
-            </a:r>
-          </a:p>
-        </p:txBody>
-      </p:sp>
-      <p:sp>
-        <p:nvSpPr>
-          <p:cNvPr id="13" name="TextBox 12"/>
-          <p:cNvSpPr txBox="1"/>
-          <p:nvPr/>
-        </p:nvSpPr>
-        <p:spPr>
-          <a:xfrm>
-            <a:off x="9448495" y="2363723"/>
-            <a:ext cx="2103120" cy="914400"/>
-          </a:xfrm>
-          <a:prstGeom prst="rect">
-            <a:avLst/>
-          </a:prstGeom>
-          <a:noFill/>
-        </p:spPr>
-        <p:txBody>
-          <a:bodyPr wrap="square" anchor="ctr"/>
-          <a:lstStyle/>
-          <a:p>
-            <a:pPr algn="l" eaLnBrk="0">
-              <a:lnSpc>
-                <a:spcPct val="110000"/>
-              </a:lnSpc>
-            </a:pPr>
-            <a:r>
-              <a:rPr sz="1250" b="1">
-                <a:solidFill>
-                  <a:srgbClr val="556175"/>
-                </a:solidFill>
-                <a:latin typeface="맑은 고딕"/>
-                <a:ea typeface="맑은 고딕"/>
-                <a:cs typeface="맑은 고딕"/>
-              </a:rPr>
-              <a:t>운전원 승인 단계</a:t>
-            </a:r>
-          </a:p>
-        </p:txBody>
-      </p:sp>
-      <p:sp>
-        <p:nvSpPr>
-          <p:cNvPr id="14" name="Rounded Rectangle 13"/>
-          <p:cNvSpPr/>
-          <p:nvPr/>
-        </p:nvSpPr>
-        <p:spPr>
-          <a:xfrm>
-            <a:off x="548640" y="3310127"/>
-            <a:ext cx="11094415" cy="850392"/>
-          </a:xfrm>
-          <a:prstGeom prst="roundRect">
-            <a:avLst>
-              <a:gd name="adj" fmla="val 8000"/>
-            </a:avLst>
-          </a:prstGeom>
-          <a:solidFill>
-            <a:srgbClr val="E7F3FD"/>
-          </a:solidFill>
-          <a:ln>
-            <a:noFill/>
-          </a:ln>
-        </p:spPr>
-        <p:txBody>
-          <a:bodyPr rtlCol="0" anchor="ctr"/>
-          <a:lstStyle/>
-          <a:p>
-            <a:pPr algn="ctr"/>
-          </a:p>
-        </p:txBody>
-      </p:sp>
-      <p:sp>
-        <p:nvSpPr>
-          <p:cNvPr id="15" name="TextBox 14"/>
-          <p:cNvSpPr txBox="1"/>
-          <p:nvPr/>
-        </p:nvSpPr>
-        <p:spPr>
-          <a:xfrm>
-            <a:off x="685800" y="3278123"/>
-            <a:ext cx="2514600" cy="914400"/>
-          </a:xfrm>
-          <a:prstGeom prst="rect">
-            <a:avLst/>
-          </a:prstGeom>
-          <a:noFill/>
-        </p:spPr>
-        <p:txBody>
-          <a:bodyPr wrap="square" anchor="ctr"/>
-          <a:lstStyle/>
-          <a:p>
-            <a:pPr algn="l" eaLnBrk="0">
-              <a:lnSpc>
-                <a:spcPct val="110000"/>
-              </a:lnSpc>
-            </a:pPr>
-            <a:r>
-              <a:rPr sz="1600" b="1">
-                <a:solidFill>
-                  <a:srgbClr val="13294B"/>
-                </a:solidFill>
-                <a:latin typeface="맑은 고딕"/>
-                <a:ea typeface="맑은 고딕"/>
-                <a:cs typeface="맑은 고딕"/>
-              </a:rPr>
-              <a:t>approved_role</a:t>
-            </a:r>
-          </a:p>
-        </p:txBody>
-      </p:sp>
-      <p:sp>
-        <p:nvSpPr>
-          <p:cNvPr id="16" name="TextBox 15"/>
-          <p:cNvSpPr txBox="1"/>
-          <p:nvPr/>
-        </p:nvSpPr>
-        <p:spPr>
-          <a:xfrm>
-            <a:off x="3200400" y="3278123"/>
-            <a:ext cx="6156655" cy="914400"/>
-          </a:xfrm>
-          <a:prstGeom prst="rect">
-            <a:avLst/>
-          </a:prstGeom>
-          <a:noFill/>
-        </p:spPr>
-        <p:txBody>
-          <a:bodyPr wrap="square" anchor="ctr"/>
-          <a:lstStyle/>
-          <a:p>
-            <a:pPr algn="l" eaLnBrk="0">
-              <a:lnSpc>
-                <a:spcPct val="110000"/>
-              </a:lnSpc>
-            </a:pPr>
-            <a:r>
-              <a:rPr sz="1400" b="0">
-                <a:solidFill>
-                  <a:srgbClr val="1F2A3A"/>
-                </a:solidFill>
-                <a:latin typeface="맑은 고딕"/>
-                <a:ea typeface="맑은 고딕"/>
-                <a:cs typeface="맑은 고딕"/>
-              </a:rPr>
-              <a:t>승인한 역할</a:t>
-            </a:r>
-          </a:p>
-          <a:p>
-            <a:pPr algn="l" eaLnBrk="0">
-              <a:lnSpc>
-                <a:spcPct val="110000"/>
-              </a:lnSpc>
-            </a:pPr>
-            <a:r>
-              <a:rPr sz="1400" b="0">
-                <a:solidFill>
-                  <a:srgbClr val="1F2A3A"/>
-                </a:solidFill>
-                <a:latin typeface="맑은 고딕"/>
-                <a:ea typeface="맑은 고딕"/>
-                <a:cs typeface="맑은 고딕"/>
-              </a:rPr>
-              <a:t>역할 예: 운전원</a:t>
-            </a:r>
-          </a:p>
-        </p:txBody>
-      </p:sp>
-      <p:sp>
-        <p:nvSpPr>
-          <p:cNvPr id="17" name="TextBox 16"/>
-          <p:cNvSpPr txBox="1"/>
-          <p:nvPr/>
-        </p:nvSpPr>
-        <p:spPr>
-          <a:xfrm>
-            <a:off x="9448495" y="3278123"/>
-            <a:ext cx="2103120" cy="914400"/>
-          </a:xfrm>
-          <a:prstGeom prst="rect">
-            <a:avLst/>
-          </a:prstGeom>
-          <a:noFill/>
-        </p:spPr>
-        <p:txBody>
-          <a:bodyPr wrap="square" anchor="ctr"/>
-          <a:lstStyle/>
-          <a:p>
-            <a:pPr algn="l" eaLnBrk="0">
-              <a:lnSpc>
-                <a:spcPct val="110000"/>
-              </a:lnSpc>
-            </a:pPr>
-            <a:r>
-              <a:rPr sz="1250" b="1">
-                <a:solidFill>
-                  <a:srgbClr val="1A6FC4"/>
-                </a:solidFill>
-                <a:latin typeface="맑은 고딕"/>
-                <a:ea typeface="맑은 고딕"/>
-                <a:cs typeface="맑은 고딕"/>
-              </a:rPr>
-              <a:t>서버</a:t>
-            </a:r>
-          </a:p>
-          <a:p>
-            <a:pPr algn="l" eaLnBrk="0">
-              <a:lnSpc>
-                <a:spcPct val="110000"/>
-              </a:lnSpc>
-            </a:pPr>
-            <a:r>
-              <a:rPr sz="1250" b="1">
-                <a:solidFill>
-                  <a:srgbClr val="1A6FC4"/>
-                </a:solidFill>
-                <a:latin typeface="맑은 고딕"/>
-                <a:ea typeface="맑은 고딕"/>
-                <a:cs typeface="맑은 고딕"/>
-              </a:rPr>
-              <a:t>에이전트는 못 쓴다</a:t>
-            </a:r>
-          </a:p>
-        </p:txBody>
-      </p:sp>
-      <p:sp>
-        <p:nvSpPr>
-          <p:cNvPr id="18" name="Rounded Rectangle 17"/>
-          <p:cNvSpPr/>
-          <p:nvPr/>
-        </p:nvSpPr>
-        <p:spPr>
-          <a:xfrm>
-            <a:off x="548640" y="4224527"/>
-            <a:ext cx="11094415" cy="850392"/>
-          </a:xfrm>
-          <a:prstGeom prst="roundRect">
-            <a:avLst>
-              <a:gd name="adj" fmla="val 8000"/>
-            </a:avLst>
-          </a:prstGeom>
-          <a:solidFill>
-            <a:srgbClr val="F3F6F9"/>
-          </a:solidFill>
-          <a:ln>
-            <a:noFill/>
-          </a:ln>
-        </p:spPr>
-        <p:txBody>
-          <a:bodyPr rtlCol="0" anchor="ctr"/>
-          <a:lstStyle/>
-          <a:p>
-            <a:pPr algn="ctr"/>
-          </a:p>
-        </p:txBody>
-      </p:sp>
-      <p:sp>
-        <p:nvSpPr>
-          <p:cNvPr id="19" name="TextBox 18"/>
-          <p:cNvSpPr txBox="1"/>
-          <p:nvPr/>
-        </p:nvSpPr>
-        <p:spPr>
-          <a:xfrm>
-            <a:off x="685800" y="4192523"/>
-            <a:ext cx="2514600" cy="914400"/>
-          </a:xfrm>
-          <a:prstGeom prst="rect">
-            <a:avLst/>
-          </a:prstGeom>
-          <a:noFill/>
-        </p:spPr>
-        <p:txBody>
-          <a:bodyPr wrap="square" anchor="ctr"/>
-          <a:lstStyle/>
-          <a:p>
-            <a:pPr algn="l" eaLnBrk="0">
-              <a:lnSpc>
-                <a:spcPct val="110000"/>
-              </a:lnSpc>
-            </a:pPr>
-            <a:r>
-              <a:rPr sz="1600" b="1">
-                <a:solidFill>
-                  <a:srgbClr val="13294B"/>
-                </a:solidFill>
-                <a:latin typeface="맑은 고딕"/>
-                <a:ea typeface="맑은 고딕"/>
-                <a:cs typeface="맑은 고딕"/>
-              </a:rPr>
-              <a:t>APPROVAL_ACCEPTED</a:t>
-            </a:r>
-          </a:p>
-        </p:txBody>
-      </p:sp>
-      <p:sp>
-        <p:nvSpPr>
-          <p:cNvPr id="20" name="TextBox 19"/>
-          <p:cNvSpPr txBox="1"/>
-          <p:nvPr/>
-        </p:nvSpPr>
-        <p:spPr>
-          <a:xfrm>
-            <a:off x="3200400" y="4192523"/>
-            <a:ext cx="6156655" cy="914400"/>
-          </a:xfrm>
-          <a:prstGeom prst="rect">
-            <a:avLst/>
-          </a:prstGeom>
-          <a:noFill/>
-        </p:spPr>
-        <p:txBody>
-          <a:bodyPr wrap="square" anchor="ctr"/>
-          <a:lstStyle/>
-          <a:p>
-            <a:pPr algn="l" eaLnBrk="0">
-              <a:lnSpc>
-                <a:spcPct val="110000"/>
-              </a:lnSpc>
-            </a:pPr>
-            <a:r>
-              <a:rPr sz="1400" b="0">
-                <a:solidFill>
-                  <a:srgbClr val="1F2A3A"/>
-                </a:solidFill>
-                <a:latin typeface="맑은 고딕"/>
-                <a:ea typeface="맑은 고딕"/>
-                <a:cs typeface="맑은 고딕"/>
-              </a:rPr>
-              <a:t>승인 접수 기록</a:t>
-            </a:r>
-          </a:p>
-          <a:p>
-            <a:pPr algn="l" eaLnBrk="0">
-              <a:lnSpc>
-                <a:spcPct val="110000"/>
-              </a:lnSpc>
-            </a:pPr>
-            <a:r>
-              <a:rPr sz="1400" b="0">
-                <a:solidFill>
-                  <a:srgbClr val="1F2A3A"/>
-                </a:solidFill>
-                <a:latin typeface="맑은 고딕"/>
-                <a:ea typeface="맑은 고딕"/>
-                <a:cs typeface="맑은 고딕"/>
-              </a:rPr>
-              <a:t>역할과 판단 id</a:t>
-            </a:r>
-          </a:p>
-        </p:txBody>
-      </p:sp>
-      <p:sp>
-        <p:nvSpPr>
-          <p:cNvPr id="21" name="TextBox 20"/>
-          <p:cNvSpPr txBox="1"/>
-          <p:nvPr/>
-        </p:nvSpPr>
-        <p:spPr>
-          <a:xfrm>
-            <a:off x="9448495" y="4192523"/>
-            <a:ext cx="2103120" cy="914400"/>
-          </a:xfrm>
-          <a:prstGeom prst="rect">
-            <a:avLst/>
-          </a:prstGeom>
-          <a:noFill/>
-        </p:spPr>
-        <p:txBody>
-          <a:bodyPr wrap="square" anchor="ctr"/>
-          <a:lstStyle/>
-          <a:p>
-            <a:pPr algn="l" eaLnBrk="0">
-              <a:lnSpc>
-                <a:spcPct val="110000"/>
-              </a:lnSpc>
-            </a:pPr>
-            <a:r>
-              <a:rPr sz="1250" b="1">
-                <a:solidFill>
-                  <a:srgbClr val="556175"/>
-                </a:solidFill>
-                <a:latin typeface="맑은 고딕"/>
-                <a:ea typeface="맑은 고딕"/>
-                <a:cs typeface="맑은 고딕"/>
-              </a:rPr>
-              <a:t>처리 기록</a:t>
-            </a:r>
-          </a:p>
-        </p:txBody>
-      </p:sp>
-      <p:sp>
-        <p:nvSpPr>
-          <p:cNvPr id="22" name="Rounded Rectangle 21"/>
-          <p:cNvSpPr/>
-          <p:nvPr/>
-        </p:nvSpPr>
-        <p:spPr>
-          <a:xfrm>
-            <a:off x="548640" y="5138927"/>
-            <a:ext cx="11094415" cy="850392"/>
-          </a:xfrm>
-          <a:prstGeom prst="roundRect">
-            <a:avLst>
-              <a:gd name="adj" fmla="val 8000"/>
-            </a:avLst>
-          </a:prstGeom>
-          <a:solidFill>
-            <a:srgbClr val="F3F6F9"/>
-          </a:solidFill>
-          <a:ln>
-            <a:noFill/>
-          </a:ln>
-        </p:spPr>
-        <p:txBody>
-          <a:bodyPr rtlCol="0" anchor="ctr"/>
-          <a:lstStyle/>
-          <a:p>
-            <a:pPr algn="ctr"/>
-          </a:p>
-        </p:txBody>
-      </p:sp>
-      <p:sp>
-        <p:nvSpPr>
-          <p:cNvPr id="23" name="TextBox 22"/>
-          <p:cNvSpPr txBox="1"/>
-          <p:nvPr/>
-        </p:nvSpPr>
-        <p:spPr>
-          <a:xfrm>
-            <a:off x="685800" y="5106923"/>
-            <a:ext cx="2514600" cy="914400"/>
-          </a:xfrm>
-          <a:prstGeom prst="rect">
-            <a:avLst/>
-          </a:prstGeom>
-          <a:noFill/>
-        </p:spPr>
-        <p:txBody>
-          <a:bodyPr wrap="square" anchor="ctr"/>
-          <a:lstStyle/>
-          <a:p>
-            <a:pPr algn="l" eaLnBrk="0">
-              <a:lnSpc>
-                <a:spcPct val="110000"/>
-              </a:lnSpc>
-            </a:pPr>
-            <a:r>
-              <a:rPr sz="1600" b="1">
-                <a:solidFill>
-                  <a:srgbClr val="13294B"/>
-                </a:solidFill>
-                <a:latin typeface="맑은 고딕"/>
-                <a:ea typeface="맑은 고딕"/>
-                <a:cs typeface="맑은 고딕"/>
-              </a:rPr>
-              <a:t>APPROVAL_DELIVERY</a:t>
-            </a:r>
-          </a:p>
-        </p:txBody>
-      </p:sp>
-      <p:sp>
-        <p:nvSpPr>
-          <p:cNvPr id="24" name="TextBox 23"/>
-          <p:cNvSpPr txBox="1"/>
-          <p:nvPr/>
-        </p:nvSpPr>
-        <p:spPr>
-          <a:xfrm>
-            <a:off x="3200400" y="5106923"/>
-            <a:ext cx="6156655" cy="914400"/>
-          </a:xfrm>
-          <a:prstGeom prst="rect">
-            <a:avLst/>
-          </a:prstGeom>
-          <a:noFill/>
-        </p:spPr>
-        <p:txBody>
-          <a:bodyPr wrap="square" anchor="ctr"/>
-          <a:lstStyle/>
-          <a:p>
-            <a:pPr algn="l" eaLnBrk="0">
-              <a:lnSpc>
-                <a:spcPct val="110000"/>
-              </a:lnSpc>
-            </a:pPr>
-            <a:r>
-              <a:rPr sz="1400" b="0">
-                <a:solidFill>
-                  <a:srgbClr val="1F2A3A"/>
-                </a:solidFill>
-                <a:latin typeface="맑은 고딕"/>
-                <a:ea typeface="맑은 고딕"/>
-                <a:cs typeface="맑은 고딕"/>
-              </a:rPr>
-              <a:t>승인 전달 완료 기록</a:t>
-            </a:r>
-          </a:p>
-          <a:p>
-            <a:pPr algn="l" eaLnBrk="0">
-              <a:lnSpc>
-                <a:spcPct val="110000"/>
-              </a:lnSpc>
-            </a:pPr>
-            <a:r>
-              <a:rPr sz="1400" b="0">
-                <a:solidFill>
-                  <a:srgbClr val="1F2A3A"/>
-                </a:solidFill>
-                <a:latin typeface="맑은 고딕"/>
-                <a:ea typeface="맑은 고딕"/>
-                <a:cs typeface="맑은 고딕"/>
-              </a:rPr>
-              <a:t>이 뒤에야 냉각 명령이 열린다</a:t>
-            </a:r>
-          </a:p>
-        </p:txBody>
-      </p:sp>
-      <p:sp>
-        <p:nvSpPr>
-          <p:cNvPr id="25" name="TextBox 24"/>
-          <p:cNvSpPr txBox="1"/>
-          <p:nvPr/>
-        </p:nvSpPr>
-        <p:spPr>
-          <a:xfrm>
-            <a:off x="9448495" y="5106923"/>
-            <a:ext cx="2103120" cy="914400"/>
-          </a:xfrm>
-          <a:prstGeom prst="rect">
-            <a:avLst/>
-          </a:prstGeom>
-          <a:noFill/>
-        </p:spPr>
-        <p:txBody>
-          <a:bodyPr wrap="square" anchor="ctr"/>
-          <a:lstStyle/>
-          <a:p>
-            <a:pPr algn="l" eaLnBrk="0">
-              <a:lnSpc>
-                <a:spcPct val="110000"/>
-              </a:lnSpc>
-            </a:pPr>
-            <a:r>
-              <a:rPr sz="1250" b="1">
-                <a:solidFill>
-                  <a:srgbClr val="556175"/>
-                </a:solidFill>
-                <a:latin typeface="맑은 고딕"/>
-                <a:ea typeface="맑은 고딕"/>
-                <a:cs typeface="맑은 고딕"/>
-              </a:rPr>
-              <a:t>처리 기록</a:t>
-            </a:r>
           </a:p>
         </p:txBody>
       </p:sp>
@@ -27894,7 +27675,7 @@
                 <a:ea typeface="맑은 고딕"/>
                 <a:cs typeface="맑은 고딕"/>
               </a:rPr>
-              <a:t>세 업무의 처리 건: 누구의 승인과 어떤 시스템 실행</a:t>
+              <a:t>세 업무의 승인 역할과 시스템 실행</a:t>
             </a:r>
           </a:p>
         </p:txBody>
@@ -29104,7 +28885,7 @@
                 <a:ea typeface="맑은 고딕"/>
                 <a:cs typeface="맑은 고딕"/>
               </a:rPr>
-              <a:t>처리 건 한 건에는 에이전트 쪽과 프로세스 쪽의 장치가 겹쳐 있어, 결과가 기대와 다를 때 어느 장치의 몫인지부터 가린다.</a:t>
+              <a:t>결과가 기대와 다르면 에이전트의 판단과 프로세스의 순서·책임 중 어느 쪽을 확인할지 가린다.</a:t>
             </a:r>
           </a:p>
         </p:txBody>
@@ -29246,7 +29027,7 @@
           <p:nvPr/>
         </p:nvPicPr>
         <p:blipFill>
-          <a:blip r:embed="rId3"/>
+          <a:blip r:embed="rIdTheory32_rId3"/>
           <a:stretch>
             <a:fillRect/>
           </a:stretch>
@@ -29525,7 +29306,7 @@
           <p:nvPr/>
         </p:nvPicPr>
         <p:blipFill>
-          <a:blip r:embed="rId4"/>
+          <a:blip r:embed="rIdTheory32_rId4"/>
           <a:stretch>
             <a:fillRect/>
           </a:stretch>
@@ -41817,7 +41598,7 @@
           <p:nvPr/>
         </p:nvPicPr>
         <p:blipFill>
-          <a:blip r:embed="rId2"/>
+          <a:blip r:embed="rIdTheory48_rId3"/>
           <a:stretch>
             <a:fillRect/>
           </a:stretch>
@@ -42014,7 +41795,7 @@
           <p:nvPr/>
         </p:nvPicPr>
         <p:blipFill>
-          <a:blip r:embed="rId3"/>
+          <a:blip r:embed="rIdTheory48_rId4"/>
           <a:stretch>
             <a:fillRect/>
           </a:stretch>
@@ -42232,7 +42013,7 @@
           <p:nvPr/>
         </p:nvPicPr>
         <p:blipFill>
-          <a:blip r:embed="rId4"/>
+          <a:blip r:embed="rIdTheory48_rId5"/>
           <a:stretch>
             <a:fillRect/>
           </a:stretch>
@@ -42450,7 +42231,7 @@
           <p:nvPr/>
         </p:nvPicPr>
         <p:blipFill>
-          <a:blip r:embed="rId5"/>
+          <a:blip r:embed="rIdTheory48_rId6"/>
           <a:stretch>
             <a:fillRect/>
           </a:stretch>
@@ -42649,7 +42430,7 @@
           <p:nvPr/>
         </p:nvPicPr>
         <p:blipFill>
-          <a:blip r:embed="rId6"/>
+          <a:blip r:embed="rIdTheory48_rId7"/>
           <a:stretch>
             <a:fillRect/>
           </a:stretch>
@@ -42722,7 +42503,7 @@
                 <a:ea typeface="맑은 고딕"/>
                 <a:cs typeface="맑은 고딕"/>
               </a:rPr>
-              <a:t>끝 이벤트에 닿아</a:t>
+              <a:t>필요한 흐름이 모두 끝나</a:t>
             </a:r>
           </a:p>
           <a:p>
@@ -43690,7 +43471,7 @@
                 <a:ea typeface="맑은 고딕"/>
                 <a:cs typeface="맑은 고딕"/>
               </a:rPr>
-              <a:t>BPMN 기반 멀티 에이전트 오케스트레이션: ProcessGPT</a:t>
+              <a:t>ProcessGPT: BPMN 기반 멀티 에이전트 조율</a:t>
             </a:r>
           </a:p>
         </p:txBody>
@@ -43994,7 +43775,7 @@
                 <a:ea typeface="맑은 고딕"/>
                 <a:cs typeface="맑은 고딕"/>
               </a:rPr>
-              <a:t>멀티 에이전트 / 오케스트레이션</a:t>
+              <a:t>멀티 에이전트 조율</a:t>
             </a:r>
           </a:p>
           <a:p>
@@ -51075,7 +50856,7 @@
                 <a:ea typeface="맑은 고딕"/>
                 <a:cs typeface="맑은 고딕"/>
               </a:rPr>
-              <a:t>핀 오염의 기준(냉각 효율 70 % 미만)을 읽었다</a:t>
+              <a:t>핀 오염 기준 등록(냉각 효율 70 % 미만)</a:t>
             </a:r>
           </a:p>
         </p:txBody>
@@ -52497,7 +52278,7 @@
                 <a:ea typeface="맑은 고딕"/>
                 <a:cs typeface="맑은 고딕"/>
               </a:rPr>
-              <a:t>에이전트의 결과에 반드시 있어야 할 항목과 형식의 약속</a:t>
+              <a:t>결과의 필수 항목·형식·의미와 처리 조건의 약속</a:t>
             </a:r>
           </a:p>
         </p:txBody>
@@ -53939,7 +53720,7 @@
                 <a:ea typeface="맑은 고딕"/>
                 <a:cs typeface="맑은 고딕"/>
               </a:rPr>
-              <a:t>에이전트가 원인을 쿨러 핀 오염으로 가리고 팬 최대 운전을 권하는 추천안을 제출했으며, 운전원은 아직 응답하지 않았다.</a:t>
+              <a:t>핀 오염에 팬 최대 운전을 권하는 추천안을 제출했고, 운전원은 아직 응답하지 않았다.</a:t>
             </a:r>
           </a:p>
         </p:txBody>
@@ -55665,7 +55446,7 @@
                 <a:ea typeface="맑은 고딕"/>
                 <a:cs typeface="맑은 고딕"/>
               </a:rPr>
-              <a:t>통제의 관점에서 가장 알맞은 판단은?</a:t>
+              <a:t>이 수업의 승인 정책에서 가장 알맞은 판단은?</a:t>
             </a:r>
           </a:p>
         </p:txBody>
@@ -55803,7 +55584,7 @@
                 <a:ea typeface="맑은 고딕"/>
                 <a:cs typeface="맑은 고딕"/>
               </a:rPr>
-              <a:t>발주의 등록은 승인 뒤의 프로세스 작업에 두고 에이전트는 읽기만 한다</a:t>
+              <a:t>발주는 승인 뒤 프로세스가 등록하고 에이전트는 업무 원천 조회와 제안 제출을 맡는다</a:t>
             </a:r>
           </a:p>
         </p:txBody>

--- a/산출물/실전반/이론/08회차/실전반_08일차.pptx
+++ b/산출물/실전반/이론/08회차/실전반_08일차.pptx
@@ -565,7 +565,7 @@
           <a:lstStyle/>
           <a:p>
             <a:r>
-              <a:t>안녕하세요. 이번 회차에서는 이 과정을 마무리합니다. 지금까지 쿨러 사건 하나를 붙잡고 세 영역을 나눠서 배웠죠. 판단의 재료가 되는 지식, 그 지식을 읽어서 추천안을 만드는 에이전트, 그리고 그 추천안을 사람의 승인과 시스템 실행으로 잇는 프로세스였어요. 사건을 한번 떠올려 볼까요? 쿨러에 이상이 생겨서 경보가 울렸고요, 에이전트가 원인을 가려서 조치를 추천했습니다. 운전원이 승인하자 시스템이 팬 속도를 올렸죠. 그런데 이 한 건 안에서 세 영역은 서로 무엇을 주고받았을까요? 그리고 이 구조를 쿨러가 아닌 내 업무에도 똑같이 세울 수 있을까요? 이번 회차에서는 먼저 쿨러 사건 한 건 위에서 세 영역이 주고받는 걸 되짚어 보고요, 그다음에 같은 구조로 생산·정비 조율 업무를 직접 만들어 보겠습니다. 마지막으로 실제 제품에서도 그 구조를 확인해 보겠습니다.</a:t>
+              <a:t>안녕하세요. 이번 회차에서는 쿨러 사건을 따라 지식, 에이전트, 프로세스가 무엇을 주고받는지 되짚습니다. 지식은 판단의 재료이고, 에이전트는 근거를 조회해 추천하며, 프로세스는 사람의 승인과 시스템 실행을 다음 차례로 잇습니다. 그 연결을 교대 인수인계에도 적용해 보겠습니다. 다음 교대에 전달할 메모를 실제 설비와 정비·재고 자료에 대조하고, 두 사람이 검토하고 보완하는 흐름을 만듭니다. 마지막에는 제품 시연에서 같은 역할과 구현 차이를 확인합니다.</a:t>
             </a:r>
           </a:p>
         </p:txBody>
@@ -1335,7 +1335,7 @@
           <a:lstStyle/>
           <a:p>
             <a:r>
-              <a:t>이번 회차의 학습목표부터 볼게요. 화면에 카드가 네 장 있습니다. 첫 번째 카드는 지식에서 판단까지예요. 에이전트가 도구마다 어떤 지식과 어떤 값을 읽는지 설명하고, 검토와 개정을 거쳐 관리하는 지식과 지금의 값, 그리고 출처가 각각 어디에 있는지 가려 봅니다. 두 번째 카드는 제안에서 완료까지입니다. 추천안이 사람의 승인과 시스템 실행을 거쳐서 끝난 업무가 되는 길을 설명하고요, 에이전트 쪽 장치와 프로세스 쪽 장치가 각각 무엇을 맡는지 나눠 봐요. 세 번째 카드는 내 주제에 적용하기예요. 친숙한 작은 업무 하나를 제가 골라서 명세, 지식 구조, 에이전트, 흐름까지 직접 만듭니다. 이때 에이전트는 확인된 것만 제안하고, 나머지는 보류하게 할 거예요. 마지막 카드는 제품에서 확인하기입니다. ProcessGPT 시연을 보면서 배운 구조가 그대로 있는 자리와 넓어진 범위를 가려 보고, 끝으로 학습 노트에 개념과 산출물을 이어 둡니다.</a:t>
+              <a:t>이번 회차의 학습목표를 보겠습니다. 첫째, 에이전트가 도구로 읽는 지식과 현재 값을 구별하고 판단의 출처를 확인합니다. 둘째, 제안과 사람의 승인, 시스템 실행, 결과 확인을 구분해 업무가 끝나는 과정을 설명합니다. 셋째, 교대 인수인계에서 제공된 문서와 에이전트, 흐름을 연결하고 실제 검토와 보완을 확인합니다. 마지막으로 제품 시연에서 같은 역할과 구현 차이를 살피고, 실습 결과를 학습 노트에 정리합니다.</a:t>
             </a:r>
           </a:p>
         </p:txBody>
@@ -1545,7 +1545,7 @@
           <a:lstStyle/>
           <a:p>
             <a:r>
-              <a:t>이번 시간에는 에이전트의 결과가 업무 완료로 이어지는 전체 구조를 되짚습니다. 앞 시간에는 에이전트가 지식과 값을 읽어서 추천안 한 건을 제출하는 데까지 따라왔죠. 이번 시간의 첫 단원, 목차의 네 번째 단원은 제안에서 완료까지, 승인과 시스템 실행이에요. 그 추천안을 누가 승인하고, 어떤 시스템이 무엇을 실행해야 이 일이 끝났다고 말할 수 있을까요? 이어서 같은 구조를 내 업무에 적용할 실습과 제품 시연의 관찰 기준까지 함께 준비하겠습니다. 아직 실습을 수행한 상태는 아니에요. 무엇을 만들고 어떤 결과로 확인할지를 먼저 연결해 두고, 실제 실습 뒤에 이번 회차를 마무리합니다.</a:t>
+              <a:t>이번 시간에는 에이전트의 결과가 업무 완료로 이어지는 전체 구조를 되짚습니다. 앞 시간에는 에이전트가 지식과 값을 읽어서 추천안 한 건을 제출하는 데까지 따라왔죠. 이번 시간의 첫 단원, 목차의 네 번째 단원은 제안에서 완료까지, 승인과 시스템 실행이에요. 그 추천안을 누가 승인하고, 어떤 시스템이 무엇을 실행해야 이 일이 끝났다고 말할 수 있을까요? 이어서 같은 구조를 교대 인수인계에 적용할 실습과 제품 시연의 관찰 기준까지 함께 준비하겠습니다. 아직 실습을 수행한 상태는 아니에요. 무엇을 만들고 어떤 결과로 확인할지를 먼저 연결해 두고, 실제 실습 뒤에 이번 회차를 마무리합니다.</a:t>
             </a:r>
           </a:p>
         </p:txBody>
@@ -2105,7 +2105,7 @@
           <a:lstStyle/>
           <a:p>
             <a:r>
-              <a:t>목차를 보면서 이번 회차의 순서를 잡아 볼게요. 화면에 여덟 줄이 있는데, 위의 다섯 줄이 이론입니다. 앞의 세 단원은 쿨러 사건의 경보 한 건이 추천안 한 건이 되기까지를 따라가요. 에이전트가 무엇을 받아서 시작하는지 보고, 그래프 질의와 증거로 원인을 가리는 과정, 그리고 조치를 정하고 출처를 남기는 방식을 차례로 봅니다. 넷째와 다섯째 단원은 그 추천안이 승인과 시스템 실행을 거쳐서 끝나기까지예요. 그 과정에 겹쳐 있는 에이전트 쪽 장치와 프로세스 쪽 장치를 나눠 봅니다. 아래 세 줄은 실습이에요. 같은 구조를 내 주제에 적용하는 실습 넷을 하고, ProcessGPT 시연을 본 다음, 학습 노트를 정리하면서 과정을 마칩니다. 이번 시간에는 그 가운데 앞의 세 단원, 현장 지식이 AI의 판단 근거가 되는 과정을 되짚습니다.</a:t>
+              <a:t>목차에서 앞의 다섯 단원은 이론입니다. 쿨러 경보가 추천안이 되기까지의 지식과 조회 근거를 보고, 그 뒤 승인과 시스템 실행으로 업무가 끝나는 과정을 살펴봅니다. 이어서 에이전트와 프로세스가 각각 맡는 일을 구분합니다. 실습에서는 교대 인수인계에 제공 문서, 에이전트와 흐름을 연결합니다. 그다음 ProcessGPT 시연에서 같은 구조가 어디에 나타나는지 보고, 결과를 학습 노트에 정리합니다.</a:t>
             </a:r>
           </a:p>
         </p:txBody>
@@ -3015,7 +3015,7 @@
           <a:lstStyle/>
           <a:p>
             <a:r>
-              <a:t>지금까지 쿨러 사건 한 건 위에서, 지식이 에이전트의 판단이 되고 그 판단이 사람의 승인과 시스템 실행을 거쳐 끝나는 길을 처음부터 끝까지 다시 따라왔죠. 이제 그 구조를 직접 세워 볼 차례입니다. 이번에는 HYD-02의 생산·정비 조율 업무 위에서요. 내 업무로 옮기는 실습은 넷이 이어지는데, 첫 실습에서는 내 주제의 자료와 업무 목표, 완료 조건을 정의합니다. 생산 일정과 정비 기한, 부품·작동유·인력의 확인 자료를 대조해 후보를 제안하는 업무입니다. 회의록을 요약하는 데서 끝내지 않고, 어떤 안건을 결정해야 하는지 근거와 함께 남깁니다. 고른 업무를 화면의 카드 네 장에 맞춰 적어요. 첫 카드는 무엇을 받아 시작하고 어디서 정보를 읽을 수 있는지, 둘째는 에이전트가 무엇을 내는지, 셋째는 어느 결과를 누가 확인하는지, 마지막 카드는 무엇이 되면 끝났다고 보는지예요. 에이전트가 할 일은 읽기, 분류, 추천 가운데서 이 회차 안에 끝까지 만들 수 있는 크기로 줄입니다. 이 실습에서 남는 건 업무 명세 한 장이에요. 필요한 항목이 갖춰지고 각 조건을 원문과 결과로 확인할 수 있어야 합니다. 「잘 정리된다」가 아니라, 무엇이 남으면 끝인지가 보여야 해요. 하지 못한 일을 어떻게 남길지도 적혀 있어야 하고요. 이 명세 한 장이 뒤의 세 실습이 따를 기준이 되거든요. 실제 실습에서는 이 명세부터 적겠습니다. 이어지는 지식 구조와 에이전트, 흐름이 무엇을 위해 필요한지 판단할 기준이 되는 한 장이에요.</a:t>
+              <a:t>지금까지 쿨러 사건에서 지식이 판단의 근거가 되고, 사람의 승인을 거쳐 시스템이 실행하는 흐름을 살펴봤습니다. 이제 교대 인수인계를 통해 같은 연결을 적용합니다. 한 근무자가 전달받은 작업 메모를 다음 근무자에게 넘기는 장면입니다. 메모에 정비가 끝났다고 쓰여 있어도 열린 작업지시가 남아 있다면 둘을 따로 확인해야 합니다. 먼저 대상 설비와 교대, 기준 시각, 작업 메모를 정리합니다. 제공 점검 문서와 설비 이력, 정비·재고 자료가 확인할 출처입니다. 에이전트가 근거를 읽어 인계안 초안을 만들고, 인계자와 인수자가 차례로 검토합니다. 끝난 인계 기록에는 확인된 근거뿐 아니라 미확인 항목과 다음 사람이 할 확인도 남아야 합니다. 인수 확인은 정비 완료나 설비 조치가 아닙니다.</a:t>
             </a:r>
           </a:p>
         </p:txBody>
@@ -3085,7 +3085,7 @@
           <a:lstStyle/>
           <a:p>
             <a:r>
-              <a:t>두 번째로 준비할 실습은 내 문서에서 주요 정보를 뽑아 작은 지식 구조를 만드는 일입니다. 첫 실습에서 작성할 명세에는 정보를 어디서 읽을지 적게 됩니다. 쿨러 사건에서 에이전트가 지식 그래프를 읽었던 것처럼, 내 에이전트에게도 읽을 지식이 있어야 합니다. 화면의 카드 네 장을 보세요. 입력은 명세에 적은 정보원 가운데 문서 하나예요. 제공된 문서도 좋고, 공개해도 되는 내 자료도 좋아요. 그 문서로 답하고 싶은 질문도 함께 정해 둡니다. 범위는 그 질문에 필요한 핵심 개념과 속성, 관계까지예요. 문서 전체를 옮기는 게 아니라, 질문에 답하는 데 필요한 만큼만 가려 냅니다. 남는 건 셋입니다. 개념과 관계를 정의한 스키마, 문서에 나오는 대상을 적은 샘플 인스턴스, 그리고 질문의 조회문이에요. 인스턴스마다 식별자를 붙이고, 어느 문서의 어느 대목에서 왔는지 출처도 붙입니다. 성공 기준은 마지막 카드예요. 만든 지식을 수업의 기준 그래프와 섞이지 않게 따로 둔 이름 공간에 넣고, 정한 질문이 조회로 풀리면 성공입니다. 여기서 만든 지식이 그다음 실습에서 만들 에이전트의 입력이 돼요. 문서의 답과 조회 결과가 같은지 비교해야, 데이터가 들어갔다는 확인에서 한 걸음 더 나아가 질문에 답할 수 있는 지식인지 확인할 수 있습니다.</a:t>
+              <a:t>41~42장 통합 발화는 41장 발표자 노트를 따른다.</a:t>
             </a:r>
           </a:p>
         </p:txBody>
@@ -3155,7 +3155,7 @@
           <a:lstStyle/>
           <a:p>
             <a:r>
-              <a:t>세 번째 실습에서는 만들어 둘 지식 구조를 읽는 에이전트를 붙입니다. 앞 실습에서 질문이 조회로 풀리는지 확인한 뒤에, 그 조회 결과를 사용해 제안하게 할 거예요. 화면의 카드 네 장을 보세요. 입력은 앞에서 만든 스키마와 자료, 그리고 쓸 수 있는 읽기 도구예요. 범위는 에이전트에 목표와 스킬을 적고, 읽기 도구를 MCP로 연결하는 데까지입니다. 에이전트는 바이브 코딩으로 구성해요. 남는 건 에이전트 정의와 스킬, 그리고 최초 자료와 후속 자료의 제안·보류 결과예요. 이 에이전트가 지킬 규칙은 하나입니다. 확인된 정보로만 제안하고, 확인하지 못한 값이나 권한 밖의 작업은 지어내지 않고 보류로 냅니다. 이번 업무에서는 정비 시간 후보를 비교합니다. 생산 시간이 비어 있어도 필요한 자원 확인이 남아 있으면 적합한 후보로 확정할 수 없어요. 보류 이유를 남기고 후속 확인 자료가 들어왔을 때 같은 조건을 다시 평가해야 합니다. 그래서 성공 기준은 마지막 카드의 두 가지예요. 제안의 근거가 실제로 읽은 값이고, 확인하지 못한 것은 보류로 남았으면 성공입니다. 최초 자료와 후속 확인 자료의 결과를 비교하면서, 바뀐 판단에는 새 근거가 있고 유지돼야 할 조건은 그대로인지 확인합니다.</a:t>
+              <a:t>다음으로 인계에 사용할 보충 점검 문서를 기존 지식에 연결합니다. 강사가 제공한 HI-01 문서에는 설비 상태, 열린 작업지시, 부품 상태, 작업 메모를 대조하는 절차가 있습니다. 추출 결과의 각 절차가 원문의 어느 부분에서 왔는지 사람이 먼저 확인합니다. 같은 제공 문서와 추출 조건에서는 준비된 검토본을 재사용하지만, 사람이 확인하고 적재하는 단계는 남아 있습니다. 원문과 맞지 않거나 부족한 항목을 발견하면 그대로 적재하지 말고 확인해야 합니다. 기존 쿨러·정비·구매 지식은 그대로 두고 보충 문서만 추가합니다. 이 실습은 학생의 임의 문서를 무제한으로 추출하는 경로가 아닙니다.</a:t>
             </a:r>
           </a:p>
         </p:txBody>
@@ -3225,7 +3225,7 @@
           <a:lstStyle/>
           <a:p>
             <a:r>
-              <a:t>네 번째 실습은 직접 그린 흐름으로 에이전트를 실행하는 일입니다. 앞 실습에서 만들 에이전트는 제안이나 보류 한 건을 내는 데서 멈춥니다. 쿨러 사건에서도 에이전트의 일은 추천안을 제출하면서 끝났고, 그 뒤를 이은 건 프로세스였죠. 내 업무도 마찬가지예요. 에이전트가 낸 제안이나 보류를 누가 확인하고 어떻게 끝낼지는 흐름이 정합니다. 작은 업무의 흐름은 bpmn.io로 그리고요, 화면의 다섯 칸, 시작, 에이전트 작업, 필요한 자리의 사람 확인, 결과 보고, 종료입니다. 그린 흐름을 준비된 연결 방식의 범위에서 등록하고 실행하면, 앞에서 만든 에이전트가 그 단계에서 일하고 처리 건 하나가 기록으로 남아요. 등록된 흐름과 그 처리 건의 기록이 이 실습에서 남는 것입니다. 이때 지킬 게 하나 있습니다. 일정 등록이나 메일 발송처럼 준비된 범위 밖의 외부 시스템 쓰기는 성공한 것처럼 적지 않아요. 하지 못한 일로 결과 보고에 남깁니다. 필요한 흐름이 모두 끝나 다른 열린 작업 없이 처리 건이 닫히고, 사람 확인이 필요한 자리에 실제로 있었고, 결과 보고에 한 일과 하지 못한 일이 함께 남았으면 성공이에요. 단, 등록할 수 있는 연결이 먼저 준비돼 있어야 합니다. 수업 예제에는 제가 실제 도구와 결과 형식에 맞게 채울 자리도 있어요. 연결이 없는 기능을 성공으로 꾸미지 말고, 확인 가능한 범위와 막힌 이유를 결과로 남겨야 합니다.</a:t>
+              <a:t>43~44장 통합 발화는 43장 발표자 노트를 따른다.</a:t>
             </a:r>
           </a:p>
         </p:txBody>
@@ -3295,7 +3295,7 @@
           <a:lstStyle/>
           <a:p>
             <a:r>
-              <a:t>이제 ProcessGPT 시연을 볼 기준을 준비하겠습니다. 앞에서 안내한 네 실습은 작은 업무 하나를 명세, 지식, 에이전트, 흐름으로 연결하는 과정이었죠. 그럼 같은 구조가 실제 제품에서는 어떻게 나타날까요? 시연으로 지식, 에이전트, 프로세스의 연결을 확인하기 전에, 몇 장으로 짚고 시작할게요.</a:t>
+              <a:t>이제 교대 인계안을 작성할 에이전트와 스킬을 구성합니다. 입력은 대상 설비와 인계할 교대, 기준 시각, 작업 메모입니다. 에이전트는 허용된 읽기 도구로 설비 상태와 열린 작업지시, 실제 재고와 입고 예정 자료를 조회합니다. 메모에서 정비가 완료됐다고 전했더라도 실제 작업지시가 열려 있다면 그 차이를 불일치로 남겨야 합니다. 입고 예정과 현재 재고도 같은 말이 아닙니다. 조회 결과가 없거나 조회 자체가 실패한 경우에는 확인이 필요한 이유와 다음 확인을 남깁니다. 실제 조회한 도구와 결과가 인계안의 근거가 되어야 합니다. 학생은 에이전트의 이름과 설명을 이해하기 쉽게 작성할 수 있지만 도구 서버나 모델을 임의로 바꾸지는 않습니다.</a:t>
             </a:r>
           </a:p>
         </p:txBody>
@@ -3365,7 +3365,7 @@
           <a:lstStyle/>
           <a:p>
             <a:r>
-              <a:t>ProcessGPT는 BPMN으로 업무 흐름을 표현하고 여러 에이전트의 일을 조율하는 오픈소스 프로젝트입니다. 개발사의 공식 소개에서 확인할 수 있는 방향이에요. 여기서 볼 핵심은 제품 이름보다 오케스트레이션이라는 역할입니다. 여러 수행자가 각자의 일을 하더라도, 누가 언제 시작하고 어떤 결과를 다음에 넘길지는 조율해야 하죠. HYD에서 프로세스 엔진이 맡았던 역할입니다. 수행자가 여러 전문 에이전트로 늘어나도, 이 연결과 책임을 설계해야 한다는 점은 같습니다. 공식 소개에는 자연어로 프로세스를 정의하는 기능도 나옵니다. 업무를 말로 설명해 초안을 만드는 길이 열리는 거예요. 그렇다고 생성된 그림이 내 업무의 완료 조건이나 승인 규칙까지 자동으로 맞췄다는 뜻은 아닙니다. 사람이 의도를 검토하고 실제 실행 결과를 확인해야 하죠. 시연에서는 기능의 수보다 그 연결을 보겠습니다. 일을 맡기는 설계는 어디에 있고, 실제로 진행되는 한 건은 어디에 있으며, 결과를 낸 뒤 다음 차례를 누가 여는지요. 이 질문은 다른 제품을 볼 때도 그대로 사용할 수 있습니다.</a:t>
+              <a:t>45~46장 통합 발화는 45장 발표자 노트를 따른다.</a:t>
             </a:r>
           </a:p>
         </p:txBody>
@@ -3435,7 +3435,7 @@
           <a:lstStyle/>
           <a:p>
             <a:r>
-              <a:t>우리가 만든 건 제품의 어느 자리에 해당할까요? 짝을 맞춰 보겠습니다. 표의 왼쪽 칸이 이 과정에서 만든 것, 가운데 칸이 ProcessGPT에서 그게 나타나는 자리, 오른쪽 칸이 그 구실이에요. 첫 줄은 판단에 필요한 지식의 자리입니다. 제품의 공개 구조에는 지식 그래프뿐 아니라 문서 검색을 위한 구성도 있어요. 이 표는 HYD 제작 때 참고한 제품 구조와의 대응입니다. 둘째 줄, 에이전트는 사람과 같은 사용자 목록의 한 행으로 등록되고, 쓸 도구는 조직 단위로 등록한 MCP 서버에서 나옵니다. 우리 시스템도 같은 방식으로 에이전트를 등록했어요. 셋째 줄부터 프로세스 쪽인데, 이름이 조금 달라요. 흐름과 판본은 프로세스 정의와 정의 버전입니다. 강조한 두 줄을 보세요. 처리 건은 프로세스 인스턴스, 단계는 워크아이템이라고 불러요. 마지막 줄, 사람에게 맡겨진 워크아이템이 모이는 곳이 내 작업함입니다. 이름은 달라도 구실은 같아요. 그러니까 처리 건과 단계를 구별하던 질문을 제품의 인스턴스와 워크아이템에도 적용할 수 있습니다. 상태 이름이 비슷해도 실제 완료 의미는 해당 제품의 정의와 결과 기록을 확인해야 해요.</a:t>
+              <a:t>마지막으로 제공된 교대 흐름을 포털에 연결해 한 처리 건을 진행합니다. bpmn.io에서 시작과 인계안 작성, 인계자 검토, 인수자 확인 또는 보완, 종료의 연결을 확인합니다. 포털에는 시작 입력과 역할, 각 작업에 담당할 에이전트를 연결한 뒤 검사를 통과한 판본을 등록합니다. 시작하면 에이전트가 실제 자료를 조회해 초안을 만들고 인계자가 확인합니다. 다음으로 인수자가 내용을 살펴보고 보완이 필요하면 사유를 적어 같은 처리 건으로 돌려보냅니다. 보완된 초안을 인계자가 다시 검토하고 인수자가 확인하면 인계 기록이 끝납니다. 이 확인은 사람 사이에 내용을 전달했다는 뜻이며, 설비가 조치됐거나 발주와 정비가 완료됐다는 뜻은 아닙니다.</a:t>
             </a:r>
           </a:p>
         </p:txBody>
@@ -3505,7 +3505,7 @@
           <a:lstStyle/>
           <a:p>
             <a:r>
-              <a:t>이 대응이 실제로 어떻게 움직이는지, HYD가 참고한 제품의 작업 전달 구조를 한 그림으로 놓았습니다. 이 그림은 실제 제품의 쿨러 실행 화면이 아니라, 배운 사례를 구조에 대응시킨 설명입니다. 왼쪽이 실행 엔진, 가운데가 워크아이템 목록, 오른쪽이 수행자예요. 실행 엔진은 프로세스 정의를 읽고, 수행할 작업을 워크아이템으로 관리하고, 다음 차례의 작업을 진행 상태로 엽니다. 예정 작업을 미리 목록에 만들어 둘 수도 있어요. 오른쪽 수행자는 자기에게 맡겨진 워크아이템을 처리해서 결과를 제출하고요. 엔진은 그 결과를 받아서 다음 워크아이템을 엽니다. 쿨러 사건으로 읽어 볼까요? 목록 맨 위, 진단 · 조치 제안은 에이전트가 끝내서 완료 상태예요. 가운데 운전원 승인은 사람에게 맡겨져서 처리 중이고, 이 워크아이템이 운전원의 작업함에 놓여 있습니다. 맨 아래 다음 작업은 아직 차례가 오지 않은 예정 상태고요. 에이전트가 결과를 제출하면 엔진이 이어받는다는 걸 앞에서 봤죠. 제품에서도 그 구조가 그대로입니다. 에이전트든 사람이든 수행자는 자기 워크아이템만 처리하고, 다음을 여는 건 엔진이에요.</a:t>
+              <a:t>47~48장 통합 발화는 47장 발표자 노트를 따른다.</a:t>
             </a:r>
           </a:p>
         </p:txBody>
@@ -3575,7 +3575,7 @@
           <a:lstStyle/>
           <a:p>
             <a:r>
-              <a:t>왼쪽은 HYD가 제품 구조를 참고한 부분입니다. 프로세스 정의와 판본, 실제 인스턴스, 수행자에게 맡기는 작업을 구별했어요. 에이전트가 결과를 제출하고 엔진이 그 결과를 받아 다음 작업을 여는 구조도 참고했습니다. 제품을 그대로 설치해 쓴 것과는 구별해야 해요. 교육용으로 직접 구현한 부분과 적용 범위가 있기 때문입니다. 오른쪽은 제품을 평가할 때 더 살펴볼 범위예요. 자연어로 만든 정의를 어떻게 검토하는지, 여러 에이전트와 하위 프로세스를 어떻게 관리하는지, 지식을 어떤 방식으로 검색하는지, 운영 중에는 권한과 실패를 어떻게 다루는지입니다. 기능이 소개돼 있는 것과 우리 환경에서 그 기능을 검증한 것은 다릅니다. 특히 수업에서 역할을 골라 승인한 경험을 실제 사용자 인증과 혼동하지 마세요. 기업에서는 누가 접속했는지 확인하고, 그 신원에 어떤 권한이 있는지 연결해야 합니다. 같은 승인 상자가 있어도 이 연결이 빠지면 책임을 확인할 수 없죠. 제품이 바뀌었을 때도 살펴봐야 하는 것은 바로 이런 역할과 통제의 실제 연결입니다.</a:t>
+              <a:t>이어서 ProcessGPT 시연을 볼 기준을 준비합니다. 앞의 교대 실습에서는 제공 문서와 실제 조회를 인계안에 연결하고, 두 사람의 검토와 보완을 하나의 처리 건으로 이어 봅니다. 이제 제품에서는 지식, 에이전트, 프로세스가 각각 어디에 나타나고 다음 차례가 어떻게 열리는지 살펴보겠습니다.</a:t>
             </a:r>
           </a:p>
         </p:txBody>
@@ -3715,7 +3715,7 @@
           <a:lstStyle/>
           <a:p>
             <a:r>
-              <a:t>기업 업무에 적용할 때는 표의 여섯 항목을 질문으로 바꿔 보면 좋습니다. 사람 승인은 효과를 내기 전에 필요한 결정이 있었는지, 권한은 그 결정을 할 사람이 맞는지를 묻습니다. 승인 버튼이 보인다는 것만으로 두 질문이 해결되지는 않아요. 감사 추적은 누가 무엇을 결정하고 어떤 실행이 일어났는지 되짚는 길입니다. 제안, 승인, 명령과 결과가 서로 이어져 있어야 원인을 추적할 수 있죠. 이미 한 작업을 다시 시도해도 되는지 판단할 때도 이 기록이 필요합니다. 보상은 실패 뒤에 남은 효과를 정리하는 일입니다. 모든 작업을 과거로 되돌리는 만능 취소가 아니에요. 예를 들어 발주 뒤 다음 단계가 실패했다면, 발주 취소가 가능한지 확인하고 취소 요청이나 정정 절차를 실행해야 합니다. 이미 발송한 안내를 없던 일로 만들 수 없다면 정정 안내가 필요할 수 있고요. BPMN도 보상 작업을 표현할 수 있지만, 무엇을 어떻게 보상할지는 업무별로 설계해야 합니다. 실행 격리는 에이전트와 도구가 접근할 데이터와 기능을 제한합니다. 읽기 도구의 범위, 계정 권한, 연결 가능한 시스템을 함께 봐야 해요. 변경 통제는 어떤 판본으로 실행 중인지와 새 정의를 언제 적용할지를 관리합니다. 처리 건의 판본을 고정해도 센서 값이나 현재 권한까지 고정되는 것은 아닙니다. 오른쪽 칸은 HYD에서 이 원리를 살펴본 자리와 추가로 확인할 지점입니다. 제품을 도입할 때도 각 항목이 실제 설정과 시험에서 어떻게 지켜지는지 확인하세요. 제품 이름이 같다는 이유만으로 우리 업무에 필요한 통제가 모두 갖춰졌다고 결론 내리지 않는 겁니다.</a:t>
+              <a:t>ProcessGPT는 BPMN으로 업무 흐름을 표현하고 여러 에이전트의 일을 조율하는 오픈소스 프로젝트입니다. 개발사의 공식 소개에서 확인할 수 있는 방향이에요. 여기서 볼 핵심은 제품 이름보다 오케스트레이션이라는 역할입니다. 여러 수행자가 각자의 일을 하더라도, 누가 언제 시작하고 어떤 결과를 다음에 넘길지는 조율해야 하죠. HYD에서 프로세스 엔진이 맡았던 역할입니다. 수행자가 여러 전문 에이전트로 늘어나도, 이 연결과 책임을 설계해야 한다는 점은 같습니다. 공식 소개에는 자연어로 프로세스를 정의하는 기능도 나옵니다. 업무를 말로 설명해 초안을 만드는 길이 열리는 거예요. 그렇다고 생성된 그림이 내 업무의 완료 조건이나 승인 규칙까지 자동으로 맞췄다는 뜻은 아닙니다. 사람이 의도를 검토하고 실제 실행 결과를 확인해야 하죠. 시연에서는 기능의 수보다 그 연결을 보겠습니다. 일을 맡기는 설계는 어디에 있고, 실제로 진행되는 한 건은 어디에 있으며, 결과를 낸 뒤 다음 차례를 누가 여는지요. 이 질문은 다른 제품을 볼 때도 그대로 사용할 수 있습니다.</a:t>
             </a:r>
           </a:p>
         </p:txBody>
@@ -3785,7 +3785,7 @@
           <a:lstStyle/>
           <a:p>
             <a:r>
-              <a:t>시연을 시작하기 전에 무엇을 볼지 정리해 두겠습니다. 화면의 카드 네 장이 눈여겨볼 것들이에요. 첫째, 지식과 에이전트와 프로세스가 제품에서 어떤 이름으로 나타나는지. 둘째, 정의 하나에서 열린 인스턴스가 에이전트 작업과 사람 작업으로 어떻게 이어지는지예요. 셋째는 배운 구조 위에 더해진 것들입니다. 말로 만드는 정의나 여러 에이전트의 협업 같은 거요. 넷째는 승인과 권한, 감사 추적 같은 통제가 흐름의 어디에 놓이는지예요. 시연을 본 뒤에는 화면에서 세 가지를 가려낼 수 있어야 합니다. 눈앞의 것이 정의인지 인스턴스인지, 지금이 누구의 차례인지, 사람이 결정하는 자리가 어디인지요. 실제 시연에서는 이 네 가지를 제품 화면에 대어 확인합니다. 준비된 환경에서 확인하지 못한 것은 미확인으로 남기면 됩니다.</a:t>
+              <a:t>우리가 만든 건 제품의 어느 자리에 해당할까요? 짝을 맞춰 보겠습니다. 표의 왼쪽 칸이 이 과정에서 만든 것, 가운데 칸이 ProcessGPT에서 그게 나타나는 자리, 오른쪽 칸이 그 구실이에요. 첫 줄은 판단에 필요한 지식의 자리입니다. 제품의 공개 구조에는 지식 그래프뿐 아니라 문서 검색을 위한 구성도 있어요. 이 표는 HYD 제작 때 참고한 제품 구조와의 대응입니다. 둘째 줄, 에이전트는 사람과 같은 사용자 목록의 한 행으로 등록되고, 쓸 도구는 조직 단위로 등록한 MCP 서버에서 나옵니다. 우리 시스템도 같은 방식으로 에이전트를 등록했어요. 셋째 줄부터 프로세스 쪽인데, 이름이 조금 달라요. 흐름과 판본은 프로세스 정의와 정의 버전입니다. 강조한 두 줄을 보세요. 처리 건은 프로세스 인스턴스, 단계는 워크아이템이라고 불러요. 마지막 줄, 사람에게 맡겨진 워크아이템이 모이는 곳이 내 작업함입니다. 이름은 달라도 구실은 같아요. 그러니까 처리 건과 단계를 구별하던 질문을 제품의 인스턴스와 워크아이템에도 적용할 수 있습니다. 상태 이름이 비슷해도 실제 완료 의미는 해당 제품의 정의와 결과 기록을 확인해야 해요.</a:t>
             </a:r>
           </a:p>
         </p:txBody>
@@ -3855,7 +3855,7 @@
           <a:lstStyle/>
           <a:p>
             <a:r>
-              <a:t>마지막으로 준비할 실습은 학습 내용과 결과를 개인 지식 자산으로 정리하는 일입니다. 제품 시연까지 마친 뒤에는 정의와 인스턴스, 담당과 결정의 자리를 어디에서 확인했는지도 남길 수 있겠죠. 남은 건 이 모든 걸 내 것으로 묶어 두는 일이에요. 과정을 시작할 때 만든 Notion 학습 노트로 돌아갑니다. 노트에 네 가지를 서로 이어서 기록합니다. 화면의 카드 순서대로, 자신의 문장으로 다시 쓴 개념, 그 개념이 나온 참고 자료, 이번 회차에 만든 명세와 스키마와 에이전트와 흐름 같은 실습 산출물, 그리고 그게 정한 대로 동작했는지의 검증 결과예요. 왜 이렇게 이어 둘까요? 개념만 적힌 노트는 무엇을 알았는지를 보여 줍니다. 그런데 산출물과 검증 결과가 이어진 노트는 무엇을 할 수 있는지를 보여 줘요. 수업 계정에서 Notion 연결과 쓰기 권한이 확인되면 MCP로 연동해서 기록하는 모습을 보여 드리고요, 그렇지 않은 환경에서는 준비한 Markdown을 Notion에 직접 정리합니다. 개념에서 출처와 산출물로, 산출물에서 검증 결과로 끊기지 않고 이어지면 이 노트는 완성입니다. 이제 실제 실습과 시연에서는 안내한 순서대로 결과를 확인하고, 마지막에 네 가지를 이어 기록하겠습니다. 마치고 돌아오면 복습과 퀴즈로 과정을 정리합니다.</a:t>
+              <a:t>이 대응이 실제로 어떻게 움직이는지, HYD가 참고한 제품의 작업 전달 구조를 한 그림으로 놓았습니다. 이 그림은 실제 제품의 쿨러 실행 화면이 아니라, 배운 사례를 구조에 대응시킨 설명입니다. 왼쪽이 실행 엔진, 가운데가 워크아이템 목록, 오른쪽이 수행자예요. 실행 엔진은 프로세스 정의를 읽고, 수행할 작업을 워크아이템으로 관리하고, 다음 차례의 작업을 진행 상태로 엽니다. 예정 작업을 미리 목록에 만들어 둘 수도 있어요. 오른쪽 수행자는 자기에게 맡겨진 워크아이템을 처리해서 결과를 제출하고요. 엔진은 그 결과를 받아서 다음 워크아이템을 엽니다. 쿨러 사건으로 읽어 볼까요? 목록 맨 위, 진단 · 조치 제안은 에이전트가 끝내서 완료 상태예요. 가운데 운전원 승인은 사람에게 맡겨져서 처리 중이고, 이 워크아이템이 운전원의 작업함에 놓여 있습니다. 맨 아래 다음 작업은 아직 차례가 오지 않은 예정 상태고요. 에이전트가 결과를 제출하면 엔진이 이어받는다는 걸 앞에서 봤죠. 제품에서도 그 구조가 그대로입니다. 에이전트든 사람이든 수행자는 자기 워크아이템만 처리하고, 다음을 여는 건 엔진이에요.</a:t>
             </a:r>
           </a:p>
         </p:txBody>
@@ -3925,7 +3925,7 @@
           <a:lstStyle/>
           <a:p>
             <a:r>
-              <a:t>실습과 시연에서 남긴 기록으로 돌아왔습니다. 이제 복습과 용어 정리, 퀴즈로 이번 회차를 마무리하겠습니다. 학습 노트에는 완성한 결과와 아직 확인하지 못한 것을 구분해 두겠습니다. 먼저 이번 회차에 배운 흐름을 쿨러 사건으로 복습해 보겠습니다. 표에 쿨러 사건의 다섯 순간을 놓았어요. 답과 근거 칸은 잠깐 가려 둘게요. 순간마다 지식, 에이전트, 프로세스 가운데 어느 영역의 일인지 먼저 골라 보세요. 왜 그 영역인지 근거도 같이 생각해 보시고요. 답을 맞춰 볼까요? 첫째, 핀 오염을 판단할 기준을 등록해 관리하는 일은 지식의 영역입니다. 기준은 매뉴얼과 정책을 검토해 관리하고 개정하는 지식이죠. 둘째, 지금의 냉각 효율을 읽어서 기준에 댄 건 에이전트의 일이에요. 값은 도구로 읽은 현재 값이고, 그걸 기준에 대어 판단하는 게 에이전트의 몫이니까요. 셋째, 쿨러 핀 세척을 설비보전팀장이 승인한다는 건 다시 지식입니다. 승인 역할은 조치에 적힌 지식이었죠. 넷째, 운전원 승인 뒤에 냉각 명령이 열린 건 프로세스의 일이에요. 단계 사이의 순서는 엔진이 지킵니다. 다섯째가 헷갈리기 쉬워요. 내려간 유온을 다시 읽고 작업지시를 등록한 건 프로세스의 일입니다. 둘째 순간처럼 시계열 DB를 읽긴 하는데, 판단의 재료를 읽은 게 아니라 승인 뒤 실행의 결과를 확인한 서비스 작업이거든요. 결국 같은 값을 읽어도, 누가 무엇을 위해 읽었는지에 따라 영역이 갈립니다. 이 HYD 사례에서는 진단 도구를 통한 대조와 승인 뒤 재관측 서비스의 역할이 다릅니다. 다른 시스템에서는 배치가 달라질 수 있어도, 판단 근거를 읽는 일과 실행 결과를 확인하는 일을 구별하는 질문은 유효합니다.</a:t>
+              <a:t>왼쪽은 HYD가 제품 구조를 참고한 부분입니다. 프로세스 정의와 판본, 실제 인스턴스, 수행자에게 맡기는 작업을 구별했어요. 에이전트가 결과를 제출하고 엔진이 그 결과를 받아 다음 작업을 여는 구조도 참고했습니다. 제품을 그대로 설치해 쓴 것과는 구별해야 해요. 교육용으로 직접 구현한 부분과 적용 범위가 있기 때문입니다. 오른쪽은 제품을 평가할 때 더 살펴볼 범위예요. 자연어로 만든 정의를 어떻게 검토하는지, 여러 에이전트와 하위 프로세스를 어떻게 관리하는지, 지식을 어떤 방식으로 검색하는지, 운영 중에는 권한과 실패를 어떻게 다루는지입니다. 기능이 소개돼 있는 것과 우리 환경에서 그 기능을 검증한 것은 다릅니다. 특히 수업에서 역할을 골라 승인한 경험을 실제 사용자 인증과 혼동하지 마세요. 기업에서는 누가 접속했는지 확인하고, 그 신원에 어떤 권한이 있는지 연결해야 합니다. 같은 승인 상자가 있어도 이 연결이 빠지면 책임을 확인할 수 없죠. 제품이 바뀌었을 때도 살펴봐야 하는 것은 바로 이런 역할과 통제의 실제 연결입니다.</a:t>
             </a:r>
           </a:p>
         </p:txBody>
@@ -3995,7 +3995,7 @@
           <a:lstStyle/>
           <a:p>
             <a:r>
-              <a:t>흐름을 되짚었으니, 이번엔 용어의 이름과 뜻을 정리하겠습니다. 표에 이번 회차에서 다시 쓰고 새로 세운 용어 일곱 개가 있어요. 스킬은 에이전트가 업무를 수행하는 순서와 요령을 적은 재사용 지침입니다. MCP는 에이전트가 외부 시스템의 도구를 같은 방식으로 부르게 하는 연결 규약이에요. 출력 계약은 결과의 필수 항목과 형식, 의미와 처리 조건에 대한 약속입니다. HITL은 사람의 판단이나 피드백을 과정 안에 넣는 방식입니다. 이 수업에서는 실행 전에 승인하거나 거절하는 자리로 구체화했고요. 프로세스 인스턴스는 프로세스 정의에 따라 실제로 도는 한 건이에요. 우리가 처리 건이라고 불러 온 거죠. 워크아이템은 인스턴스 안에서 수행자에게 맡겨지는 작업 하나, 우리가 단계라고 부른 겁니다. 마지막으로 멀티 에이전트 오케스트레이션은 한 프로세스 안에서 여러 에이전트의 순서와 호출을 조율하는 일입니다.</a:t>
+              <a:t>기업 업무에 적용할 때는 표의 여섯 항목을 질문으로 바꿔 보면 좋습니다. 사람 승인은 효과를 내기 전에 필요한 결정이 있었는지, 권한은 그 결정을 할 사람이 맞는지를 묻습니다. 승인 버튼이 보인다는 것만으로 두 질문이 해결되지는 않아요. 감사 추적은 누가 무엇을 결정하고 어떤 실행이 일어났는지 되짚는 길입니다. 제안, 승인, 명령과 결과가 서로 이어져 있어야 원인을 추적할 수 있죠. 이미 한 작업을 다시 시도해도 되는지 판단할 때도 이 기록이 필요합니다. 보상은 실패 뒤에 남은 효과를 정리하는 일입니다. 모든 작업을 과거로 되돌리는 만능 취소가 아니에요. 예를 들어 발주 뒤 다음 단계가 실패했다면, 발주 취소가 가능한지 확인하고 취소 요청이나 정정 절차를 실행해야 합니다. 이미 발송한 안내를 없던 일로 만들 수 없다면 정정 안내가 필요할 수 있고요. BPMN도 보상 작업을 표현할 수 있지만, 무엇을 어떻게 보상할지는 업무별로 설계해야 합니다. 실행 격리는 에이전트와 도구가 접근할 데이터와 기능을 제한합니다. 읽기 도구의 범위, 계정 권한, 연결 가능한 시스템을 함께 봐야 해요. 변경 통제는 어떤 판본으로 실행 중인지와 새 정의를 언제 적용할지를 관리합니다. 처리 건의 판본을 고정해도 센서 값이나 현재 권한까지 고정되는 것은 아닙니다. 오른쪽 칸은 HYD에서 이 원리를 살펴본 자리와 추가로 확인할 지점입니다. 제품을 도입할 때도 각 항목이 실제 설정과 시험에서 어떻게 지켜지는지 확인하세요. 제품 이름이 같다는 이유만으로 우리 업무에 필요한 통제가 모두 갖춰졌다고 결론 내리지 않는 겁니다.</a:t>
             </a:r>
           </a:p>
         </p:txBody>
@@ -4065,7 +4065,7 @@
           <a:lstStyle/>
           <a:p>
             <a:r>
-              <a:t>배운 내용을 판단에 쓸 수 있는지, 퀴즈 세 문제로 확인해 보겠습니다. 보기의 말을 기억하는 것보다, 그 판단이 어느 영역의 몫인지 근거를 댈 수 있는지가 중요해요. 문제마다 보기를 읽고 나면 잠깐 멈출 테니, 그때 답을 골라 보세요. 정답과 까닭은 세 문제를 다 푼 뒤에 함께 확인하겠습니다.</a:t>
+              <a:t>시연을 시작하기 전에 무엇을 볼지 정리해 두겠습니다. 화면의 카드 네 장이 눈여겨볼 것들이에요. 첫째, 지식과 에이전트와 프로세스가 제품에서 어떤 이름으로 나타나는지. 둘째, 정의 하나에서 열린 인스턴스가 에이전트 작업과 사람 작업으로 어떻게 이어지는지예요. 셋째는 배운 구조 위에 더해진 것들입니다. 말로 만드는 정의나 여러 에이전트의 협업 같은 거요. 넷째는 승인과 권한, 감사 추적 같은 통제가 흐름의 어디에 놓이는지예요. 시연을 본 뒤에는 화면에서 세 가지를 가려낼 수 있어야 합니다. 눈앞의 것이 정의인지 인스턴스인지, 지금이 누구의 차례인지, 사람이 결정하는 자리가 어디인지요. 실제 시연에서는 이 네 가지를 제품 화면에 대어 확인합니다. 준비된 환경에서 확인하지 못한 것은 미확인으로 남기면 됩니다.</a:t>
             </a:r>
           </a:p>
         </p:txBody>
@@ -4135,7 +4135,7 @@
           <a:lstStyle/>
           <a:p>
             <a:r>
-              <a:t>첫 번째 문제입니다. 상황부터 볼게요. 에이전트가 원인을 쿨러 핀 오염으로 가리고, 팬 최대 운전을 권하는 추천안을 제출했습니다. 운전원은 아직 응답하지 않았어요. 이 시점의 처리 건에 대한 설명으로 옳은 건 무엇일까요? 1번, 추천안이 제출됐으니 팬 속도는 이미 100퍼센트로 올라갔다. 2번, 에이전트가 승인 결과를 기다리며 다음 도구를 부르고 있다. 3번, 에이전트의 일은 끝났고 엔진이 운전원 승인을 열어 기다린다. 4번, 운전원이 응답하지 않으면 추천대로 자동 실행된다.</a:t>
+              <a:t>마지막으로 학습 내용과 결과를 다시 찾아볼 수 있게 정리합니다. 개념을 자신의 말로 적고, 그 개념이 나온 자료와 이번에 작성한 교대 에이전트·흐름·인계 처리 건을 연결합니다. 확인한 조회 근거와 사람의 검토, 보완 후에도 남은 미확인 항목을 함께 기록합니다. 학습 노트에 적힌 내용과 실제 처리 건의 결과를 구분하면 무엇을 배웠고 무엇을 확인했는지 다시 찾을 수 있습니다. 수업 계정의 연결과 쓰기 권한이 확인된 경우에만 Notion 연동을 시연하고, 그렇지 않으면 준비한 Markdown을 직접 정리합니다.</a:t>
             </a:r>
           </a:p>
         </p:txBody>
@@ -4205,7 +4205,7 @@
           <a:lstStyle/>
           <a:p>
             <a:r>
-              <a:t>두 번째 문제입니다. 매뉴얼이 개정돼서, 쿨러 핀 오염을 가리는 냉각 효율의 기준값이 달라졌어요. 그런데 에이전트는 여전히 예전 기준으로 판단합니다. 조회 구조와 기준의 단위는 그대로라고 할 때, 새 기준이 판단에 쓰이게 하려면, 먼저 고칠 곳은 어디일까요? 1번, 스킬의 절차에 새 기준값을 문장으로 적어 넣는다. 2번, 개정된 문서를 검토해 증거 기준을 다시 적재한다. 3번, 프로세스 정의의 게이트웨이 조건을 새 기준값으로 바꾼다. 4번, 운전원이 승인할 때마다 새 기준값을 확인하게 한다.</a:t>
+              <a:t>56~57장 통합 발화는 56장 발표자 노트를 따른다.</a:t>
             </a:r>
           </a:p>
         </p:txBody>
@@ -4275,7 +4275,7 @@
           <a:lstStyle/>
           <a:p>
             <a:r>
-              <a:t>마지막 문제입니다. 재고 보충을 빨리 끝내려고, 구매 에이전트에게 발주를 직접 등록하는 쓰기 도구를 연결하자는 의견이 나왔어요. 이 수업의 승인 정책에서 가장 알맞은 판단은 무엇일까요? 1번, 발주는 승인 뒤 프로세스가 등록하고 에이전트는 업무 원천을 조회해 제안을 제출한다. 2번, 스킬에 승인 뒤에만 발주한다고 적어 두면 쓰기 도구를 연결해도 된다. 3번, 발주한 뒤에 감사 기록이 남으니 쓰기 도구를 연결해도 문제없다. 4번, 발주 수량을 규칙으로 계산하게 하면 사람의 승인은 필요 없다.</a:t>
+              <a:t>실습과 시연에서 남긴 기록으로 돌아왔습니다. 이제 복습과 용어 정리, 퀴즈로 이번 회차를 마무리하겠습니다. 학습 노트에는 완성한 결과와 아직 확인하지 못한 것을 구분해 두겠습니다. 먼저 이번 회차에 배운 흐름을 쿨러 사건으로 복습해 보겠습니다. 표에 쿨러 사건의 다섯 순간을 놓았어요. 답과 근거 칸은 잠깐 가려 둘게요. 순간마다 지식, 에이전트, 프로세스 가운데 어느 영역의 일인지 먼저 골라 보세요. 왜 그 영역인지 근거도 같이 생각해 보시고요. 답을 맞춰 볼까요? 첫째, 핀 오염을 판단할 기준을 등록해 관리하는 일은 지식의 영역입니다. 기준은 매뉴얼과 정책을 검토해 관리하고 개정하는 지식이죠. 둘째, 지금의 냉각 효율을 읽어서 기준에 댄 건 에이전트의 일이에요. 값은 도구로 읽은 현재 값이고, 그걸 기준에 대어 판단하는 게 에이전트의 몫이니까요. 셋째, 쿨러 핀 세척을 설비보전팀장이 승인한다는 건 다시 지식입니다. 승인 역할은 조치에 적힌 지식이었죠. 넷째, 운전원 승인 뒤에 냉각 명령이 열린 건 프로세스의 일이에요. 단계 사이의 순서는 엔진이 지킵니다. 다섯째가 헷갈리기 쉬워요. 내려간 유온을 다시 읽고 작업지시를 등록한 건 프로세스의 일입니다. 둘째 순간처럼 시계열 DB를 읽긴 하는데, 판단의 재료를 읽은 게 아니라 승인 뒤 실행의 결과를 확인한 서비스 작업이거든요. 결국 같은 값을 읽어도, 누가 무엇을 위해 읽었는지에 따라 영역이 갈립니다. 이 HYD 사례에서는 진단 도구를 통한 대조와 승인 뒤 재관측 서비스의 역할이 다릅니다. 다른 시스템에서는 배치가 달라질 수 있어도, 판단 근거를 읽는 일과 실행 결과를 확인하는 일을 구별하는 질문은 유효합니다.</a:t>
             </a:r>
           </a:p>
         </p:txBody>
@@ -4345,7 +4345,7 @@
           <a:lstStyle/>
           <a:p>
             <a:r>
-              <a:t>정답을 확인해 보겠습니다. 고른 답과 근거를 같이 대조해 보세요. 첫 문항의 정답은 3번이에요. 에이전트의 일은 추천안을 제출하는 데서 끝나고, 운전원 승인 단계를 여는 건 엔진입니다. 설비 명령은 승인이 전달된 뒤에만 나가니까, 이 시점에 팬은 아직 그대로예요. 1번은 제출과 실행을 같은 걸로 본 보기예요. 2번은 에이전트가 승인을 기다린다고 본 건데, 에이전트는 다음에 누가 무엇을 하는지 몰라도 됩니다. 4번은 응답 없음을 승인으로 읽은 거예요. 응답이 없으면 지연 알림만 나가고, 처리 건은 계속 기다리죠. 둘째 문항의 정답은 2번입니다. 증거 기준은 매뉴얼에서 뽑아 적재한 지식이고, 진단 도구가 판단할 때마다 그 기준을 읽어요. 이 문제처럼 조회 구조와 기준의 단위가 유지된다면, 개정된 문서를 검토해 기준을 다시 적재하고 판단에 반영됐는지 확인합니다. 1번처럼 스킬에 적으면 기준이 두 곳에 생겨서, 문서가 다시 바뀔 때 어긋나요. 3번의 게이트웨이는 승인과 회복을 가르는 조건이라 원인의 기준과는 관계가 없습니다. 4번은 기준을 사람의 기억에 맡기는 셈이고요. 셋째 문항의 정답은 1번입니다. 업무 시스템에 쓰는 일은 승인 뒤의 프로세스 작업에 두고, 이 사례의 에이전트에는 읽기와 제안 제출에 필요한 권한을 둡니다. 2번은 스킬에 적은 순서를 엔진이 지키는 순서와 헷갈린 보기예요. 지침은 따르는 쪽에 맡겨질 뿐, 보장되지 않죠. 3번의 감사 기록은 일이 벌어진 뒤에 남는 거라서 승인을 대신하지 못하고요, 4번은 계산이 아무리 정확해도 책임질 사람의 결정이 빠집니다. 여기까지가 이번 회차입니다. 그리고 이 회차로 과정 전체를 마칩니다. 앞으로 다른 제품이나 도구를 만나더라도, 이 과정에서 익힌 원리와 역할의 구분은 그대로 쓸 수 있을 거예요. 이번 회차에 정리한 학습 노트, 그리고 직접 만든 명세와 에이전트와 흐름이 각자의 업무에서 다음 일을 시작하는 출발점이 되면 좋겠습니다. 그동안 수고 많으셨습니다. 감사합니다.</a:t>
+              <a:t>흐름을 되짚었으니, 이번엔 용어의 이름과 뜻을 정리하겠습니다. 표에 이번 회차에서 다시 쓰고 새로 세운 용어 일곱 개가 있어요. 스킬은 에이전트가 업무를 수행하는 순서와 요령을 적은 재사용 지침입니다. MCP는 에이전트가 외부 시스템의 도구를 같은 방식으로 부르게 하는 연결 규약이에요. 출력 계약은 결과의 필수 항목과 형식, 의미와 처리 조건에 대한 약속입니다. HITL은 사람의 판단이나 피드백을 과정 안에 넣는 방식입니다. 이 수업에서는 실행 전에 승인하거나 거절하는 자리로 구체화했고요. 프로세스 인스턴스는 프로세스 정의에 따라 실제로 도는 한 건이에요. 우리가 처리 건이라고 불러 온 거죠. 워크아이템은 인스턴스 안에서 수행자에게 맡겨지는 작업 하나, 우리가 단계라고 부른 겁니다. 마지막으로 멀티 에이전트 오케스트레이션은 한 프로세스 안에서 여러 에이전트의 순서와 호출을 조율하는 일입니다.</a:t>
             </a:r>
           </a:p>
         </p:txBody>
@@ -4485,7 +4485,7 @@
           <a:lstStyle/>
           <a:p>
             <a:r>
-              <a:t>41~42장 통합 발화는 41장 발표자 노트를 따른다.</a:t>
+              <a:t>배운 내용을 판단에 쓸 수 있는지, 퀴즈 세 문제로 확인해 보겠습니다. 보기의 말을 기억하는 것보다, 그 판단이 어느 영역의 몫인지 근거를 댈 수 있는지가 중요해요. 문제마다 보기를 읽고 나면 잠깐 멈출 테니, 그때 답을 골라 보세요. 정답과 까닭은 세 문제를 다 푼 뒤에 함께 확인하겠습니다.</a:t>
             </a:r>
           </a:p>
         </p:txBody>
@@ -4555,7 +4555,7 @@
           <a:lstStyle/>
           <a:p>
             <a:r>
-              <a:t>43~44장 통합 발화는 43장 발표자 노트를 따른다.</a:t>
+              <a:t>첫 번째 문제입니다. 상황부터 볼게요. 에이전트가 원인을 쿨러 핀 오염으로 가리고, 팬 최대 운전을 권하는 추천안을 제출했습니다. 운전원은 아직 응답하지 않았어요. 이 시점의 처리 건에 대한 설명으로 옳은 건 무엇일까요? 1번, 추천안이 제출됐으니 팬 속도는 이미 100퍼센트로 올라갔다. 2번, 에이전트가 승인 결과를 기다리며 다음 도구를 부르고 있다. 3번, 에이전트의 일은 끝났고 엔진이 운전원 승인을 열어 기다린다. 4번, 운전원이 응답하지 않으면 추천대로 자동 실행된다.</a:t>
             </a:r>
           </a:p>
         </p:txBody>
@@ -4625,7 +4625,7 @@
           <a:lstStyle/>
           <a:p>
             <a:r>
-              <a:t>45~46장 통합 발화는 45장 발표자 노트를 따른다.</a:t>
+              <a:t>두 번째 문제입니다. 매뉴얼이 개정돼서, 쿨러 핀 오염을 가리는 냉각 효율의 기준값이 달라졌어요. 그런데 에이전트는 여전히 예전 기준으로 판단합니다. 조회 구조와 기준의 단위는 그대로라고 할 때, 새 기준이 판단에 쓰이게 하려면, 먼저 고칠 곳은 어디일까요? 1번, 스킬의 절차에 새 기준값을 문장으로 적어 넣는다. 2번, 개정된 문서를 검토해 증거 기준을 다시 적재한다. 3번, 프로세스 정의의 게이트웨이 조건을 새 기준값으로 바꾼다. 4번, 운전원이 승인할 때마다 새 기준값을 확인하게 한다.</a:t>
             </a:r>
           </a:p>
         </p:txBody>
@@ -4695,7 +4695,7 @@
           <a:lstStyle/>
           <a:p>
             <a:r>
-              <a:t>47~48장 통합 발화는 47장 발표자 노트를 따른다.</a:t>
+              <a:t>마지막 문제입니다. 재고 보충을 빨리 끝내려고, 구매 에이전트에게 발주를 직접 등록하는 쓰기 도구를 연결하자는 의견이 나왔어요. 이 수업의 승인 정책에서 가장 알맞은 판단은 무엇일까요? 1번, 발주는 승인 뒤 프로세스가 등록하고 에이전트는 업무 원천을 조회해 제안을 제출한다. 2번, 스킬에 승인 뒤에만 발주한다고 적어 두면 쓰기 도구를 연결해도 된다. 3번, 발주한 뒤에 감사 기록이 남으니 쓰기 도구를 연결해도 문제없다. 4번, 발주 수량을 규칙으로 계산하게 하면 사람의 승인은 필요 없다.</a:t>
             </a:r>
           </a:p>
         </p:txBody>
@@ -4765,7 +4765,7 @@
           <a:lstStyle/>
           <a:p>
             <a:r>
-              <a:t>56~57장 통합 발화는 56장 발표자 노트를 따른다.</a:t>
+              <a:t>정답을 확인해 보겠습니다. 고른 답과 근거를 같이 대조해 보세요. 첫 문항의 정답은 3번이에요. 에이전트의 일은 추천안을 제출하는 데서 끝나고, 운전원 승인 단계를 여는 건 엔진입니다. 설비 명령은 승인이 전달된 뒤에만 나가니까, 이 시점에 팬은 아직 그대로예요. 1번은 제출과 실행을 같은 걸로 본 보기예요. 2번은 에이전트가 승인을 기다린다고 본 건데, 에이전트는 다음에 누가 무엇을 하는지 몰라도 됩니다. 4번은 응답 없음을 승인으로 읽은 거예요. 응답이 없으면 지연 알림만 나가고, 처리 건은 계속 기다리죠. 둘째 문항의 정답은 2번입니다. 증거 기준은 매뉴얼에서 뽑아 적재한 지식이고, 진단 도구가 판단할 때마다 그 기준을 읽어요. 이 문제처럼 조회 구조와 기준의 단위가 유지된다면, 개정된 문서를 검토해 기준을 다시 적재하고 판단에 반영됐는지 확인합니다. 1번처럼 스킬에 적으면 기준이 두 곳에 생겨서, 문서가 다시 바뀔 때 어긋나요. 3번의 게이트웨이는 승인과 회복을 가르는 조건이라 원인의 기준과는 관계가 없습니다. 4번은 기준을 사람의 기억에 맡기는 셈이고요. 셋째 문항의 정답은 1번입니다. 업무 시스템에 쓰는 일은 승인 뒤의 프로세스 작업에 두고, 이 사례의 에이전트에는 읽기와 제안 제출에 필요한 권한을 둡니다. 2번은 스킬에 적은 순서를 엔진이 지키는 순서와 헷갈린 보기예요. 지침은 따르는 쪽에 맡겨질 뿐, 보장되지 않죠. 3번의 감사 기록은 일이 벌어진 뒤에 남는 거라서 승인을 대신하지 못하고요, 4번은 계산이 아무리 정확해도 책임질 사람의 결정이 빠집니다. 여기까지가 이번 회차입니다. 그리고 이 회차로 과정 전체를 마칩니다. 앞으로 다른 제품이나 도구를 만나더라도, 이 과정에서 익힌 원리와 역할의 구분은 그대로 쓸 수 있을 거예요. 이번 회차에 정리한 학습 노트, 그리고 직접 만든 명세와 에이전트와 흐름이 각자의 업무에서 다음 일을 시작하는 출발점이 되면 좋겠습니다. 그동안 수고 많으셨습니다. 감사합니다.</a:t>
             </a:r>
           </a:p>
         </p:txBody>
@@ -8091,7 +8091,7 @@
                 <a:ea typeface="맑은 고딕"/>
                 <a:cs typeface="맑은 고딕"/>
               </a:rPr>
-              <a:t>실전반 8회차 · 내 주제에 적용하고 지식 자산으로 마무리하기</a:t>
+              <a:t>실전반 8회차 · 교대 인수인계와 지식 자산 정리</a:t>
             </a:r>
           </a:p>
         </p:txBody>
@@ -8187,7 +8187,7 @@
                 <a:ea typeface="맑은 고딕"/>
                 <a:cs typeface="맑은 고딕"/>
               </a:rPr>
-              <a:t>쿨러 사건 한 건으로 세 영역의 연결을 되짚고, 같은 구조를 내 주제와 제품에 대어 본다</a:t>
+              <a:t>쿨러 사건 한 건으로 세 영역의 연결을 되짚고, 같은 구조를 교대 인수인계와 제품에 대어 본다</a:t>
             </a:r>
           </a:p>
         </p:txBody>
@@ -17397,7 +17397,7 @@
                 <a:ea typeface="맑은 고딕"/>
                 <a:cs typeface="맑은 고딕"/>
               </a:rPr>
-              <a:t>쿨러 사건 한 건에서 지식, 에이전트, 프로세스가 주고받는 것을 설명하고, 같은 구조를 내 주제와 제품에 대어 본다.</a:t>
+              <a:t>쿨러 사건과 교대 인계로 지식·에이전트·프로세스의 연결을 설명한다.</a:t>
             </a:r>
           </a:p>
         </p:txBody>
@@ -17541,7 +17541,7 @@
           <p:nvPr/>
         </p:nvPicPr>
         <p:blipFill>
-          <a:blip r:embed="rIdTheory2_rId3"/>
+          <a:blip r:embed="rId3"/>
           <a:stretch>
             <a:fillRect/>
           </a:stretch>
@@ -17781,7 +17781,7 @@
           <p:nvPr/>
         </p:nvPicPr>
         <p:blipFill>
-          <a:blip r:embed="rIdTheory2_rId4"/>
+          <a:blip r:embed="rId4"/>
           <a:stretch>
             <a:fillRect/>
           </a:stretch>
@@ -18021,7 +18021,7 @@
           <p:nvPr/>
         </p:nvPicPr>
         <p:blipFill>
-          <a:blip r:embed="rIdTheory2_rId5"/>
+          <a:blip r:embed="rId5"/>
           <a:stretch>
             <a:fillRect/>
           </a:stretch>
@@ -18073,7 +18073,7 @@
                 <a:ea typeface="맑은 고딕"/>
                 <a:cs typeface="맑은 고딕"/>
               </a:rPr>
-              <a:t>내 주제에 적용</a:t>
+              <a:t>교대 인수인계</a:t>
             </a:r>
           </a:p>
           <a:p>
@@ -18094,7 +18094,7 @@
                 <a:ea typeface="맑은 고딕"/>
                 <a:cs typeface="맑은 고딕"/>
               </a:rPr>
-              <a:t>• 명세 · 지식 · 에이전트 · 흐름을 만든다</a:t>
+              <a:t>• 제공 문서 · 에이전트 · 흐름을 연결한다</a:t>
             </a:r>
           </a:p>
           <a:p>
@@ -18115,7 +18115,7 @@
                 <a:ea typeface="맑은 고딕"/>
                 <a:cs typeface="맑은 고딕"/>
               </a:rPr>
-              <a:t>• 제안과 보류를 검증한다</a:t>
+              <a:t>• 검토와 보완을 확인한다</a:t>
             </a:r>
           </a:p>
         </p:txBody>
@@ -18261,7 +18261,7 @@
           <p:nvPr/>
         </p:nvPicPr>
         <p:blipFill>
-          <a:blip r:embed="rIdTheory2_rId6"/>
+          <a:blip r:embed="rId6"/>
           <a:stretch>
             <a:fillRect/>
           </a:stretch>
@@ -20612,7 +20612,7 @@
       </p:sp>
       <p:pic>
         <p:nvPicPr>
-          <p:cNvPr id="6" name="삽화:사건선_지식에서판단.svg" descr="illust_7223998276485619802_1792243894.png"/>
+          <p:cNvPr id="6" name="삽화:사건선_지식에서판단.svg" descr="illust_3111525295367462295_1793003853.png"/>
           <p:cNvPicPr>
             <a:picLocks noChangeAspect="1"/>
           </p:cNvPicPr>
@@ -24859,7 +24859,7 @@
       </p:sp>
       <p:pic>
         <p:nvPicPr>
-          <p:cNvPr id="6" name="삽화:시스템실행.svg" descr="illust_3666384504035103020_1792243894.png"/>
+          <p:cNvPr id="6" name="삽화:시스템실행.svg" descr="illust_1494521434563044931_1793003853.png"/>
           <p:cNvPicPr>
             <a:picLocks noChangeAspect="1"/>
           </p:cNvPicPr>
@@ -27147,7 +27147,7 @@
                 <a:ea typeface="맑은 고딕"/>
                 <a:cs typeface="맑은 고딕"/>
               </a:rPr>
-              <a:t>업무 명세 · 지식 구조 · 제안 에이전트 · 흐름 실행</a:t>
+              <a:t>교대 인수인계: 문서 · 에이전트 · 흐름 실행</a:t>
             </a:r>
           </a:p>
         </p:txBody>
@@ -29027,7 +29027,7 @@
           <p:nvPr/>
         </p:nvPicPr>
         <p:blipFill>
-          <a:blip r:embed="rIdTheory32_rId3"/>
+          <a:blip r:embed="rId3"/>
           <a:stretch>
             <a:fillRect/>
           </a:stretch>
@@ -29306,7 +29306,7 @@
           <p:nvPr/>
         </p:nvPicPr>
         <p:blipFill>
-          <a:blip r:embed="rIdTheory32_rId4"/>
+          <a:blip r:embed="rId4"/>
           <a:stretch>
             <a:fillRect/>
           </a:stretch>
@@ -29756,7 +29756,7 @@
       </p:sp>
       <p:pic>
         <p:nvPicPr>
-          <p:cNvPr id="6" name="삽화:장치자리.svg" descr="illust_5096401292042459925_1792243894.png"/>
+          <p:cNvPr id="6" name="삽화:장치자리.svg" descr="illust_7611543176196104342_1793003853.png"/>
           <p:cNvPicPr>
             <a:picLocks noChangeAspect="1"/>
           </p:cNvPicPr>
@@ -36686,7 +36686,7 @@
       </p:sp>
       <p:pic>
         <p:nvPicPr>
-          <p:cNvPr id="6" name="삽화:세영역.svg" descr="illust_5154019262014234687_1792243894.png"/>
+          <p:cNvPr id="6" name="삽화:세영역.svg" descr="illust_1640150637262657737_1793003853.png"/>
           <p:cNvPicPr>
             <a:picLocks noChangeAspect="1"/>
           </p:cNvPicPr>
@@ -37256,7 +37256,7 @@
                 <a:ea typeface="맑은 고딕"/>
                 <a:cs typeface="맑은 고딕"/>
               </a:rPr>
-              <a:t>실습: 내 주제의 업무 명세 작성</a:t>
+              <a:t>실습: 다음 교대를 위한 인계 업무 정하기</a:t>
             </a:r>
           </a:p>
         </p:txBody>
@@ -37391,7 +37391,7 @@
                 <a:ea typeface="맑은 고딕"/>
                 <a:cs typeface="맑은 고딕"/>
               </a:rPr>
-              <a:t>업무 명세 한 장에 적는 것</a:t>
+              <a:t>인계안에 담을 입력과 확인</a:t>
             </a:r>
           </a:p>
         </p:txBody>
@@ -37430,7 +37430,7 @@
                 <a:ea typeface="맑은 고딕"/>
                 <a:cs typeface="맑은 고딕"/>
               </a:rPr>
-              <a:t>친숙한 작은 업무 하나를 골라 입력과 정보원, 에이전트 산출물, 사람 확인, 완료 조건을 적은 업무 명세 한 장을 만든다.</a:t>
+              <a:t>대상과 작업 메모를 실제 자료와 대조해 다음 교대가 확인할 일을 남긴다.</a:t>
             </a:r>
           </a:p>
         </p:txBody>
@@ -37511,8 +37511,8 @@
         </p:nvSpPr>
         <p:spPr>
           <a:xfrm>
-            <a:off x="548640" y="2313241"/>
-            <a:ext cx="2567863" cy="3356229"/>
+            <a:off x="548640" y="2510790"/>
+            <a:ext cx="2567863" cy="2961132"/>
           </a:xfrm>
           <a:prstGeom prst="roundRect">
             <a:avLst>
@@ -37544,7 +37544,7 @@
         </p:nvSpPr>
         <p:spPr>
           <a:xfrm>
-            <a:off x="777240" y="2514409"/>
+            <a:off x="777240" y="2711958"/>
             <a:ext cx="731520" cy="731520"/>
           </a:xfrm>
           <a:prstGeom prst="ellipse">
@@ -37574,14 +37574,14 @@
           <p:nvPr/>
         </p:nvPicPr>
         <p:blipFill>
-          <a:blip r:embed="rId2"/>
+          <a:blip r:embed="rId3"/>
           <a:stretch>
             <a:fillRect/>
           </a:stretch>
         </p:blipFill>
         <p:spPr>
           <a:xfrm>
-            <a:off x="930859" y="2668028"/>
+            <a:off x="930859" y="2865577"/>
             <a:ext cx="424281" cy="424281"/>
           </a:xfrm>
           <a:prstGeom prst="rect">
@@ -37597,8 +37597,8 @@
         </p:nvSpPr>
         <p:spPr>
           <a:xfrm>
-            <a:off x="713232" y="3337369"/>
-            <a:ext cx="2238679" cy="1829181"/>
+            <a:off x="713232" y="3534918"/>
+            <a:ext cx="2238679" cy="1434084"/>
           </a:xfrm>
           <a:prstGeom prst="rect">
             <a:avLst/>
@@ -37618,7 +37618,7 @@
               </a:spcAft>
             </a:pPr>
             <a:r>
-              <a:rPr sz="2150" b="1">
+              <a:rPr sz="1950" b="1">
                 <a:solidFill>
                   <a:srgbClr val="13294B"/>
                 </a:solidFill>
@@ -37626,11 +37626,11 @@
                 <a:ea typeface="맑은 고딕"/>
                 <a:cs typeface="맑은 고딕"/>
               </a:rPr>
-              <a:t>입력과 정보원</a:t>
-            </a:r>
-          </a:p>
-          <a:p>
-            <a:pPr algn="l" eaLnBrk="0" marL="200025" indent="-200025">
+              <a:t>입력</a:t>
+            </a:r>
+          </a:p>
+          <a:p>
+            <a:pPr algn="l" eaLnBrk="0" marL="177165" indent="-177165">
               <a:lnSpc>
                 <a:spcPct val="110000"/>
               </a:lnSpc>
@@ -37639,7 +37639,7 @@
               </a:spcAft>
             </a:pPr>
             <a:r>
-              <a:rPr sz="1750" b="0">
+              <a:rPr sz="1550" b="0">
                 <a:solidFill>
                   <a:srgbClr val="1F2A3A"/>
                 </a:solidFill>
@@ -37647,11 +37647,11 @@
                 <a:ea typeface="맑은 고딕"/>
                 <a:cs typeface="맑은 고딕"/>
               </a:rPr>
-              <a:t>• 무엇을 받아 시작하는가</a:t>
-            </a:r>
-          </a:p>
-          <a:p>
-            <a:pPr algn="l" eaLnBrk="0" marL="200025" indent="-200025">
+              <a:t>• 설비 · 교대 · 기준 시각</a:t>
+            </a:r>
+          </a:p>
+          <a:p>
+            <a:pPr algn="l" eaLnBrk="0" marL="177165" indent="-177165">
               <a:lnSpc>
                 <a:spcPct val="110000"/>
               </a:lnSpc>
@@ -37660,7 +37660,7 @@
               </a:spcAft>
             </a:pPr>
             <a:r>
-              <a:rPr sz="1750" b="0">
+              <a:rPr sz="1550" b="0">
                 <a:solidFill>
                   <a:srgbClr val="1F2A3A"/>
                 </a:solidFill>
@@ -37668,7 +37668,7 @@
                 <a:ea typeface="맑은 고딕"/>
                 <a:cs typeface="맑은 고딕"/>
               </a:rPr>
-              <a:t>• 어디에서 읽을 수 있는가</a:t>
+              <a:t>• 전달받은 작업 메모</a:t>
             </a:r>
           </a:p>
         </p:txBody>
@@ -37681,7 +37681,7 @@
         </p:nvSpPr>
         <p:spPr>
           <a:xfrm>
-            <a:off x="777240" y="5239702"/>
+            <a:off x="777240" y="5042154"/>
             <a:ext cx="822960" cy="292608"/>
           </a:xfrm>
           <a:prstGeom prst="roundRect">
@@ -37712,7 +37712,7 @@
         </p:nvSpPr>
         <p:spPr>
           <a:xfrm>
-            <a:off x="777240" y="5239702"/>
+            <a:off x="777240" y="5042154"/>
             <a:ext cx="822960" cy="292608"/>
           </a:xfrm>
           <a:prstGeom prst="rect">
@@ -37751,8 +37751,8 @@
         </p:nvSpPr>
         <p:spPr>
           <a:xfrm>
-            <a:off x="3390823" y="2313241"/>
-            <a:ext cx="2567863" cy="3356229"/>
+            <a:off x="3390823" y="2510790"/>
+            <a:ext cx="2567863" cy="2961132"/>
           </a:xfrm>
           <a:prstGeom prst="roundRect">
             <a:avLst>
@@ -37784,7 +37784,7 @@
         </p:nvSpPr>
         <p:spPr>
           <a:xfrm>
-            <a:off x="3619423" y="2514409"/>
+            <a:off x="3619423" y="2711958"/>
             <a:ext cx="731520" cy="731520"/>
           </a:xfrm>
           <a:prstGeom prst="ellipse">
@@ -37814,14 +37814,14 @@
           <p:nvPr/>
         </p:nvPicPr>
         <p:blipFill>
-          <a:blip r:embed="rId3"/>
+          <a:blip r:embed="rId4"/>
           <a:stretch>
             <a:fillRect/>
           </a:stretch>
         </p:blipFill>
         <p:spPr>
           <a:xfrm>
-            <a:off x="3773043" y="2668028"/>
+            <a:off x="3773043" y="2865577"/>
             <a:ext cx="424281" cy="424281"/>
           </a:xfrm>
           <a:prstGeom prst="rect">
@@ -37837,8 +37837,8 @@
         </p:nvSpPr>
         <p:spPr>
           <a:xfrm>
-            <a:off x="3555415" y="3337369"/>
-            <a:ext cx="2238679" cy="1829181"/>
+            <a:off x="3555415" y="3534918"/>
+            <a:ext cx="2238679" cy="1434084"/>
           </a:xfrm>
           <a:prstGeom prst="rect">
             <a:avLst/>
@@ -37858,7 +37858,7 @@
               </a:spcAft>
             </a:pPr>
             <a:r>
-              <a:rPr sz="2150" b="1">
+              <a:rPr sz="1950" b="1">
                 <a:solidFill>
                   <a:srgbClr val="13294B"/>
                 </a:solidFill>
@@ -37866,11 +37866,11 @@
                 <a:ea typeface="맑은 고딕"/>
                 <a:cs typeface="맑은 고딕"/>
               </a:rPr>
-              <a:t>에이전트 산출물</a:t>
-            </a:r>
-          </a:p>
-          <a:p>
-            <a:pPr algn="l" eaLnBrk="0" marL="200025" indent="-200025">
+              <a:t>정보원</a:t>
+            </a:r>
+          </a:p>
+          <a:p>
+            <a:pPr algn="l" eaLnBrk="0" marL="177165" indent="-177165">
               <a:lnSpc>
                 <a:spcPct val="110000"/>
               </a:lnSpc>
@@ -37879,7 +37879,7 @@
               </a:spcAft>
             </a:pPr>
             <a:r>
-              <a:rPr sz="1750" b="0">
+              <a:rPr sz="1550" b="0">
                 <a:solidFill>
                   <a:srgbClr val="1F2A3A"/>
                 </a:solidFill>
@@ -37887,11 +37887,11 @@
                 <a:ea typeface="맑은 고딕"/>
                 <a:cs typeface="맑은 고딕"/>
               </a:rPr>
-              <a:t>• 읽기, 분류, 추천 가운데</a:t>
-            </a:r>
-          </a:p>
-          <a:p>
-            <a:pPr algn="l" eaLnBrk="0" marL="200025" indent="-200025">
+              <a:t>• 점검 문서와 설비 이력</a:t>
+            </a:r>
+          </a:p>
+          <a:p>
+            <a:pPr algn="l" eaLnBrk="0" marL="177165" indent="-177165">
               <a:lnSpc>
                 <a:spcPct val="110000"/>
               </a:lnSpc>
@@ -37900,7 +37900,7 @@
               </a:spcAft>
             </a:pPr>
             <a:r>
-              <a:rPr sz="1750" b="0">
+              <a:rPr sz="1550" b="0">
                 <a:solidFill>
                   <a:srgbClr val="1F2A3A"/>
                 </a:solidFill>
@@ -37908,7 +37908,7 @@
                 <a:ea typeface="맑은 고딕"/>
                 <a:cs typeface="맑은 고딕"/>
               </a:rPr>
-              <a:t>• 무엇을 내는가</a:t>
+              <a:t>• 정비 · 재고 자료</a:t>
             </a:r>
           </a:p>
         </p:txBody>
@@ -37921,7 +37921,7 @@
         </p:nvSpPr>
         <p:spPr>
           <a:xfrm>
-            <a:off x="3619423" y="5239702"/>
+            <a:off x="3619423" y="5042154"/>
             <a:ext cx="822960" cy="292608"/>
           </a:xfrm>
           <a:prstGeom prst="roundRect">
@@ -37952,7 +37952,7 @@
         </p:nvSpPr>
         <p:spPr>
           <a:xfrm>
-            <a:off x="3619423" y="5239702"/>
+            <a:off x="3619423" y="5042154"/>
             <a:ext cx="822960" cy="292608"/>
           </a:xfrm>
           <a:prstGeom prst="rect">
@@ -37978,7 +37978,7 @@
                 <a:ea typeface="맑은 고딕"/>
                 <a:cs typeface="맑은 고딕"/>
               </a:rPr>
-              <a:t>산출물</a:t>
+              <a:t>정보원</a:t>
             </a:r>
           </a:p>
         </p:txBody>
@@ -37991,8 +37991,8 @@
         </p:nvSpPr>
         <p:spPr>
           <a:xfrm>
-            <a:off x="6233007" y="2313241"/>
-            <a:ext cx="2567863" cy="3356229"/>
+            <a:off x="6233007" y="2510790"/>
+            <a:ext cx="2567863" cy="2961132"/>
           </a:xfrm>
           <a:prstGeom prst="roundRect">
             <a:avLst>
@@ -38024,7 +38024,7 @@
         </p:nvSpPr>
         <p:spPr>
           <a:xfrm>
-            <a:off x="6461607" y="2514409"/>
+            <a:off x="6461607" y="2711958"/>
             <a:ext cx="731520" cy="731520"/>
           </a:xfrm>
           <a:prstGeom prst="ellipse">
@@ -38054,14 +38054,14 @@
           <p:nvPr/>
         </p:nvPicPr>
         <p:blipFill>
-          <a:blip r:embed="rId4"/>
+          <a:blip r:embed="rId5"/>
           <a:stretch>
             <a:fillRect/>
           </a:stretch>
         </p:blipFill>
         <p:spPr>
           <a:xfrm>
-            <a:off x="6615226" y="2668028"/>
+            <a:off x="6615226" y="2865577"/>
             <a:ext cx="424281" cy="424281"/>
           </a:xfrm>
           <a:prstGeom prst="rect">
@@ -38077,8 +38077,8 @@
         </p:nvSpPr>
         <p:spPr>
           <a:xfrm>
-            <a:off x="6397599" y="3337369"/>
-            <a:ext cx="2238679" cy="1829181"/>
+            <a:off x="6397599" y="3534918"/>
+            <a:ext cx="2238679" cy="1434084"/>
           </a:xfrm>
           <a:prstGeom prst="rect">
             <a:avLst/>
@@ -38098,7 +38098,7 @@
               </a:spcAft>
             </a:pPr>
             <a:r>
-              <a:rPr sz="2150" b="1">
+              <a:rPr sz="1950" b="1">
                 <a:solidFill>
                   <a:srgbClr val="13294B"/>
                 </a:solidFill>
@@ -38110,7 +38110,7 @@
             </a:r>
           </a:p>
           <a:p>
-            <a:pPr algn="l" eaLnBrk="0" marL="200025" indent="-200025">
+            <a:pPr algn="l" eaLnBrk="0" marL="177165" indent="-177165">
               <a:lnSpc>
                 <a:spcPct val="110000"/>
               </a:lnSpc>
@@ -38119,7 +38119,7 @@
               </a:spcAft>
             </a:pPr>
             <a:r>
-              <a:rPr sz="1750" b="0">
+              <a:rPr sz="1550" b="0">
                 <a:solidFill>
                   <a:srgbClr val="1F2A3A"/>
                 </a:solidFill>
@@ -38127,11 +38127,11 @@
                 <a:ea typeface="맑은 고딕"/>
                 <a:cs typeface="맑은 고딕"/>
               </a:rPr>
-              <a:t>• 어느 결과를</a:t>
-            </a:r>
-          </a:p>
-          <a:p>
-            <a:pPr algn="l" eaLnBrk="0" marL="200025" indent="-200025">
+              <a:t>• 인계자가 검토</a:t>
+            </a:r>
+          </a:p>
+          <a:p>
+            <a:pPr algn="l" eaLnBrk="0" marL="177165" indent="-177165">
               <a:lnSpc>
                 <a:spcPct val="110000"/>
               </a:lnSpc>
@@ -38140,7 +38140,7 @@
               </a:spcAft>
             </a:pPr>
             <a:r>
-              <a:rPr sz="1750" b="0">
+              <a:rPr sz="1550" b="0">
                 <a:solidFill>
                   <a:srgbClr val="1F2A3A"/>
                 </a:solidFill>
@@ -38148,7 +38148,7 @@
                 <a:ea typeface="맑은 고딕"/>
                 <a:cs typeface="맑은 고딕"/>
               </a:rPr>
-              <a:t>• 누가 확인하는가</a:t>
+              <a:t>• 인수자가 확인</a:t>
             </a:r>
           </a:p>
         </p:txBody>
@@ -38161,7 +38161,7 @@
         </p:nvSpPr>
         <p:spPr>
           <a:xfrm>
-            <a:off x="6461607" y="5239702"/>
+            <a:off x="6461607" y="5042154"/>
             <a:ext cx="822960" cy="292608"/>
           </a:xfrm>
           <a:prstGeom prst="roundRect">
@@ -38192,7 +38192,7 @@
         </p:nvSpPr>
         <p:spPr>
           <a:xfrm>
-            <a:off x="6461607" y="5239702"/>
+            <a:off x="6461607" y="5042154"/>
             <a:ext cx="822960" cy="292608"/>
           </a:xfrm>
           <a:prstGeom prst="rect">
@@ -38231,8 +38231,8 @@
         </p:nvSpPr>
         <p:spPr>
           <a:xfrm>
-            <a:off x="9075191" y="2313241"/>
-            <a:ext cx="2567863" cy="3356229"/>
+            <a:off x="9075191" y="2510790"/>
+            <a:ext cx="2567863" cy="2961132"/>
           </a:xfrm>
           <a:prstGeom prst="roundRect">
             <a:avLst>
@@ -38264,7 +38264,7 @@
         </p:nvSpPr>
         <p:spPr>
           <a:xfrm>
-            <a:off x="9303791" y="2514409"/>
+            <a:off x="9303791" y="2711958"/>
             <a:ext cx="731520" cy="731520"/>
           </a:xfrm>
           <a:prstGeom prst="ellipse">
@@ -38294,14 +38294,14 @@
           <p:nvPr/>
         </p:nvPicPr>
         <p:blipFill>
-          <a:blip r:embed="rId5"/>
+          <a:blip r:embed="rId6"/>
           <a:stretch>
             <a:fillRect/>
           </a:stretch>
         </p:blipFill>
         <p:spPr>
           <a:xfrm>
-            <a:off x="9457410" y="2668028"/>
+            <a:off x="9457410" y="2865577"/>
             <a:ext cx="424281" cy="424281"/>
           </a:xfrm>
           <a:prstGeom prst="rect">
@@ -38317,8 +38317,8 @@
         </p:nvSpPr>
         <p:spPr>
           <a:xfrm>
-            <a:off x="9239783" y="3337369"/>
-            <a:ext cx="2238679" cy="1829181"/>
+            <a:off x="9239783" y="3534918"/>
+            <a:ext cx="2238679" cy="1434084"/>
           </a:xfrm>
           <a:prstGeom prst="rect">
             <a:avLst/>
@@ -38338,7 +38338,7 @@
               </a:spcAft>
             </a:pPr>
             <a:r>
-              <a:rPr sz="2150" b="1">
+              <a:rPr sz="1950" b="1">
                 <a:solidFill>
                   <a:srgbClr val="13294B"/>
                 </a:solidFill>
@@ -38350,7 +38350,7 @@
             </a:r>
           </a:p>
           <a:p>
-            <a:pPr algn="l" eaLnBrk="0" marL="200025" indent="-200025">
+            <a:pPr algn="l" eaLnBrk="0" marL="177165" indent="-177165">
               <a:lnSpc>
                 <a:spcPct val="110000"/>
               </a:lnSpc>
@@ -38359,7 +38359,7 @@
               </a:spcAft>
             </a:pPr>
             <a:r>
-              <a:rPr sz="1750" b="0">
+              <a:rPr sz="1550" b="0">
                 <a:solidFill>
                   <a:srgbClr val="1F2A3A"/>
                 </a:solidFill>
@@ -38367,11 +38367,11 @@
                 <a:ea typeface="맑은 고딕"/>
                 <a:cs typeface="맑은 고딕"/>
               </a:rPr>
-              <a:t>• 무엇이 되면 끝났다고 보는가</a:t>
-            </a:r>
-          </a:p>
-          <a:p>
-            <a:pPr algn="l" eaLnBrk="0" marL="200025" indent="-200025">
+              <a:t>• 근거와 미확인 항목</a:t>
+            </a:r>
+          </a:p>
+          <a:p>
+            <a:pPr algn="l" eaLnBrk="0" marL="177165" indent="-177165">
               <a:lnSpc>
                 <a:spcPct val="110000"/>
               </a:lnSpc>
@@ -38380,7 +38380,7 @@
               </a:spcAft>
             </a:pPr>
             <a:r>
-              <a:rPr sz="1750" b="0">
+              <a:rPr sz="1550" b="0">
                 <a:solidFill>
                   <a:srgbClr val="1F2A3A"/>
                 </a:solidFill>
@@ -38388,7 +38388,7 @@
                 <a:ea typeface="맑은 고딕"/>
                 <a:cs typeface="맑은 고딕"/>
               </a:rPr>
-              <a:t>• 하지 못한 일은 어떻게 남기는가</a:t>
+              <a:t>• 다음 확인할 일 기록</a:t>
             </a:r>
           </a:p>
         </p:txBody>
@@ -38401,7 +38401,7 @@
         </p:nvSpPr>
         <p:spPr>
           <a:xfrm>
-            <a:off x="9303791" y="5239702"/>
+            <a:off x="9303791" y="5042154"/>
             <a:ext cx="1021080" cy="292608"/>
           </a:xfrm>
           <a:prstGeom prst="roundRect">
@@ -38432,7 +38432,7 @@
         </p:nvSpPr>
         <p:spPr>
           <a:xfrm>
-            <a:off x="9303791" y="5239702"/>
+            <a:off x="9303791" y="5042154"/>
             <a:ext cx="1021080" cy="292608"/>
           </a:xfrm>
           <a:prstGeom prst="rect">
@@ -38591,7 +38591,7 @@
                 <a:ea typeface="맑은 고딕"/>
                 <a:cs typeface="맑은 고딕"/>
               </a:rPr>
-              <a:t>실습: 내 문서로 만드는 작은 지식 구조</a:t>
+              <a:t>실습: 제공 점검 문서를 지식으로 연결하기</a:t>
             </a:r>
           </a:p>
         </p:txBody>
@@ -38726,7 +38726,7 @@
                 <a:ea typeface="맑은 고딕"/>
                 <a:cs typeface="맑은 고딕"/>
               </a:rPr>
-              <a:t>스키마와 샘플 인스턴스, 그리고 질문의 조회</a:t>
+              <a:t>문서의 절차를 원문과 대조해 추가한다</a:t>
             </a:r>
           </a:p>
         </p:txBody>
@@ -38765,7 +38765,7 @@
                 <a:ea typeface="맑은 고딕"/>
                 <a:cs typeface="맑은 고딕"/>
               </a:rPr>
-              <a:t>내 문서에서 뽑은 스키마와 샘플 인스턴스는 출처와 식별자를 붙여, 수업용으로 따로 둔 이름 공간에서 조회로 확인한다.</a:t>
+              <a:t>제공된 보충 문서에서 추출한 절차와 출처를 검토한 뒤 기존 지식에 추가한다.</a:t>
             </a:r>
           </a:p>
         </p:txBody>
@@ -38846,8 +38846,8 @@
         </p:nvSpPr>
         <p:spPr>
           <a:xfrm>
-            <a:off x="548640" y="2448814"/>
-            <a:ext cx="2567863" cy="3085084"/>
+            <a:off x="548640" y="2371343"/>
+            <a:ext cx="2567863" cy="3240024"/>
           </a:xfrm>
           <a:prstGeom prst="roundRect">
             <a:avLst>
@@ -38879,7 +38879,7 @@
         </p:nvSpPr>
         <p:spPr>
           <a:xfrm>
-            <a:off x="777240" y="2649982"/>
+            <a:off x="777240" y="2572511"/>
             <a:ext cx="731520" cy="731520"/>
           </a:xfrm>
           <a:prstGeom prst="ellipse">
@@ -38909,14 +38909,14 @@
           <p:nvPr/>
         </p:nvPicPr>
         <p:blipFill>
-          <a:blip r:embed="rId2"/>
+          <a:blip r:embed="rId3"/>
           <a:stretch>
             <a:fillRect/>
           </a:stretch>
         </p:blipFill>
         <p:spPr>
           <a:xfrm>
-            <a:off x="930859" y="2803601"/>
+            <a:off x="930859" y="2726131"/>
             <a:ext cx="424281" cy="424281"/>
           </a:xfrm>
           <a:prstGeom prst="rect">
@@ -38932,8 +38932,8 @@
         </p:nvSpPr>
         <p:spPr>
           <a:xfrm>
-            <a:off x="713232" y="3472942"/>
-            <a:ext cx="2238679" cy="1558036"/>
+            <a:off x="713232" y="3395471"/>
+            <a:ext cx="2238679" cy="1712976"/>
           </a:xfrm>
           <a:prstGeom prst="rect">
             <a:avLst/>
@@ -38953,7 +38953,7 @@
               </a:spcAft>
             </a:pPr>
             <a:r>
-              <a:rPr sz="1800" b="1">
+              <a:rPr sz="2000" b="1">
                 <a:solidFill>
                   <a:srgbClr val="13294B"/>
                 </a:solidFill>
@@ -38965,7 +38965,7 @@
             </a:r>
           </a:p>
           <a:p>
-            <a:pPr algn="l" eaLnBrk="0" marL="160020" indent="-160020">
+            <a:pPr algn="l" eaLnBrk="0" marL="182880" indent="-182880">
               <a:lnSpc>
                 <a:spcPct val="110000"/>
               </a:lnSpc>
@@ -38974,7 +38974,7 @@
               </a:spcAft>
             </a:pPr>
             <a:r>
-              <a:rPr sz="1400" b="0">
+              <a:rPr sz="1600" b="0">
                 <a:solidFill>
                   <a:srgbClr val="1F2A3A"/>
                 </a:solidFill>
@@ -38982,11 +38982,11 @@
                 <a:ea typeface="맑은 고딕"/>
                 <a:cs typeface="맑은 고딕"/>
               </a:rPr>
-              <a:t>• 제공된 문서나 공개할 수 있는 내 자료</a:t>
-            </a:r>
-          </a:p>
-          <a:p>
-            <a:pPr algn="l" eaLnBrk="0" marL="160020" indent="-160020">
+              <a:t>• 제공된 HI-01</a:t>
+            </a:r>
+          </a:p>
+          <a:p>
+            <a:pPr algn="l" eaLnBrk="0" marL="182880" indent="-182880">
               <a:lnSpc>
                 <a:spcPct val="110000"/>
               </a:lnSpc>
@@ -38995,7 +38995,7 @@
               </a:spcAft>
             </a:pPr>
             <a:r>
-              <a:rPr sz="1400" b="0">
+              <a:rPr sz="1600" b="0">
                 <a:solidFill>
                   <a:srgbClr val="1F2A3A"/>
                 </a:solidFill>
@@ -39003,7 +39003,7 @@
                 <a:ea typeface="맑은 고딕"/>
                 <a:cs typeface="맑은 고딕"/>
               </a:rPr>
-              <a:t>• 문서마다 답할 질문</a:t>
+              <a:t>• 점검 보충 문서</a:t>
             </a:r>
           </a:p>
         </p:txBody>
@@ -39016,7 +39016,7 @@
         </p:nvSpPr>
         <p:spPr>
           <a:xfrm>
-            <a:off x="777240" y="5104130"/>
+            <a:off x="777240" y="5181600"/>
             <a:ext cx="822960" cy="292608"/>
           </a:xfrm>
           <a:prstGeom prst="roundRect">
@@ -39047,7 +39047,7 @@
         </p:nvSpPr>
         <p:spPr>
           <a:xfrm>
-            <a:off x="777240" y="5104130"/>
+            <a:off x="777240" y="5181600"/>
             <a:ext cx="822960" cy="292608"/>
           </a:xfrm>
           <a:prstGeom prst="rect">
@@ -39086,8 +39086,8 @@
         </p:nvSpPr>
         <p:spPr>
           <a:xfrm>
-            <a:off x="3390823" y="2448814"/>
-            <a:ext cx="2567863" cy="3085084"/>
+            <a:off x="3390823" y="2371343"/>
+            <a:ext cx="2567863" cy="3240024"/>
           </a:xfrm>
           <a:prstGeom prst="roundRect">
             <a:avLst>
@@ -39119,7 +39119,7 @@
         </p:nvSpPr>
         <p:spPr>
           <a:xfrm>
-            <a:off x="3619423" y="2649982"/>
+            <a:off x="3619423" y="2572511"/>
             <a:ext cx="731520" cy="731520"/>
           </a:xfrm>
           <a:prstGeom prst="ellipse">
@@ -39149,14 +39149,14 @@
           <p:nvPr/>
         </p:nvPicPr>
         <p:blipFill>
-          <a:blip r:embed="rId3"/>
+          <a:blip r:embed="rId4"/>
           <a:stretch>
             <a:fillRect/>
           </a:stretch>
         </p:blipFill>
         <p:spPr>
           <a:xfrm>
-            <a:off x="3773043" y="2803601"/>
+            <a:off x="3773043" y="2726131"/>
             <a:ext cx="424281" cy="424281"/>
           </a:xfrm>
           <a:prstGeom prst="rect">
@@ -39172,8 +39172,8 @@
         </p:nvSpPr>
         <p:spPr>
           <a:xfrm>
-            <a:off x="3555415" y="3472942"/>
-            <a:ext cx="2238679" cy="1558036"/>
+            <a:off x="3555415" y="3395471"/>
+            <a:ext cx="2238679" cy="1712976"/>
           </a:xfrm>
           <a:prstGeom prst="rect">
             <a:avLst/>
@@ -39193,7 +39193,7 @@
               </a:spcAft>
             </a:pPr>
             <a:r>
-              <a:rPr sz="1800" b="1">
+              <a:rPr sz="2000" b="1">
                 <a:solidFill>
                   <a:srgbClr val="13294B"/>
                 </a:solidFill>
@@ -39205,7 +39205,7 @@
             </a:r>
           </a:p>
           <a:p>
-            <a:pPr algn="l" eaLnBrk="0" marL="148590" indent="-148590">
+            <a:pPr algn="l" eaLnBrk="0" marL="182880" indent="-182880">
               <a:lnSpc>
                 <a:spcPct val="110000"/>
               </a:lnSpc>
@@ -39214,7 +39214,7 @@
               </a:spcAft>
             </a:pPr>
             <a:r>
-              <a:rPr sz="1300" b="0">
+              <a:rPr sz="1600" b="0">
                 <a:solidFill>
                   <a:srgbClr val="1F2A3A"/>
                 </a:solidFill>
@@ -39222,11 +39222,11 @@
                 <a:ea typeface="맑은 고딕"/>
                 <a:cs typeface="맑은 고딕"/>
               </a:rPr>
-              <a:t>• 질문에 필요한 핵심 개념</a:t>
-            </a:r>
-          </a:p>
-          <a:p>
-            <a:pPr algn="l" eaLnBrk="0" marL="148590" indent="-148590">
+              <a:t>• 설비 · 작업지시 · 부품</a:t>
+            </a:r>
+          </a:p>
+          <a:p>
+            <a:pPr algn="l" eaLnBrk="0" marL="182880" indent="-182880">
               <a:lnSpc>
                 <a:spcPct val="110000"/>
               </a:lnSpc>
@@ -39235,7 +39235,7 @@
               </a:spcAft>
             </a:pPr>
             <a:r>
-              <a:rPr sz="1300" b="0">
+              <a:rPr sz="1600" b="0">
                 <a:solidFill>
                   <a:srgbClr val="1F2A3A"/>
                 </a:solidFill>
@@ -39243,7 +39243,7 @@
                 <a:ea typeface="맑은 고딕"/>
                 <a:cs typeface="맑은 고딕"/>
               </a:rPr>
-              <a:t>• 그 개념의 속성과 관계</a:t>
+              <a:t>• 작업 메모 확인 절차</a:t>
             </a:r>
           </a:p>
         </p:txBody>
@@ -39256,7 +39256,7 @@
         </p:nvSpPr>
         <p:spPr>
           <a:xfrm>
-            <a:off x="3619423" y="5104130"/>
+            <a:off x="3619423" y="5181600"/>
             <a:ext cx="822960" cy="292608"/>
           </a:xfrm>
           <a:prstGeom prst="roundRect">
@@ -39287,7 +39287,7 @@
         </p:nvSpPr>
         <p:spPr>
           <a:xfrm>
-            <a:off x="3619423" y="5104130"/>
+            <a:off x="3619423" y="5181600"/>
             <a:ext cx="822960" cy="292608"/>
           </a:xfrm>
           <a:prstGeom prst="rect">
@@ -39326,8 +39326,8 @@
         </p:nvSpPr>
         <p:spPr>
           <a:xfrm>
-            <a:off x="6233007" y="2448814"/>
-            <a:ext cx="2567863" cy="3085084"/>
+            <a:off x="6233007" y="2371343"/>
+            <a:ext cx="2567863" cy="3240024"/>
           </a:xfrm>
           <a:prstGeom prst="roundRect">
             <a:avLst>
@@ -39359,7 +39359,7 @@
         </p:nvSpPr>
         <p:spPr>
           <a:xfrm>
-            <a:off x="6461607" y="2649982"/>
+            <a:off x="6461607" y="2572511"/>
             <a:ext cx="731520" cy="731520"/>
           </a:xfrm>
           <a:prstGeom prst="ellipse">
@@ -39389,14 +39389,14 @@
           <p:nvPr/>
         </p:nvPicPr>
         <p:blipFill>
-          <a:blip r:embed="rId4"/>
+          <a:blip r:embed="rId5"/>
           <a:stretch>
             <a:fillRect/>
           </a:stretch>
         </p:blipFill>
         <p:spPr>
           <a:xfrm>
-            <a:off x="6615226" y="2803601"/>
+            <a:off x="6615226" y="2726131"/>
             <a:ext cx="424281" cy="424281"/>
           </a:xfrm>
           <a:prstGeom prst="rect">
@@ -39412,8 +39412,8 @@
         </p:nvSpPr>
         <p:spPr>
           <a:xfrm>
-            <a:off x="6397599" y="3472942"/>
-            <a:ext cx="2238679" cy="1558036"/>
+            <a:off x="6397599" y="3395471"/>
+            <a:ext cx="2238679" cy="1712976"/>
           </a:xfrm>
           <a:prstGeom prst="rect">
             <a:avLst/>
@@ -39433,7 +39433,7 @@
               </a:spcAft>
             </a:pPr>
             <a:r>
-              <a:rPr sz="1800" b="1">
+              <a:rPr sz="2000" b="1">
                 <a:solidFill>
                   <a:srgbClr val="13294B"/>
                 </a:solidFill>
@@ -39441,11 +39441,11 @@
                 <a:ea typeface="맑은 고딕"/>
                 <a:cs typeface="맑은 고딕"/>
               </a:rPr>
-              <a:t>산출물</a:t>
-            </a:r>
-          </a:p>
-          <a:p>
-            <a:pPr algn="l" eaLnBrk="0" marL="160020" indent="-160020">
+              <a:t>검토</a:t>
+            </a:r>
+          </a:p>
+          <a:p>
+            <a:pPr algn="l" eaLnBrk="0" marL="182880" indent="-182880">
               <a:lnSpc>
                 <a:spcPct val="110000"/>
               </a:lnSpc>
@@ -39454,7 +39454,7 @@
               </a:spcAft>
             </a:pPr>
             <a:r>
-              <a:rPr sz="1400" b="0">
+              <a:rPr sz="1600" b="0">
                 <a:solidFill>
                   <a:srgbClr val="1F2A3A"/>
                 </a:solidFill>
@@ -39462,11 +39462,11 @@
                 <a:ea typeface="맑은 고딕"/>
                 <a:cs typeface="맑은 고딕"/>
               </a:rPr>
-              <a:t>• 스키마</a:t>
-            </a:r>
-          </a:p>
-          <a:p>
-            <a:pPr algn="l" eaLnBrk="0" marL="160020" indent="-160020">
+              <a:t>• 추출된 내용과</a:t>
+            </a:r>
+          </a:p>
+          <a:p>
+            <a:pPr algn="l" eaLnBrk="0" marL="182880" indent="-182880">
               <a:lnSpc>
                 <a:spcPct val="110000"/>
               </a:lnSpc>
@@ -39475,7 +39475,7 @@
               </a:spcAft>
             </a:pPr>
             <a:r>
-              <a:rPr sz="1400" b="0">
+              <a:rPr sz="1600" b="0">
                 <a:solidFill>
                   <a:srgbClr val="1F2A3A"/>
                 </a:solidFill>
@@ -39483,28 +39483,7 @@
                 <a:ea typeface="맑은 고딕"/>
                 <a:cs typeface="맑은 고딕"/>
               </a:rPr>
-              <a:t>• 식별자와 출처를 붙인 샘플 인스턴스</a:t>
-            </a:r>
-          </a:p>
-          <a:p>
-            <a:pPr algn="l" eaLnBrk="0" marL="160020" indent="-160020">
-              <a:lnSpc>
-                <a:spcPct val="110000"/>
-              </a:lnSpc>
-              <a:spcAft>
-                <a:spcPts val="400"/>
-              </a:spcAft>
-            </a:pPr>
-            <a:r>
-              <a:rPr sz="1400" b="0">
-                <a:solidFill>
-                  <a:srgbClr val="1F2A3A"/>
-                </a:solidFill>
-                <a:latin typeface="맑은 고딕"/>
-                <a:ea typeface="맑은 고딕"/>
-                <a:cs typeface="맑은 고딕"/>
-              </a:rPr>
-              <a:t>• 질문의 조회문</a:t>
+              <a:t>• 원문 위치를 대조</a:t>
             </a:r>
           </a:p>
         </p:txBody>
@@ -39517,7 +39496,7 @@
         </p:nvSpPr>
         <p:spPr>
           <a:xfrm>
-            <a:off x="6461607" y="5104130"/>
+            <a:off x="6461607" y="5181600"/>
             <a:ext cx="822960" cy="292608"/>
           </a:xfrm>
           <a:prstGeom prst="roundRect">
@@ -39548,7 +39527,7 @@
         </p:nvSpPr>
         <p:spPr>
           <a:xfrm>
-            <a:off x="6461607" y="5104130"/>
+            <a:off x="6461607" y="5181600"/>
             <a:ext cx="822960" cy="292608"/>
           </a:xfrm>
           <a:prstGeom prst="rect">
@@ -39574,7 +39553,7 @@
                 <a:ea typeface="맑은 고딕"/>
                 <a:cs typeface="맑은 고딕"/>
               </a:rPr>
-              <a:t>산출물</a:t>
+              <a:t>검토</a:t>
             </a:r>
           </a:p>
         </p:txBody>
@@ -39587,8 +39566,8 @@
         </p:nvSpPr>
         <p:spPr>
           <a:xfrm>
-            <a:off x="9075191" y="2448814"/>
-            <a:ext cx="2567863" cy="3085084"/>
+            <a:off x="9075191" y="2371343"/>
+            <a:ext cx="2567863" cy="3240024"/>
           </a:xfrm>
           <a:prstGeom prst="roundRect">
             <a:avLst>
@@ -39620,7 +39599,7 @@
         </p:nvSpPr>
         <p:spPr>
           <a:xfrm>
-            <a:off x="9303791" y="2649982"/>
+            <a:off x="9303791" y="2572511"/>
             <a:ext cx="731520" cy="731520"/>
           </a:xfrm>
           <a:prstGeom prst="ellipse">
@@ -39650,14 +39629,14 @@
           <p:nvPr/>
         </p:nvPicPr>
         <p:blipFill>
-          <a:blip r:embed="rId5"/>
+          <a:blip r:embed="rId6"/>
           <a:stretch>
             <a:fillRect/>
           </a:stretch>
         </p:blipFill>
         <p:spPr>
           <a:xfrm>
-            <a:off x="9457410" y="2803601"/>
+            <a:off x="9457410" y="2726131"/>
             <a:ext cx="424281" cy="424281"/>
           </a:xfrm>
           <a:prstGeom prst="rect">
@@ -39673,8 +39652,8 @@
         </p:nvSpPr>
         <p:spPr>
           <a:xfrm>
-            <a:off x="9239783" y="3472942"/>
-            <a:ext cx="2238679" cy="1558036"/>
+            <a:off x="9239783" y="3395471"/>
+            <a:ext cx="2238679" cy="1712976"/>
           </a:xfrm>
           <a:prstGeom prst="rect">
             <a:avLst/>
@@ -39694,7 +39673,7 @@
               </a:spcAft>
             </a:pPr>
             <a:r>
-              <a:rPr sz="1800" b="1">
+              <a:rPr sz="2000" b="1">
                 <a:solidFill>
                   <a:srgbClr val="13294B"/>
                 </a:solidFill>
@@ -39706,7 +39685,7 @@
             </a:r>
           </a:p>
           <a:p>
-            <a:pPr algn="l" eaLnBrk="0" marL="160020" indent="-160020">
+            <a:pPr algn="l" eaLnBrk="0" marL="182880" indent="-182880">
               <a:lnSpc>
                 <a:spcPct val="110000"/>
               </a:lnSpc>
@@ -39715,7 +39694,7 @@
               </a:spcAft>
             </a:pPr>
             <a:r>
-              <a:rPr sz="1400" b="0">
+              <a:rPr sz="1600" b="0">
                 <a:solidFill>
                   <a:srgbClr val="1F2A3A"/>
                 </a:solidFill>
@@ -39723,11 +39702,11 @@
                 <a:ea typeface="맑은 고딕"/>
                 <a:cs typeface="맑은 고딕"/>
               </a:rPr>
-              <a:t>• 따로 둔 이름 공간에 넣는다</a:t>
-            </a:r>
-          </a:p>
-          <a:p>
-            <a:pPr algn="l" eaLnBrk="0" marL="160020" indent="-160020">
+              <a:t>• 검토한 절차를 추가</a:t>
+            </a:r>
+          </a:p>
+          <a:p>
+            <a:pPr algn="l" eaLnBrk="0" marL="182880" indent="-182880">
               <a:lnSpc>
                 <a:spcPct val="110000"/>
               </a:lnSpc>
@@ -39736,7 +39715,7 @@
               </a:spcAft>
             </a:pPr>
             <a:r>
-              <a:rPr sz="1400" b="0">
+              <a:rPr sz="1600" b="0">
                 <a:solidFill>
                   <a:srgbClr val="1F2A3A"/>
                 </a:solidFill>
@@ -39744,7 +39723,7 @@
                 <a:ea typeface="맑은 고딕"/>
                 <a:cs typeface="맑은 고딕"/>
               </a:rPr>
-              <a:t>• 정한 질문이 조회로 풀린다</a:t>
+              <a:t>• 기존 지식은 유지</a:t>
             </a:r>
           </a:p>
         </p:txBody>
@@ -39757,7 +39736,7 @@
         </p:nvSpPr>
         <p:spPr>
           <a:xfrm>
-            <a:off x="9303791" y="5104130"/>
+            <a:off x="9303791" y="5181600"/>
             <a:ext cx="1021080" cy="292608"/>
           </a:xfrm>
           <a:prstGeom prst="roundRect">
@@ -39788,7 +39767,7 @@
         </p:nvSpPr>
         <p:spPr>
           <a:xfrm>
-            <a:off x="9303791" y="5104130"/>
+            <a:off x="9303791" y="5181600"/>
             <a:ext cx="1021080" cy="292608"/>
           </a:xfrm>
           <a:prstGeom prst="rect">
@@ -39947,7 +39926,7 @@
                 <a:ea typeface="맑은 고딕"/>
                 <a:cs typeface="맑은 고딕"/>
               </a:rPr>
-              <a:t>실습: 내 지식을 읽어 제안하는 에이전트</a:t>
+              <a:t>실습: 교대 인계안을 작성할 에이전트 만들기</a:t>
             </a:r>
           </a:p>
         </p:txBody>
@@ -40082,7 +40061,7 @@
                 <a:ea typeface="맑은 고딕"/>
                 <a:cs typeface="맑은 고딕"/>
               </a:rPr>
-              <a:t>확인된 것만 제안하는 에이전트의 구성</a:t>
+              <a:t>네 영역을 확인하고 불일치를 남긴다</a:t>
             </a:r>
           </a:p>
         </p:txBody>
@@ -40121,7 +40100,7 @@
                 <a:ea typeface="맑은 고딕"/>
                 <a:cs typeface="맑은 고딕"/>
               </a:rPr>
-              <a:t>이 실습의 작은 에이전트는 확인된 정보로만 제안하고, 미확인 값과 권한 밖의 작업은 지어내지 않고 보류로 낸다.</a:t>
+              <a:t>실제 조회 결과와 작업 메모를 대조해 확인된 것과 확인할 일을 구분한다.</a:t>
             </a:r>
           </a:p>
         </p:txBody>
@@ -40202,8 +40181,8 @@
         </p:nvSpPr>
         <p:spPr>
           <a:xfrm>
-            <a:off x="548640" y="2557272"/>
-            <a:ext cx="2567863" cy="2868168"/>
+            <a:off x="548640" y="2313241"/>
+            <a:ext cx="2567863" cy="3356229"/>
           </a:xfrm>
           <a:prstGeom prst="roundRect">
             <a:avLst>
@@ -40235,7 +40214,7 @@
         </p:nvSpPr>
         <p:spPr>
           <a:xfrm>
-            <a:off x="777240" y="2758440"/>
+            <a:off x="777240" y="2514409"/>
             <a:ext cx="731520" cy="731520"/>
           </a:xfrm>
           <a:prstGeom prst="ellipse">
@@ -40265,14 +40244,14 @@
           <p:nvPr/>
         </p:nvPicPr>
         <p:blipFill>
-          <a:blip r:embed="rId2"/>
+          <a:blip r:embed="rId3"/>
           <a:stretch>
             <a:fillRect/>
           </a:stretch>
         </p:blipFill>
         <p:spPr>
           <a:xfrm>
-            <a:off x="930859" y="2912059"/>
+            <a:off x="930859" y="2668028"/>
             <a:ext cx="424281" cy="424281"/>
           </a:xfrm>
           <a:prstGeom prst="rect">
@@ -40288,8 +40267,8 @@
         </p:nvSpPr>
         <p:spPr>
           <a:xfrm>
-            <a:off x="713232" y="3581400"/>
-            <a:ext cx="2238679" cy="1341120"/>
+            <a:off x="713232" y="3337369"/>
+            <a:ext cx="2238679" cy="1829181"/>
           </a:xfrm>
           <a:prstGeom prst="rect">
             <a:avLst/>
@@ -40309,7 +40288,7 @@
               </a:spcAft>
             </a:pPr>
             <a:r>
-              <a:rPr sz="1800" b="1">
+              <a:rPr sz="2150" b="1">
                 <a:solidFill>
                   <a:srgbClr val="13294B"/>
                 </a:solidFill>
@@ -40321,7 +40300,7 @@
             </a:r>
           </a:p>
           <a:p>
-            <a:pPr algn="l" eaLnBrk="0" marL="148590" indent="-148590">
+            <a:pPr algn="l" eaLnBrk="0" marL="200025" indent="-200025">
               <a:lnSpc>
                 <a:spcPct val="110000"/>
               </a:lnSpc>
@@ -40330,7 +40309,7 @@
               </a:spcAft>
             </a:pPr>
             <a:r>
-              <a:rPr sz="1300" b="0">
+              <a:rPr sz="1750" b="0">
                 <a:solidFill>
                   <a:srgbClr val="1F2A3A"/>
                 </a:solidFill>
@@ -40338,11 +40317,11 @@
                 <a:ea typeface="맑은 고딕"/>
                 <a:cs typeface="맑은 고딕"/>
               </a:rPr>
-              <a:t>• 앞서 만든 스키마와 자료</a:t>
-            </a:r>
-          </a:p>
-          <a:p>
-            <a:pPr algn="l" eaLnBrk="0" marL="148590" indent="-148590">
+              <a:t>• 대상 · 교대 · 기준 시각</a:t>
+            </a:r>
+          </a:p>
+          <a:p>
+            <a:pPr algn="l" eaLnBrk="0" marL="200025" indent="-200025">
               <a:lnSpc>
                 <a:spcPct val="110000"/>
               </a:lnSpc>
@@ -40351,7 +40330,7 @@
               </a:spcAft>
             </a:pPr>
             <a:r>
-              <a:rPr sz="1300" b="0">
+              <a:rPr sz="1750" b="0">
                 <a:solidFill>
                   <a:srgbClr val="1F2A3A"/>
                 </a:solidFill>
@@ -40359,7 +40338,7 @@
                 <a:ea typeface="맑은 고딕"/>
                 <a:cs typeface="맑은 고딕"/>
               </a:rPr>
-              <a:t>• 쓸 수 있는 읽기 MCP</a:t>
+              <a:t>• 전달받은 작업 메모</a:t>
             </a:r>
           </a:p>
         </p:txBody>
@@ -40372,7 +40351,7 @@
         </p:nvSpPr>
         <p:spPr>
           <a:xfrm>
-            <a:off x="777240" y="4995672"/>
+            <a:off x="777240" y="5239702"/>
             <a:ext cx="822960" cy="292608"/>
           </a:xfrm>
           <a:prstGeom prst="roundRect">
@@ -40403,7 +40382,7 @@
         </p:nvSpPr>
         <p:spPr>
           <a:xfrm>
-            <a:off x="777240" y="4995672"/>
+            <a:off x="777240" y="5239702"/>
             <a:ext cx="822960" cy="292608"/>
           </a:xfrm>
           <a:prstGeom prst="rect">
@@ -40442,8 +40421,8 @@
         </p:nvSpPr>
         <p:spPr>
           <a:xfrm>
-            <a:off x="3390823" y="2557272"/>
-            <a:ext cx="2567863" cy="2868168"/>
+            <a:off x="3390823" y="2313241"/>
+            <a:ext cx="2567863" cy="3356229"/>
           </a:xfrm>
           <a:prstGeom prst="roundRect">
             <a:avLst>
@@ -40475,7 +40454,7 @@
         </p:nvSpPr>
         <p:spPr>
           <a:xfrm>
-            <a:off x="3619423" y="2758440"/>
+            <a:off x="3619423" y="2514409"/>
             <a:ext cx="731520" cy="731520"/>
           </a:xfrm>
           <a:prstGeom prst="ellipse">
@@ -40505,14 +40484,14 @@
           <p:nvPr/>
         </p:nvPicPr>
         <p:blipFill>
-          <a:blip r:embed="rId3"/>
+          <a:blip r:embed="rId4"/>
           <a:stretch>
             <a:fillRect/>
           </a:stretch>
         </p:blipFill>
         <p:spPr>
           <a:xfrm>
-            <a:off x="3773043" y="2912059"/>
+            <a:off x="3773043" y="2668028"/>
             <a:ext cx="424281" cy="424281"/>
           </a:xfrm>
           <a:prstGeom prst="rect">
@@ -40528,8 +40507,8 @@
         </p:nvSpPr>
         <p:spPr>
           <a:xfrm>
-            <a:off x="3555415" y="3581400"/>
-            <a:ext cx="2238679" cy="1341120"/>
+            <a:off x="3555415" y="3337369"/>
+            <a:ext cx="2238679" cy="1829181"/>
           </a:xfrm>
           <a:prstGeom prst="rect">
             <a:avLst/>
@@ -40549,7 +40528,7 @@
               </a:spcAft>
             </a:pPr>
             <a:r>
-              <a:rPr sz="1800" b="1">
+              <a:rPr sz="2150" b="1">
                 <a:solidFill>
                   <a:srgbClr val="13294B"/>
                 </a:solidFill>
@@ -40557,11 +40536,11 @@
                 <a:ea typeface="맑은 고딕"/>
                 <a:cs typeface="맑은 고딕"/>
               </a:rPr>
-              <a:t>범위</a:t>
-            </a:r>
-          </a:p>
-          <a:p>
-            <a:pPr algn="l" eaLnBrk="0" marL="160020" indent="-160020">
+              <a:t>조회</a:t>
+            </a:r>
+          </a:p>
+          <a:p>
+            <a:pPr algn="l" eaLnBrk="0" marL="200025" indent="-200025">
               <a:lnSpc>
                 <a:spcPct val="110000"/>
               </a:lnSpc>
@@ -40570,7 +40549,7 @@
               </a:spcAft>
             </a:pPr>
             <a:r>
-              <a:rPr sz="1400" b="0">
+              <a:rPr sz="1750" b="0">
                 <a:solidFill>
                   <a:srgbClr val="1F2A3A"/>
                 </a:solidFill>
@@ -40578,11 +40557,11 @@
                 <a:ea typeface="맑은 고딕"/>
                 <a:cs typeface="맑은 고딕"/>
               </a:rPr>
-              <a:t>• 목표와 스킬 작성</a:t>
-            </a:r>
-          </a:p>
-          <a:p>
-            <a:pPr algn="l" eaLnBrk="0" marL="160020" indent="-160020">
+              <a:t>• 설비와 작업지시</a:t>
+            </a:r>
+          </a:p>
+          <a:p>
+            <a:pPr algn="l" eaLnBrk="0" marL="200025" indent="-200025">
               <a:lnSpc>
                 <a:spcPct val="110000"/>
               </a:lnSpc>
@@ -40591,7 +40570,7 @@
               </a:spcAft>
             </a:pPr>
             <a:r>
-              <a:rPr sz="1400" b="0">
+              <a:rPr sz="1750" b="0">
                 <a:solidFill>
                   <a:srgbClr val="1F2A3A"/>
                 </a:solidFill>
@@ -40599,7 +40578,7 @@
                 <a:ea typeface="맑은 고딕"/>
                 <a:cs typeface="맑은 고딕"/>
               </a:rPr>
-              <a:t>• 읽기 MCP 연결</a:t>
+              <a:t>• 재고와 입고 예정</a:t>
             </a:r>
           </a:p>
         </p:txBody>
@@ -40612,7 +40591,7 @@
         </p:nvSpPr>
         <p:spPr>
           <a:xfrm>
-            <a:off x="3619423" y="4995672"/>
+            <a:off x="3619423" y="5239702"/>
             <a:ext cx="822960" cy="292608"/>
           </a:xfrm>
           <a:prstGeom prst="roundRect">
@@ -40643,7 +40622,7 @@
         </p:nvSpPr>
         <p:spPr>
           <a:xfrm>
-            <a:off x="3619423" y="4995672"/>
+            <a:off x="3619423" y="5239702"/>
             <a:ext cx="822960" cy="292608"/>
           </a:xfrm>
           <a:prstGeom prst="rect">
@@ -40669,7 +40648,7 @@
                 <a:ea typeface="맑은 고딕"/>
                 <a:cs typeface="맑은 고딕"/>
               </a:rPr>
-              <a:t>범위</a:t>
+              <a:t>조회</a:t>
             </a:r>
           </a:p>
         </p:txBody>
@@ -40682,8 +40661,8 @@
         </p:nvSpPr>
         <p:spPr>
           <a:xfrm>
-            <a:off x="6233007" y="2557272"/>
-            <a:ext cx="2567863" cy="2868168"/>
+            <a:off x="6233007" y="2313241"/>
+            <a:ext cx="2567863" cy="3356229"/>
           </a:xfrm>
           <a:prstGeom prst="roundRect">
             <a:avLst>
@@ -40715,7 +40694,7 @@
         </p:nvSpPr>
         <p:spPr>
           <a:xfrm>
-            <a:off x="6461607" y="2758440"/>
+            <a:off x="6461607" y="2514409"/>
             <a:ext cx="731520" cy="731520"/>
           </a:xfrm>
           <a:prstGeom prst="ellipse">
@@ -40745,14 +40724,14 @@
           <p:nvPr/>
         </p:nvPicPr>
         <p:blipFill>
-          <a:blip r:embed="rId4"/>
+          <a:blip r:embed="rId5"/>
           <a:stretch>
             <a:fillRect/>
           </a:stretch>
         </p:blipFill>
         <p:spPr>
           <a:xfrm>
-            <a:off x="6615226" y="2912059"/>
+            <a:off x="6615226" y="2668028"/>
             <a:ext cx="424281" cy="424281"/>
           </a:xfrm>
           <a:prstGeom prst="rect">
@@ -40768,8 +40747,8 @@
         </p:nvSpPr>
         <p:spPr>
           <a:xfrm>
-            <a:off x="6397599" y="3581400"/>
-            <a:ext cx="2238679" cy="1341120"/>
+            <a:off x="6397599" y="3337369"/>
+            <a:ext cx="2238679" cy="1829181"/>
           </a:xfrm>
           <a:prstGeom prst="rect">
             <a:avLst/>
@@ -40789,7 +40768,7 @@
               </a:spcAft>
             </a:pPr>
             <a:r>
-              <a:rPr sz="1800" b="1">
+              <a:rPr sz="2150" b="1">
                 <a:solidFill>
                   <a:srgbClr val="13294B"/>
                 </a:solidFill>
@@ -40801,7 +40780,7 @@
             </a:r>
           </a:p>
           <a:p>
-            <a:pPr algn="l" eaLnBrk="0" marL="160020" indent="-160020">
+            <a:pPr algn="l" eaLnBrk="0" marL="200025" indent="-200025">
               <a:lnSpc>
                 <a:spcPct val="110000"/>
               </a:lnSpc>
@@ -40810,7 +40789,7 @@
               </a:spcAft>
             </a:pPr>
             <a:r>
-              <a:rPr sz="1400" b="0">
+              <a:rPr sz="1750" b="0">
                 <a:solidFill>
                   <a:srgbClr val="1F2A3A"/>
                 </a:solidFill>
@@ -40818,11 +40797,11 @@
                 <a:ea typeface="맑은 고딕"/>
                 <a:cs typeface="맑은 고딕"/>
               </a:rPr>
-              <a:t>• 에이전트 정의와 스킬</a:t>
-            </a:r>
-          </a:p>
-          <a:p>
-            <a:pPr algn="l" eaLnBrk="0" marL="160020" indent="-160020">
+              <a:t>• 네 영역의 인계안</a:t>
+            </a:r>
+          </a:p>
+          <a:p>
+            <a:pPr algn="l" eaLnBrk="0" marL="200025" indent="-200025">
               <a:lnSpc>
                 <a:spcPct val="110000"/>
               </a:lnSpc>
@@ -40831,7 +40810,7 @@
               </a:spcAft>
             </a:pPr>
             <a:r>
-              <a:rPr sz="1400" b="0">
+              <a:rPr sz="1750" b="0">
                 <a:solidFill>
                   <a:srgbClr val="1F2A3A"/>
                 </a:solidFill>
@@ -40839,7 +40818,7 @@
                 <a:ea typeface="맑은 고딕"/>
                 <a:cs typeface="맑은 고딕"/>
               </a:rPr>
-              <a:t>• 제안이나 보류가 담긴 결과 한 건</a:t>
+              <a:t>• 실제 조회 근거</a:t>
             </a:r>
           </a:p>
         </p:txBody>
@@ -40852,7 +40831,7 @@
         </p:nvSpPr>
         <p:spPr>
           <a:xfrm>
-            <a:off x="6461607" y="4995672"/>
+            <a:off x="6461607" y="5239702"/>
             <a:ext cx="822960" cy="292608"/>
           </a:xfrm>
           <a:prstGeom prst="roundRect">
@@ -40883,7 +40862,7 @@
         </p:nvSpPr>
         <p:spPr>
           <a:xfrm>
-            <a:off x="6461607" y="4995672"/>
+            <a:off x="6461607" y="5239702"/>
             <a:ext cx="822960" cy="292608"/>
           </a:xfrm>
           <a:prstGeom prst="rect">
@@ -40922,8 +40901,8 @@
         </p:nvSpPr>
         <p:spPr>
           <a:xfrm>
-            <a:off x="9075191" y="2557272"/>
-            <a:ext cx="2567863" cy="2868168"/>
+            <a:off x="9075191" y="2313241"/>
+            <a:ext cx="2567863" cy="3356229"/>
           </a:xfrm>
           <a:prstGeom prst="roundRect">
             <a:avLst>
@@ -40955,7 +40934,7 @@
         </p:nvSpPr>
         <p:spPr>
           <a:xfrm>
-            <a:off x="9303791" y="2758440"/>
+            <a:off x="9303791" y="2514409"/>
             <a:ext cx="731520" cy="731520"/>
           </a:xfrm>
           <a:prstGeom prst="ellipse">
@@ -40985,14 +40964,14 @@
           <p:nvPr/>
         </p:nvPicPr>
         <p:blipFill>
-          <a:blip r:embed="rId5"/>
+          <a:blip r:embed="rId6"/>
           <a:stretch>
             <a:fillRect/>
           </a:stretch>
         </p:blipFill>
         <p:spPr>
           <a:xfrm>
-            <a:off x="9457410" y="2912059"/>
+            <a:off x="9457410" y="2668028"/>
             <a:ext cx="424281" cy="424281"/>
           </a:xfrm>
           <a:prstGeom prst="rect">
@@ -41008,8 +40987,8 @@
         </p:nvSpPr>
         <p:spPr>
           <a:xfrm>
-            <a:off x="9239783" y="3581400"/>
-            <a:ext cx="2238679" cy="1341120"/>
+            <a:off x="9239783" y="3337369"/>
+            <a:ext cx="2238679" cy="1829181"/>
           </a:xfrm>
           <a:prstGeom prst="rect">
             <a:avLst/>
@@ -41029,7 +41008,7 @@
               </a:spcAft>
             </a:pPr>
             <a:r>
-              <a:rPr sz="1800" b="1">
+              <a:rPr sz="2150" b="1">
                 <a:solidFill>
                   <a:srgbClr val="13294B"/>
                 </a:solidFill>
@@ -41041,7 +41020,7 @@
             </a:r>
           </a:p>
           <a:p>
-            <a:pPr algn="l" eaLnBrk="0" marL="160020" indent="-160020">
+            <a:pPr algn="l" eaLnBrk="0" marL="200025" indent="-200025">
               <a:lnSpc>
                 <a:spcPct val="110000"/>
               </a:lnSpc>
@@ -41050,7 +41029,7 @@
               </a:spcAft>
             </a:pPr>
             <a:r>
-              <a:rPr sz="1400" b="0">
+              <a:rPr sz="1750" b="0">
                 <a:solidFill>
                   <a:srgbClr val="1F2A3A"/>
                 </a:solidFill>
@@ -41058,11 +41037,11 @@
                 <a:ea typeface="맑은 고딕"/>
                 <a:cs typeface="맑은 고딕"/>
               </a:rPr>
-              <a:t>• 제안의 근거는 읽은 값</a:t>
-            </a:r>
-          </a:p>
-          <a:p>
-            <a:pPr algn="l" eaLnBrk="0" marL="160020" indent="-160020">
+              <a:t>• 불일치 · 누락 · 조회 시점</a:t>
+            </a:r>
+          </a:p>
+          <a:p>
+            <a:pPr algn="l" eaLnBrk="0" marL="200025" indent="-200025">
               <a:lnSpc>
                 <a:spcPct val="110000"/>
               </a:lnSpc>
@@ -41071,7 +41050,7 @@
               </a:spcAft>
             </a:pPr>
             <a:r>
-              <a:rPr sz="1400" b="0">
+              <a:rPr sz="1750" b="0">
                 <a:solidFill>
                   <a:srgbClr val="1F2A3A"/>
                 </a:solidFill>
@@ -41079,7 +41058,7 @@
                 <a:ea typeface="맑은 고딕"/>
                 <a:cs typeface="맑은 고딕"/>
               </a:rPr>
-              <a:t>• 미확인 값과 권한 밖 작업은 보류</a:t>
+              <a:t>• 다음 확인을 기록</a:t>
             </a:r>
           </a:p>
         </p:txBody>
@@ -41092,7 +41071,7 @@
         </p:nvSpPr>
         <p:spPr>
           <a:xfrm>
-            <a:off x="9303791" y="4995672"/>
+            <a:off x="9303791" y="5239702"/>
             <a:ext cx="1021080" cy="292608"/>
           </a:xfrm>
           <a:prstGeom prst="roundRect">
@@ -41123,7 +41102,7 @@
         </p:nvSpPr>
         <p:spPr>
           <a:xfrm>
-            <a:off x="9303791" y="4995672"/>
+            <a:off x="9303791" y="5239702"/>
             <a:ext cx="1021080" cy="292608"/>
           </a:xfrm>
           <a:prstGeom prst="rect">
@@ -41282,7 +41261,7 @@
                 <a:ea typeface="맑은 고딕"/>
                 <a:cs typeface="맑은 고딕"/>
               </a:rPr>
-              <a:t>실습: 직접 그린 흐름으로 내 에이전트 실행</a:t>
+              <a:t>실습: 교대 흐름을 연결해 인계 확인하기</a:t>
             </a:r>
           </a:p>
         </p:txBody>
@@ -41417,7 +41396,7 @@
                 <a:ea typeface="맑은 고딕"/>
                 <a:cs typeface="맑은 고딕"/>
               </a:rPr>
-              <a:t>내 에이전트를 단계로 둔 흐름과 남는 처리 건</a:t>
+              <a:t>초안에서 두 사람의 확인까지</a:t>
             </a:r>
           </a:p>
         </p:txBody>
@@ -41456,7 +41435,7 @@
                 <a:ea typeface="맑은 고딕"/>
                 <a:cs typeface="맑은 고딕"/>
               </a:rPr>
-              <a:t>준비된 연결로 흐름을 등록·실행하고, 처리 건의 실제 결과와 미확인 범위를 구분해 기록한다.</a:t>
+              <a:t>제공 흐름을 연결해 같은 처리 건에서 검토·보완하고 인수를 확인한다.</a:t>
             </a:r>
           </a:p>
         </p:txBody>
@@ -41537,8 +41516,8 @@
         </p:nvSpPr>
         <p:spPr>
           <a:xfrm>
-            <a:off x="548640" y="2550541"/>
-            <a:ext cx="1911644" cy="2881629"/>
+            <a:off x="548640" y="2670619"/>
+            <a:ext cx="1911644" cy="2641473"/>
           </a:xfrm>
           <a:prstGeom prst="roundRect">
             <a:avLst>
@@ -41568,7 +41547,7 @@
         </p:nvSpPr>
         <p:spPr>
           <a:xfrm>
-            <a:off x="1138702" y="2733421"/>
+            <a:off x="1138702" y="2853499"/>
             <a:ext cx="731520" cy="731520"/>
           </a:xfrm>
           <a:prstGeom prst="ellipse">
@@ -41598,14 +41577,14 @@
           <p:nvPr/>
         </p:nvPicPr>
         <p:blipFill>
-          <a:blip r:embed="rIdTheory48_rId3"/>
+          <a:blip r:embed="rId3"/>
           <a:stretch>
             <a:fillRect/>
           </a:stretch>
         </p:blipFill>
         <p:spPr>
           <a:xfrm>
-            <a:off x="1292321" y="2887040"/>
+            <a:off x="1292321" y="3007118"/>
             <a:ext cx="424281" cy="424281"/>
           </a:xfrm>
           <a:prstGeom prst="rect">
@@ -41621,8 +41600,8 @@
         </p:nvSpPr>
         <p:spPr>
           <a:xfrm>
-            <a:off x="621792" y="3538093"/>
-            <a:ext cx="1765340" cy="1820925"/>
+            <a:off x="621792" y="3658171"/>
+            <a:ext cx="1765340" cy="1580768"/>
           </a:xfrm>
           <a:prstGeom prst="rect">
             <a:avLst/>
@@ -41671,7 +41650,7 @@
                 <a:ea typeface="맑은 고딕"/>
                 <a:cs typeface="맑은 고딕"/>
               </a:rPr>
-              <a:t>업무를 여는</a:t>
+              <a:t>설비 · 교대</a:t>
             </a:r>
           </a:p>
           <a:p>
@@ -41692,7 +41671,7 @@
                 <a:ea typeface="맑은 고딕"/>
                 <a:cs typeface="맑은 고딕"/>
               </a:rPr>
-              <a:t>사건을 정한다</a:t>
+              <a:t>시각 · 메모</a:t>
             </a:r>
           </a:p>
         </p:txBody>
@@ -41734,8 +41713,8 @@
         </p:nvSpPr>
         <p:spPr>
           <a:xfrm>
-            <a:off x="2844332" y="2550541"/>
-            <a:ext cx="1911644" cy="2881629"/>
+            <a:off x="2844332" y="2670619"/>
+            <a:ext cx="1911644" cy="2641473"/>
           </a:xfrm>
           <a:prstGeom prst="roundRect">
             <a:avLst>
@@ -41765,7 +41744,7 @@
         </p:nvSpPr>
         <p:spPr>
           <a:xfrm>
-            <a:off x="3434394" y="2733421"/>
+            <a:off x="3434394" y="2853499"/>
             <a:ext cx="731520" cy="731520"/>
           </a:xfrm>
           <a:prstGeom prst="ellipse">
@@ -41795,14 +41774,14 @@
           <p:nvPr/>
         </p:nvPicPr>
         <p:blipFill>
-          <a:blip r:embed="rIdTheory48_rId4"/>
+          <a:blip r:embed="rId4"/>
           <a:stretch>
             <a:fillRect/>
           </a:stretch>
         </p:blipFill>
         <p:spPr>
           <a:xfrm>
-            <a:off x="3588014" y="2887040"/>
+            <a:off x="3588014" y="3007118"/>
             <a:ext cx="424281" cy="424281"/>
           </a:xfrm>
           <a:prstGeom prst="rect">
@@ -41818,8 +41797,8 @@
         </p:nvSpPr>
         <p:spPr>
           <a:xfrm>
-            <a:off x="2917484" y="3538093"/>
-            <a:ext cx="1765340" cy="1820925"/>
+            <a:off x="2917484" y="3658171"/>
+            <a:ext cx="1765340" cy="1580768"/>
           </a:xfrm>
           <a:prstGeom prst="rect">
             <a:avLst/>
@@ -41847,7 +41826,7 @@
                 <a:ea typeface="맑은 고딕"/>
                 <a:cs typeface="맑은 고딕"/>
               </a:rPr>
-              <a:t>에이전트 작업</a:t>
+              <a:t>인계안</a:t>
             </a:r>
           </a:p>
           <a:p>
@@ -41868,7 +41847,7 @@
                 <a:ea typeface="맑은 고딕"/>
                 <a:cs typeface="맑은 고딕"/>
               </a:rPr>
-              <a:t>앞서 만든</a:t>
+              <a:t>에이전트가</a:t>
             </a:r>
           </a:p>
           <a:p>
@@ -41889,28 +41868,7 @@
                 <a:ea typeface="맑은 고딕"/>
                 <a:cs typeface="맑은 고딕"/>
               </a:rPr>
-              <a:t>에이전트에게</a:t>
-            </a:r>
-          </a:p>
-          <a:p>
-            <a:pPr algn="ctr" eaLnBrk="0">
-              <a:lnSpc>
-                <a:spcPct val="110000"/>
-              </a:lnSpc>
-              <a:spcAft>
-                <a:spcPts val="400"/>
-              </a:spcAft>
-            </a:pPr>
-            <a:r>
-              <a:rPr sz="1550" b="0">
-                <a:solidFill>
-                  <a:srgbClr val="1F2A3A"/>
-                </a:solidFill>
-                <a:latin typeface="맑은 고딕"/>
-                <a:ea typeface="맑은 고딕"/>
-                <a:cs typeface="맑은 고딕"/>
-              </a:rPr>
-              <a:t>맡긴다</a:t>
+              <a:t>근거를 조회</a:t>
             </a:r>
           </a:p>
         </p:txBody>
@@ -41952,8 +41910,8 @@
         </p:nvSpPr>
         <p:spPr>
           <a:xfrm>
-            <a:off x="5140025" y="2550541"/>
-            <a:ext cx="1911644" cy="2881629"/>
+            <a:off x="5140025" y="2670619"/>
+            <a:ext cx="1911644" cy="2641473"/>
           </a:xfrm>
           <a:prstGeom prst="roundRect">
             <a:avLst>
@@ -41983,7 +41941,7 @@
         </p:nvSpPr>
         <p:spPr>
           <a:xfrm>
-            <a:off x="5730087" y="2733421"/>
+            <a:off x="5730087" y="2853499"/>
             <a:ext cx="731520" cy="731520"/>
           </a:xfrm>
           <a:prstGeom prst="ellipse">
@@ -42013,14 +41971,14 @@
           <p:nvPr/>
         </p:nvPicPr>
         <p:blipFill>
-          <a:blip r:embed="rIdTheory48_rId5"/>
+          <a:blip r:embed="rId5"/>
           <a:stretch>
             <a:fillRect/>
           </a:stretch>
         </p:blipFill>
         <p:spPr>
           <a:xfrm>
-            <a:off x="5883706" y="2887040"/>
+            <a:off x="5883706" y="3007118"/>
             <a:ext cx="424281" cy="424281"/>
           </a:xfrm>
           <a:prstGeom prst="rect">
@@ -42036,8 +41994,8 @@
         </p:nvSpPr>
         <p:spPr>
           <a:xfrm>
-            <a:off x="5213177" y="3538093"/>
-            <a:ext cx="1765340" cy="1820925"/>
+            <a:off x="5213177" y="3658171"/>
+            <a:ext cx="1765340" cy="1580768"/>
           </a:xfrm>
           <a:prstGeom prst="rect">
             <a:avLst/>
@@ -42065,7 +42023,7 @@
                 <a:ea typeface="맑은 고딕"/>
                 <a:cs typeface="맑은 고딕"/>
               </a:rPr>
-              <a:t>사람 확인</a:t>
+              <a:t>인계자</a:t>
             </a:r>
           </a:p>
           <a:p>
@@ -42086,7 +42044,7 @@
                 <a:ea typeface="맑은 고딕"/>
                 <a:cs typeface="맑은 고딕"/>
               </a:rPr>
-              <a:t>필요한 자리에</a:t>
+              <a:t>초안과</a:t>
             </a:r>
           </a:p>
           <a:p>
@@ -42107,28 +42065,7 @@
                 <a:ea typeface="맑은 고딕"/>
                 <a:cs typeface="맑은 고딕"/>
               </a:rPr>
-              <a:t>사람 작업을</a:t>
-            </a:r>
-          </a:p>
-          <a:p>
-            <a:pPr algn="ctr" eaLnBrk="0">
-              <a:lnSpc>
-                <a:spcPct val="110000"/>
-              </a:lnSpc>
-              <a:spcAft>
-                <a:spcPts val="400"/>
-              </a:spcAft>
-            </a:pPr>
-            <a:r>
-              <a:rPr sz="1550" b="0">
-                <a:solidFill>
-                  <a:srgbClr val="1F2A3A"/>
-                </a:solidFill>
-                <a:latin typeface="맑은 고딕"/>
-                <a:ea typeface="맑은 고딕"/>
-                <a:cs typeface="맑은 고딕"/>
-              </a:rPr>
-              <a:t>둔다</a:t>
+              <a:t>불일치 검토</a:t>
             </a:r>
           </a:p>
         </p:txBody>
@@ -42170,8 +42107,8 @@
         </p:nvSpPr>
         <p:spPr>
           <a:xfrm>
-            <a:off x="7435717" y="2550541"/>
-            <a:ext cx="1911644" cy="2881629"/>
+            <a:off x="7435717" y="2670619"/>
+            <a:ext cx="1911644" cy="2641473"/>
           </a:xfrm>
           <a:prstGeom prst="roundRect">
             <a:avLst>
@@ -42201,7 +42138,7 @@
         </p:nvSpPr>
         <p:spPr>
           <a:xfrm>
-            <a:off x="8025780" y="2733421"/>
+            <a:off x="8025780" y="2853499"/>
             <a:ext cx="731520" cy="731520"/>
           </a:xfrm>
           <a:prstGeom prst="ellipse">
@@ -42231,14 +42168,14 @@
           <p:nvPr/>
         </p:nvPicPr>
         <p:blipFill>
-          <a:blip r:embed="rIdTheory48_rId6"/>
+          <a:blip r:embed="rId6"/>
           <a:stretch>
             <a:fillRect/>
           </a:stretch>
         </p:blipFill>
         <p:spPr>
           <a:xfrm>
-            <a:off x="8179399" y="2887040"/>
+            <a:off x="8179399" y="3007118"/>
             <a:ext cx="424281" cy="424281"/>
           </a:xfrm>
           <a:prstGeom prst="rect">
@@ -42254,8 +42191,8 @@
         </p:nvSpPr>
         <p:spPr>
           <a:xfrm>
-            <a:off x="7508869" y="3538093"/>
-            <a:ext cx="1765340" cy="1820925"/>
+            <a:off x="7508869" y="3658171"/>
+            <a:ext cx="1765340" cy="1580768"/>
           </a:xfrm>
           <a:prstGeom prst="rect">
             <a:avLst/>
@@ -42283,7 +42220,7 @@
                 <a:ea typeface="맑은 고딕"/>
                 <a:cs typeface="맑은 고딕"/>
               </a:rPr>
-              <a:t>결과 보고</a:t>
+              <a:t>인수자</a:t>
             </a:r>
           </a:p>
           <a:p>
@@ -42304,7 +42241,7 @@
                 <a:ea typeface="맑은 고딕"/>
                 <a:cs typeface="맑은 고딕"/>
               </a:rPr>
-              <a:t>한 일과 하지 못한</a:t>
+              <a:t>확인 또는</a:t>
             </a:r>
           </a:p>
           <a:p>
@@ -42325,7 +42262,7 @@
                 <a:ea typeface="맑은 고딕"/>
                 <a:cs typeface="맑은 고딕"/>
               </a:rPr>
-              <a:t>일을 함께 알린다</a:t>
+              <a:t>보완 요청</a:t>
             </a:r>
           </a:p>
         </p:txBody>
@@ -42367,8 +42304,8 @@
         </p:nvSpPr>
         <p:spPr>
           <a:xfrm>
-            <a:off x="9731410" y="2550541"/>
-            <a:ext cx="1911644" cy="2881629"/>
+            <a:off x="9731410" y="2670619"/>
+            <a:ext cx="1911644" cy="2641473"/>
           </a:xfrm>
           <a:prstGeom prst="roundRect">
             <a:avLst>
@@ -42400,7 +42337,7 @@
         </p:nvSpPr>
         <p:spPr>
           <a:xfrm>
-            <a:off x="10321472" y="2733421"/>
+            <a:off x="10321472" y="2853499"/>
             <a:ext cx="731520" cy="731520"/>
           </a:xfrm>
           <a:prstGeom prst="ellipse">
@@ -42430,14 +42367,14 @@
           <p:nvPr/>
         </p:nvPicPr>
         <p:blipFill>
-          <a:blip r:embed="rIdTheory48_rId7"/>
+          <a:blip r:embed="rId7"/>
           <a:stretch>
             <a:fillRect/>
           </a:stretch>
         </p:blipFill>
         <p:spPr>
           <a:xfrm>
-            <a:off x="10475092" y="2887040"/>
+            <a:off x="10475092" y="3007118"/>
             <a:ext cx="424281" cy="424281"/>
           </a:xfrm>
           <a:prstGeom prst="rect">
@@ -42453,8 +42390,8 @@
         </p:nvSpPr>
         <p:spPr>
           <a:xfrm>
-            <a:off x="9804562" y="3538093"/>
-            <a:ext cx="1765340" cy="1820925"/>
+            <a:off x="9804562" y="3658171"/>
+            <a:ext cx="1765340" cy="1580768"/>
           </a:xfrm>
           <a:prstGeom prst="rect">
             <a:avLst/>
@@ -42503,7 +42440,7 @@
                 <a:ea typeface="맑은 고딕"/>
                 <a:cs typeface="맑은 고딕"/>
               </a:rPr>
-              <a:t>필요한 흐름이 모두 끝나</a:t>
+              <a:t>인계 확인과</a:t>
             </a:r>
           </a:p>
           <a:p>
@@ -42524,7 +42461,7 @@
                 <a:ea typeface="맑은 고딕"/>
                 <a:cs typeface="맑은 고딕"/>
               </a:rPr>
-              <a:t>처리 건이 닫힌다</a:t>
+              <a:t>남은 일 기록</a:t>
             </a:r>
           </a:p>
         </p:txBody>
@@ -42906,7 +42843,7 @@
       </p:sp>
       <p:pic>
         <p:nvPicPr>
-          <p:cNvPr id="6" name="삽화:사건선_전체.svg" descr="illust_9220388101328140836_1792243894.png"/>
+          <p:cNvPr id="6" name="삽화:사건선_전체.svg" descr="illust_4743819962037133419_1793003853.png"/>
           <p:cNvPicPr>
             <a:picLocks noChangeAspect="1"/>
           </p:cNvPicPr>
@@ -45432,7 +45369,7 @@
       </p:sp>
       <p:pic>
         <p:nvPicPr>
-          <p:cNvPr id="6" name="삽화:작업목록.svg" descr="illust_6321520322374784129_1792243894.png"/>
+          <p:cNvPr id="6" name="삽화:작업목록.svg" descr="illust_6033123599472314294_1793003853.png"/>
           <p:cNvPicPr>
             <a:picLocks noChangeAspect="1"/>
           </p:cNvPicPr>
@@ -49519,8 +49456,8 @@
         </p:nvSpPr>
         <p:spPr>
           <a:xfrm>
-            <a:off x="548640" y="2510790"/>
-            <a:ext cx="2567863" cy="2961132"/>
+            <a:off x="548640" y="2630868"/>
+            <a:ext cx="2567863" cy="2720975"/>
           </a:xfrm>
           <a:prstGeom prst="roundRect">
             <a:avLst>
@@ -49552,7 +49489,7 @@
         </p:nvSpPr>
         <p:spPr>
           <a:xfrm>
-            <a:off x="777240" y="2711958"/>
+            <a:off x="777240" y="2832036"/>
             <a:ext cx="731520" cy="731520"/>
           </a:xfrm>
           <a:prstGeom prst="ellipse">
@@ -49582,14 +49519,14 @@
           <p:nvPr/>
         </p:nvPicPr>
         <p:blipFill>
-          <a:blip r:embed="rId2"/>
+          <a:blip r:embed="rId3"/>
           <a:stretch>
             <a:fillRect/>
           </a:stretch>
         </p:blipFill>
         <p:spPr>
           <a:xfrm>
-            <a:off x="930859" y="2865577"/>
+            <a:off x="930859" y="2985655"/>
             <a:ext cx="424281" cy="424281"/>
           </a:xfrm>
           <a:prstGeom prst="rect">
@@ -49605,8 +49542,8 @@
         </p:nvSpPr>
         <p:spPr>
           <a:xfrm>
-            <a:off x="713232" y="3534918"/>
-            <a:ext cx="2238679" cy="1434084"/>
+            <a:off x="713232" y="3654996"/>
+            <a:ext cx="2238679" cy="1193927"/>
           </a:xfrm>
           <a:prstGeom prst="rect">
             <a:avLst/>
@@ -49689,7 +49626,7 @@
         </p:nvSpPr>
         <p:spPr>
           <a:xfrm>
-            <a:off x="777240" y="5042154"/>
+            <a:off x="777240" y="4922075"/>
             <a:ext cx="822960" cy="292608"/>
           </a:xfrm>
           <a:prstGeom prst="roundRect">
@@ -49720,7 +49657,7 @@
         </p:nvSpPr>
         <p:spPr>
           <a:xfrm>
-            <a:off x="777240" y="5042154"/>
+            <a:off x="777240" y="4922075"/>
             <a:ext cx="822960" cy="292608"/>
           </a:xfrm>
           <a:prstGeom prst="rect">
@@ -49759,8 +49696,8 @@
         </p:nvSpPr>
         <p:spPr>
           <a:xfrm>
-            <a:off x="3390823" y="2510790"/>
-            <a:ext cx="2567863" cy="2961132"/>
+            <a:off x="3390823" y="2630868"/>
+            <a:ext cx="2567863" cy="2720975"/>
           </a:xfrm>
           <a:prstGeom prst="roundRect">
             <a:avLst>
@@ -49792,7 +49729,7 @@
         </p:nvSpPr>
         <p:spPr>
           <a:xfrm>
-            <a:off x="3619423" y="2711958"/>
+            <a:off x="3619423" y="2832036"/>
             <a:ext cx="731520" cy="731520"/>
           </a:xfrm>
           <a:prstGeom prst="ellipse">
@@ -49822,14 +49759,14 @@
           <p:nvPr/>
         </p:nvPicPr>
         <p:blipFill>
-          <a:blip r:embed="rId3"/>
+          <a:blip r:embed="rId4"/>
           <a:stretch>
             <a:fillRect/>
           </a:stretch>
         </p:blipFill>
         <p:spPr>
           <a:xfrm>
-            <a:off x="3773043" y="2865577"/>
+            <a:off x="3773043" y="2985655"/>
             <a:ext cx="424281" cy="424281"/>
           </a:xfrm>
           <a:prstGeom prst="rect">
@@ -49845,8 +49782,8 @@
         </p:nvSpPr>
         <p:spPr>
           <a:xfrm>
-            <a:off x="3555415" y="3534918"/>
-            <a:ext cx="2238679" cy="1434084"/>
+            <a:off x="3555415" y="3654996"/>
+            <a:ext cx="2238679" cy="1193927"/>
           </a:xfrm>
           <a:prstGeom prst="rect">
             <a:avLst/>
@@ -49929,7 +49866,7 @@
         </p:nvSpPr>
         <p:spPr>
           <a:xfrm>
-            <a:off x="3619423" y="5042154"/>
+            <a:off x="3619423" y="4922075"/>
             <a:ext cx="822960" cy="292608"/>
           </a:xfrm>
           <a:prstGeom prst="roundRect">
@@ -49960,7 +49897,7 @@
         </p:nvSpPr>
         <p:spPr>
           <a:xfrm>
-            <a:off x="3619423" y="5042154"/>
+            <a:off x="3619423" y="4922075"/>
             <a:ext cx="822960" cy="292608"/>
           </a:xfrm>
           <a:prstGeom prst="rect">
@@ -49999,8 +49936,8 @@
         </p:nvSpPr>
         <p:spPr>
           <a:xfrm>
-            <a:off x="6233007" y="2510790"/>
-            <a:ext cx="2567863" cy="2961132"/>
+            <a:off x="6233007" y="2630868"/>
+            <a:ext cx="2567863" cy="2720975"/>
           </a:xfrm>
           <a:prstGeom prst="roundRect">
             <a:avLst>
@@ -50032,7 +49969,7 @@
         </p:nvSpPr>
         <p:spPr>
           <a:xfrm>
-            <a:off x="6461607" y="2711958"/>
+            <a:off x="6461607" y="2832036"/>
             <a:ext cx="731520" cy="731520"/>
           </a:xfrm>
           <a:prstGeom prst="ellipse">
@@ -50062,14 +49999,14 @@
           <p:nvPr/>
         </p:nvPicPr>
         <p:blipFill>
-          <a:blip r:embed="rId4"/>
+          <a:blip r:embed="rId5"/>
           <a:stretch>
             <a:fillRect/>
           </a:stretch>
         </p:blipFill>
         <p:spPr>
           <a:xfrm>
-            <a:off x="6615226" y="2865577"/>
+            <a:off x="6615226" y="2985655"/>
             <a:ext cx="424281" cy="424281"/>
           </a:xfrm>
           <a:prstGeom prst="rect">
@@ -50085,8 +50022,8 @@
         </p:nvSpPr>
         <p:spPr>
           <a:xfrm>
-            <a:off x="6397599" y="3534918"/>
-            <a:ext cx="2238679" cy="1434084"/>
+            <a:off x="6397599" y="3654996"/>
+            <a:ext cx="2238679" cy="1193927"/>
           </a:xfrm>
           <a:prstGeom prst="rect">
             <a:avLst/>
@@ -50135,7 +50072,7 @@
                 <a:ea typeface="맑은 고딕"/>
                 <a:cs typeface="맑은 고딕"/>
               </a:rPr>
-              <a:t>• 명세, 스키마, 에이전트,</a:t>
+              <a:t>• 인계안과 에이전트,</a:t>
             </a:r>
           </a:p>
           <a:p>
@@ -50156,7 +50093,7 @@
                 <a:ea typeface="맑은 고딕"/>
                 <a:cs typeface="맑은 고딕"/>
               </a:rPr>
-              <a:t>• 흐름 같은 결과물</a:t>
+              <a:t>• 흐름 · 처리 건</a:t>
             </a:r>
           </a:p>
         </p:txBody>
@@ -50169,7 +50106,7 @@
         </p:nvSpPr>
         <p:spPr>
           <a:xfrm>
-            <a:off x="6461607" y="5042154"/>
+            <a:off x="6461607" y="4922075"/>
             <a:ext cx="822960" cy="292608"/>
           </a:xfrm>
           <a:prstGeom prst="roundRect">
@@ -50200,7 +50137,7 @@
         </p:nvSpPr>
         <p:spPr>
           <a:xfrm>
-            <a:off x="6461607" y="5042154"/>
+            <a:off x="6461607" y="4922075"/>
             <a:ext cx="822960" cy="292608"/>
           </a:xfrm>
           <a:prstGeom prst="rect">
@@ -50239,8 +50176,8 @@
         </p:nvSpPr>
         <p:spPr>
           <a:xfrm>
-            <a:off x="9075191" y="2510790"/>
-            <a:ext cx="2567863" cy="2961132"/>
+            <a:off x="9075191" y="2630868"/>
+            <a:ext cx="2567863" cy="2720975"/>
           </a:xfrm>
           <a:prstGeom prst="roundRect">
             <a:avLst>
@@ -50272,7 +50209,7 @@
         </p:nvSpPr>
         <p:spPr>
           <a:xfrm>
-            <a:off x="9303791" y="2711958"/>
+            <a:off x="9303791" y="2832036"/>
             <a:ext cx="731520" cy="731520"/>
           </a:xfrm>
           <a:prstGeom prst="ellipse">
@@ -50302,14 +50239,14 @@
           <p:nvPr/>
         </p:nvPicPr>
         <p:blipFill>
-          <a:blip r:embed="rId5"/>
+          <a:blip r:embed="rId6"/>
           <a:stretch>
             <a:fillRect/>
           </a:stretch>
         </p:blipFill>
         <p:spPr>
           <a:xfrm>
-            <a:off x="9457410" y="2865577"/>
+            <a:off x="9457410" y="2985655"/>
             <a:ext cx="424281" cy="424281"/>
           </a:xfrm>
           <a:prstGeom prst="rect">
@@ -50325,8 +50262,8 @@
         </p:nvSpPr>
         <p:spPr>
           <a:xfrm>
-            <a:off x="9239783" y="3534918"/>
-            <a:ext cx="2238679" cy="1434084"/>
+            <a:off x="9239783" y="3654996"/>
+            <a:ext cx="2238679" cy="1193927"/>
           </a:xfrm>
           <a:prstGeom prst="rect">
             <a:avLst/>
@@ -50409,7 +50346,7 @@
         </p:nvSpPr>
         <p:spPr>
           <a:xfrm>
-            <a:off x="9303791" y="5042154"/>
+            <a:off x="9303791" y="4922075"/>
             <a:ext cx="822960" cy="292608"/>
           </a:xfrm>
           <a:prstGeom prst="roundRect">
@@ -50440,7 +50377,7 @@
         </p:nvSpPr>
         <p:spPr>
           <a:xfrm>
-            <a:off x="9303791" y="5042154"/>
+            <a:off x="9303791" y="4922075"/>
             <a:ext cx="822960" cy="292608"/>
           </a:xfrm>
           <a:prstGeom prst="rect">
@@ -52965,7 +52902,7 @@
       </p:sp>
       <p:pic>
         <p:nvPicPr>
-          <p:cNvPr id="6" name="삽화:사건선_영역.svg" descr="illust_6855758207263699367_1792243894.png"/>
+          <p:cNvPr id="6" name="삽화:사건선_영역.svg" descr="illust_8931004096820814942_1793003853.png"/>
           <p:cNvPicPr>
             <a:picLocks noChangeAspect="1"/>
           </p:cNvPicPr>
@@ -57511,7 +57448,7 @@
       </p:sp>
       <p:pic>
         <p:nvPicPr>
-          <p:cNvPr id="6" name="삽화:스킬도구.svg" descr="illust_2659105247243488785_1792243894.png"/>
+          <p:cNvPr id="6" name="삽화:스킬도구.svg" descr="illust_3618109303002458958_1793003853.png"/>
           <p:cNvPicPr>
             <a:picLocks noChangeAspect="1"/>
           </p:cNvPicPr>

--- a/산출물/실전반/이론/08회차/실전반_08일차.pptx
+++ b/산출물/실전반/이론/08회차/실전반_08일차.pptx
@@ -554,7 +554,37 @@
           <a:lstStyle/>
           <a:p>
             <a:r>
-              <a:t>안녕하세요. 이번 회차는 과정의 마지막 회차입니다. 지금까지 만든 지식과 에이전트, 업무 흐름을 교대 인수인계 한 건에 모두 써 보겠습니다. 근무를 마치는 사람이 다음 근무자에게 메모를 남긴다고 해 보죠. 「쿨러 핀 세척 끝났습니다.」 다음 근무자는 이 한 줄을 그대로 믿어도 될까요? 실제 작업지시는 아직 열려 있을 수도 있고, 부품은 도착 예정일 뿐일 수도 있습니다. 이번 회차의 물음은 이겁니다. 인계받는 사람이 무엇을 보고 이 메모를 받아들이고, 무엇이 모자라면 다시 물어야 하는가. 이 물음에 답하는 재료는 이미 다 배웠습니다. 쿨러 처리 건에서 지식이 도구를 거쳐 판단의 근거가 되던 길, 그리고 추천안이 사람의 승인과 시스템 실행으로 닫히던 길이요. 오늘은 그 두 길을 짧게 되짚고, 같은 길을 교대 인수인계에 그대로 대어 보겠습니다.</a:t>
+              <a:t>[짚을 곳] 제목 → 과정 줄 → 부제 → 아이콘 셋(지식 · 에이전트 · 흐름)</a:t>
+            </a:r>
+          </a:p>
+          <a:p>
+            <a:r>
+              <a:t>· 과정의 마지막 회차: 만든 지식 · 에이전트 · 업무 흐름을 교대 인수인계 한 건에 모두 쓴다</a:t>
+            </a:r>
+          </a:p>
+          <a:p>
+            <a:r>
+              <a:t>· 장면: 「쿨러 핀 세척 끝났습니다」 메모 한 줄, 그대로 믿어도 되나</a:t>
+            </a:r>
+          </a:p>
+          <a:p>
+            <a:r>
+              <a:t>· 작업지시는 아직 열려 있을 수 있고, 부품은 도착 예정일 뿐일 수 있다</a:t>
+            </a:r>
+          </a:p>
+          <a:p>
+            <a:r>
+              <a:t>· 물음: 인수자는 무엇을 보고 받아들이고, 무엇이 모자라면 다시 묻나</a:t>
+            </a:r>
+          </a:p>
+          <a:p>
+            <a:r>
+              <a:t>· 재료는 이미 배움: 쿨러 처리 건의 두 길(지식 → 판단 근거, 추천안 → 승인 · 시스템 실행)</a:t>
+            </a:r>
+          </a:p>
+          <a:p>
+            <a:r>
+              <a:t>[다음] 학습목표 네 카드</a:t>
             </a:r>
           </a:p>
         </p:txBody>
@@ -624,7 +654,42 @@
           <a:lstStyle/>
           <a:p>
             <a:r>
-              <a:t>지금까지 되짚은 길 위에, 실전 실습에서 직접 만든 결과물을 놓아 보겠습니다. 표의 왼쪽 열이 그 결과물들이에요. 조치 검토 결과는 조치 평가 도구의 자리였습니다. 후보마다 판정과 이유, 원문 출처, 추가로 확인할 값을 달았죠. 작업 확인 카드는 SOP의 준비, 금지, 완료 조건을 원문 절과 함께 모은 거라 출처 줄의 자리고요. 점검 요청은 원인 근거에 대상과 관측 시각, 확인 항목을 붙인 것이고, 다음 협의 안건은 확인된 사실과 아직 남은 확인을 갈라 정리한 거였습니다. 명세와 회귀 검증은 출력 계약을 정하고 정상, 누락, 오류 사례로 결과를 검사했던 거고요. 마지막 줄의 BPMN과 A, B, C 실행 기록은 다음 단원에서 볼 승인과 시스템 실행의 자리입니다. 오른쪽 열이 이번 회차에서 쓸 곳이에요. 교대 인계안을 만들 때 이 방법들을 그대로 다시 씁니다. 확인된 것과 미확인을 섞지 않는 법, 원문과 대조하는 법, 관측 시각과 확인할 질문을 붙이는 법, 메모의 주장과 원천 사실을 가르는 법, 계약과 사례로 검증하는 법이요. 그리고 A, B, C 실행에서 열어 둔 작업지시나 발주 중인 수량이 교대에 넘길 내용이 됩니다. 새로운 기술을 더 배우는 게 아니라, 익힌 방법을 다른 업무 한 건에 옮겨 쓰는 거예요.</a:t>
+              <a:t>[짚을 곳] 왼쪽 열(활용 결과) → 가운데(이 길에서 같은 자리) → 오른쪽(교대에서 다시 쓰는 것) → 강조한 여섯째 줄</a:t>
+            </a:r>
+          </a:p>
+          <a:p>
+            <a:r>
+              <a:t>· 조치 검토 결과: 후보별 판정 · 이유 · 출처 · 추가 확인 값 → 확인 · 미확인 · 제외를 섞지 않는 법</a:t>
+            </a:r>
+          </a:p>
+          <a:p>
+            <a:r>
+              <a:t>· 작업 확인 카드: SOP 준비 · 금지 · 완료 조건 + 원문 절 → HI-01 절차를 원문과 대조</a:t>
+            </a:r>
+          </a:p>
+          <a:p>
+            <a:r>
+              <a:t>· 점검 요청 · 다음 협의 안건: 관측 시각 · 확인 항목, 사실과 남은 확인의 구분 → 메모의 주장 vs 원천 사실</a:t>
+            </a:r>
+          </a:p>
+          <a:p>
+            <a:r>
+              <a:t>· 명세 · 회귀: 출력 계약 + 정상 · 누락 · 오류 사례 → 네 영역 계약과 불일치 사례 검증</a:t>
+            </a:r>
+          </a:p>
+          <a:p>
+            <a:r>
+              <a:t>· BPMN · ABC 실행 기록: 승인 · 시스템 실행 자리 → 열린 작업 · 예약 · 발주 중이 교대에 넘길 내용</a:t>
+            </a:r>
+          </a:p>
+          <a:p>
+            <a:r>
+              <a:t>· 새 기술이 아니라 익힌 방법을 다른 업무 한 건에 옮겨 씀</a:t>
+            </a:r>
+          </a:p>
+          <a:p>
+            <a:r>
+              <a:t>[다음] 빈 결과의 구별</a:t>
             </a:r>
           </a:p>
         </p:txBody>
@@ -694,7 +759,42 @@
           <a:lstStyle/>
           <a:p>
             <a:r>
-              <a:t>교대 인계로 넘어가기 전에 한 가지를 더 짚겠습니다. 결과가 비어 있을 때, 왜 비었는지를 가르는 일이에요. 표의 왼쪽 열이 비는 이유 다섯 가지, 가운데가 그때 출력에 나타나는 모습, 오른쪽이 그 빈칸을 잘못 채운 기록입니다. 첫 줄, 관계가 적재되지 않았으면 조회는 정상으로 끝나는데 후보가 0행이에요. 이걸 「원인이 없다」로 적으면 틀립니다. 둘째 줄, 기준에 댈 값이 없으면 진단 도구는 원인을 정하지 않고 보류를 냅니다. 여기서 그럴듯한 원인을 지어 넣으면 안 되죠. 셋째 줄, 값이 너무 오래됐으면 신선도 검사에 걸려 역시 보류예요. 지난 값을 지금 값처럼 쓰면 안 되고요. 강조한 넷째 줄이 교대에서 가장 자주 만날 경우입니다. 조회 자체가 실패했으면 출력에는 오류 응답과 실행한 조회가 남아야 해요. 이걸 「업무 없음」이나 0으로 적으면, 다음 근무자는 확인할 게 없다고 믿게 됩니다. 수업 시스템의 업무 규칙에도 실패를 0이나 빈 값으로 바꿔 성공처럼 내지 말라고 적혀 있어요. 마지막 줄은 출처 관계가 빠진 경우로, 추천은 나오지만 근거를 되짚을 길이 없습니다. 다섯 경우 모두 결과가 비었다는 점은 같아요. 다른 건 다음 사람이 어디를 확인해야 하느냐입니다. 적재를 볼지, 새 값을 기다릴지, 원천 연결을 고칠지가 달라지죠. 그래서 비어 있는 이유를 그대로 남기는 겁니다.</a:t>
+              <a:t>[짚을 곳] 왼쪽(비어 있는 이유) → 가운데(출력 모습) → 오른쪽(이렇게 적으면 틀림) → 강조한 넷째 줄</a:t>
+            </a:r>
+          </a:p>
+          <a:p>
+            <a:r>
+              <a:t>· 연결 미적재: 조회 정상 · 후보 0행 → 「원인이 없다」로 적으면 틀림</a:t>
+            </a:r>
+          </a:p>
+          <a:p>
+            <a:r>
+              <a:t>· 기준 값 없음 · 값이 오래됨: 보류(신선도 검사) → 원인 지어 넣기 · 지난 값을 지금 값처럼 쓰기 금지</a:t>
+            </a:r>
+          </a:p>
+          <a:p>
+            <a:r>
+              <a:t>· 조회 실패(교대에서 가장 자주): 오류 응답과 실행한 조회를 남김 → 「업무 없음」이나 0으로 적으면 다음 근무자가 확인할 게 없다고 믿음</a:t>
+            </a:r>
+          </a:p>
+          <a:p>
+            <a:r>
+              <a:t>· 수업 시스템 업무 규칙: 실패를 0이나 빈 값으로 바꿔 성공처럼 내지 않는다</a:t>
+            </a:r>
+          </a:p>
+          <a:p>
+            <a:r>
+              <a:t>· 출처 관계 없음: 추천은 나오나 근거를 되짚을 길이 없음</a:t>
+            </a:r>
+          </a:p>
+          <a:p>
+            <a:r>
+              <a:t>· 다섯 모두 「비었다」는 같고, 다음 사람이 볼 곳(적재 · 새 값 · 원천 연결)이 다름 → 이유를 그대로 남김</a:t>
+            </a:r>
+          </a:p>
+          <a:p>
+            <a:r>
+              <a:t>[다음] 판단 문제</a:t>
             </a:r>
           </a:p>
         </p:txBody>
@@ -764,7 +864,37 @@
           <a:lstStyle/>
           <a:p>
             <a:r>
-              <a:t>단원을 닫기 전에 판단 문제 하나 풀어 보겠습니다. 같은 시각의 값으로 에이전트를 두 번 돌렸더니, 한 번은 업무 값 조회 도구를 불렀고 한 번은 부르지 않았어요. 설명 문장도 서로 달랐습니다. 이 차이를 판단하는 방법으로 맞는 것은 무엇일까요? 1번, 설명 문장이 다르니 에이전트를 믿을 수 없어 두 결과를 모두 버린다. 2번, 후보, 기준, 읽어 온 값이 같은지 대조하고, 같다면 순서와 문장의 차이로 본다. 3번, 두 결과 가운데 점수가 더 높은 쪽을 정답으로 고른다. 4번, 문장을 고정하려고 스킬에 원인과 추천을 미리 적어 둔다. 답은 2번입니다. 어느 도구를 언제 부를지, 근거를 어떤 문장으로 설명할지는 에이전트가 정하는 부분이라 실행마다 달라질 수 있어요. 업무 값 조회도 스킬에 「필요하면」 하라고 적힌 단계였죠. 반면 후보와 기준, 그리고 읽어 온 값은 지식과 원천에서 온 것이라 에이전트가 정하지 않습니다. 순위에 드는 업무 값은 평가 도구가 직접 읽으니까, 조회 도구를 안 불렀어도 순위는 같게 나와요. 그러니 이 세 가지가 같은지 먼저 대조하면 됩니다. 1번은 정하지 않은 부분까지 의심해서 쓸 수 있는 판단을 버리는 거고, 3번은 같은 판단을 두 번 낸 걸 다른 답처럼 고르는 겁니다. 4번은 그럴듯하지만 원인과 기준이 그래프와 스킬, 두 곳에 생겨요. 문서가 개정되면 두 곳이 어긋나죠. 기준은 지식에 한 곳만 두고, 에이전트는 그걸 읽게 하는 게 원칙이었습니다.</a:t>
+              <a:t>[짚을 곳] 상황(같은 시각 값으로 두 번 실행, 업무 값 조회 여부 · 설명 문장이 다름) → 보기 넷 → 20초</a:t>
+            </a:r>
+          </a:p>
+          <a:p>
+            <a:r>
+              <a:t>· 정답 2: 후보 · 기준 · 읽어 온 값이 같은지 대조, 같으면 순서와 문장의 차이</a:t>
+            </a:r>
+          </a:p>
+          <a:p>
+            <a:r>
+              <a:t>· 도구 호출 차례 · 설명 문장은 에이전트가 정하는 부분이라 실행마다 다를 수 있음(업무 값 조회는 스킬에 「필요하면」)</a:t>
+            </a:r>
+          </a:p>
+          <a:p>
+            <a:r>
+              <a:t>· 후보 · 기준 · 값은 지식과 원천에서 옴, 순위의 업무 값은 평가 도구가 직접 읽어 같음</a:t>
+            </a:r>
+          </a:p>
+          <a:p>
+            <a:r>
+              <a:t>· 오답: 1 정하지 않은 부분까지 의심해 판단을 버림, 3 같은 판단을 다른 답처럼 고름</a:t>
+            </a:r>
+          </a:p>
+          <a:p>
+            <a:r>
+              <a:t>· 오답 4: 원인 · 기준이 그래프와 스킬 두 곳에 생겨 개정 때 어긋남 → 기준은 지식 한 곳, 에이전트는 읽기</a:t>
+            </a:r>
+          </a:p>
+          <a:p>
+            <a:r>
+              <a:t>[다음] 둘째 단원</a:t>
             </a:r>
           </a:p>
         </p:txBody>
@@ -834,7 +964,32 @@
           <a:lstStyle/>
           <a:p>
             <a:r>
-              <a:t>두 번째 단원은 교대 인계안의 근거와 원천 대조입니다. 쿨러 처리 건에서 본 지식과 조회 도구를, 이번엔 교대 인수인계 한 건에 써 보겠습니다. 이 단원의 물음은 처음에 던진 그 물음이에요. 인수자는 무엇을 보고 인계 내용을 받아들이고, 무엇이 모자라면 다시 물어야 하는가.</a:t>
+              <a:t>[짚을 곳] 단원 번호 02 → 제목 → 부제</a:t>
+            </a:r>
+          </a:p>
+          <a:p>
+            <a:r>
+              <a:t>· 같은 지식과 조회 도구를 교대 인수인계 한 건에 쓴다</a:t>
+            </a:r>
+          </a:p>
+          <a:p>
+            <a:r>
+              <a:t>· 물음(처음 장면의 그 물음): 인수자는 무엇을 보고 인계 내용을 받아들이나</a:t>
+            </a:r>
+          </a:p>
+          <a:p>
+            <a:r>
+              <a:t>· 물음: 무엇이 모자라면 다시 물어야 하나</a:t>
+            </a:r>
+          </a:p>
+          <a:p>
+            <a:r>
+              <a:t>· 결과물이 조치가 아니라 근거와 확인이라는 점이 달라짐</a:t>
+            </a:r>
+          </a:p>
+          <a:p>
+            <a:r>
+              <a:t>[다음] 두 처리 건 견주기</a:t>
             </a:r>
           </a:p>
         </p:txBody>
@@ -904,7 +1059,37 @@
           <a:lstStyle/>
           <a:p>
             <a:r>
-              <a:t>두 처리 건을 나란히 놓았습니다. 왼쪽이 쿨러 처리 건, 오른쪽이 교대 처리 건이고, 줄마다 같은 항목을 견주게 맞춰 놓았어요. 시작부터 보죠. 쿨러는 경보 한 건이 처리 건을 열었습니다. 교대는 사람이 설비와 교대, 기준 시각, 작업 메모, 이 네 가지를 입력해서 엽니다. 읽기 줄을 보면, 교대도 같은 세 서버, 곧 지식 그래프와 업무 DB, 시계열을 읽어요. 다만 교대에 허용된 건 그 서버들의 조회 도구뿐입니다. 판단 카드를 제출하는 도구는 없어요. 결과 줄에서 둘이 갈립니다. 쿨러는 추천안 하나와 대안을 냈죠. 교대는 설비, 열린 작업지시, 부품, 작업 메모, 이 네 영역을 확인한 내용과 그 근거를 냅니다. 그리고 제출 줄을 보세요. 교대 처리 건에는 업무 시스템에 쓰는 일이 하나도 없습니다. 끝 줄도 달라요. 쿨러는 승인 뒤에 명령과 재관측, 작업지시가 실행됐지만, 교대는 인계자가 검토하고 인수자가 확인하는 데서 끝납니다. 꼬리표 두 개가 이 차이를 요약해요. 쿨러 처리 건은 조치를 실행하고, 교대 처리 건은 확인을 전달합니다. 업무 규칙에도 인수인계는 조회와 전달이고, 설비 명령이나 발주, 정비 완료를 실행하지 않는다고 적혀 있어요.</a:t>
+              <a:t>[짚을 곳] 왼쪽(쿨러 처리 건) vs 강조한 오른쪽(교대 처리 건) → 줄마다 같은 항목 → 꼬리표</a:t>
+            </a:r>
+          </a:p>
+          <a:p>
+            <a:r>
+              <a:t>· 시작: 경보 한 건 vs 사람이 넣는 넷(설비 · 교대 · 기준 시각 · 작업 메모)</a:t>
+            </a:r>
+          </a:p>
+          <a:p>
+            <a:r>
+              <a:t>· 읽기: 같은 세 서버(지식 그래프 · 업무 DB · 시계열), 교대는 조회 도구만 · 판단 카드 제출 도구 없음</a:t>
+            </a:r>
+          </a:p>
+          <a:p>
+            <a:r>
+              <a:t>· 결과: 추천안 하나와 대안 vs 네 영역(설비 · 열린 작업지시 · 부품 · 작업 메모)의 확인과 근거</a:t>
+            </a:r>
+          </a:p>
+          <a:p>
+            <a:r>
+              <a:t>· 제출 · 끝: 판단 제출 → 승인 뒤 명령 · 재관측 · 작업지시 vs 업무 시스템 쓰기 없음 → 인계자 검토 · 인수자 확인</a:t>
+            </a:r>
+          </a:p>
+          <a:p>
+            <a:r>
+              <a:t>· 꼬리표: 조치를 실행 vs 확인을 전달, 업무 규칙: 인수인계는 조회와 전달, 설비 명령 · 발주 · 정비 완료를 실행하지 않음</a:t>
+            </a:r>
+          </a:p>
+          <a:p>
+            <a:r>
+              <a:t>[다음] HI-01의 대조 기준</a:t>
             </a:r>
           </a:p>
         </p:txBody>
@@ -974,7 +1159,42 @@
           <a:lstStyle/>
           <a:p>
             <a:r>
-              <a:t>메모를 원천에 무슨 기준으로 대어 볼까요? 그 기준을 정한 게 보충 매뉴얼 HI-01입니다. 기존 쿨러, 정비, 구매 매뉴얼을 바꾸지 않고 새 문서로 더한 거고, 설비를 직접 움직이는 조치가 아니라 조회하고 확인할 때 쓰는 참고 절차예요. 표의 위 세 줄이 그 절차 셋입니다. 첫 줄은 설비 상태를 확인하는 절차예요. 시계열에서 관측 시각과 설비를 확인하고 최근 값을 읽는데, 인계 기준 시각과 실제로 조회한 시각을 함께 적습니다. 관측 시각이 없거나 조회가 실패하면 정상이라고 하지 말고 확인 필요로 남겨요. 둘째 줄은 열린 작업지시 대조입니다. 업무 DB에서 그 설비 작업지시의 상태와 완료 시각을 읽어요. 메모에는 정비가 끝났다고 적혀 있는데 작업지시가 열려 있거나 완료 시각이 없으면, 불일치나 확인 필요로 남깁니다. 셋째 줄은 부품이에요. ERP에서 현재고와 예약, 입고 예정을 따로 읽고, 입고 예정을 현재고에 더해서 도착했다고 쓰지 않습니다. 강조한 마지막 줄이 기록을 어떻게 해석하느냐예요. 인계 확인은 다음 근무자가 전달 사항을 확인했다는 기록입니다. 정비가 끝났다는 기록도, 부품이 들어왔다는 기록도, 발주를 승인했다는 기록도 아니에요. 서로 모순된 기록은 한쪽을 지우지 말고 둘 다 근거와 함께 남기라고 되어 있습니다.</a:t>
+              <a:t>[짚을 곳] 표 위 세 줄(절차) → 가운데(원천에서 확인할 칸) → 오른쪽(남길 판정) → 강조한 넷째 줄</a:t>
+            </a:r>
+          </a:p>
+          <a:p>
+            <a:r>
+              <a:t>· HI-01: 기존 쿨러 · 정비 · 구매 매뉴얼은 그대로 두고 더한 보충 문서, 조회 · 확인용 참고 절차(설비를 움직이는 조치 아님)</a:t>
+            </a:r>
+          </a:p>
+          <a:p>
+            <a:r>
+              <a:t>· HI-01 설비 상태: 관측 시각 · 설비 식별 · 최근 값, 기준 시각과 조회 시각을 함께 → 관측 시각 없음 · 조회 실패는 확인 필요</a:t>
+            </a:r>
+          </a:p>
+          <a:p>
+            <a:r>
+              <a:t>· HI-02 열린 작업지시: 식별자 · 상태 · 예정 · 완료시각 → 메모는 완료인데 열려 있으면 불일치 또는 확인 필요</a:t>
+            </a:r>
+          </a:p>
+          <a:p>
+            <a:r>
+              <a:t>· HI-03 부품: on_hand · reserved · on_order를 따로, 입고 예정을 현재고에 합산하지 않음</a:t>
+            </a:r>
+          </a:p>
+          <a:p>
+            <a:r>
+              <a:t>· HI-1.4: 인계 확인 = 다음 근무자가 전달 사항을 확인한 기록, 정비 완료 · 입고 · 발주 승인 아님</a:t>
+            </a:r>
+          </a:p>
+          <a:p>
+            <a:r>
+              <a:t>· 모순된 기록은 한쪽을 지우지 않고 둘 다 근거와 함께 남김</a:t>
+            </a:r>
+          </a:p>
+          <a:p>
+            <a:r>
+              <a:t>[다음] 출력 계약</a:t>
             </a:r>
           </a:p>
         </p:txBody>
@@ -1044,7 +1264,42 @@
           <a:lstStyle/>
           <a:p>
             <a:r>
-              <a:t>이 기준이 인계안에서는 어떤 모양이 될까요? 왼쪽이 수업 시스템이 받아들이는 인계안의 출력 계약입니다. 맨 위가 인계 요약, 가운데 체크 항목이 네 영역이고, 맨 아래가 근거 목록이에요. 네 영역은 설비, 작업지시, 부품, 작업 메모이고, 각 영역을 꼭 한 번씩 적어야 합니다. 영역마다 상태를 셋 가운데 하나로 고르는데, 원천과 맞으면 확인됨, 근거가 모자라면 확인 필요, 서로 다르면 불일치예요. 그리고 확인한 사실, 다음 근무자가 확인할 일, 근거 목록의 번호를 답니다. 근거 목록에는 실제로 부른 도구와 그 결과가 들어가요. 오른쪽 짚을 점을 보겠습니다. 둘째 점이 핵심이에요. 작업 메모 밖의 영역이 근거 번호 없이 확인됨이나 불일치로 적히면 제출이 거절됩니다. 근거가 없으면 확인 필요로만 남길 수 있는 거죠. 셋째 점, 근거마다 이 작업에서 실제로 성공한 도구 호출과 맞아야 받아들여집니다. 조회하지 않은 결과를 근거로 꾸며 넣을 수 없게 해 둔 거예요. 그런데 넷째 점처럼 이 검사도 못 보는 게 있습니다. 근거가 실제 호출과 맞는지는 보지만, 맞는 설비를 조회했는지까지는 보지 않아요. 그건 사람이 근거를 열어 봐야 압니다. 앞에서 명세와 회귀로 출력 계약을 검사했던 것과 같은 구조예요. 계약이 형식을 지키게 하고, 내용은 사람이 대조합니다.</a:t>
+              <a:t>[짚을 곳] 코드 위(handover_summary) → checks의 칸 → 아래 evidence → 오른쪽 짚을 점 넷(강조한 둘째)</a:t>
+            </a:r>
+          </a:p>
+          <a:p>
+            <a:r>
+              <a:t>· 네 영역 equipment · work_orders · parts · work_notes를 한 번씩</a:t>
+            </a:r>
+          </a:p>
+          <a:p>
+            <a:r>
+              <a:t>· 세 상태: observed(원천과 맞음) · needs_check(근거 모자람) · conflict(서로 다름)</a:t>
+            </a:r>
+          </a:p>
+          <a:p>
+            <a:r>
+              <a:t>· 칸: finding(확인한 사실) · next_action(다음 근무자 할 일) · evidence_indices(근거 번호), evidence는 실제 도구 호출과 결과 40개 이하</a:t>
+            </a:r>
+          </a:p>
+          <a:p>
+            <a:r>
+              <a:t>· 작업 메모 밖 영역이 근거 없이 observed · conflict → 제출 거절, 근거 없으면 needs_check만</a:t>
+            </a:r>
+          </a:p>
+          <a:p>
+            <a:r>
+              <a:t>· 근거마다 이 작업의 성공한 호출과 맞아야 → 꾸민 근거 차단</a:t>
+            </a:r>
+          </a:p>
+          <a:p>
+            <a:r>
+              <a:t>· 못 보는 것: 맞는 대상을 조회했나는 사람이 근거를 열어 봄 → 계약은 형식, 내용은 사람(명세 · 회귀와 같은 구조)</a:t>
+            </a:r>
+          </a:p>
+          <a:p>
+            <a:r>
+              <a:t>[다음] 메모 한 장 대조</a:t>
             </a:r>
           </a:p>
         </p:txBody>
@@ -1114,7 +1369,42 @@
           <a:lstStyle/>
           <a:p>
             <a:r>
-              <a:t>이 계약으로 작업 메모 한 장을 대조해 보겠습니다. 왼쪽 메모의 주장과 가운데 원천 조회 결과는 수업용으로 정한 예예요. 오른쪽에 영역별 상태와 다음 근무자가 확인할 일을 적었습니다. 첫 줄, 메모는 유온 경보가 해소됐다고 합니다. 조회해 보니 최근 값은 정상인데, 관측 시각이 인계 기준 시각보다 뒤예요. 기준 시각 당시의 상태는 복원하지 못했고요. 그러면 지금 값이 정상이라는 것과 기준 시각에 해소됐다는 것은 다른 얘기라서 확인 필요로 남기고, 기준 시각의 상태를 확인할 일로 넘깁니다. 둘째 줄, 메모에는 핀 세척 정비가 끝났다고 적혀 있는데 작업지시는 배정됨 상태이고 완료 시각이 없어요. 둘이 서로 다르니 불일치입니다. 메모와 작업지시 조회, 두 근거를 모두 남기고, 담당자에게 작업지시를 확인하라고 적어요. 실제 수업 시스템에서 돌린 교대 한 건도 바로 이 경우를 불일치로 남기고 다음 확인을 적은 뒤에 인수 확인으로 끝났습니다. 셋째 줄은 부품이에요. 메모는 쿨러 코어를 받아 뒀다고 하는데 현재고는 0이고 입고 예정이 1입니다. 입고 예정을 받은 걸로 칠 수 없으니 이것도 불일치고, 입고 기록을 확인할 일로 넘깁니다. 마지막 줄은 작업 메모 자체예요. 메모는 쓴 사람의 기록이라 주장으로 남기고, 원천과 다른 두 곳을 짚어 둡니다. 같은 메모 한 장인데 영역마다 상태가 다르게 나왔죠. 그래서 다음 근무자가 할 일도 영역마다 구체적으로 정해집니다.</a:t>
+              <a:t>[짚을 곳] 왼쪽(메모의 주장, 가정) → 가운데(원천 조회, 가정) → 오른쪽(상태 · 다음 확인) → 강조한 넷째 줄</a:t>
+            </a:r>
+          </a:p>
+          <a:p>
+            <a:r>
+              <a:t>· 값은 수업용으로 정한 예</a:t>
+            </a:r>
+          </a:p>
+          <a:p>
+            <a:r>
+              <a:t>· 설비: 「유온 경보 해소」, 최근 값 정상이나 관측 시각이 기준 시각 뒤 · 기준 시각 상태 복원 안 됨 → needs_check, 기준 시각 상태 확인</a:t>
+            </a:r>
+          </a:p>
+          <a:p>
+            <a:r>
+              <a:t>· 작업지시: 「핀 세척 정비 완료」, 배정됨 · 완료시각 없음 → conflict, 두 근거 남김, 담당자에게 확인</a:t>
+            </a:r>
+          </a:p>
+          <a:p>
+            <a:r>
+              <a:t>· 실제 수업 시스템의 교대 한 건도 이 경우를 conflict로 남기고 다음 확인을 적은 뒤 인수 확인으로 끝남</a:t>
+            </a:r>
+          </a:p>
+          <a:p>
+            <a:r>
+              <a:t>· 부품: 「쿨러 코어 받아 둠」, 현재고 0 · 입고 예정 1 → conflict, 입고 기록 확인</a:t>
+            </a:r>
+          </a:p>
+          <a:p>
+            <a:r>
+              <a:t>· 메모 자체는 쓴 사람의 주장으로 남기고 원천과 다른 두 곳을 짚음 → 영역마다 할 일이 구체적으로 정해짐</a:t>
+            </a:r>
+          </a:p>
+          <a:p>
+            <a:r>
+              <a:t>[다음] 받아들일 근거</a:t>
             </a:r>
           </a:p>
         </p:txBody>
@@ -1184,7 +1474,42 @@
           <a:lstStyle/>
           <a:p>
             <a:r>
-              <a:t>이제 이번 회차의 중심 물음에 답해 보겠습니다. 인수자는 인계안을 받았을 때 무엇을 보고 받아들일까요? 문장이 아니라 근거 번호가 가리키는 원천 조회를 봅니다. 표의 가운데 열이 영역마다 받아들일 근거고, 오른쪽 열이 그 근거가 모자랄 때 보완 사유에 적을 질문이에요. 설비 영역은 관측 시각이 기준 시각과 함께 적힌 시계열 조회가 있어야 받아들입니다. 없으면 이 값은 언제 관측한 거냐고 묻죠. 작업지시 영역은 대상 설비 작업지시의 식별자와 상태, 완료 시각이 근거예요. 열려 있다면 누구에게 확인할지가 적혀 있어야 하고요. 부품 영역은 현재고, 예약, 입고 예정이 나뉜 ERP 조회여야 합니다. 셋이 한 숫자로 뭉쳐 있으면 나눠서 다시 적어 달라고 요청해요. 아래 두 줄은 상태별입니다. 불일치는 메모와 원천, 두 근거가 다 남아 있어야 받아들여요. 그리고 어느 기록이 더 늦은 시각의 것인지 묻습니다. 메모가 작업지시를 닫기 전에 쓰였는지, 닫힌 뒤에 쓰였는지에 따라 다음 확인이 달라지니까요. 확인 필요는 실패 응답이나 자료가 없는 이유, 그리고 실행한 조회가 남아 있어야 합니다. 실패를 업무 없음으로 적은 건 아닌지 묻는 거죠. 근거가 모자라면 인수자는 이 질문을 사유로 적어 보완을 요청합니다. 그러면 같은 처리 건 안에서 에이전트가 지금 상태를 다시 조회해 인계안을 고치고, 인계자가 다시 검토해요. 인수자가 할 일은 인계안을 대신 고쳐 쓰는 게 아니라, 무엇이 모자란지 정확히 묻는 겁니다.</a:t>
+              <a:t>[짚을 곳] 왼쪽(영역 · 상태) → 가운데(받아들일 근거) → 오른쪽(보완 질문) → 강조한 넷째 줄</a:t>
+            </a:r>
+          </a:p>
+          <a:p>
+            <a:r>
+              <a:t>· 중심 물음의 답: 문장이 아니라 근거 번호가 가리키는 원천 조회를 보고 받아들임</a:t>
+            </a:r>
+          </a:p>
+          <a:p>
+            <a:r>
+              <a:t>· 설비: 기준 시각과 함께 적힌 관측 시각 → 없으면 「이 값은 언제 관측했나」</a:t>
+            </a:r>
+          </a:p>
+          <a:p>
+            <a:r>
+              <a:t>· 작업지시: 식별자 · 상태 · 완료시각 → 「열린 작업지시를 누구에게 확인하나」, 부품: 현재고 · 예약 · 입고 예정을 나눈 조회 → 뭉쳐 있으면 나눠 다시 적기</a:t>
+            </a:r>
+          </a:p>
+          <a:p>
+            <a:r>
+              <a:t>· 불일치: 메모와 원천 두 근거 → 「어느 기록이 더 늦은 시각인가」(작업지시를 닫기 전 · 뒤 메모에 따라 다음 확인이 달라짐)</a:t>
+            </a:r>
+          </a:p>
+          <a:p>
+            <a:r>
+              <a:t>· 확인 필요: 실패 응답이나 없는 이유 + 실행한 조회 → 「실패를 업무 없음으로 적지 않았나」</a:t>
+            </a:r>
+          </a:p>
+          <a:p>
+            <a:r>
+              <a:t>· 모자라면 질문을 사유로 보완 요청 → 같은 처리 건에서 에이전트가 지금 상태를 다시 조회 · 인계자 재검토, 인수자는 대신 고쳐 쓰지 않고 정확히 묻는다</a:t>
+            </a:r>
+          </a:p>
+          <a:p>
+            <a:r>
+              <a:t>[다음] 판단 문제</a:t>
             </a:r>
           </a:p>
         </p:txBody>
@@ -1254,7 +1579,42 @@
           <a:lstStyle/>
           <a:p>
             <a:r>
-              <a:t>판단 문제로 확인해 보겠습니다. HYD-01의 인계안에서 작업지시 영역이 「열린 작업지시 없음」으로 적혀 있어요. 그런데 근거 번호를 열어 보니 조회 대상이 HYD-02였습니다. 인수자의 선택으로 맞는 것은 무엇일까요? 1번, 근거가 실제 도구 호출과 맞으니 그대로 인수 확인한다. 2번, 대상 설비로 다시 조회해 달라는 사유를 적어 보완을 요청한다. 3번, 인수자가 작업지시를 직접 조회한 뒤 인계안을 고쳐 쓰고 확인한다. 4번, 인수자가 인계를 거절해 처리 건을 닫는다. 답은 2번입니다. 이 근거는 실제로 성공한 조회라서 계약 검사는 통과했어요. 하지만 다른 설비를 조회한 결과라 HYD-01에 대해서는 아무것도 말해 주지 않습니다. 그러니 대상 설비로 다시 조회해 달라는 사유를 적어 보완을 요청하면, 같은 처리 건에서 다음 초안이 다시 조회해요. 1번은 계약 검사를 통과한 걸 내용이 맞는 걸로 본 겁니다. 3번은 인수자의 몫을 넘어요. 인수자가 남기는 건 확인이나 보완이라는 결정과 그 사유이고, 인계안을 고쳐 쓰는 건 초안 단계의 일입니다. 4번은 인수자에게 없는 선택지예요. 인수자는 확인과 보완만 고를 수 있고, 거절은 인계자 검토에만 있습니다. 이렇게 인계안의 근거는 계약으로 형식을 지키고, 인수자가 원천을 열어 내용을 받아들이는 구조였습니다. 다음 시간에는 추천안이 승인과 시스템 실행을 거쳐 업무로 끝나는 구조를 되짚고, 같은 구조로 교대 처리 건의 검토와 인수 확인을 보겠습니다.</a:t>
+              <a:t>[짚을 곳] 상황(HYD-01 인계안의 작업지시 「열린 작업지시 없음」, 근거의 조회 대상은 HYD-02) → 보기 넷 → 20초</a:t>
+            </a:r>
+          </a:p>
+          <a:p>
+            <a:r>
+              <a:t>· 정답 2: 대상 설비로 다시 조회해 달라는 사유를 적어 보완 요청</a:t>
+            </a:r>
+          </a:p>
+          <a:p>
+            <a:r>
+              <a:t>· 근거는 실제 성공한 조회라 계약 검사는 통과, 그러나 HYD-01에 대해 아무것도 말해 주지 않음</a:t>
+            </a:r>
+          </a:p>
+          <a:p>
+            <a:r>
+              <a:t>· 오답 1: 계약 검사 통과를 내용의 맞음으로 봄</a:t>
+            </a:r>
+          </a:p>
+          <a:p>
+            <a:r>
+              <a:t>· 오답 3: 인수자 몫을 넘음, 인수자는 확인 · 보완의 결정과 사유만, 고쳐 쓰기는 초안 단계</a:t>
+            </a:r>
+          </a:p>
+          <a:p>
+            <a:r>
+              <a:t>· 오답 4: 인수자에게 없는 선택지, 거절은 인계자 검토에만</a:t>
+            </a:r>
+          </a:p>
+          <a:p>
+            <a:r>
+              <a:t>· 정리: 인계안의 근거는 계약으로 형식, 인수자가 원천을 열어 내용을 받아들이는 구조</a:t>
+            </a:r>
+          </a:p>
+          <a:p>
+            <a:r>
+              <a:t>[다음] 셋째 단원</a:t>
             </a:r>
           </a:p>
         </p:txBody>
@@ -1324,7 +1684,32 @@
           <a:lstStyle/>
           <a:p>
             <a:r>
-              <a:t>학습목표는 카드 네 장입니다. 첫 카드는 지식이 판단의 근거가 되는 길이에요. 경보 한 건에 비어 있는 원인과 조치를 도구가 지식과 값으로 채우는 길을 따라가고, 실전 실습에서 만든 결과물들이 그 길의 어디에 놓이는지 찾습니다. 둘째 카드가 이번 회차의 중심입니다. 작업 메모를 설비, 정비, ERP 기록과 대조해서, 인수자가 받아들일 근거와 다시 물어야 할 보완 질문을 정하는 거예요. 셋째 카드는 업무가 끝나는 구조입니다. 추천안은 승인과 시스템 실행으로, 인계안은 두 사람의 확인으로 닫히는데, 장치마다 어떤 일을 맡는지 가릅니다. 마지막 카드는 실습과 정리예요. 보충 매뉴얼, 인계 에이전트, 제공된 교대 흐름으로 한 건을 끝까지 처리하고, ProcessGPT 시연과 학습노트 기록으로 마칩니다.</a:t>
+              <a:t>[짚을 곳] 카드 네 장 왼쪽부터 → 꼬리표 → 강조한 넷째 카드</a:t>
+            </a:r>
+          </a:p>
+          <a:p>
+            <a:r>
+              <a:t>· 1 판단의 근거: 경보의 빈칸을 도구가 지식 · 값으로 채움, 활용 결과가 놓이는 자리 찾기</a:t>
+            </a:r>
+          </a:p>
+          <a:p>
+            <a:r>
+              <a:t>· 2 교대 인계안(중심): 메모를 설비 · 정비 · ERP와 대조, 받을 근거와 보완 질문</a:t>
+            </a:r>
+          </a:p>
+          <a:p>
+            <a:r>
+              <a:t>· 3 업무 완료 구조: 추천안은 승인 · 실행으로, 인계안은 두 사람의 확인으로 닫힘</a:t>
+            </a:r>
+          </a:p>
+          <a:p>
+            <a:r>
+              <a:t>· 4 실습 · 정리: HI-01 · 인계 에이전트 · 제공 흐름으로 한 건 끝까지, ProcessGPT 시연 · 학습노트</a:t>
+            </a:r>
+          </a:p>
+          <a:p>
+            <a:r>
+              <a:t>[다음] 목차</a:t>
             </a:r>
           </a:p>
         </p:txBody>
@@ -1394,7 +1779,32 @@
           <a:lstStyle/>
           <a:p>
             <a:r>
-              <a:t>이번 시간에는 에이전트가 낸 결과가 사람과 시스템을 거쳐 끝난 업무가 되는 구조를 되짚고, 그 구조를 교대 처리 건에 적용합니다. 세 번째 단원은 추천안에서 업무 완료까지예요. 쿨러 처리 건에서 추천안이 제출된 뒤에 무엇이 남아 있었는지, 그리고 처리 건이 닫힌 뒤에도 무엇이 남는지를 보겠습니다.</a:t>
+              <a:t>[짚을 곳] 단원 번호 03 → 제목 → 부제</a:t>
+            </a:r>
+          </a:p>
+          <a:p>
+            <a:r>
+              <a:t>· 에이전트가 낸 결과가 사람과 시스템을 거쳐 끝난 업무가 되는 구조를 되짚고, 교대 처리 건에 적용</a:t>
+            </a:r>
+          </a:p>
+          <a:p>
+            <a:r>
+              <a:t>· 물음: 추천안 제출 뒤에 무엇이 남아 있었나</a:t>
+            </a:r>
+          </a:p>
+          <a:p>
+            <a:r>
+              <a:t>· 물음: 처리 건이 닫힌 뒤에도 무엇이 남나</a:t>
+            </a:r>
+          </a:p>
+          <a:p>
+            <a:r>
+              <a:t>· 추천안 뒤의 자리는 사람과 엔진이 맡는다</a:t>
+            </a:r>
+          </a:p>
+          <a:p>
+            <a:r>
+              <a:t>[다음] 쿨러 처리 건의 일곱 자리</a:t>
             </a:r>
           </a:p>
         </p:txBody>
@@ -1464,7 +1874,42 @@
           <a:lstStyle/>
           <a:p>
             <a:r>
-              <a:t>쿨러 처리 건이 지나간 자리를 위에서부터 일곱 줄로 놓았습니다. 가운데 열이 그 자리를 맡은 쪽, 오른쪽 열이 그 자리에 남은 기록이에요. 맨 위, 경보가 처리 건을 열었습니다. 강조한 둘째 줄이 에이전트의 자리예요. 냉각 긴급 대응 에이전트가 진단하고 추천안을 냈죠. 셋째 줄부터는 다른 쪽이 맡습니다. 운전원이 사람 작업으로 승인하고, 엔진이 냉각 명령을 SCADA를 거쳐 PLC로 보냈어요. 오른쪽 화살표가 엔진이 쓰는 방향입니다. 다음 줄은 화살표가 반대죠. 엔진이 시계열 DB에서 유온을 다시 읽어서, 61도에서 51도 남짓으로 내려온 걸 확인했습니다. 그 뒤 엔진이 CMMS에 쿨러 핀 세척 작업지시를 등록하고, 결과를 정상으로 보고하며 끝났어요. 일곱 자리 가운데 에이전트가 맡은 건 하나뿐입니다. 추천안이 나온 순간은 업무가 끝난 때가 아니라 앞부분을 지난 때예요. 그리고 오른쪽 열처럼 자리마다 따로 기록이 남았습니다. 작업지시에는 어느 판단에서 나왔는지 판단 번호가 같이 적혀 있어서, 정비 담당자가 작업지시 한 장에서 출발해 판단의 근거까지 거슬러 갈 수 있어요.</a:t>
+              <a:t>[짚을 곳] 일곱 줄 위에서 아래로 → 가운데(맡는 쪽) → 오른쪽(남은 기록) → 강조한 둘째 줄</a:t>
+            </a:r>
+          </a:p>
+          <a:p>
+            <a:r>
+              <a:t>· 경보 ALT-hyd01-0014-e0a1 11:13:08이 처리 건을 엶</a:t>
+            </a:r>
+          </a:p>
+          <a:p>
+            <a:r>
+              <a:t>· 에이전트 자리는 진단 · 제안 하나: 냉각 긴급 대응 → 추천안 DEC-1010-002-408b</a:t>
+            </a:r>
+          </a:p>
+          <a:p>
+            <a:r>
+              <a:t>· 운전원 승인(사람 작업, 11:14:56) → 엔진 → SCADA → PLC 냉각 명령 CMD-1010-0001-b94a DONE</a:t>
+            </a:r>
+          </a:p>
+          <a:p>
+            <a:r>
+              <a:t>· 재관측은 화살표 반대(엔진 ← 시계열 DB): 유온 61.4 → 51.5 ℃ · 경보 해제</a:t>
+            </a:r>
+          </a:p>
+          <a:p>
+            <a:r>
+              <a:t>· 작업지시 WO-1010-C058(CMMS) → 결과 정상 보고 · 끝</a:t>
+            </a:r>
+          </a:p>
+          <a:p>
+            <a:r>
+              <a:t>· 추천안이 나온 순간 = 앞부분을 지난 때, 작업지시에 판단 번호가 있어 작업지시 한 장에서 판단 근거까지 거슬러 감</a:t>
+            </a:r>
+          </a:p>
+          <a:p>
+            <a:r>
+              <a:t>[다음] 넘겨지는 차례</a:t>
             </a:r>
           </a:p>
         </p:txBody>
@@ -1534,7 +1979,42 @@
           <a:lstStyle/>
           <a:p>
             <a:r>
-              <a:t>에이전트의 자리에서 명령 자리까지, 무엇이 어떤 차례로 넘어가는지를 다섯 단계로 놓았습니다. 첫 단계, 에이전트가 출력 계약대로 판단 결과를 제출합니다. 그러면 그 단계는 제출됨 상태가 되고, 에이전트의 일은 여기서 끝나요. 둘째 단계에서 엔진이 이어받습니다. 단계가 미리 선언한 출력만 처리 건의 변수로 합치고, 운전원 승인 단계를 열어요. 다음 차례를 여는 건 에이전트가 아니라 엔진입니다. 셋째 단계가 사람의 결정이에요. 승인인지, 어떤 조치를 골랐는지, 누가 어떤 역할로 승인했는지가 남는데, 이 값들은 서버가 채웁니다. 에이전트가 「승인됨」이라고 써 넣을 수 없게 막아 둔 거죠. 넷째 단계에서 승인을 접수했다는 기록과 전달했다는 기록이 차례로 남고, 마지막 단계, 전달이 끝난 뒤에야 냉각 명령이 열립니다. 이 차례에서 기억할 건 둘이에요. 에이전트는 계약대로 내면 끝나고, 사람의 결정은 서버가 기록한다는 겁니다. 교대 처리 건에서도 인계안을 낸 뒤의 차례를 엔진이 열고, 두 사람의 결정을 서버가 기록해요.</a:t>
+              <a:t>[짚을 곳] 다섯 단계 왼쪽부터 → 강조한 다섯째 단계</a:t>
+            </a:r>
+          </a:p>
+          <a:p>
+            <a:r>
+              <a:t>· 제출: 출력 계약대로 decision, 단계는 SUBMITTED, 에이전트의 일은 여기까지</a:t>
+            </a:r>
+          </a:p>
+          <a:p>
+            <a:r>
+              <a:t>· 엔진이 이어받음: 선언한 출력만 변수로 합치고 운전원 승인 단계를 엶 → 다음 차례를 여는 쪽은 엔진</a:t>
+            </a:r>
+          </a:p>
+          <a:p>
+            <a:r>
+              <a:t>· 사람의 결정: 승인 · 고른 조치 · 역할을 서버가 채움 → 에이전트가 「승인됨」을 써 넣을 수 없음</a:t>
+            </a:r>
+          </a:p>
+          <a:p>
+            <a:r>
+              <a:t>· 승인 기록: 접수 기록 다음에 전달 기록</a:t>
+            </a:r>
+          </a:p>
+          <a:p>
+            <a:r>
+              <a:t>· 명령 단계: 전달이 끝난 뒤에만 냉각 명령이 열림</a:t>
+            </a:r>
+          </a:p>
+          <a:p>
+            <a:r>
+              <a:t>· 기억할 둘: 에이전트는 계약대로 내면 끝, 사람의 결정은 서버가 기록 → 교대에서도 엔진이 차례를 열고 두 사람의 결정을 서버가 기록</a:t>
+            </a:r>
+          </a:p>
+          <a:p>
+            <a:r>
+              <a:t>[다음] 세 결말</a:t>
             </a:r>
           </a:p>
         </p:txBody>
@@ -1604,7 +2084,37 @@
           <a:lstStyle/>
           <a:p>
             <a:r>
-              <a:t>사람의 결정에 따라 처리 건은 세 가지로 끝날 수 있습니다. 표의 세 줄이 그 결말이고, 오른쪽 열이 이번 회차에서 새로 붙인 칸, 다음 근무자에게 남는 확인이에요. 첫 줄, 승인하고 회복까지 확인한 경우입니다. 명령과 재관측, 작업지시 등록이 실행되고 정상으로 끝났죠. 그런데 오른쪽을 보세요. 핀 세척 작업지시는 등록됐을 뿐, 정비는 아직입니다. 처리 건은 닫혔지만 다음 근무자는 이 작업지시가 언제 처리되는지 이어서 봐야 해요. 둘째 줄, 거절하면 설비 명령은 하나도 나가지 않고, 거절의 끝 이벤트로 닫힙니다. 결과 보고의 값은 기록에 반려로 적혀요. 이때 경보의 원인은 그대로 남아 있으니, 왜 거절했는지를 다음 근무자에게 전해야 합니다. 셋째 줄, 응답이 없으면 기한 10분이 지나도 승인 지연 알림만 나가고 처리 건은 닫히지 않아요. 자동으로 승인되지도 취소되지도 않습니다. 승인을 기다리는 처리 건이 있다는 사실 자체가 넘길 내용이에요. 세 경우 모두 처리 건이 끝났다고 업무가 다 끝난 게 아니었습니다. 이 오른쪽 열이 바로 교대 인계안이 담아야 할 내용이에요.</a:t>
+              <a:t>[짚을 곳] 세 줄(결말) → 가운데(시스템 실행 · 끝) → 오른쪽(새로 붙인 칸, 다음 근무자에게 남는 확인) → 강조한 첫째 줄</a:t>
+            </a:r>
+          </a:p>
+          <a:p>
+            <a:r>
+              <a:t>· 승인 · 회복 확인: 명령 · 재관측 · 작업지시 등록, E_end · 결과 정상 → 핀 세척 작업지시는 등록일 뿐 정비는 아직</a:t>
+            </a:r>
+          </a:p>
+          <a:p>
+            <a:r>
+              <a:t>· 거절: 설비 명령 0건, E_rejected · 결과 값 반려 → 경보의 원인은 그대로, 거절 사유를 전함</a:t>
+            </a:r>
+          </a:p>
+          <a:p>
+            <a:r>
+              <a:t>· 응답 없음: 기한 10분 뒤 승인 지연 알림만, 처리 건은 닫히지 않음(자동 승인 · 취소 없음) → 승인 대기 중인 처리 건 자체를 넘김</a:t>
+            </a:r>
+          </a:p>
+          <a:p>
+            <a:r>
+              <a:t>· 세 경우 모두 처리 건의 끝 ≠ 업무의 끝</a:t>
+            </a:r>
+          </a:p>
+          <a:p>
+            <a:r>
+              <a:t>· 오른쪽 열 = 교대 인계안이 담아야 할 내용</a:t>
+            </a:r>
+          </a:p>
+          <a:p>
+            <a:r>
+              <a:t>[다음] ABC 실행 기록</a:t>
             </a:r>
           </a:p>
         </p:txBody>
@@ -1674,7 +2184,37 @@
           <a:lstStyle/>
           <a:p>
             <a:r>
-              <a:t>실전 실습에서 A, B, C 세 업무를 실행해 봤죠. 그 실행 기록에서 교대로 넘길 것을 정리해 보겠습니다. 왼쪽이 업무와 승인자, 가운데가 승인 뒤의 시스템 실행, 오른쪽이 교대에 넘길 확인이에요. A 냉각 대응은 운전원이 승인하고, 명령과 재관측, 작업지시 등록까지 실행됐습니다. 작업지시는 등록일 뿐 정비 완료가 아니에요. B 정기 점검은 설비보전팀장이 승인하고, CMMS에 정비 오더를 등록하고 생산팀에 공지를 보냅니다. 넘길 건 정비 예정 시간과, 실제로 정비를 했는지예요. C 재고 보충은 구매 담당이 승인하고, ERP 발주와 공급사 통지, 입고 확인이 이어집니다. 수업 시스템은 입고를 바로 반영하지만 실제 배송과는 다르죠. 그래서 발주 중인 수량과 입고가 끝난 수량을 나눠 넘겨야 합니다. 강조한 마지막 줄이 재고 보충이 시작될 때의 값이에요. 현재고 3에 정비 예약이 2라서 쓸 수 있는 건 1이고, 발주 중은 0이었습니다. 재주문점 2보다 적어서 목표 재고 7까지 6개가 필요했죠. 여기서 보듯 현재고, 예약, 발주 중은 서로 다른 칸입니다. 교대 인계안의 부품 영역에서 이 칸들을 한 숫자로 합치지 않고 이름 그대로 넘기는 이유가 여기 있어요.</a:t>
+              <a:t>[짚을 곳] 위 세 줄(업무 · 승인자) → 가운데(승인 뒤 시스템 실행) → 오른쪽(교대에 넘길 확인) → 강조한 넷째 줄</a:t>
+            </a:r>
+          </a:p>
+          <a:p>
+            <a:r>
+              <a:t>· A 냉각 대응 · 운전원: PLC 명령 · 재관측 · 작업지시(CMMS) → 작업지시 등록 ≠ 정비 완료</a:t>
+            </a:r>
+          </a:p>
+          <a:p>
+            <a:r>
+              <a:t>· B 정기 점검 · 설비보전팀장: 정비 오더(CMMS) · 생산팀 공지 → 정비 예정 시간과 실제 정비 여부</a:t>
+            </a:r>
+          </a:p>
+          <a:p>
+            <a:r>
+              <a:t>· C 재고 보충 · 구매 담당: ERP 발주 · 공급사 통지 · 입고 확인 → 수업 시스템은 입고를 바로 반영하나 실제 배송과 다름, 발주 중과 입고 완료를 나눈 수량</a:t>
+            </a:r>
+          </a:p>
+          <a:p>
+            <a:r>
+              <a:t>· C 시작 값: 현재고 3 · 정비 예약 2 · 발주 중 0 · 가용 1, 재주문점 2보다 적어 목표 재고 7까지 6개 필요</a:t>
+            </a:r>
+          </a:p>
+          <a:p>
+            <a:r>
+              <a:t>· 현재고 · 예약 · 발주 중은 다른 칸 → 부품 영역에서 한 수로 합치지 않고 이름 그대로 넘김</a:t>
+            </a:r>
+          </a:p>
+          <a:p>
+            <a:r>
+              <a:t>[다음] COMPLETED가 말하지 않는 것</a:t>
             </a:r>
           </a:p>
         </p:txBody>
@@ -1744,7 +2284,37 @@
           <a:lstStyle/>
           <a:p>
             <a:r>
-              <a:t>처리 건이 끝났는지는 상태 값으로 봅니다. 그런데 그 상태 값이 무엇을 말해 주지 않는지 짚고 가겠습니다. 표의 다섯 처리 건, 가운데 열을 보면 상태가 모두 COMPLETED예요. A를 승인한 건과 거절한 건이 똑같이 COMPLETED입니다. B와 C를 거절한 건도 그래요. 상태 값은 흐름이 끝났다는 것만 말합니다. 무엇으로 끝났는지는 그 옆의 끝 이벤트와 결과 보고를 봐야 하죠. 그리고 오른쪽 열을 보세요. B를 거절한 뒤에도 정기 점검 도래 표시가, C를 거절한 뒤에도 재고 보충 필요 표시가 켜진 채 남아 있습니다. 업무 쪽에서는 일이 끝나지 않은 거예요. 강조한 마지막 줄이 교대 처리 건입니다. 인수 확인이 끝나면 처리 건은 COMPLETED이고, 인수 확인 기록 완료라는 끝으로 닫혀요. 그래도 열린 작업지시와 입고 예정은 그대로입니다. 교대 흐름에는 업무 시스템에 쓰는 단계가 없으니까요. 그래서 처리 건의 결과를 읽을 때는 세 곳을 봅니다. 상태 값, 끝 이벤트와 결과 보고, 그리고 업무 쪽에 남은 표시예요. COMPLETED를 성공이나 업무 완료로 읽으면 다음 근무자가 확인할 일을 놓칩니다.</a:t>
+              <a:t>[짚을 곳] 다섯 처리 건 → 가운데(상태 · 끝 이벤트 · 결과) → 오른쪽(업무에 남은 것) → 강조한 다섯째 줄</a:t>
+            </a:r>
+          </a:p>
+          <a:p>
+            <a:r>
+              <a:t>· 다섯 모두 COMPLETED: A 승인도 A 거절도 같음 → 상태 값은 흐름이 끝났다는 것만</a:t>
+            </a:r>
+          </a:p>
+          <a:p>
+            <a:r>
+              <a:t>· 무엇으로 끝났나: 끝 이벤트(E_end · E_rejected)와 결과 보고(정상 · 반려)</a:t>
+            </a:r>
+          </a:p>
+          <a:p>
+            <a:r>
+              <a:t>· B · C 거절 뒤: 정기 점검 도래 · 재고 보충 필요 표시가 켜진 채 → 업무 쪽은 끝나지 않음</a:t>
+            </a:r>
+          </a:p>
+          <a:p>
+            <a:r>
+              <a:t>· 교대 인수 확인: COMPLETED · 인수 확인 기록 완료, 열린 작업지시 · 입고 예정은 그대로(업무 시스템 쓰기 단계 없음)</a:t>
+            </a:r>
+          </a:p>
+          <a:p>
+            <a:r>
+              <a:t>· 결과 읽기의 세 곳: 상태 값, 끝 이벤트 · 결과 보고, 업무 쪽에 남은 표시 → COMPLETED를 성공 · 업무 완료로 읽으면 확인할 일을 놓침</a:t>
+            </a:r>
+          </a:p>
+          <a:p>
+            <a:r>
+              <a:t>[다음] 넷째 단원</a:t>
             </a:r>
           </a:p>
         </p:txBody>
@@ -1814,7 +2384,32 @@
           <a:lstStyle/>
           <a:p>
             <a:r>
-              <a:t>네 번째 단원은 교대 처리 건의 장치와 사람의 확인입니다. 에이전트, 스킬, MCP, 명세와 시나리오, BPMN 정의와 인스턴스, 작업 담당, 승인, 시스템 작업. 쿨러 처리 건에서 이 장치들이 맡던 일을 교대 처리 건에서는 어떻게 나눠 맡는지, 그리고 제공된 교대 흐름에서 무엇을 바꿀 수 있고 무엇을 지켜야 하는지 보겠습니다.</a:t>
+              <a:t>[짚을 곳] 단원 번호 04 → 제목 → 부제</a:t>
+            </a:r>
+          </a:p>
+          <a:p>
+            <a:r>
+              <a:t>· 장치: 에이전트 · 스킬 · MCP · 명세와 시나리오 · BPMN 정의와 인스턴스 · 작업 담당 · 승인 · 시스템 작업</a:t>
+            </a:r>
+          </a:p>
+          <a:p>
+            <a:r>
+              <a:t>· 물음: 쿨러에서 맡던 일을 교대에서는 어떻게 나눠 맡나</a:t>
+            </a:r>
+          </a:p>
+          <a:p>
+            <a:r>
+              <a:t>· 물음: 제공된 교대 흐름에서 무엇을 바꿀 수 있고 무엇을 지키나</a:t>
+            </a:r>
+          </a:p>
+          <a:p>
+            <a:r>
+              <a:t>· 에이전트 쪽 장치와 프로세스 쪽 장치를 나눠 본다</a:t>
+            </a:r>
+          </a:p>
+          <a:p>
+            <a:r>
+              <a:t>[다음] 두 처리 건의 장치 표</a:t>
             </a:r>
           </a:p>
         </p:txBody>
@@ -1884,7 +2479,42 @@
           <a:lstStyle/>
           <a:p>
             <a:r>
-              <a:t>왼쪽 열이 장치 이름이에요. 위 네 줄은 에이전트 쪽 장치, 아래 다섯 줄은 프로세스 쪽 장치입니다. 가운데가 쿨러 처리 건, 오른쪽이 교대 처리 건이고요. 에이전트 쪽부터 보죠. 쿨러에서는 냉각 긴급 대응 에이전트가 추천안을 냈고, 교대에서는 실습에서 직접 구성할 인계 에이전트가 인계안을 냅니다. 스킬은 쿨러에서 진단, 평가, 제출의 순서였고, 교대에서는 네 영역을 어떻게 대조하고 상태를 어떻게 판정할지의 기준이에요. MCP 줄을 보면 쿨러 쪽은 제안 제출 도구까지 있었지만, 교대 쪽은 같은 세 서버의 조회 도구뿐입니다. 명세와 시나리오도 각각 추천안 계약과 인계안 계약, 거절 시나리오와 불일치 시나리오로 바뀌어요. 프로세스 쪽으로 내려가면, 정의는 냉각 대응 흐름과 제공된 교대 흐름의 별도 판본이고, 인스턴스는 경보 한 건이 여는지 시작 폼의 네 입력이 여는지가 다릅니다. 작업 담당은 쿨러가 에이전트, 운전원, 시스템이었고, 교대는 에이전트, 인계자, 인수자예요. 강조한 줄과 맨 아래 줄에서 가장 크게 달라집니다. 쿨러에는 사람의 확인이 운전원 승인 하나였는데, 교대에는 인계자 검토와 인수자 확인, 둘이에요. 그리고 교대에는 시스템 작업이 하나도 없습니다. 쿨러는 사람이 승인한 조치를 시스템이 실행하는 처리 건이었고, 교대는 에이전트가 모은 근거를 두 사람이 확인하는 처리 건입니다.</a:t>
+              <a:t>[짚을 곳] 왼쪽(장치) 위 네 줄 에이전트 쪽 · 아래 다섯 줄 프로세스 쪽 → 가운데(쿨러) vs 오른쪽(교대) → 강조한 여덟째 줄과 맨 아래 줄</a:t>
+            </a:r>
+          </a:p>
+          <a:p>
+            <a:r>
+              <a:t>· 에이전트 실행: 냉각 긴급 대응 → 추천안 vs 실습에서 직접 구성하는 인계 에이전트 → 인계안</a:t>
+            </a:r>
+          </a:p>
+          <a:p>
+            <a:r>
+              <a:t>· 스킬: 진단 → 평가 → 제출 순서 vs 네 영역 대조 · 상태 판정 기준, MCP: 제안 제출 포함 vs 같은 세 서버의 조회만</a:t>
+            </a:r>
+          </a:p>
+          <a:p>
+            <a:r>
+              <a:t>· 명세 · 시나리오: 추천안 계약 · 거절 시나리오 vs 인계안 계약 · 불일치 시나리오</a:t>
+            </a:r>
+          </a:p>
+          <a:p>
+            <a:r>
+              <a:t>· BPMN 정의 c3_cooling vs ShiftHandover 별도 판본, 인스턴스: 경보 한 건 vs 시작 폼 네 입력, 작업 담당: 에이전트 · 운전원 · 시스템 vs 에이전트 · 인계자 · 인수자</a:t>
+            </a:r>
+          </a:p>
+          <a:p>
+            <a:r>
+              <a:t>· HITL: 운전원 승인 · 거절 하나 vs 인계자 검토 · 인수자 확인 둘, 시스템 작업: 명령 · 재관측 · 작업지시 vs 없음</a:t>
+            </a:r>
+          </a:p>
+          <a:p>
+            <a:r>
+              <a:t>· 요약: 쿨러는 승인한 조치를 시스템이 실행, 교대는 모은 근거를 두 사람이 확인</a:t>
+            </a:r>
+          </a:p>
+          <a:p>
+            <a:r>
+              <a:t>[다음] 제공 흐름의 차례</a:t>
             </a:r>
           </a:p>
         </p:txBody>
@@ -1954,7 +2584,42 @@
           <a:lstStyle/>
           <a:p>
             <a:r>
-              <a:t>제공된 교대 흐름이 실제로 어떤 차례로 도는지 표로 펼쳤습니다. 왼쪽이 지금 차례, 가운데가 그 차례에서 내리는 결정, 오른쪽이 다음 차례예요. 인계 요청에서 설비와 교대, 기준 시각, 작업 메모를 입력하면 에이전트가 인계안을 작성하고, 초안과 근거를 내면 인계자 검토로 넘어갑니다. 강조한 두 줄이 사람의 검토예요. 인계자는 승인, 보완, 거절 가운데 하나를 고릅니다. 승인하면 인수자 확인으로, 보완이면 보완 초안으로, 거절이면 인계 거절 기록으로 끝나요. 인수자는 확인이나 보완을 고르고, 확인하면 인수 확인 기록 완료로 끝나고, 보완이면 역시 보완 초안으로 갑니다. 보완 초안은 두 번까지 있어요. 보완 1, 보완 2마다 인계자 검토와 인수자 확인이 다시 따라옵니다. 이때 에이전트는 사람이 적은 사유를 받아서 지금 상태를 다시 조회해요. 앞 초안의 조회 결과를 그대로 다시 쓰지 않습니다. 마지막 줄을 보세요. 보완 2 뒤에도 다시 보완을 요청하면 더 돌지 않고, 후속 확인 필요, 인수 미확정으로 끝납니다. 끝없이 고치게 두지 않고, 확인하지 못한 채 끝났다는 사실을 끝 이벤트로 남기는 거죠. 그러니 이 흐름의 끝은 셋입니다. 확인, 거절, 그리고 후속 확인 필요예요.</a:t>
+              <a:t>[짚을 곳] 왼쪽(지금 차례) → 가운데(결정) → 오른쪽(다음 차례) → 강조한 셋째 · 넷째 줄</a:t>
+            </a:r>
+          </a:p>
+          <a:p>
+            <a:r>
+              <a:t>· 인계 요청(설비 · 교대 · 기준 시각 · 작업 메모) → 인계안 작성(에이전트) → 초안과 근거 제출 → 인계자 검토</a:t>
+            </a:r>
+          </a:p>
+          <a:p>
+            <a:r>
+              <a:t>· 인계자: approve → 인수자 확인, revise → 보완 초안, reject → 인계 거절 기록(끝)</a:t>
+            </a:r>
+          </a:p>
+          <a:p>
+            <a:r>
+              <a:t>· 인수자: confirm → 인수 확인 기록 완료(끝), revise → 보완 초안</a:t>
+            </a:r>
+          </a:p>
+          <a:p>
+            <a:r>
+              <a:t>· 보완 1 · 2: 사유를 받아 지금 상태를 다시 조회, 앞 초안 결과를 그대로 다시 쓰지 않음, 매번 인계자 검토 · 인수자 확인이 다시 따라옴</a:t>
+            </a:r>
+          </a:p>
+          <a:p>
+            <a:r>
+              <a:t>· 보완 2 뒤의 revise: 더 돌지 않고 후속 확인 필요 · 인수 미확정(끝) → 확인 못 한 채 끝났다는 사실을 끝 이벤트로 남김</a:t>
+            </a:r>
+          </a:p>
+          <a:p>
+            <a:r>
+              <a:t>· 끝은 셋: 확인 · 거절 · 후속 확인 필요</a:t>
+            </a:r>
+          </a:p>
+          <a:p>
+            <a:r>
+              <a:t>[다음] 사람의 결정이 남는 칸</a:t>
             </a:r>
           </a:p>
         </p:txBody>
@@ -2024,7 +2689,42 @@
           <a:lstStyle/>
           <a:p>
             <a:r>
-              <a:t>두 사람의 결정이 실제로 무엇으로 남는지 보겠습니다. 왼쪽은 각 단계가 내는 결과 칸이에요. 인계자 검토는 승인, 보완, 거절 가운데 하나와, 확인 사항이나 보완 · 거절 사유를 남깁니다. 사유는 비워 둘 수 없어요. 인수자 확인은 확인이나 보완 가운데 하나와 사유를 남기는데, 칸이 하나 더 있습니다. 확인을 고를 때는 이 확인이 전달받았다는 기록일 뿐이라는 데 반드시 동의해야 해요. 동의하지 않으면 시스템이 받아들이지 않고 「인계 확인은 설비 조치, 발주, 정비 완료가 아님을 확인하라」고 돌려보냅니다. 아래 보완 초안은 두 사람이 적은 사유를 입력으로 받고, 필요한 지금 상태를 다시 조회하고요. 오른쪽 짚을 점을 차례로 보면, 첫째, 거절은 인계자 검토에만 있습니다. 인수자는 확인과 보완만 고를 수 있어요. 둘째, 사유가 있어야 받아들여지니까 다음 초안이 무엇을 고칠지 압니다. 앞에서 정한 보완 질문이 바로 여기 들어가요. 셋째, 강조한 전달 확인입니다. 사람이 인수 확인을 누른 순간 열린 작업지시가 닫히거나 부품이 들어오는 게 아니라는 걸, 결정하는 사람 스스로 한 번 더 확인하게 만든 장치예요. 넷째, 보완할 때는 앞 초안의 조회 결과를 지금 상태로 다시 쓰지 않습니다.</a:t>
+              <a:t>[짚을 곳] 코드 세 묶음(인계자 검토 · 인수자 확인 · 보완 초안) → 오른쪽 짚을 점 넷(강조한 셋째)</a:t>
+            </a:r>
+          </a:p>
+          <a:p>
+            <a:r>
+              <a:t>· 인계자: sender_decision approve · revise · reject, sender_notes 필수</a:t>
+            </a:r>
+          </a:p>
+          <a:p>
+            <a:r>
+              <a:t>· 인수자: receiver_decision confirm · revise, receiver_notes 필수, confirm이면 communication_only true 필수</a:t>
+            </a:r>
+          </a:p>
+          <a:p>
+            <a:r>
+              <a:t>· 동의 없으면 시스템이 거절: 「인계 확인은 설비 조치, 발주, 정비 완료가 아님을 확인하라」</a:t>
+            </a:r>
+          </a:p>
+          <a:p>
+            <a:r>
+              <a:t>· 보완 초안: 두 사람의 notes가 입력, 필요한 지금 상태를 다시 조회</a:t>
+            </a:r>
+          </a:p>
+          <a:p>
+            <a:r>
+              <a:t>· 짚을 점: 거절은 인계자 검토에만, 사유가 있어야 다음 초안이 고칠 곳을 앎(보완 질문이 여기 들어감)</a:t>
+            </a:r>
+          </a:p>
+          <a:p>
+            <a:r>
+              <a:t>· 전달 확인: 확인을 누른 순간 작업지시가 닫히거나 부품이 들어오지 않음을 결정하는 사람이 한 번 더 확인하게 하는 장치, 보완 때 앞 조회 결과를 지금 상태로 쓰지 않음</a:t>
+            </a:r>
+          </a:p>
+          <a:p>
+            <a:r>
+              <a:t>[다음] 바꿀 것 · 유지할 것</a:t>
             </a:r>
           </a:p>
         </p:txBody>
@@ -2094,7 +2794,37 @@
           <a:lstStyle/>
           <a:p>
             <a:r>
-              <a:t>목차의 위 네 줄이 이론입니다. 첫째와 셋째 단원은 쿨러 처리 건으로 지식이 판단이 되는 길, 판단이 업무 완료가 되는 길을 되짚어요. 둘째와 넷째 단원은 그 두 길을 교대 인수인계에 적용합니다. 다섯째 줄은 교대 실습 네 개를 묶은 거고, 이어서 ProcessGPT 시연과 Notion 학습노트 기록을 한 뒤, 복습과 용어, 퀴즈로 마무리합니다. 이번 시간에는 앞의 두 단원, 지식이 판단의 근거가 되는 길과 교대 인계안의 근거를 다룹니다.</a:t>
+              <a:t>[짚을 곳] 여덟 줄 위에서 아래로 → 오른쪽 이론 · 실습 · 정리 꼬리표</a:t>
+            </a:r>
+          </a:p>
+          <a:p>
+            <a:r>
+              <a:t>· 1 · 3단원: 쿨러 처리 건으로 되짚기(지식 → 판단, 판단 → 업무 완료)</a:t>
+            </a:r>
+          </a:p>
+          <a:p>
+            <a:r>
+              <a:t>· 2 · 4단원: 같은 두 길을 교대 인수인계에 적용</a:t>
+            </a:r>
+          </a:p>
+          <a:p>
+            <a:r>
+              <a:t>· 5줄: 교대 실습 넷(입력 · 보충 매뉴얼 · 에이전트 · 흐름) 묶음</a:t>
+            </a:r>
+          </a:p>
+          <a:p>
+            <a:r>
+              <a:t>· 6 · 7줄: ProcessGPT 시연, Notion 학습노트 기록 → 8줄 복습 · 용어 · 퀴즈</a:t>
+            </a:r>
+          </a:p>
+          <a:p>
+            <a:r>
+              <a:t>· 앞 두 단원(판단의 근거, 인계안의 근거)부터 시작</a:t>
+            </a:r>
+          </a:p>
+          <a:p>
+            <a:r>
+              <a:t>[다음] 첫 단원</a:t>
             </a:r>
           </a:p>
         </p:txBody>
@@ -2164,7 +2894,42 @@
           <a:lstStyle/>
           <a:p>
             <a:r>
-              <a:t>실습에서는 이 교대 흐름을 bpmn.io에서 열어 손보고 포털에 판본으로 등록합니다. 그때 바꿀 수 있는 것과 유지해야 하는 것을 나눠 두었어요. 왼쪽, 바꿀 수 있는 건 작업의 표시 이름과 그림 배치, 흐름의 이름, 그리고 세 초안 단계에 배정할 자기 에이전트입니다. 이렇게 바꾼 흐름은 별도 판본으로 등록돼요. 오른쪽 강조한 칸이 유지하는 것입니다. 흐름의 식별자와 작업, 연결, 분기 조건, 시작 입력 네 개는 그대로 둡니다. 쓰기 도구나 시스템 작업을 더하지 않고, 학생이 따로 만든 코드가 포털 작업에 자동으로 붙지도 않아요. 이건 말로만 정한 규칙이 아닙니다. 등록할 때 시스템이 제공 흐름과 구조를 비교해서, 이름만 다르고 구조가 같은 판본만 받아요. 매핑도 흐름 이름과 세 초안 단계의 에이전트만 바뀌었는지 검사합니다. 그래서 학생마다 표시 이름은 달라도 검토와 보완의 경로, 시작 입력은 모두 같아요. 인수 확인이 정비나 발주로 바뀌는 길이 흐름 안에 생기지 않는 것도 이 검사 덕분입니다.</a:t>
+              <a:t>[짚을 곳] 왼쪽(바꿀 수 있는 것) vs 강조한 오른쪽(유지하는 것) → 꼬리표(표시 · 배정</a:t>
+            </a:r>
+          </a:p>
+          <a:p>
+            <a:r>
+              <a:t>구조 · 권한)</a:t>
+            </a:r>
+          </a:p>
+          <a:p>
+            <a:r>
+              <a:t>· 실습: bpmn.io에서 손보고 포털에 판본으로 등록</a:t>
+            </a:r>
+          </a:p>
+          <a:p>
+            <a:r>
+              <a:t>· 바꿀 수 있음: 작업 표시 이름 · 그림 배치, 흐름 이름, 세 초안 단계에 배정할 자기 에이전트 → 별도 판본</a:t>
+            </a:r>
+          </a:p>
+          <a:p>
+            <a:r>
+              <a:t>· 유지: 흐름 ID ShiftHandover · 작업 · 연결 · 분기 조건, 시작 입력 넷, 쓰기 도구 · 시스템 작업 없음, 임의 코드의 자동 연결 없음</a:t>
+            </a:r>
+          </a:p>
+          <a:p>
+            <a:r>
+              <a:t>· 말로만 정한 규칙 아님: 등록 때 제공 흐름과 구조를 비교해 이름만 다르고 구조가 같은 판본만 받음, 매핑도 흐름 이름 · 세 초안 단계 에이전트만 바뀌었는지 검사</a:t>
+            </a:r>
+          </a:p>
+          <a:p>
+            <a:r>
+              <a:t>· 결과: 학생마다 표시 이름은 달라도 검토 · 보완 경로와 시작 입력은 같음, 인수 확인이 정비 · 발주로 바뀌는 길이 생기지 않음</a:t>
+            </a:r>
+          </a:p>
+          <a:p>
+            <a:r>
+              <a:t>[다음] 불일치 시나리오</a:t>
             </a:r>
           </a:p>
         </p:txBody>
@@ -2234,7 +2999,42 @@
           <a:lstStyle/>
           <a:p>
             <a:r>
-              <a:t>에이전트 쪽 장치 가운데 명세와 시나리오를 교대에 적용해 보겠습니다. 실전 실습에서 기대 결과를 먼저 정하고 판정 코드로 검사했던 그 방법이에요. 왼쪽이 시나리오입니다. 전제에서 작업 메모에 「쿨러 핀 세척 정비 완료」가 있고, 그 설비의 작업지시는 배정됨 상태에 완료 시각이 없다고 정합니다. 행동은 인계안을 작성하는 거고요. 기대 결과는 넷이에요. 작업지시 영역의 상태는 불일치, 메모와 작업지시 조회를 모두 근거로 남기고, 다음 근무자가 확인할 작업지시를 적고, 작업지시를 닫는 호출은 없어야 합니다. 오른쪽 짚을 점을 보면, 전제는 명세의 입력 계약처럼 메모와 원천의 상태를 먼저 정한 거예요. 강조한 기대 결과에서는 상태, 근거, 다음 확인을 결과에서 검사합니다. 문장 표현은 실행마다 달라도 괜찮아요. 셋째, 회귀 검증도 함께 합니다. 원천이 메모와 같은 사례도 돌려서, 일치하는 경우는 확인됨으로 남기는지 봐야 해요. 불일치만 잘 잡는 게 아니라 멀쩡한 경우를 불일치로 만들지 않는지도 봐야 하니까요. 넷째, 실제 수업 시스템에서 돌린 교대 한 건도 이 경우를 불일치로 남긴 뒤 인수 확인으로 끝났습니다.</a:t>
+              <a:t>[짚을 곳] 코드 Given · When · Then 차례 → 오른쪽 짚을 점 넷(강조한 둘째)</a:t>
+            </a:r>
+          </a:p>
+          <a:p>
+            <a:r>
+              <a:t>· 실전 실습의 방법: 기대 결과를 먼저 정하고 판정 코드로 검사</a:t>
+            </a:r>
+          </a:p>
+          <a:p>
+            <a:r>
+              <a:t>· Given: 메모에 「쿨러 핀 세척 정비 완료」, 그 설비 작업지시는 배정됨 · 완료시각 없음, When: 인계안 작성</a:t>
+            </a:r>
+          </a:p>
+          <a:p>
+            <a:r>
+              <a:t>· Then 넷: 작업지시 영역 conflict, 메모와 작업지시 조회를 모두 근거로, 다음 근무자가 확인할 작업지시, 작업지시를 닫는 호출 없음</a:t>
+            </a:r>
+          </a:p>
+          <a:p>
+            <a:r>
+              <a:t>· Given = 명세의 입력 계약처럼 상태를 먼저 정함, Then은 상태 · 근거 · 다음 확인을 검사하고 문장 표현은 달라도 됨</a:t>
+            </a:r>
+          </a:p>
+          <a:p>
+            <a:r>
+              <a:t>· 회귀: 원천이 메모와 같은 사례도 함께 → 일치를 observed로 남기나, 멀쩡한 경우를 불일치로 만들지 않나</a:t>
+            </a:r>
+          </a:p>
+          <a:p>
+            <a:r>
+              <a:t>· 실제 수업 시스템의 교대 한 건도 이 경우를 conflict로 남긴 뒤 인수 확인</a:t>
+            </a:r>
+          </a:p>
+          <a:p>
+            <a:r>
+              <a:t>[다음] 기대와 다를 때 볼 곳</a:t>
             </a:r>
           </a:p>
         </p:txBody>
@@ -2304,7 +3104,42 @@
           <a:lstStyle/>
           <a:p>
             <a:r>
-              <a:t>교대 처리 건을 돌려 보면 기대와 다른 결과가 나올 수 있어요. 그때 어디부터 볼지를 증상별로 정리했습니다. 왼쪽이 드러난 증상, 가운데가 먼저 볼 곳, 오른쪽이 영역이에요. 인계안 근거에 HI-01의 절이 나오지 않는다면, 보충 매뉴얼을 검토하고 적재할 때 출처가 이어졌는지부터 봅니다. 지식의 문제예요. 입고 예정이 현재고로 적혔다면 스킬과 지침에 대조 기준을 제대로 적었는지 봅니다. 근거가 실제 호출과 맞지 않아 제출이 거절됐다면, 출력 계약과 그 작업의 도구 호출 기록을 대조하고요. 이 둘은 에이전트 쪽입니다. 초안 단계에서 다른 에이전트가 돈다면 판본의 세 초안 단계에 누구를 배정했는지 봅니다. 프로세스 쪽이죠. 마지막 줄, 보완을 두 번 했는데도 미확정으로 끝났다면, 보완 사유가 구체적이었는지, 다시 조회한 원천이 무엇을 보여 줬는지를 봅니다. 사람의 결정과 흐름이 함께 걸린 경우예요. 이렇게 증상으로 영역을 먼저 좁히면, 에이전트의 문장부터 고치다가 진짜 원인을 놓치는 일을 줄일 수 있습니다. 그다음은 처리 건 기록을 따라가며 확인하면 돼요.</a:t>
+              <a:t>[짚을 곳] 왼쪽(드러난 증상) → 가운데(먼저 볼 곳) → 오른쪽(영역) → 강조한 다섯째 줄</a:t>
+            </a:r>
+          </a:p>
+          <a:p>
+            <a:r>
+              <a:t>· 근거에 HI-01 절이 안 나옴 → 보충 매뉴얼 검토 · 적재와 출처 연결(지식)</a:t>
+            </a:r>
+          </a:p>
+          <a:p>
+            <a:r>
+              <a:t>· 입고 예정이 현재고로 적힘 → 스킬과 지침의 대조 기준(에이전트)</a:t>
+            </a:r>
+          </a:p>
+          <a:p>
+            <a:r>
+              <a:t>· 근거가 실제 호출과 안 맞아 제출 거절 → 출력 계약과 이 작업의 도구 호출 기록(에이전트)</a:t>
+            </a:r>
+          </a:p>
+          <a:p>
+            <a:r>
+              <a:t>· 초안 단계에서 다른 에이전트가 돎 → 판본의 세 초안 단계 배정(프로세스)</a:t>
+            </a:r>
+          </a:p>
+          <a:p>
+            <a:r>
+              <a:t>· 보완 두 번 뒤에도 미확정 → 보완 사유가 구체적이었나, 다시 조회한 원천이 무엇을 보였나(사람 · 프로세스)</a:t>
+            </a:r>
+          </a:p>
+          <a:p>
+            <a:r>
+              <a:t>· 증상으로 영역을 먼저 좁히면 에이전트 문장부터 고치다 원인을 놓치는 일이 줆, 그다음 처리 건 기록을 따라감</a:t>
+            </a:r>
+          </a:p>
+          <a:p>
+            <a:r>
+              <a:t>[다음] 실습 1</a:t>
             </a:r>
           </a:p>
         </p:txBody>
@@ -2374,7 +3209,32 @@
           <a:lstStyle/>
           <a:p>
             <a:r>
-              <a:t>이제 실습으로 교대 인수인계 한 건을 직접 처리합니다. 첫 실습은 인계 문제의 입력과 완료 조건을 정하는 거예요. 화면의 첫 카드가 입력입니다. 대상 설비와 인계할 교대, 기준 시각, 전달받은 작업 메모를 HI-01의 기준에 맞춰 정리해요. 둘째 카드는 다음 담당자가 이어 확인할 것, 설비 상태와 열린 작업, 부품, 작업 메모입니다. A, B, C에서 본 업무 기록을 다시 실행하는 게 아니라, 그 기록과 별개로 교대 한 건의 문제를 정하는 거예요. 셋째 카드가 완료 조건입니다. 주장마다 근거가 있고, 불일치와 확인할 일이 남고, 인계자 검토와 인수자 확인이 기록되면 완료예요. 이 조건을 먼저 정해 둬야 나중에 인계안이 맞는지 판정할 기준이 섭니다.</a:t>
+              <a:t>[짚을 곳] 실습 구분 → 제목</a:t>
+            </a:r>
+          </a:p>
+          <a:p>
+            <a:r>
+              <a:t>· 목적: 교대 인수인계 한 건의 문제를 정한다</a:t>
+            </a:r>
+          </a:p>
+          <a:p>
+            <a:r>
+              <a:t>· 입력: 대상 설비 · 인계할 교대 · 기준 시각 · 전달받은 작업 메모, HI-01 기준에 맞춤</a:t>
+            </a:r>
+          </a:p>
+          <a:p>
+            <a:r>
+              <a:t>· 이어 확인할 것: 설비 상태 · 열린 작업 · 부품 · 작업 메모, A · B · C 기록을 다시 실행하지 않음</a:t>
+            </a:r>
+          </a:p>
+          <a:p>
+            <a:r>
+              <a:t>· 완료 조건을 먼저 정해야 인계안 판정 기준이 섬</a:t>
+            </a:r>
+          </a:p>
+          <a:p>
+            <a:r>
+              <a:t>[다음] 입력과 완료 조건 카드</a:t>
             </a:r>
           </a:p>
         </p:txBody>
@@ -2444,7 +3304,37 @@
           <a:lstStyle/>
           <a:p>
             <a:r>
-              <a:t>33~34장 통합 발화는 33장 발표자 노트를 따른다.</a:t>
+              <a:t>[짚을 곳] 카드 셋 왼쪽부터 → 꼬리표 → 강조한 셋째 카드</a:t>
+            </a:r>
+          </a:p>
+          <a:p>
+            <a:r>
+              <a:t>· 입력: 대상 설비 · 인계할 교대 · 기준 시각 · 작업 메모(HI-01 기준)</a:t>
+            </a:r>
+          </a:p>
+          <a:p>
+            <a:r>
+              <a:t>· 이어 확인할 것: 설비 상태 · 열린 작업 · 부품 · 작업 메모, ABC 기록과 별개인 교대 한 건</a:t>
+            </a:r>
+          </a:p>
+          <a:p>
+            <a:r>
+              <a:t>· 완료 조건: 주장마다 근거, 불일치와 확인할 일이 남음, 인계자 검토 · 인수자 확인 기록</a:t>
+            </a:r>
+          </a:p>
+          <a:p>
+            <a:r>
+              <a:t>· 앞 이론과의 연결: 네 영역 · 세 상태 계약, 받아들일 근거와 보완 질문</a:t>
+            </a:r>
+          </a:p>
+          <a:p>
+            <a:r>
+              <a:t>· 판정 기준이 먼저 서야 뒤 실습의 인계안을 맞다 · 틀리다로 가름</a:t>
+            </a:r>
+          </a:p>
+          <a:p>
+            <a:r>
+              <a:t>[다음] 실습 2</a:t>
             </a:r>
           </a:p>
         </p:txBody>
@@ -2514,7 +3404,32 @@
           <a:lstStyle/>
           <a:p>
             <a:r>
-              <a:t>다음은 인계의 기준이 될 보충 매뉴얼을 지식에 더하는 실습입니다. 강사 코드로 교대 실습이 열리면 제공 HI-01을 고릅니다. 둘째 카드처럼 준비된 추출 후보의 절차와 조건, 근거를 원문과 하나씩 대조해요. 같은 문서를 같은 조건으로 뽑은 결과를 다시 쓰는 것과, 사람이 검토해서 적재하는 일은 다릅니다. 앞의 것은 시간을 아끼는 거고, 뒤의 것은 여전히 사람의 몫이에요. 셋째 카드에서 지식 지도로 새 항목의 식별자와 문서, 판본, 절이 이어졌는지 확인하고, 마지막 카드처럼 검토한 항목만 더하고 기존 세 문서는 그대로인지 봅니다. 여기서 더한 절차가 이후 인계안의 확인 기준이 돼요.</a:t>
+              <a:t>[짚을 곳] 실습 구분 → 제목</a:t>
+            </a:r>
+          </a:p>
+          <a:p>
+            <a:r>
+              <a:t>· 목적: 인계의 기준이 될 보충 매뉴얼 HI-01을 지식에 더한다</a:t>
+            </a:r>
+          </a:p>
+          <a:p>
+            <a:r>
+              <a:t>· 강사 코드로 교대 실습이 열리면 제공 HI-01을 고름</a:t>
+            </a:r>
+          </a:p>
+          <a:p>
+            <a:r>
+              <a:t>· 같은 문서 · 같은 조건의 추출 재사용(시간 절약) ≠ 사람의 검토 · 적재(여전히 사람 몫)</a:t>
+            </a:r>
+          </a:p>
+          <a:p>
+            <a:r>
+              <a:t>· 더한 절차가 이후 인계안의 확인 기준</a:t>
+            </a:r>
+          </a:p>
+          <a:p>
+            <a:r>
+              <a:t>[다음] 검토 · 적재 카드</a:t>
             </a:r>
           </a:p>
         </p:txBody>
@@ -2584,7 +3499,37 @@
           <a:lstStyle/>
           <a:p>
             <a:r>
-              <a:t>35~36장 통합 발화는 35장 발표자 노트를 따른다.</a:t>
+              <a:t>[짚을 곳] 카드 넷 왼쪽부터 → 꼬리표 → 강조한 넷째 카드</a:t>
+            </a:r>
+          </a:p>
+          <a:p>
+            <a:r>
+              <a:t>· 입력: 강사 코드로 열린 교대 실습, 제공 HI-01 보충 매뉴얼</a:t>
+            </a:r>
+          </a:p>
+          <a:p>
+            <a:r>
+              <a:t>· 검토: 추출 후보의 절차 · 조건 · 근거를 원문과 하나씩 대조</a:t>
+            </a:r>
+          </a:p>
+          <a:p>
+            <a:r>
+              <a:t>· 확인: 지식 지도에서 새 항목의 식별자와 문서 · 판본 · 절 연결(출처 연결)</a:t>
+            </a:r>
+          </a:p>
+          <a:p>
+            <a:r>
+              <a:t>· 성공 기준: 검토한 항목만 추가, 기존 세 문서(쿨러 · 정비 · 구매)는 그대로, 인계안의 확인 기준으로 씀</a:t>
+            </a:r>
+          </a:p>
+          <a:p>
+            <a:r>
+              <a:t>· 앞 이론과의 연결: HI-01 · HI-02 · HI-03 · HI-1.4, 근거에 절이 안 나오면 이 적재와 출처부터 봄</a:t>
+            </a:r>
+          </a:p>
+          <a:p>
+            <a:r>
+              <a:t>[다음] 실습 3</a:t>
             </a:r>
           </a:p>
         </p:txBody>
@@ -2654,7 +3599,32 @@
           <a:lstStyle/>
           <a:p>
             <a:r>
-              <a:t>세 번째는 원천을 대조하는 인계 에이전트와 스킬을 만드는 실습입니다. 첫 카드, 도구는 허용된 설비, 정비, ERP 읽기 도구뿐이에요. 쓰기나 설비 조치 도구는 없습니다. 둘째 카드처럼 관측 시각, 열린 작업지시, 재고와 예약, 발주 중 수량, 작업 메모를 대조하게 하고, 셋째 카드처럼 완료 주장과 원천이 다르면 두 근거와 확인할 질문을 남기게 해요. 마지막 카드가 검증입니다. 결과의 문장마다 원천 기록과 비교하고, 모자라면 지침을 보완하세요. 로컬 랩에서 익힌 출처와 질문, 검증 방법을 그대로 쓰면 됩니다. 다만 로컬에서 만든 코드가 포털 작업에 자동으로 붙지는 않아요.</a:t>
+              <a:t>[짚을 곳] 실습 구분 → 제목</a:t>
+            </a:r>
+          </a:p>
+          <a:p>
+            <a:r>
+              <a:t>· 목적: 원천을 대조하는 인계 에이전트와 스킬을 만든다</a:t>
+            </a:r>
+          </a:p>
+          <a:p>
+            <a:r>
+              <a:t>· 도구는 허용된 설비 · 정비 · ERP 읽기뿐, 쓰기 · 설비 조치 도구 없음</a:t>
+            </a:r>
+          </a:p>
+          <a:p>
+            <a:r>
+              <a:t>· 로컬 랩에서 익힌 출처 · 질문 · 검증 방법을 그대로 씀</a:t>
+            </a:r>
+          </a:p>
+          <a:p>
+            <a:r>
+              <a:t>· 로컬에서 만든 코드가 포털 작업에 자동으로 붙지 않음</a:t>
+            </a:r>
+          </a:p>
+          <a:p>
+            <a:r>
+              <a:t>[다음] 에이전트 · 스킬 카드</a:t>
             </a:r>
           </a:p>
         </p:txBody>
@@ -2724,7 +3694,37 @@
           <a:lstStyle/>
           <a:p>
             <a:r>
-              <a:t>37~38장 통합 발화는 37장 발표자 노트를 따른다.</a:t>
+              <a:t>[짚을 곳] 카드 넷 왼쪽부터 → 꼬리표 → 강조한 넷째 카드</a:t>
+            </a:r>
+          </a:p>
+          <a:p>
+            <a:r>
+              <a:t>· 도구: 허용된 설비 · 정비 · ERP 읽기 도구, 쓰기 · 설비 조치 도구 없음(조회 범위)</a:t>
+            </a:r>
+          </a:p>
+          <a:p>
+            <a:r>
+              <a:t>· 대조: 관측 시각 · 열린 작업지시 · 재고 · 예약 · 발주 중 수량 · 작업 메모(네 영역)</a:t>
+            </a:r>
+          </a:p>
+          <a:p>
+            <a:r>
+              <a:t>· 차이 처리: 완료 주장과 원천이 다르면 두 근거와 확인할 질문을 남김(불일치)</a:t>
+            </a:r>
+          </a:p>
+          <a:p>
+            <a:r>
+              <a:t>· 검증: 결과 문장마다 원천 기록과 비교, 모자라면 지침 보완</a:t>
+            </a:r>
+          </a:p>
+          <a:p>
+            <a:r>
+              <a:t>· 앞 이론과의 연결: 입고 예정을 현재고로 적으면 스킬 · 지침의 대조 기준부터 봄</a:t>
+            </a:r>
+          </a:p>
+          <a:p>
+            <a:r>
+              <a:t>[다음] 실습 4</a:t>
             </a:r>
           </a:p>
         </p:txBody>
@@ -2794,7 +3794,32 @@
           <a:lstStyle/>
           <a:p>
             <a:r>
-              <a:t>네 번째 실습에서는 제공된 교대 흐름을 등록하고 한 건을 끝까지 실행합니다. 화면의 흐름을 왼쪽부터 보면, bpmn.io에서 표시 이름과 배치만 정리하고 시작 입력, 검토, 보완 분기는 그대로 둡니다. 세 초안 단계에 자기 에이전트를 배정해 판본을 등록하고, 설비와 교대 정보를 넣어 처리 건을 시작해요. 초안이 나오면 원천과 대조하고 인수자에게 근거와 남은 일을 설명합니다. 실제로 보완할 내용이 있으면 같은 처리 건에서 재검토하고요. 마지막 칸처럼 인수 확인을 정비나 발주 완료로 바꾸지 않고, 최종 인계안과 근거, 확인 기록을 저장하면 끝입니다.</a:t>
+              <a:t>[짚을 곳] 실습 구분 → 제목</a:t>
+            </a:r>
+          </a:p>
+          <a:p>
+            <a:r>
+              <a:t>· 목적: 제공 교대 흐름을 판본으로 등록하고 한 건을 끝까지 실행</a:t>
+            </a:r>
+          </a:p>
+          <a:p>
+            <a:r>
+              <a:t>· bpmn.io에서 표시 이름 · 배치만 정리, 시작 입력 · 검토 · 보완 분기는 그대로</a:t>
+            </a:r>
+          </a:p>
+          <a:p>
+            <a:r>
+              <a:t>· 세 초안 단계에 자기 에이전트 배정 → 등록 → 설비 · 교대 정보로 시작</a:t>
+            </a:r>
+          </a:p>
+          <a:p>
+            <a:r>
+              <a:t>· 인수 확인을 정비 · 발주 완료로 바꾸지 않음</a:t>
+            </a:r>
+          </a:p>
+          <a:p>
+            <a:r>
+              <a:t>[다음] 등록에서 인수 확인까지</a:t>
             </a:r>
           </a:p>
         </p:txBody>
@@ -2864,7 +3889,32 @@
           <a:lstStyle/>
           <a:p>
             <a:r>
-              <a:t>첫 번째 단원은 지식이 판단의 근거가 되는 길입니다. 쿨러 성능 저하 경보가 났을 때 에이전트가 받은 건 경보 메시지 한 건뿐이었어요. 그런데 결과로 나온 추천안에는 원인과 조치, 순위와 출처가 다 들어 있었죠. 그 사이를 무엇이 채웠는지, 교대 인계에 쓰기 전에 그 길부터 짧게 되짚겠습니다.</a:t>
+              <a:t>[짚을 곳] 단원 번호 01 → 제목 → 부제</a:t>
+            </a:r>
+          </a:p>
+          <a:p>
+            <a:r>
+              <a:t>· 쿨러 성능 저하 경보: 에이전트가 받은 것은 경보 메시지 한 건뿐</a:t>
+            </a:r>
+          </a:p>
+          <a:p>
+            <a:r>
+              <a:t>· 결과 추천안에는 원인 · 조치 · 순위 · 출처가 다 있음</a:t>
+            </a:r>
+          </a:p>
+          <a:p>
+            <a:r>
+              <a:t>· 물음: 그 사이를 무엇이 채웠나</a:t>
+            </a:r>
+          </a:p>
+          <a:p>
+            <a:r>
+              <a:t>· 교대 인계에 쓰기 전에 그 길을 짧게 되짚는다</a:t>
+            </a:r>
+          </a:p>
+          <a:p>
+            <a:r>
+              <a:t>[다음] 경보에 없는 것과 채우는 도구</a:t>
             </a:r>
           </a:p>
         </p:txBody>
@@ -2934,7 +3984,37 @@
           <a:lstStyle/>
           <a:p>
             <a:r>
-              <a:t>39~40장 통합 발화는 39장 발표자 노트를 따른다.</a:t>
+              <a:t>[짚을 곳] 흐름 여섯 칸 왼쪽부터 → 강조한 여섯째 칸</a:t>
+            </a:r>
+          </a:p>
+          <a:p>
+            <a:r>
+              <a:t>· 흐름 정리: 표시 이름 · 배치만, 입력 · 검토 · 보완 분기 유지(구조 검사)</a:t>
+            </a:r>
+          </a:p>
+          <a:p>
+            <a:r>
+              <a:t>· 판본 등록: 세 초안 단계에 자기 에이전트 배정, 시작: 설비 · 교대 정보 입력 → 초안과 근거 생성</a:t>
+            </a:r>
+          </a:p>
+          <a:p>
+            <a:r>
+              <a:t>· 검토 · 설명: 원천과 대조하고 인수자에게 근거 · 남은 일을 설명</a:t>
+            </a:r>
+          </a:p>
+          <a:p>
+            <a:r>
+              <a:t>· 보완: 실제로 보완할 내용이 있을 때만, 같은 처리 건에서 재검토</a:t>
+            </a:r>
+          </a:p>
+          <a:p>
+            <a:r>
+              <a:t>· 인수 · 저장: 정비 · 발주 완료가 아님, 최종 인계안 · 근거 · 확인 기록 저장</a:t>
+            </a:r>
+          </a:p>
+          <a:p>
+            <a:r>
+              <a:t>[다음] ProcessGPT 시연</a:t>
             </a:r>
           </a:p>
         </p:txBody>
@@ -3004,7 +4084,32 @@
           <a:lstStyle/>
           <a:p>
             <a:r>
-              <a:t>교대 한 건을 직접 끝까지 처리해 봤습니다. 이번엔 같은 구조가 실제 제품에서는 어떻게 보이는지, ProcessGPT 시연으로 확인하겠습니다. 시연 전에 무엇을 대어 볼지 두 장으로 준비할게요.</a:t>
+              <a:t>[짚을 곳] 실습 구분 → 제목</a:t>
+            </a:r>
+          </a:p>
+          <a:p>
+            <a:r>
+              <a:t>· 교대 한 건을 직접 끝까지 처리한 뒤 같은 구조가 실제 제품에서 어떻게 보이는지 확인</a:t>
+            </a:r>
+          </a:p>
+          <a:p>
+            <a:r>
+              <a:t>· 시연 전에 무엇을 대어 볼지 두 장으로 준비</a:t>
+            </a:r>
+          </a:p>
+          <a:p>
+            <a:r>
+              <a:t>· 하나는 구조의 이름 대응, 하나는 통제와 실행 기록의 자리</a:t>
+            </a:r>
+          </a:p>
+          <a:p>
+            <a:r>
+              <a:t>· 본 것과 확인 못 한 것을 가를 준비</a:t>
+            </a:r>
+          </a:p>
+          <a:p>
+            <a:r>
+              <a:t>[다음] 제품에서 불리는 이름</a:t>
             </a:r>
           </a:p>
         </p:txBody>
@@ -3074,7 +4179,42 @@
           <a:lstStyle/>
           <a:p>
             <a:r>
-              <a:t>ProcessGPT는 BPMN으로 업무 흐름을 표현하고, 여러 에이전트의 일을 순서대로 조율하는 오픈소스 프로젝트입니다. 개발사가 공개한 소개에서 확인할 수 있는 방향이에요. 우리 수업의 프로세스 엔진도 이 제품을 그대로 설치한 게 아니라, 제품의 구조를 참고해 직접 구현한 거고요. 표의 왼쪽 열이 교대 실습에서 만든 것, 가운데가 제품에서 불리는 이름입니다. 등록한 교대 흐름의 판본은 프로세스 정의와 정의 버전, 직접 돌린 교대 처리 건은 프로세스 인스턴스예요. 인계안 작성, 검토, 확인 같은 단계 하나하나는 워크아이템이라고 부르고, 강조한 줄처럼 인계자와 인수자의 차례는 사람에게 맡겨진 워크아이템이 모이는 작업함에 놓입니다. 인계 에이전트는 사용자 목록에 사람과 나란히 등록되고, 쓸 도구는 조직 단위로 등록한 MCP 서버에서 나와요. 보충 매뉴얼 같은 지식은 지식 그래프와 문서 검색 같은 구성이 맡습니다. 오른쪽 열이 시연에서 확인할 것이에요. 정의와 실행 건이 어디서 갈리는지, 지금 누구의 차례인지, 사람 작업이 어디에 놓이는지를 보면 됩니다. 이름은 달라도 처리 건과 단계를 가르던 질문은 그대로 쓸 수 있어요.</a:t>
+              <a:t>[짚을 곳] 왼쪽(교대 실습에서) → 가운데(ProcessGPT에서) → 오른쪽(시연에서 확인할 것) → 강조한 넷째 줄</a:t>
+            </a:r>
+          </a:p>
+          <a:p>
+            <a:r>
+              <a:t>· ProcessGPT: BPMN으로 업무 흐름을 표현하고 여러 에이전트 일을 순서대로 조율하는 오픈소스 프로젝트(개발사 공개 소개 기준)</a:t>
+            </a:r>
+          </a:p>
+          <a:p>
+            <a:r>
+              <a:t>· 수업 엔진은 제품을 설치한 것이 아니라 구조를 참고해 직접 구현</a:t>
+            </a:r>
+          </a:p>
+          <a:p>
+            <a:r>
+              <a:t>· ShiftHandover 판본 = 프로세스 정의 · 정의 버전, 교대 처리 건 = 프로세스 인스턴스, 단계 = 워크아이템</a:t>
+            </a:r>
+          </a:p>
+          <a:p>
+            <a:r>
+              <a:t>· 인계자 · 인수자의 차례 = 사람에게 맡겨진 워크아이템이 모이는 작업함</a:t>
+            </a:r>
+          </a:p>
+          <a:p>
+            <a:r>
+              <a:t>· 인계 에이전트 = 사용자 목록의 에이전트, 조회 도구 = 조직 단위 MCP 서버, 보충 매뉴얼 지식 = 지식 그래프 · 문서 검색 구성</a:t>
+            </a:r>
+          </a:p>
+          <a:p>
+            <a:r>
+              <a:t>· 볼 것: 정의와 실행 건이 갈리는 곳, 지금 누구의 차례, 사람 작업이 놓이는 곳 → 이름은 달라도 같은 질문</a:t>
+            </a:r>
+          </a:p>
+          <a:p>
+            <a:r>
+              <a:t>[다음] 통제와 실행 기록의 자리</a:t>
             </a:r>
           </a:p>
         </p:txBody>
@@ -3144,7 +4284,37 @@
           <a:lstStyle/>
           <a:p>
             <a:r>
-              <a:t>두 번째로 준비할 건 통제와 실행 기록입니다. 왼쪽이 통제 요소, 가운데가 교대 실습에서 그 통제를 본 자리, 오른쪽이 제품에서 확인할 것이에요. 강조한 첫 줄, 사람의 확인은 교대에서 인계자 검토와 인수자 확인 단계였죠. 제품에서는 사람 작업이 흐름의 어디에 놓이는지 봅니다. 권한은 교대에서 역할마다 고를 수 있는 선택지가 정해져 있었는데, 수업에서는 역할을 화면에서 골랐어요. 기업에서는 접속한 사람의 신원과 그 사람의 권한이 연결돼야 하니까, 제품에서는 그 연결을 봐야 합니다. 실행 기록은 처리 건의 이벤트와 근거 번호, 보완 사유로 남았고요. 실행 격리는 인계 에이전트가 조회 도구만 쓴 것, 변경 통제는 구조 검사를 통과한 판본만 등록된 것이었습니다. 마지막 줄이 가장 중요한 기준이에요. 제품 소개에 나온 기능과 우리 환경에서 실제로 검증한 기능은 다릅니다. 시연에서 본 것은 본 것대로, 확인하지 못한 것은 미확인으로 구별해 남기면 됩니다.</a:t>
+              <a:t>[짚을 곳] 왼쪽(통제) → 가운데(교대 실습에서 본 자리) → 오른쪽(제품에서 확인할 것) → 강조한 첫째 줄</a:t>
+            </a:r>
+          </a:p>
+          <a:p>
+            <a:r>
+              <a:t>· 사람의 확인: 인계자 검토 · 인수자 확인 단계 → 사람 작업이 흐름 어디에 놓이나</a:t>
+            </a:r>
+          </a:p>
+          <a:p>
+            <a:r>
+              <a:t>· 권한: 역할별 선택지, 수업에서는 역할을 화면에서 고름 → 기업에서는 접속한 신원과 권한의 연결을 봄</a:t>
+            </a:r>
+          </a:p>
+          <a:p>
+            <a:r>
+              <a:t>· 실행 기록: 처리 건 이벤트 · 근거 번호 · 보완 사유 → 누가 무엇을 결정했는지 남는 곳</a:t>
+            </a:r>
+          </a:p>
+          <a:p>
+            <a:r>
+              <a:t>· 실행 격리: 인계 에이전트는 조회 도구만, 변경 통제: 구조 검사를 통과한 판본만 등록 → 정의 버전과 진행 중인 건</a:t>
+            </a:r>
+          </a:p>
+          <a:p>
+            <a:r>
+              <a:t>· 구현 경계(가장 중요): 제품 소개의 기능 ≠ 우리 환경에서 검증한 기능, 본 것은 본 것대로 · 못 본 것은 미확인</a:t>
+            </a:r>
+          </a:p>
+          <a:p>
+            <a:r>
+              <a:t>[다음] 시연에서 볼 연결</a:t>
             </a:r>
           </a:p>
         </p:txBody>
@@ -3214,7 +4384,37 @@
           <a:lstStyle/>
           <a:p>
             <a:r>
-              <a:t>시연에서 볼 것을 카드 네 장으로 정리했습니다. 첫째, 지식 조회와 에이전트 판단이 어느 작업에서 일어나는지. 둘째, 사람 작업이 어디에 놓이고 다음 차례를 누가 여는지예요. 셋째, 제품의 정의와 인스턴스, 작업함을 교대 실습의 판본, 처리 건, 차례와 비교하고, 넷째, 업무 통제와 실행 기록이 어디에 남는지 봅니다. 확인하지 못한 것은 미확인으로 남겨 두세요.</a:t>
+              <a:t>[짚을 곳] 카드 넷 왼쪽부터 → 꼬리표 → 강조한 넷째 카드</a:t>
+            </a:r>
+          </a:p>
+          <a:p>
+            <a:r>
+              <a:t>· 지식 · 에이전트: 지식 조회와 에이전트 판단이 어느 작업에서 일어나나(판단)</a:t>
+            </a:r>
+          </a:p>
+          <a:p>
+            <a:r>
+              <a:t>· 사람 · 프로세스: 사람 작업이 놓인 자리와 다음 차례를 여는 쪽(차례)</a:t>
+            </a:r>
+          </a:p>
+          <a:p>
+            <a:r>
+              <a:t>· 정의 · 인스턴스 · 작업함: 교대 실습의 판본 · 처리 건과 견줌(대응)</a:t>
+            </a:r>
+          </a:p>
+          <a:p>
+            <a:r>
+              <a:t>· 통제 · 기록: 업무 통제와 실행 기록이 남는 곳, 확인 못 한 것은 미확인(경계)</a:t>
+            </a:r>
+          </a:p>
+          <a:p>
+            <a:r>
+              <a:t>· 한 건 안에서 네 가지가 이어지는 모습을 봄</a:t>
+            </a:r>
+          </a:p>
+          <a:p>
+            <a:r>
+              <a:t>[다음] 실습 5</a:t>
             </a:r>
           </a:p>
         </p:txBody>
@@ -3284,7 +4484,32 @@
           <a:lstStyle/>
           <a:p>
             <a:r>
-              <a:t>시연까지 봤으니, 마지막 실습은 지금까지의 결과를 Notion 학습노트에 기록하는 겁니다. 카드 순서대로 보면, 먼저 지식, 판단, 승인, 인계 확인 같은 핵심 개념을 자기 문장으로 적습니다. 그 옆에 이번에 만든 인계안과 흐름 판본, 처리 건, 그리고 조회 근거와 HI-01의 절을 연결해요. 셋째 카드처럼 조회, 판단, 검토, 실행 확인에 쓴 자료와 산출물을 이어 두면 나중에 다시 찾아 쓸 수 있습니다. 기록은 수업 환경에서 쓸 수 있으면 MCP로 반영하고, 그렇지 않으면 작성한 Markdown을 직접 붙여 학습노트를 완성하면 됩니다.</a:t>
+              <a:t>[짚을 곳] 실습 구분 → 제목</a:t>
+            </a:r>
+          </a:p>
+          <a:p>
+            <a:r>
+              <a:t>· 목적: 지금까지의 결과를 Notion 학습노트에 기록</a:t>
+            </a:r>
+          </a:p>
+          <a:p>
+            <a:r>
+              <a:t>· 핵심 개념(지식 · 판단 · 승인 · 인계 확인)을 자기 문장으로</a:t>
+            </a:r>
+          </a:p>
+          <a:p>
+            <a:r>
+              <a:t>· 인계안 · 흐름 판본 · 처리 건과 조회 근거 · HI-01 절을 연결</a:t>
+            </a:r>
+          </a:p>
+          <a:p>
+            <a:r>
+              <a:t>· 기록은 수업 환경에서 되면 MCP로, 아니면 작성한 Markdown을 직접 붙임</a:t>
+            </a:r>
+          </a:p>
+          <a:p>
+            <a:r>
+              <a:t>[다음] 학습노트 카드</a:t>
             </a:r>
           </a:p>
         </p:txBody>
@@ -3354,7 +4579,37 @@
           <a:lstStyle/>
           <a:p>
             <a:r>
-              <a:t>45~46장 통합 발화는 45장 발표자 노트를 따른다.</a:t>
+              <a:t>[짚을 곳] 카드 넷 왼쪽부터 → 꼬리표 → 강조한 넷째 카드</a:t>
+            </a:r>
+          </a:p>
+          <a:p>
+            <a:r>
+              <a:t>· 개념: 핵심 개념을 자기 문장으로(이해)</a:t>
+            </a:r>
+          </a:p>
+          <a:p>
+            <a:r>
+              <a:t>· 결과 · 근거: 인계안 · 처리 건, 조회 근거 · 원문(산출물)</a:t>
+            </a:r>
+          </a:p>
+          <a:p>
+            <a:r>
+              <a:t>· 다시 쓸 연결: 조회 · 판단 · 검토 · 실행 확인에 쓴 자료와 산출물을 이음 → 나중에 다시 찾아 씀(재사용)</a:t>
+            </a:r>
+          </a:p>
+          <a:p>
+            <a:r>
+              <a:t>· 기록 방법: MCP 반영 또는 Markdown</a:t>
+            </a:r>
+          </a:p>
+          <a:p>
+            <a:r>
+              <a:t>· 과정이 끝난 뒤에도 쓰려면 개념 · 결과 · 근거가 서로 이어져 있어야 함</a:t>
+            </a:r>
+          </a:p>
+          <a:p>
+            <a:r>
+              <a:t>[다음] 복습 표</a:t>
             </a:r>
           </a:p>
         </p:txBody>
@@ -3424,7 +4679,42 @@
           <a:lstStyle/>
           <a:p>
             <a:r>
-              <a:t>학습노트까지 정리했으니, 복습과 용어 정리, 퀴즈로 이번 회차를 마무리하겠습니다. 먼저 교대 한 건의 다섯 순간을 놓았어요. 가운데 영역 칸과 오른쪽 근거 칸은 잠깐 가려 둘게요. 순간마다 지식, 에이전트, 프로세스 가운데 어느 영역의 일인지, 근거와 함께 골라 보세요. 첫째, HI-01 절차를 원문과 대조해 추가한 건 지식의 일입니다. 사람이 검토해서 적재한 절차와 출처가 남았죠. 둘째, 작업지시의 상태를 읽어 메모와 대조한 건 에이전트의 일이에요. 도구로 읽은 원천 값을 기준에 대어 판단했으니까요. 셋째, 인계자가 승인하자 인수자 확인이 열린 건 프로세스의 일입니다. 단계 사이의 순서는 엔진이 지켜요. 넷째, 보완 초안이 지금 상태를 다시 조회한 건 에이전트의 일입니다. 업무 규칙과 스킬의 지침을 따른 거죠. 다섯째가 헷갈리기 쉬워요. 인수 확인 뒤에도 작업지시가 열린 채인 건 프로세스가 그렇게 설계돼 있어서입니다. 교대 흐름에는 업무 시스템에 쓰는 단계가 없고, 확인은 전달의 기록이니까요. 같은 교대 한 건 안에서도 누가 무엇을 위해 일했는지에 따라 영역이 갈립니다.</a:t>
+              <a:t>[짚을 곳] 왼쪽(교대 한 건의 순간) 먼저, 가운데 · 오른쪽은 가린 채 묻기 → 하나씩 열기 → 강조한 다섯째 줄</a:t>
+            </a:r>
+          </a:p>
+          <a:p>
+            <a:r>
+              <a:t>· HI-01 절차를 원문과 대조해 추가 → 지식(사람이 검토 · 적재한 절차와 출처)</a:t>
+            </a:r>
+          </a:p>
+          <a:p>
+            <a:r>
+              <a:t>· 작업지시 상태를 읽어 메모와 대조 → 에이전트(도구로 읽은 원천 값을 기준에 댄 판단)</a:t>
+            </a:r>
+          </a:p>
+          <a:p>
+            <a:r>
+              <a:t>· 인계자 승인 → 인수자 확인이 열림 → 프로세스(단계 순서는 엔진이 지킴)</a:t>
+            </a:r>
+          </a:p>
+          <a:p>
+            <a:r>
+              <a:t>· 보완 초안이 지금 상태를 다시 조회 → 에이전트(업무 규칙과 스킬 지침)</a:t>
+            </a:r>
+          </a:p>
+          <a:p>
+            <a:r>
+              <a:t>· 헷갈리는 다섯째: 인수 확인 뒤에도 작업지시가 열린 채 → 프로세스 설계(업무 시스템 쓰기 단계 없음, 확인은 전달 기록)</a:t>
+            </a:r>
+          </a:p>
+          <a:p>
+            <a:r>
+              <a:t>· 같은 한 건 안에서도 누가 무엇을 위해 일했는지로 영역이 갈림</a:t>
+            </a:r>
+          </a:p>
+          <a:p>
+            <a:r>
+              <a:t>[다음] 용어 정리</a:t>
             </a:r>
           </a:p>
         </p:txBody>
@@ -3494,7 +4784,42 @@
           <a:lstStyle/>
           <a:p>
             <a:r>
-              <a:t>이번엔 용어의 이름과 뜻을 정리하겠습니다. 스킬은 한 업무를 어떤 차례와 기준으로 할지 적어 여러 번 쓰는 지침이에요. MCP는 외부 시스템의 도구를 에이전트가 같은 약속으로 부르게 하는 연결 규약이고, 출력 계약은 다음 단계가 읽을 결과의 칸과 형식, 뜻, 그리고 받아들이는 조건입니다. HITL은 흐름 안에 사람이 결정하고 확인하는 자리를 두는 방식이죠. BDD 시나리오는 입력과 행동, 기대 결과를 Given, When, Then으로 적은 검증 사례예요. 프로세스 인스턴스는 한 프로세스 정의로 열려 실제로 진행되는 한 건, 우리가 처리 건이라 불러 온 것이고, 워크아이템은 그 안에서 에이전트나 사람에게 맡겨진 작업 하나, 곧 단계입니다. 마지막으로 교대 인수인계는 다음 근무자에게 설비 상태와 남은 일, 근거를 넘기고 확인받는 일이에요.</a:t>
+              <a:t>[짚을 곳] 여덟 줄 위에서 아래로 → 정식 명칭 → 한 줄 뜻</a:t>
+            </a:r>
+          </a:p>
+          <a:p>
+            <a:r>
+              <a:t>· 스킬 Skill: 한 업무의 차례와 기준을 적어 여러 번 쓰는 지침, MCP: 외부 시스템 도구를 같은 약속으로 부르는 연결 규약</a:t>
+            </a:r>
+          </a:p>
+          <a:p>
+            <a:r>
+              <a:t>· 출력 계약 Output Contract: 다음 단계가 읽을 칸 · 형식 · 뜻과 받아들이는 조건</a:t>
+            </a:r>
+          </a:p>
+          <a:p>
+            <a:r>
+              <a:t>· HITL: 흐름 안에 사람이 결정 · 확인하는 자리, BDD 시나리오: Given · When · Then으로 적은 검증 사례</a:t>
+            </a:r>
+          </a:p>
+          <a:p>
+            <a:r>
+              <a:t>· 프로세스 인스턴스 = 처리 건, 워크아이템 = 처리 건 안의 단계 하나</a:t>
+            </a:r>
+          </a:p>
+          <a:p>
+            <a:r>
+              <a:t>· 교대 인수인계 Shift Handover: 설비 상태 · 남은 일 · 근거를 넘기고 확인받는 일</a:t>
+            </a:r>
+          </a:p>
+          <a:p>
+            <a:r>
+              <a:t>· 질문 거리: 각 용어가 쿨러 처리 건과 교대 처리 건에서 어디에 놓였나</a:t>
+            </a:r>
+          </a:p>
+          <a:p>
+            <a:r>
+              <a:t>[다음] 퀴즈 간지</a:t>
             </a:r>
           </a:p>
         </p:txBody>
@@ -3564,7 +4889,32 @@
           <a:lstStyle/>
           <a:p>
             <a:r>
-              <a:t>마지막으로 퀴즈 세 문제로 배운 구분을 판단에 써 보겠습니다. 문제마다 보기를 듣고 잠깐 멈출 테니 그때 답을 골라 보세요. 정답과 까닭은 세 문제를 다 본 뒤에 확인합니다.</a:t>
+              <a:t>[짚을 곳] 제목 → 부제</a:t>
+            </a:r>
+          </a:p>
+          <a:p>
+            <a:r>
+              <a:t>· 세 문제로 배운 구분을 판단에 써 봄</a:t>
+            </a:r>
+          </a:p>
+          <a:p>
+            <a:r>
+              <a:t>· 문제마다 보기를 듣고 20초 멈춤, 그때 답을 고름</a:t>
+            </a:r>
+          </a:p>
+          <a:p>
+            <a:r>
+              <a:t>· 정답과 까닭은 세 문제를 다 본 뒤 한 장에서</a:t>
+            </a:r>
+          </a:p>
+          <a:p>
+            <a:r>
+              <a:t>· 다루는 구분: 인수 확인의 뜻, 현재고와 입고 예정, 인계와 쓰기의 경계</a:t>
+            </a:r>
+          </a:p>
+          <a:p>
+            <a:r>
+              <a:t>[다음] Quiz 1</a:t>
             </a:r>
           </a:p>
         </p:txBody>
@@ -3634,7 +4984,37 @@
           <a:lstStyle/>
           <a:p>
             <a:r>
-              <a:t>표의 왼쪽 열이 경보 메시지에 없는 것들입니다. 경보에는 어느 설비에서 어떤 조건이 성립했는지, 그때의 값이 무엇이었는지만 있어요. 원인 후보도, 원인을 가릴 값도, 할 수 있는 조치와 그 순위도, 판단의 출처도 없습니다. 가운데 열이 그 빈칸을 채우는 도구와 읽는 곳이에요. 원인 후보는 진단 도구가 지식 그래프의 관계를 따라가서 찾고, 원인을 가릴 냉각 효율이나 팬 진동 같은 값은 같은 진단 도구가 시계열 DB에서 읽습니다. 할 수 있는 조치와 그 순위는 조치 평가 도구가 SOP와 판단 규칙, 성과 기준, 그리고 업무 DB의 납기 같은 값을 읽어서 냅니다. 마지막 줄의 출처는 제출 도구가 추천안을 낼 때 규칙에 이어진 매뉴얼의 절을 함께 싣는 거예요. 어떤 도구를 어떤 차례로 부를지는 냉각 긴급 대응 스킬에 적혀 있었습니다. 오른쪽 열을 보세요. 그 재료가 만들어진 자리입니다. 관계는 클래스와 스키마로 설계했고, 증거 기준은 매뉴얼을 인제스천해서 넣었고, 조치와 조건은 SOP와 결정표로, 순위의 기준은 BSC와 KPI로 정했죠. 에이전트는 이 가운데 아무것도 그 자리에서 만들지 않습니다. 다 앞에서 만들어 둔 것을 도구로 읽어 올 뿐이에요.</a:t>
+              <a:t>[짚을 곳] 왼쪽 열(경보에 없는 것) → 가운데(읽는 도구 · 읽는 곳) → 오른쪽(재료가 만들어진 자리) → 강조한 다섯째 줄</a:t>
+            </a:r>
+          </a:p>
+          <a:p>
+            <a:r>
+              <a:t>· 경보에 있는 것: 어느 설비, 어떤 조건이 성립, 그때의 값뿐</a:t>
+            </a:r>
+          </a:p>
+          <a:p>
+            <a:r>
+              <a:t>· 원인 후보 · 원인을 가릴 값: diagnose가 그래프 관계와 시계열 DB(냉각 효율 · 팬 진동 · 캐비닛 온도)에서</a:t>
+            </a:r>
+          </a:p>
+          <a:p>
+            <a:r>
+              <a:t>· 조치 · 순위: evaluate_cards가 SOP · DMN · 성과 기준 · 업무 DB(납기 · 지연 보상 · 출하 대기 로트)에서</a:t>
+            </a:r>
+          </a:p>
+          <a:p>
+            <a:r>
+              <a:t>· 출처: submit_decision이 규칙에 이어진 매뉴얼 절을 함께 실음, 도구 차례는 냉각 긴급 대응 스킬</a:t>
+            </a:r>
+          </a:p>
+          <a:p>
+            <a:r>
+              <a:t>· 오른쪽 열: 스키마 · 인제스천 · SOP와 결정표 · BSC와 KPI → 에이전트는 그 자리에서 아무것도 만들지 않고 읽기만</a:t>
+            </a:r>
+          </a:p>
+          <a:p>
+            <a:r>
+              <a:t>[다음] 만들어진 차례</a:t>
             </a:r>
           </a:p>
         </p:txBody>
@@ -3704,7 +5084,32 @@
           <a:lstStyle/>
           <a:p>
             <a:r>
-              <a:t>첫 번째 문제입니다. 인수자가 근거를 보고 인수 확인을 제출해서, 교대 처리 건이 인수 확인 기록 완료로 닫혔어요. 이 시점에 대한 설명으로 옳은 것은 무엇일까요? 1번, 인계안에 불일치로 적힌 작업지시도 이 확인으로 완료 처리됐다. 2번, 전달 사항을 확인한 기록이 남았고, 열린 작업지시와 입고 예정은 그대로다. 3번, 인계 에이전트가 확인 결과에 맞춰 ERP의 재고를 고쳤다. 4번, 처리 건이 COMPLETED이므로 설비의 이상도 해소됐다는 뜻이다.</a:t>
+              <a:t>[짚을 곳] 상황(인수 확인 제출 → 인수 확인 기록 완료로 닫힘) → 보기 넷 → 20초</a:t>
+            </a:r>
+          </a:p>
+          <a:p>
+            <a:r>
+              <a:t>· 물음의 요지: 이 시점에 무엇이 남았고 무엇이 그대로인가</a:t>
+            </a:r>
+          </a:p>
+          <a:p>
+            <a:r>
+              <a:t>· 생각할 거리: 인수 확인은 무엇의 기록인가</a:t>
+            </a:r>
+          </a:p>
+          <a:p>
+            <a:r>
+              <a:t>· 생각할 거리: 교대 흐름에 업무 시스템에 쓰는 단계가 있나</a:t>
+            </a:r>
+          </a:p>
+          <a:p>
+            <a:r>
+              <a:t>· 생각할 거리: COMPLETED는 무엇을 말해 주나</a:t>
+            </a:r>
+          </a:p>
+          <a:p>
+            <a:r>
+              <a:t>[다음] Quiz 2</a:t>
             </a:r>
           </a:p>
         </p:txBody>
@@ -3774,7 +5179,32 @@
           <a:lstStyle/>
           <a:p>
             <a:r>
-              <a:t>두 번째 문제입니다. 인계안의 부품 영역에 「쿨러 코어 1개 확보」가 확인됨으로 적혀 있어요. 그런데 근거 조회를 열어 보니 현재고는 0이고 입고 예정이 1이었습니다. 인수자의 판단으로 맞는 것은? 1번, 입고 예정도 곧 들어올 재고이니 그대로 인수 확인한다. 2번, 인수자가 ERP에서 입고를 처리해 현재고를 1로 맞춘다. 3번, 현재고와 입고 예정을 나눠 적고 상태를 고쳐 달라는 사유로 보완을 요청한다. 4번, 근거 번호가 있어 계약 검사를 통과했으니 확인한다.</a:t>
+              <a:t>[짚을 곳] 상황(부품 영역 「쿨러 코어 1개 확보」가 observed, 근거 조회는 현재고 0 · 입고 예정 1) → 보기 넷 → 20초</a:t>
+            </a:r>
+          </a:p>
+          <a:p>
+            <a:r>
+              <a:t>· 물음의 요지: 인수자의 판단</a:t>
+            </a:r>
+          </a:p>
+          <a:p>
+            <a:r>
+              <a:t>· 생각할 거리: 입고 예정은 현재고인가</a:t>
+            </a:r>
+          </a:p>
+          <a:p>
+            <a:r>
+              <a:t>· 생각할 거리: 인수자가 할 수 있는 선택은 무엇과 무엇인가</a:t>
+            </a:r>
+          </a:p>
+          <a:p>
+            <a:r>
+              <a:t>· 생각할 거리: 계약 검사 통과는 내용의 맞음까지 말해 주나</a:t>
+            </a:r>
+          </a:p>
+          <a:p>
+            <a:r>
+              <a:t>[다음] Quiz 3</a:t>
             </a:r>
           </a:p>
         </p:txBody>
@@ -3844,7 +5274,32 @@
           <a:lstStyle/>
           <a:p>
             <a:r>
-              <a:t>마지막 문제입니다. 인계를 빨리 끝내려고, 인계 에이전트에 메모대로 작업지시를 완료로 바꾸는 쓰기 도구를 달자는 의견이 나왔어요. 이 수업의 정책에서 가장 알맞은 판단은 무엇일까요? 1번, 인계는 조회와 전달이라 쓰기 도구를 두지 않고, 열린 작업지시는 확인할 일로 넘긴다. 2번, 스킬에 인수자가 확인한 뒤에만 닫는다고 적으면 연결해도 된다. 3번, 처리 기록에 감사가 남으니 연결해도 문제가 없다. 4번, 메모를 쓴 사람이 숙련자라면 메모를 근거로 닫아도 된다.</a:t>
+              <a:t>[짚을 곳] 상황(메모대로 작업지시를 완료로 바꾸는 쓰기 도구를 인계 에이전트에 달자는 의견) → 보기 넷 → 20초</a:t>
+            </a:r>
+          </a:p>
+          <a:p>
+            <a:r>
+              <a:t>· 물음의 요지: 이 수업 정책에서 가장 알맞은 판단</a:t>
+            </a:r>
+          </a:p>
+          <a:p>
+            <a:r>
+              <a:t>· 생각할 거리: 인수인계는 무엇과 무엇의 일인가</a:t>
+            </a:r>
+          </a:p>
+          <a:p>
+            <a:r>
+              <a:t>· 생각할 거리: 스킬의 문장은 시스템이 지키는 규칙인가</a:t>
+            </a:r>
+          </a:p>
+          <a:p>
+            <a:r>
+              <a:t>· 생각할 거리: 감사 기록은 일이 벌어지기 전 · 뒤 언제 남나</a:t>
+            </a:r>
+          </a:p>
+          <a:p>
+            <a:r>
+              <a:t>[다음] 정답과 판단 기준</a:t>
             </a:r>
           </a:p>
         </p:txBody>
@@ -3914,7 +5369,42 @@
           <a:lstStyle/>
           <a:p>
             <a:r>
-              <a:t>고른 답과 까닭을 맞춰 보겠습니다. 첫 문제는 2번이에요. 인수 확인은 다음 근무자가 전달 사항을 확인했다는 기록입니다. 교대 흐름에는 업무 시스템에 쓰는 단계가 없으니, 열린 작업지시와 입고 예정은 그대로 남아요. 1번은 확인을 정비 완료로 읽은 거고, 3번은 조회만 하는 인계 에이전트가 재고를 고쳤다고 본 겁니다. 4번은 COMPLETED를 업무의 성공으로 읽은 거예요. 상태 값은 흐름이 끝났다는 것만 말해 줍니다. 두 번째는 3번입니다. 입고 예정은 아직 들어오지 않은 수량이라 현재고가 아니에요. 그러니 현재고와 입고 예정을 나눠 적고 상태를 고쳐 달라는 사유로 보완을 요청합니다. 1번은 둘을 합친 거고, 2번은 인수자가 업무 시스템에 쓰는 일이라 인계의 몫이 아니에요. 4번은 앞에서 본 판단 문제와 같은 함정입니다. 근거 번호가 실제 호출과 맞아도, 그 근거로 쓴 문장이 맞는지는 사람이 봐야 하죠. 세 번째는 1번입니다. 인수인계는 조회와 전달이고, 메모의 정비 완료 주장은 확인할 일로 넘깁니다. 작업지시를 닫는 건 정비를 실제로 마친 쪽이 그 업무의 절차로 하는 일이에요. 2번은 스킬의 문장을 시스템이 지키는 규칙과 헷갈린 거고, 3번의 감사 기록은 일이 벌어진 뒤에 남는 거라 책임을 대신하지 못합니다. 4번은 메모를 원천 대신 믿은 거고요. 여기까지가 이번 회차이고, 이 회차로 과정 전체를 마칩니다. 처음 회차에서 설비의 값 하나를 따라가는 데서 시작해, 지식을 직접 쌓고 에이전트에게 맡기고, 사람의 확인과 시스템 실행으로 업무를 닫는 데까지 왔습니다. 다른 제품이나 도구를 만나더라도, 무엇을 근거로 판단하고 누가 확인하는지를 가르는 질문은 그대로 쓸 수 있을 거예요. 직접 만든 지식과 에이전트, 흐름, 그리고 학습노트가 각자의 업무에서 다음 일을 시작하는 출발점이 되면 좋겠습니다. 그동안 수고 많으셨습니다. 감사합니다.</a:t>
+              <a:t>[짚을 곳] 표 세 줄(문항 · 판단 기준 · 정답) 위에서 아래로</a:t>
+            </a:r>
+          </a:p>
+          <a:p>
+            <a:r>
+              <a:t>· Quiz 1 정답 2: 인수 확인은 전달받은 기록, 쓰기 단계가 없어 열린 작업지시 · 입고 예정은 그대로</a:t>
+            </a:r>
+          </a:p>
+          <a:p>
+            <a:r>
+              <a:t>· Quiz 1 오답: 1 확인을 정비 완료로, 3 조회만 하는 에이전트가 재고를 고쳤다고 봄, 4 COMPLETED를 업무 성공으로 읽음</a:t>
+            </a:r>
+          </a:p>
+          <a:p>
+            <a:r>
+              <a:t>· Quiz 2 정답 3: 입고 예정 ≠ 현재고, 나눠 적고 상태를 고쳐 달라는 사유로 보완, 1 둘을 합침, 2 인수자가 업무 시스템에 씀, 4 근거 번호가 맞아도 문장의 맞음은 사람이 봄</a:t>
+            </a:r>
+          </a:p>
+          <a:p>
+            <a:r>
+              <a:t>· Quiz 3 정답 1: 인계는 조회와 전달, 정비 완료 주장은 확인할 일로, 작업지시를 닫는 건 정비를 마친 쪽의 절차</a:t>
+            </a:r>
+          </a:p>
+          <a:p>
+            <a:r>
+              <a:t>· Quiz 3 오답: 2 스킬 문장을 시스템 규칙과 혼동, 3 감사 기록은 사후라 책임을 대신 못 함, 4 메모를 원천 대신 믿음</a:t>
+            </a:r>
+          </a:p>
+          <a:p>
+            <a:r>
+              <a:t>· 과정 맺음: 설비 값 하나를 따라가는 데서 시작해 지식을 쌓고 에이전트에 맡기고 사람의 확인 · 시스템 실행으로 업무를 닫음, 다른 제품에서도 「무엇을 근거로 판단하고 누가 확인하나」를 쓴다, 수고 인사</a:t>
+            </a:r>
+          </a:p>
+          <a:p>
+            <a:r>
+              <a:t>[다음] 맺음</a:t>
             </a:r>
           </a:p>
         </p:txBody>
@@ -3984,7 +5474,37 @@
           <a:lstStyle/>
           <a:p>
             <a:r>
-              <a:t>앞 장 오른쪽 열을 만들어진 차례대로 펼치면 이 여섯 칸이 됩니다. 왼쪽 다섯 칸이 온톨로지를 구축한 단계예요. 무엇을 물을지 정하고 클래스와 관계, 식별자를 설계하고, 그 설계대로 그래프에 적재해서 Cypher로 조회했습니다. 그 지식에 SOP의 단계와 결정표의 규칙을 잇고, 조치를 견줄 성과 기준을 정했고요. 다섯째 칸에서 매뉴얼 원문의 절에서 지식을 뽑아 사람이 검토하고 적재했죠. 이렇게 단계마다 남긴 것을 여러 판단이 같이 쓰니까 공용 지식이라고 부릅니다. 마지막 칸이 에이전트의 자리예요. 진단 도구와 조치 평가 도구가 관계를 따라 그 지식을 읽습니다. 여기서 방향을 하나 기억해 두세요. 화살표는 구축에서 조회로만 갑니다. 에이전트의 업무 도구는 지식을 읽기만 하고, 쓰는 건 판단 제출 하나뿐이었어요. 기준이 틀렸으면 에이전트가 고치는 게 아니라, 앞 칸으로 돌아가 문서를 검토하고 다시 적재합니다. 교대 인계에서도 이 방향은 그대로예요.</a:t>
+              <a:t>[짚을 곳] 여섯 칸 왼쪽부터 → 강조한 여섯째 칸(도구 조회)</a:t>
+            </a:r>
+          </a:p>
+          <a:p>
+            <a:r>
+              <a:t>· 다섯 칸 = 온톨로지 구축 단계: 질문 · 스키마 → 그래프 적재 · Cypher → SOP · DMN → BSC · KPI → 원문 절 인제스천 · 사람 검토</a:t>
+            </a:r>
+          </a:p>
+          <a:p>
+            <a:r>
+              <a:t>· 여러 판단이 같이 쓰니 공용 지식</a:t>
+            </a:r>
+          </a:p>
+          <a:p>
+            <a:r>
+              <a:t>· 여섯째 칸: 진단 · 평가 도구가 관계를 따라 읽음</a:t>
+            </a:r>
+          </a:p>
+          <a:p>
+            <a:r>
+              <a:t>· 방향: 구축 → 조회 한쪽뿐, 업무 도구는 읽기만, 쓰기는 판단 제출 하나</a:t>
+            </a:r>
+          </a:p>
+          <a:p>
+            <a:r>
+              <a:t>· 기준이 틀리면 에이전트가 고치지 않고 앞 칸으로 돌아가 검토 · 재적재, 교대에서도 같은 방향</a:t>
+            </a:r>
+          </a:p>
+          <a:p>
+            <a:r>
+              <a:t>[다음] 진단 도구 안</a:t>
             </a:r>
           </a:p>
         </p:txBody>
@@ -4054,7 +5574,42 @@
           <a:lstStyle/>
           <a:p>
             <a:r>
-              <a:t>진단 도구 안을 한 번 들여다보겠습니다. 화면 왼쪽 위가 원인 후보를 찾는 Cypher 조회예요. 이상 패턴 노드에서 출발해 증상을 거쳐 고장 유형에 닿고, 마지막 줄에서 화살표를 거꾸로 거슬러 원인에 닿습니다. 원인이 고장 유형을 일으킨다는 관계라 방향이 반대로 저장돼 있으니까요. 출발 노드는 그 아래 줄처럼 경보의 패턴 값으로 고릅니다. 경보 메시지와 그래프가 이 값 하나로 만나는 거죠. 이 조회로 나온 후보 셋이 그 아래에 있습니다. 쿨러 핀 오염, 팬 구동 불량, 주변 온도 상승이에요. 후보마다 화살표 왼쪽이 그래프에 적재된 기준이고, 오른쪽이 판단하는 순간 시계열 DB에서 읽은 값과 판정입니다. 핀 오염은 냉각 효율 평균이 70퍼센트 미만이고 팬 진동이 기준 아래여야 하는데, 냉각 효율은 46퍼센트쯤, 팬 진동은 0.6에 조금 못 미쳤으니 둘 다 맞아요. 팬 구동 불량은 진동이 기준 이상이어야 하니 아니고, 주변 온도 상승은 캐비닛 온도 35도 이상이어야 하는데 28도쯤이라 아닙니다. 이 기준은 수업 사례에 등록된 기준이에요. 모든 설비에 통하는 진단 법칙이라는 뜻은 아닙니다. 오른쪽 짚을 점을 보겠습니다. 첫째, 조회문은 도구 안에 정해져 있어서 에이전트는 패턴 값만 넘깁니다. 그래서 같은 데이터면 같은 후보가 나와요. 둘째, 기준과 값은 성격이 다릅니다. 기준은 검토하고 개정하는 지식이고, 값은 관측 시각과 함께 읽는 지금의 값이에요. 셋째, 결과가 0행이라고 원인이 없다는 뜻은 아닐 수 있습니다. 조회 조건과 실제로 적재된 연결을 같이 봐야 해요. 이 셋째 점은 뒤에서 교대 인계의 「확인 필요」로 다시 나옵니다.</a:t>
+              <a:t>[짚을 곳] 코드 위 Cypher → $pattern 줄 → 후보 셋의 기준 → 값 · 판정 → 오른쪽 짚을 점 셋</a:t>
+            </a:r>
+          </a:p>
+          <a:p>
+            <a:r>
+              <a:t>· 조회 길: AnomalyPattern → Symptom → FailureMode ← Cause(원인 → 고장 유형 관계라 거꾸로 거슬러)</a:t>
+            </a:r>
+          </a:p>
+          <a:p>
+            <a:r>
+              <a:t>· 출발 노드는 경보의 pattern 값 COOLER_DEGRADATION, 경보와 그래프가 이 값 하나로 만남</a:t>
+            </a:r>
+          </a:p>
+          <a:p>
+            <a:r>
+              <a:t>· 핀 오염: CE 70 % 미만 → 46.2 % 맞음, VS1 0.9 미만 → 약 0.58 맞음</a:t>
+            </a:r>
+          </a:p>
+          <a:p>
+            <a:r>
+              <a:t>· 팬 구동 불량: VS1 0.9 이상이어야 → 아님, 주변 온도 상승: TS4 35 ℃ 이상이어야 → 약 28 ℃ 아님</a:t>
+            </a:r>
+          </a:p>
+          <a:p>
+            <a:r>
+              <a:t>· 기준은 수업 사례에 등록된 것, 모든 설비의 진단 법칙이 아님</a:t>
+            </a:r>
+          </a:p>
+          <a:p>
+            <a:r>
+              <a:t>· 짚을 점: 조회는 도구 안(패턴 값만 넘김 → 같은 데이터면 같은 후보), 기준(검토 · 개정) vs 값(관측 시각과 함께), 0행 ≠ 원인 없음(교대의 「확인 필요」로 이어짐)</a:t>
+            </a:r>
+          </a:p>
+          <a:p>
+            <a:r>
+              <a:t>[다음] 조치 평가</a:t>
             </a:r>
           </a:p>
         </p:txBody>
@@ -4124,7 +5679,42 @@
           <a:lstStyle/>
           <a:p>
             <a:r>
-              <a:t>원인이 핀 오염으로 가려지면 조치 평가 도구가 후보를 견줍니다. 표의 위 네 줄이 그 결과예요. 고장 유형에 이어진 SOP 넷이 그대로 후보가 됐고, 가운데 칸에 두 단계의 결과가 같이 적혀 있습니다. 먼저 결정표가 지금 해도 되는지를 가립니다. 위의 세 조치는 원격으로 하는 조치라 설비가 원격 자동일 때만 할 수 있는데, 이 사례에서는 그 조건을 충족했어요. 맨 아래 쿨러 핀 세척은 작업지시라서 운전 모드 조건이 없습니다. 그다음 남은 후보를 성과 기준이 점수로 줄 세웁니다. 팬 최대 운전이 1순위, 부하를 낮추는 두 조치는 점수가 같아 공동 2순위, 핀 세척은 4순위였죠. 마지막 줄은 그 순위에 들어간 업무 값입니다. 납기까지 여섯 시간이 채 안 남은 오더, 늦어지면 시간마다 붙는 지연 보상, 출하를 기다리는 로트 800개요. 이 값은 그래프에 적어 두지 않았어요. 값이 놓인 자리만 지식에 등록해 두고, 평가 도구가 판단하는 순간 그 자리를 따라 원천에서 읽었습니다. 그래서 같은 원인이라도 그날의 납기 사정에 따라 순위가 달라질 수 있어요. 오른쪽 승인 역할도 같은 식입니다. 핀 세척만 설비보전팀장이 승인한다는 건 에이전트가 정한 게 아니라 조치에 붙어 있는 지식이에요. 실전 실습에서 만든 조치 검토 결과가 바로 이 표의 가운데 칸을, 후보마다 이유와 출처까지 달아서 직접 구현한 것이었습니다.</a:t>
+              <a:t>[짚을 곳] 위 네 줄(조치 후보) → 가운데(결정표 · 점수 · 순위) → 오른쪽(승인 역할) → 강조한 다섯째 줄</a:t>
+            </a:r>
+          </a:p>
+          <a:p>
+            <a:r>
+              <a:t>· 고장 유형에 이어진 SOP 넷이 그대로 후보</a:t>
+            </a:r>
+          </a:p>
+          <a:p>
+            <a:r>
+              <a:t>· 결정표: 원격 조치 셋은 원격 자동일 때만, 이 사례는 충족, 핀 세척은 작업지시라 운전 모드 조건 없음</a:t>
+            </a:r>
+          </a:p>
+          <a:p>
+            <a:r>
+              <a:t>· 성과 점수: 팬 최대 운전 +3.38 1순위, 부하 낮추는 둘 +2.75 공동 2순위, 핀 세척 -1.58 4순위</a:t>
+            </a:r>
+          </a:p>
+          <a:p>
+            <a:r>
+              <a:t>· 업무 값(납기 약 6시간 · 지연 보상 시간당 120만 원 · 출하 대기 800개)은 그래프에 없음, 값의 자리만 등록 → 판단 순간 원천에서 읽음 → 날마다 순위가 달라질 수 있음</a:t>
+            </a:r>
+          </a:p>
+          <a:p>
+            <a:r>
+              <a:t>· 승인 역할도 조치에 붙은 지식(핀 세척만 설비보전팀장)</a:t>
+            </a:r>
+          </a:p>
+          <a:p>
+            <a:r>
+              <a:t>· 실전 실습의 조치 검토 결과 = 이 표 가운데 칸을 이유 · 출처까지 직접 구현</a:t>
+            </a:r>
+          </a:p>
+          <a:p>
+            <a:r>
+              <a:t>[다음] 추천안의 줄</a:t>
             </a:r>
           </a:p>
         </p:txBody>
@@ -4194,7 +5784,37 @@
           <a:lstStyle/>
           <a:p>
             <a:r>
-              <a:t>제출된 추천안을 줄로 나눠 적었습니다. 줄마다 화살표 뒤에 그 줄을 만든 도구와 지식을 붙였어요. 원인 줄은 진단 도구가 그래프의 기준과 시계열의 값을 대조한 결과고, 배제 줄은 기준을 충족하지 못한 두 후보입니다. 맞지 않은 후보까지 남기는 이유가 있어요. 승인하는 사람이 왜 다른 원인이 아닌지를 확인할 수 있으니까요. 추천 줄은 조치 평가 도구가 규칙과 성과 기준으로 매긴 1순위고, 예측 줄은 그 조치를 했을 때 유온이 50도 조금 아래로 내려간다는 계산입니다. 계산이지 관측이 아니에요. 실제로 내려갔는지는 실행한 뒤에 다시 재 봐야 합니다. 승인 줄은 앞 장에서 본 조치에 붙은 역할이고, 마지막 출처 줄이 매뉴얼의 즉시 완화 조치 절이에요. 인제스천할 때 절을 노드로 두고 규칙을 그 절에 이어 둔 관계를 따라온 겁니다. 맨 아래 줄은 도구 사이로 넘어간 것이에요. 원인과 조치 방법이 이름이 아니라 식별자로 넘어갔습니다. 이름이 비슷한 원인이 하나 더 있어도 앞 도구가 가리킨 바로 그 노드를 뒤 도구가 읽게 하려고요. 오른쪽 셋째 점이 중요합니다. 출처 링크가 있다는 건 되짚어 볼 길이 있다는 뜻이지, 내용이 맞다는 보장은 아니에요. 문서 판본과 인용한 문장이 실제로 그 기준을 뒷받침하는지는 사람이 대조합니다. 실전 실습의 작업 확인 카드에 원문 절을 붙였던 것도 이 대조를 하려는 거였죠.</a:t>
+              <a:t>[짚을 곳] 코드 줄마다 화살표 뒤(만든 도구 · 지식) → 맨 아래 넘어간 식별자 → 오른쪽 짚을 점 셋(강조한 셋째)</a:t>
+            </a:r>
+          </a:p>
+          <a:p>
+            <a:r>
+              <a:t>· 원인 · 배제: diagnose의 기준 + 시계열 값, 배제 후보를 남겨 「왜 다른 원인이 아닌가」를 되짚게 함</a:t>
+            </a:r>
+          </a:p>
+          <a:p>
+            <a:r>
+              <a:t>· 추천: evaluate_cards 1순위 3.38, 예측 유온 약 50 ℃는 계산값 → 실행 뒤 재관측으로 따로 확인</a:t>
+            </a:r>
+          </a:p>
+          <a:p>
+            <a:r>
+              <a:t>· 승인: 조치에 적힌 역할(운전원), 출처: HM-8.5 즉시 완화 조치 = 인제스천 때 남긴 절 · 출처 관계</a:t>
+            </a:r>
+          </a:p>
+          <a:p>
+            <a:r>
+              <a:t>· 식별자로 넘김(cause:cooler-fin-fouling → skill:sop-cool-11): 이름이 비슷해도 앞 도구가 가리킨 그 노드를 읽게</a:t>
+            </a:r>
+          </a:p>
+          <a:p>
+            <a:r>
+              <a:t>· 출처 링크 = 되짚을 길, 내용의 맞음 보장 아님 → 판본 · 인용 문장은 사람이 대조(작업 확인 카드의 원문 절)</a:t>
+            </a:r>
+          </a:p>
+          <a:p>
+            <a:r>
+              <a:t>[다음] 활용 결과의 자리</a:t>
             </a:r>
           </a:p>
         </p:txBody>

--- a/산출물/실전반/이론/08회차/실전반_08일차.pptx
+++ b/산출물/실전반/이론/08회차/실전반_08일차.pptx
@@ -2894,12 +2894,7 @@
           <a:lstStyle/>
           <a:p>
             <a:r>
-              <a:t>[짚을 곳] 왼쪽(바꿀 수 있는 것) vs 강조한 오른쪽(유지하는 것) → 꼬리표(표시 · 배정</a:t>
-            </a:r>
-          </a:p>
-          <a:p>
-            <a:r>
-              <a:t>구조 · 권한)</a:t>
+              <a:t>[짚을 곳] 왼쪽(바꿀 수 있는 것) vs 강조한 오른쪽(유지하는 것) → 꼬리표(표시 · 배정/구조 · 권한)</a:t>
             </a:r>
           </a:p>
           <a:p>

--- a/산출물/실전반/이론/08회차/실전반_08일차.pptx
+++ b/산출물/실전반/이론/08회차/실전반_08일차.pptx
@@ -1069,7 +1069,7 @@
           </a:p>
           <a:p>
             <a:r>
-              <a:t>· 읽기: 같은 세 서버(지식 그래프 · 업무 DB · 시계열), 교대는 조회 도구만 · 판단 카드 제출 도구 없음</a:t>
+              <a:t>· 읽기: 같은 세 서버(지식 그래프 · 업무 DB · 판단 엔진 — 시계열은 판단 엔진의 조회 도구로 읽음), 교대는 조회 도구만 · 판단 카드 제출 도구 없음</a:t>
             </a:r>
           </a:p>
           <a:p>
@@ -2294,7 +2294,7 @@
           </a:p>
           <a:p>
             <a:r>
-              <a:t>· 무엇으로 끝났나: 끝 이벤트(E_end · E_rejected)와 결과 보고(정상 · 반려)</a:t>
+              <a:t>· 무엇으로 끝났나: 끝 이벤트(E_end · E_rejected)와 결과 보고(정상 · 반려), 반려 = 거절했을 때 결과 보고에 남는 기록 값</a:t>
             </a:r>
           </a:p>
           <a:p>
